--- a/docs/report/Y_OPS_MONITOR_V2_발표자료.pptx
+++ b/docs/report/Y_OPS_MONITOR_V2_발표자료.pptx
@@ -10,11 +10,6 @@
     <p:sldId id="258" r:id="rId9"/>
     <p:sldId id="259" r:id="rId10"/>
     <p:sldId id="260" r:id="rId11"/>
-    <p:sldId id="261" r:id="rId12"/>
-    <p:sldId id="262" r:id="rId13"/>
-    <p:sldId id="263" r:id="rId14"/>
-    <p:sldId id="264" r:id="rId15"/>
-    <p:sldId id="265" r:id="rId16"/>
   </p:sldIdLst>
   <p:sldSz cx="12191695" cy="6858000" type="screen4x3"/>
   <p:notesSz cx="6858000" cy="9144000"/>
@@ -3105,8 +3100,8 @@
         </p:nvSpPr>
         <p:spPr>
           <a:xfrm>
-            <a:off x="0" y="2011680"/>
-            <a:ext cx="12191695" cy="2194560"/>
+            <a:off x="0" y="2103120"/>
+            <a:ext cx="12191695" cy="2286000"/>
           </a:xfrm>
           <a:prstGeom prst="rect">
             <a:avLst/>
@@ -3148,8 +3143,8 @@
         </p:nvSpPr>
         <p:spPr>
           <a:xfrm>
-            <a:off x="640080" y="2286000"/>
-            <a:ext cx="10881360" cy="1280160"/>
+            <a:off x="731520" y="2377440"/>
+            <a:ext cx="10698480" cy="1463040"/>
           </a:xfrm>
           <a:prstGeom prst="rect">
             <a:avLst/>
@@ -3169,19 +3164,18 @@
                 </a:solidFill>
                 <a:latin typeface="Malgun Gothic"/>
               </a:rPr>
-              <a:t>통합 운영 모니터링 프로그램 개발</a:t>
-            </a:r>
-          </a:p>
-          <a:p>
-            <a:r>
-              <a:rPr sz="1800" b="0">
+              <a:t>AI(Cursor) 활용 개발 성과 보고</a:t>
+            </a:r>
+          </a:p>
+          <a:p>
+            <a:r>
+              <a:rPr sz="1700" b="0">
                 <a:solidFill>
                   <a:srgbClr val="D5DEF5"/>
                 </a:solidFill>
                 <a:latin typeface="Malgun Gothic"/>
               </a:rPr>
-              <a:t>SM37(배치) · ST22(런타임 덤프) · SXI_MONITOR(인터페이스) 통합 대시보드
-AI 페어프로그래밍(Cursor) 기반 설계·구현 성과 보고</a:t>
+              <a:t>통합 운영 모니터링(SM37·ST22·SXI) 개발을 통한 AI 페어프로그래밍 효율성 검증</a:t>
             </a:r>
           </a:p>
         </p:txBody>
@@ -3194,8 +3188,8 @@
         </p:nvSpPr>
         <p:spPr>
           <a:xfrm>
-            <a:off x="640080" y="6126480"/>
-            <a:ext cx="10881360" cy="457200"/>
+            <a:off x="731520" y="6126480"/>
+            <a:ext cx="10698480" cy="457200"/>
           </a:xfrm>
           <a:prstGeom prst="rect">
             <a:avLst/>
@@ -3215,7 +3209,7 @@
                 </a:solidFill>
                 <a:latin typeface="Malgun Gothic"/>
               </a:rPr>
-              <a:t>SAP S/4HANA · ABAP (SAP GUI, OO ALV, IGS Chart) · 개발 도구: Cursor</a:t>
+              <a:t>SAP S/4HANA · ABAP  |  개발도구: Cursor(AI)  |  경영진 보고용</a:t>
             </a:r>
           </a:p>
         </p:txBody>
@@ -3228,7 +3222,7 @@
 </p:sld>
 </file>
 
-<file path=ppt/slides/slide10.xml><?xml version="1.0" encoding="utf-8"?>
+<file path=ppt/slides/slide2.xml><?xml version="1.0" encoding="utf-8"?>
 <p:sld xmlns:a="http://schemas.openxmlformats.org/drawingml/2006/main" xmlns:p="http://schemas.openxmlformats.org/presentationml/2006/main" xmlns:r="http://schemas.openxmlformats.org/officeDocument/2006/relationships">
   <p:cSld>
     <p:spTree>
@@ -3247,7 +3241,7 @@
         <p:spPr>
           <a:xfrm>
             <a:off x="0" y="0"/>
-            <a:ext cx="12191695" cy="914400"/>
+            <a:ext cx="12191695" cy="868680"/>
           </a:xfrm>
           <a:prstGeom prst="rect">
             <a:avLst/>
@@ -3289,8 +3283,8 @@
         </p:nvSpPr>
         <p:spPr>
           <a:xfrm>
-            <a:off x="548640" y="164592"/>
-            <a:ext cx="11064240" cy="640080"/>
+            <a:off x="548640" y="146304"/>
+            <a:ext cx="11064240" cy="594360"/>
           </a:xfrm>
           <a:prstGeom prst="rect">
             <a:avLst/>
@@ -3310,7 +3304,7 @@
                 </a:solidFill>
                 <a:latin typeface="Malgun Gothic"/>
               </a:rPr>
-              <a:t>맺음말</a:t>
+              <a:t>1. 프로젝트 개요</a:t>
             </a:r>
           </a:p>
         </p:txBody>
@@ -3323,8 +3317,8 @@
         </p:nvSpPr>
         <p:spPr>
           <a:xfrm>
-            <a:off x="640080" y="1188720"/>
-            <a:ext cx="10881360" cy="5394960"/>
+            <a:off x="640080" y="1097280"/>
+            <a:ext cx="10881360" cy="5486400"/>
           </a:xfrm>
           <a:prstGeom prst="rect">
             <a:avLst/>
@@ -3339,17 +3333,17 @@
           <a:p>
             <a:pPr>
               <a:spcBef>
-                <a:spcPts val="800"/>
+                <a:spcPts val="1000"/>
               </a:spcBef>
             </a:pPr>
             <a:r>
               <a:rPr sz="1700" b="1">
                 <a:solidFill>
-                  <a:srgbClr val="1F3564"/>
+                  <a:srgbClr val="2E5BFF"/>
                 </a:solidFill>
                 <a:latin typeface="Malgun Gothic"/>
               </a:rPr>
-              <a:t>요약</a:t>
+              <a:t>▸ 무엇을</a:t>
             </a:r>
           </a:p>
           <a:p>
@@ -3359,13 +3353,29 @@
               </a:spcBef>
             </a:pPr>
             <a:r>
-              <a:rPr sz="1450" b="0">
+              <a:rPr sz="1400" b="0">
                 <a:solidFill>
                   <a:srgbClr val="222222"/>
                 </a:solidFill>
                 <a:latin typeface="Malgun Gothic"/>
               </a:rPr>
-              <a:t>3개 운영 영역을 단일 읽기전용 대시보드로 통합, 상세 즉시 이동 제공</a:t>
+              <a:t>운영자가 매일 개별 확인하던 3개 점검 화면(배치/런타임덤프/인터페이스)을 단일 대시보드로 통합(읽기 전용).</a:t>
+            </a:r>
+          </a:p>
+          <a:p>
+            <a:pPr>
+              <a:spcBef>
+                <a:spcPts val="1000"/>
+              </a:spcBef>
+            </a:pPr>
+            <a:r>
+              <a:rPr sz="1700" b="1">
+                <a:solidFill>
+                  <a:srgbClr val="2E5BFF"/>
+                </a:solidFill>
+                <a:latin typeface="Malgun Gothic"/>
+              </a:rPr>
+              <a:t>▸ 왜</a:t>
             </a:r>
           </a:p>
           <a:p>
@@ -3375,29 +3385,29 @@
               </a:spcBef>
             </a:pPr>
             <a:r>
-              <a:rPr sz="1450" b="0">
+              <a:rPr sz="1400" b="0">
                 <a:solidFill>
                   <a:srgbClr val="222222"/>
                 </a:solidFill>
                 <a:latin typeface="Malgun Gothic"/>
               </a:rPr>
-              <a:t>Cursor(AI) 활용으로 설계·구현·검증을 가속하고 표준 준수를 강화</a:t>
+              <a:t>점검 시간 단축·누락 방지, 반복 원인 신속 식별.</a:t>
             </a:r>
           </a:p>
           <a:p>
             <a:pPr>
               <a:spcBef>
-                <a:spcPts val="800"/>
+                <a:spcPts val="1000"/>
               </a:spcBef>
             </a:pPr>
             <a:r>
               <a:rPr sz="1700" b="1">
                 <a:solidFill>
-                  <a:srgbClr val="1F3564"/>
+                  <a:srgbClr val="2E5BFF"/>
                 </a:solidFill>
                 <a:latin typeface="Malgun Gothic"/>
               </a:rPr>
-              <a:t>핵심 메시지</a:t>
+              <a:t>▸ 보고의 초점</a:t>
             </a:r>
           </a:p>
           <a:p>
@@ -3407,13 +3417,13 @@
               </a:spcBef>
             </a:pPr>
             <a:r>
-              <a:rPr sz="1450" b="0">
+              <a:rPr sz="1400" b="0">
                 <a:solidFill>
                   <a:srgbClr val="222222"/>
                 </a:solidFill>
                 <a:latin typeface="Malgun Gothic"/>
               </a:rPr>
-              <a:t>"운영 점검의 통합·자동화 + AI 페어프로그래밍으로 개발 생산성 향상"</a:t>
+              <a:t>결과물 자체보다, AI(Cursor)를 개발 전 과정에 활용해 얻은 생산성·품질 효과를 보고.</a:t>
             </a:r>
           </a:p>
         </p:txBody>
@@ -3426,7 +3436,7 @@
 </p:sld>
 </file>
 
-<file path=ppt/slides/slide2.xml><?xml version="1.0" encoding="utf-8"?>
+<file path=ppt/slides/slide3.xml><?xml version="1.0" encoding="utf-8"?>
 <p:sld xmlns:a="http://schemas.openxmlformats.org/drawingml/2006/main" xmlns:p="http://schemas.openxmlformats.org/presentationml/2006/main" xmlns:r="http://schemas.openxmlformats.org/officeDocument/2006/relationships">
   <p:cSld>
     <p:spTree>
@@ -3445,7 +3455,7 @@
         <p:spPr>
           <a:xfrm>
             <a:off x="0" y="0"/>
-            <a:ext cx="12191695" cy="914400"/>
+            <a:ext cx="12191695" cy="868680"/>
           </a:xfrm>
           <a:prstGeom prst="rect">
             <a:avLst/>
@@ -3487,8 +3497,8 @@
         </p:nvSpPr>
         <p:spPr>
           <a:xfrm>
-            <a:off x="548640" y="164592"/>
-            <a:ext cx="11064240" cy="640080"/>
+            <a:off x="548640" y="146304"/>
+            <a:ext cx="11064240" cy="594360"/>
           </a:xfrm>
           <a:prstGeom prst="rect">
             <a:avLst/>
@@ -3508,7 +3518,7 @@
                 </a:solidFill>
                 <a:latin typeface="Malgun Gothic"/>
               </a:rPr>
-              <a:t>목차</a:t>
+              <a:t>2. AI(Cursor) 활용 방식</a:t>
             </a:r>
           </a:p>
         </p:txBody>
@@ -3521,8 +3531,8 @@
         </p:nvSpPr>
         <p:spPr>
           <a:xfrm>
-            <a:off x="640080" y="1188720"/>
-            <a:ext cx="10881360" cy="5394960"/>
+            <a:off x="640080" y="1097280"/>
+            <a:ext cx="10881360" cy="5486400"/>
           </a:xfrm>
           <a:prstGeom prst="rect">
             <a:avLst/>
@@ -3537,113 +3547,161 @@
           <a:p>
             <a:pPr>
               <a:spcBef>
-                <a:spcPts val="800"/>
+                <a:spcPts val="1000"/>
               </a:spcBef>
             </a:pPr>
             <a:r>
               <a:rPr sz="1700" b="1">
                 <a:solidFill>
-                  <a:srgbClr val="1F3564"/>
+                  <a:srgbClr val="2E5BFF"/>
                 </a:solidFill>
                 <a:latin typeface="Malgun Gothic"/>
               </a:rPr>
-              <a:t>1. 프로젝트 배경 및 목표</a:t>
+              <a:t>▸ 설계 문서 자동화</a:t>
+            </a:r>
+          </a:p>
+          <a:p>
+            <a:pPr lvl="1">
+              <a:spcBef>
+                <a:spcPts val="200"/>
+              </a:spcBef>
+            </a:pPr>
+            <a:r>
+              <a:rPr sz="1400" b="0">
+                <a:solidFill>
+                  <a:srgbClr val="222222"/>
+                </a:solidFill>
+                <a:latin typeface="Malgun Gothic"/>
+              </a:rPr>
+              <a:t>설계서 작성·개정, 결정사항/미결과제 이력 관리를 대화로 진행.</a:t>
             </a:r>
           </a:p>
           <a:p>
             <a:pPr>
               <a:spcBef>
-                <a:spcPts val="800"/>
+                <a:spcPts val="1000"/>
               </a:spcBef>
             </a:pPr>
             <a:r>
               <a:rPr sz="1700" b="1">
                 <a:solidFill>
-                  <a:srgbClr val="1F3564"/>
+                  <a:srgbClr val="2E5BFF"/>
                 </a:solidFill>
                 <a:latin typeface="Malgun Gothic"/>
               </a:rPr>
-              <a:t>2. 시스템 아키텍처</a:t>
+              <a:t>▸ 자료 분석 자동화</a:t>
+            </a:r>
+          </a:p>
+          <a:p>
+            <a:pPr lvl="1">
+              <a:spcBef>
+                <a:spcPts val="200"/>
+              </a:spcBef>
+            </a:pPr>
+            <a:r>
+              <a:rPr sz="1400" b="0">
+                <a:solidFill>
+                  <a:srgbClr val="222222"/>
+                </a:solidFill>
+                <a:latin typeface="Malgun Gothic"/>
+              </a:rPr>
+              <a:t>권한 추적 결과(STAUTHTRACE 엑셀)를 직접 분석해 필요한 권한을 자동 도출.</a:t>
             </a:r>
           </a:p>
           <a:p>
             <a:pPr>
               <a:spcBef>
-                <a:spcPts val="800"/>
+                <a:spcPts val="1000"/>
               </a:spcBef>
             </a:pPr>
             <a:r>
               <a:rPr sz="1700" b="1">
                 <a:solidFill>
-                  <a:srgbClr val="1F3564"/>
+                  <a:srgbClr val="2E5BFF"/>
                 </a:solidFill>
                 <a:latin typeface="Malgun Gothic"/>
               </a:rPr>
-              <a:t>3. 주요 기능 및 화면 구성</a:t>
+              <a:t>▸ 표준 기능 조사 자동화</a:t>
+            </a:r>
+          </a:p>
+          <a:p>
+            <a:pPr lvl="1">
+              <a:spcBef>
+                <a:spcPts val="200"/>
+              </a:spcBef>
+            </a:pPr>
+            <a:r>
+              <a:rPr sz="1400" b="0">
+                <a:solidFill>
+                  <a:srgbClr val="222222"/>
+                </a:solidFill>
+                <a:latin typeface="Malgun Gothic"/>
+              </a:rPr>
+              <a:t>개발에 필요한 SAP 표준 기능/사용법을 즉시 조사·확인(수작업 문서 탐색 대체).</a:t>
             </a:r>
           </a:p>
           <a:p>
             <a:pPr>
               <a:spcBef>
-                <a:spcPts val="800"/>
+                <a:spcPts val="1000"/>
               </a:spcBef>
             </a:pPr>
             <a:r>
               <a:rPr sz="1700" b="1">
                 <a:solidFill>
-                  <a:srgbClr val="1F3564"/>
+                  <a:srgbClr val="2E5BFF"/>
                 </a:solidFill>
                 <a:latin typeface="Malgun Gothic"/>
               </a:rPr>
-              <a:t>4. 진행 경과</a:t>
+              <a:t>▸ 개발-검증 반복 루프</a:t>
+            </a:r>
+          </a:p>
+          <a:p>
+            <a:pPr lvl="1">
+              <a:spcBef>
+                <a:spcPts val="200"/>
+              </a:spcBef>
+            </a:pPr>
+            <a:r>
+              <a:rPr sz="1400" b="0">
+                <a:solidFill>
+                  <a:srgbClr val="222222"/>
+                </a:solidFill>
+                <a:latin typeface="Malgun Gothic"/>
+              </a:rPr>
+              <a:t>코드 생성 → 오류 진단 → 즉시 수정을 빠르게 반복하여 완성도 향상.</a:t>
             </a:r>
           </a:p>
           <a:p>
             <a:pPr>
               <a:spcBef>
-                <a:spcPts val="800"/>
+                <a:spcPts val="1000"/>
               </a:spcBef>
             </a:pPr>
             <a:r>
               <a:rPr sz="1700" b="1">
                 <a:solidFill>
-                  <a:srgbClr val="1F3564"/>
+                  <a:srgbClr val="2E5BFF"/>
                 </a:solidFill>
                 <a:latin typeface="Malgun Gothic"/>
               </a:rPr>
-              <a:t>5. Cursor(AI) 활용 방식</a:t>
-            </a:r>
-          </a:p>
-          <a:p>
-            <a:pPr>
+              <a:t>▸ 표준·규칙 자동 준수</a:t>
+            </a:r>
+          </a:p>
+          <a:p>
+            <a:pPr lvl="1">
               <a:spcBef>
-                <a:spcPts val="800"/>
+                <a:spcPts val="200"/>
               </a:spcBef>
             </a:pPr>
             <a:r>
-              <a:rPr sz="1700" b="1">
-                <a:solidFill>
-                  <a:srgbClr val="1F3564"/>
+              <a:rPr sz="1400" b="0">
+                <a:solidFill>
+                  <a:srgbClr val="222222"/>
                 </a:solidFill>
                 <a:latin typeface="Malgun Gothic"/>
               </a:rPr>
-              <a:t>6. 효율성 · 성과</a:t>
-            </a:r>
-          </a:p>
-          <a:p>
-            <a:pPr>
-              <a:spcBef>
-                <a:spcPts val="800"/>
-              </a:spcBef>
-            </a:pPr>
-            <a:r>
-              <a:rPr sz="1700" b="1">
-                <a:solidFill>
-                  <a:srgbClr val="1F3564"/>
-                </a:solidFill>
-                <a:latin typeface="Malgun Gothic"/>
-              </a:rPr>
-              <a:t>7. 기대 효과 및 향후 계획</a:t>
+              <a:t>“읽기 전용”·명명규칙 등 사내 개발 표준을 규칙으로 상시 자동 적용.</a:t>
             </a:r>
           </a:p>
         </p:txBody>
@@ -3656,7 +3714,7 @@
 </p:sld>
 </file>
 
-<file path=ppt/slides/slide3.xml><?xml version="1.0" encoding="utf-8"?>
+<file path=ppt/slides/slide4.xml><?xml version="1.0" encoding="utf-8"?>
 <p:sld xmlns:a="http://schemas.openxmlformats.org/drawingml/2006/main" xmlns:p="http://schemas.openxmlformats.org/presentationml/2006/main" xmlns:r="http://schemas.openxmlformats.org/officeDocument/2006/relationships">
   <p:cSld>
     <p:spTree>
@@ -3675,7 +3733,7 @@
         <p:spPr>
           <a:xfrm>
             <a:off x="0" y="0"/>
-            <a:ext cx="12191695" cy="914400"/>
+            <a:ext cx="12191695" cy="868680"/>
           </a:xfrm>
           <a:prstGeom prst="rect">
             <a:avLst/>
@@ -3717,8 +3775,8 @@
         </p:nvSpPr>
         <p:spPr>
           <a:xfrm>
-            <a:off x="548640" y="164592"/>
-            <a:ext cx="11064240" cy="640080"/>
+            <a:off x="548640" y="146304"/>
+            <a:ext cx="11064240" cy="594360"/>
           </a:xfrm>
           <a:prstGeom prst="rect">
             <a:avLst/>
@@ -3738,7 +3796,7 @@
                 </a:solidFill>
                 <a:latin typeface="Malgun Gothic"/>
               </a:rPr>
-              <a:t>1. 프로젝트 배경 및 목표</a:t>
+              <a:t>3. 효율성 · 성과</a:t>
             </a:r>
           </a:p>
         </p:txBody>
@@ -3751,8 +3809,8 @@
         </p:nvSpPr>
         <p:spPr>
           <a:xfrm>
-            <a:off x="640080" y="1188720"/>
-            <a:ext cx="10881360" cy="5394960"/>
+            <a:off x="640080" y="1097280"/>
+            <a:ext cx="10881360" cy="5486400"/>
           </a:xfrm>
           <a:prstGeom prst="rect">
             <a:avLst/>
@@ -3767,17 +3825,17 @@
           <a:p>
             <a:pPr>
               <a:spcBef>
-                <a:spcPts val="800"/>
+                <a:spcPts val="1000"/>
               </a:spcBef>
             </a:pPr>
             <a:r>
               <a:rPr sz="1700" b="1">
                 <a:solidFill>
-                  <a:srgbClr val="1F3564"/>
+                  <a:srgbClr val="2E5BFF"/>
                 </a:solidFill>
                 <a:latin typeface="Malgun Gothic"/>
               </a:rPr>
-              <a:t>배경 — 운영 점검의 비효율</a:t>
+              <a:t>▸ 개발 생산성 (정성)</a:t>
             </a:r>
           </a:p>
           <a:p>
@@ -3787,13 +3845,13 @@
               </a:spcBef>
             </a:pPr>
             <a:r>
-              <a:rPr sz="1450" b="0">
+              <a:rPr sz="1400" b="0">
                 <a:solidFill>
                   <a:srgbClr val="222222"/>
                 </a:solidFill>
                 <a:latin typeface="Malgun Gothic"/>
               </a:rPr>
-              <a:t>운영자가 매일 SM37/ST22/SXI_MONITOR 3개 트랜잭션을 개별 실행·확인</a:t>
+              <a:t>설계–구현–검토를 하나의 흐름으로 진행(맥락 유지) → 진행 속도 향상.</a:t>
             </a:r>
           </a:p>
           <a:p>
@@ -3803,29 +3861,29 @@
               </a:spcBef>
             </a:pPr>
             <a:r>
-              <a:rPr sz="1450" b="0">
+              <a:rPr sz="1400" b="0">
                 <a:solidFill>
                   <a:srgbClr val="222222"/>
                 </a:solidFill>
                 <a:latin typeface="Malgun Gothic"/>
               </a:rPr>
-              <a:t>화면 전환이 잦고, 점검 누락 및 대응 지연 위험</a:t>
+              <a:t>반복 개선(요구 변경 즉시 반영) 회수 증가로 완성도 조기 확보.</a:t>
             </a:r>
           </a:p>
           <a:p>
             <a:pPr>
               <a:spcBef>
-                <a:spcPts val="800"/>
+                <a:spcPts val="1000"/>
               </a:spcBef>
             </a:pPr>
             <a:r>
               <a:rPr sz="1700" b="1">
                 <a:solidFill>
-                  <a:srgbClr val="1F3564"/>
+                  <a:srgbClr val="2E5BFF"/>
                 </a:solidFill>
                 <a:latin typeface="Malgun Gothic"/>
               </a:rPr>
-              <a:t>목표 — 단일 화면 통합 모니터링</a:t>
+              <a:t>▸ 리서치 부담 감소 (정성)</a:t>
             </a:r>
           </a:p>
           <a:p>
@@ -3835,13 +3893,29 @@
               </a:spcBef>
             </a:pPr>
             <a:r>
-              <a:rPr sz="1450" b="0">
+              <a:rPr sz="1400" b="0">
                 <a:solidFill>
                   <a:srgbClr val="222222"/>
                 </a:solidFill>
                 <a:latin typeface="Malgun Gothic"/>
               </a:rPr>
-              <a:t>3개 영역 에러 현황을 하나의 대시보드에서 동시 가시화</a:t>
+              <a:t>표준 기능/사용법 조사를 대화로 즉시 해결 → 탐색 시간 절감.</a:t>
+            </a:r>
+          </a:p>
+          <a:p>
+            <a:pPr>
+              <a:spcBef>
+                <a:spcPts val="1000"/>
+              </a:spcBef>
+            </a:pPr>
+            <a:r>
+              <a:rPr sz="1700" b="1">
+                <a:solidFill>
+                  <a:srgbClr val="2E5BFF"/>
+                </a:solidFill>
+                <a:latin typeface="Malgun Gothic"/>
+              </a:rPr>
+              <a:t>▸ 품질·표준 준수 (정성)</a:t>
             </a:r>
           </a:p>
           <a:p>
@@ -3851,29 +3925,29 @@
               </a:spcBef>
             </a:pPr>
             <a:r>
-              <a:rPr sz="1450" b="0">
+              <a:rPr sz="1400" b="0">
                 <a:solidFill>
                   <a:srgbClr val="222222"/>
                 </a:solidFill>
                 <a:latin typeface="Malgun Gothic"/>
               </a:rPr>
-              <a:t>요약(신호등) + 집중도 차트 + 상세 목록 + 상세 화면 즉시 이동</a:t>
+              <a:t>사내 표준의 일관 적용으로 휴먼 에러·재작업 감소.</a:t>
             </a:r>
           </a:p>
           <a:p>
             <a:pPr>
               <a:spcBef>
-                <a:spcPts val="800"/>
+                <a:spcPts val="1000"/>
               </a:spcBef>
             </a:pPr>
             <a:r>
               <a:rPr sz="1700" b="1">
                 <a:solidFill>
-                  <a:srgbClr val="1F3564"/>
+                  <a:srgbClr val="2E5BFF"/>
                 </a:solidFill>
                 <a:latin typeface="Malgun Gothic"/>
               </a:rPr>
-              <a:t>핵심 원칙</a:t>
+              <a:t>▸ 효과 규모 (추정)</a:t>
             </a:r>
           </a:p>
           <a:p>
@@ -3883,13 +3957,13 @@
               </a:spcBef>
             </a:pPr>
             <a:r>
-              <a:rPr sz="1450" b="0">
+              <a:rPr sz="1400" b="0">
                 <a:solidFill>
                   <a:srgbClr val="222222"/>
                 </a:solidFill>
                 <a:latin typeface="Malgun Gothic"/>
               </a:rPr>
-              <a:t>읽기 전용(Read-Only): 데이터 변경/COMMIT/재처리 전면 금지</a:t>
+              <a:t>설계 문서화·표준 조사·오류 수정 사이클 시간이 수작업 대비 크게 단축(추정).</a:t>
             </a:r>
           </a:p>
           <a:p>
@@ -3899,29 +3973,13 @@
               </a:spcBef>
             </a:pPr>
             <a:r>
-              <a:rPr sz="1450" b="0">
+              <a:rPr sz="1400" b="0">
                 <a:solidFill>
                   <a:srgbClr val="222222"/>
                 </a:solidFill>
                 <a:latin typeface="Malgun Gothic"/>
               </a:rPr>
-              <a:t>표준 테이블/표준 FM만 사용, 드릴다운은 표시(Display) 모드</a:t>
-            </a:r>
-          </a:p>
-          <a:p>
-            <a:pPr lvl="1">
-              <a:spcBef>
-                <a:spcPts val="200"/>
-              </a:spcBef>
-            </a:pPr>
-            <a:r>
-              <a:rPr sz="1450" b="0">
-                <a:solidFill>
-                  <a:srgbClr val="222222"/>
-                </a:solidFill>
-                <a:latin typeface="Malgun Gothic"/>
-              </a:rPr>
-              <a:t>확장성: 인터페이스 기반 모듈화(신규 영역 = 프로바이더 추가)</a:t>
+              <a:t>※ 정량 수치는 향후 실측하여 보완 예정.</a:t>
             </a:r>
           </a:p>
         </p:txBody>
@@ -3934,7 +3992,7 @@
 </p:sld>
 </file>
 
-<file path=ppt/slides/slide4.xml><?xml version="1.0" encoding="utf-8"?>
+<file path=ppt/slides/slide5.xml><?xml version="1.0" encoding="utf-8"?>
 <p:sld xmlns:a="http://schemas.openxmlformats.org/drawingml/2006/main" xmlns:p="http://schemas.openxmlformats.org/presentationml/2006/main" xmlns:r="http://schemas.openxmlformats.org/officeDocument/2006/relationships">
   <p:cSld>
     <p:spTree>
@@ -3953,7 +4011,7 @@
         <p:spPr>
           <a:xfrm>
             <a:off x="0" y="0"/>
-            <a:ext cx="12191695" cy="914400"/>
+            <a:ext cx="12191695" cy="868680"/>
           </a:xfrm>
           <a:prstGeom prst="rect">
             <a:avLst/>
@@ -3995,8 +4053,8 @@
         </p:nvSpPr>
         <p:spPr>
           <a:xfrm>
-            <a:off x="548640" y="164592"/>
-            <a:ext cx="11064240" cy="640080"/>
+            <a:off x="548640" y="146304"/>
+            <a:ext cx="11064240" cy="594360"/>
           </a:xfrm>
           <a:prstGeom prst="rect">
             <a:avLst/>
@@ -4016,7 +4074,7 @@
                 </a:solidFill>
                 <a:latin typeface="Malgun Gothic"/>
               </a:rPr>
-              <a:t>2. 시스템 아키텍처</a:t>
+              <a:t>4. 기대 효과 및 향후 계획</a:t>
             </a:r>
           </a:p>
         </p:txBody>
@@ -4029,8 +4087,8 @@
         </p:nvSpPr>
         <p:spPr>
           <a:xfrm>
-            <a:off x="640080" y="1188720"/>
-            <a:ext cx="10881360" cy="5394960"/>
+            <a:off x="640080" y="1097280"/>
+            <a:ext cx="10881360" cy="5486400"/>
           </a:xfrm>
           <a:prstGeom prst="rect">
             <a:avLst/>
@@ -4045,17 +4103,17 @@
           <a:p>
             <a:pPr>
               <a:spcBef>
-                <a:spcPts val="800"/>
+                <a:spcPts val="1000"/>
               </a:spcBef>
             </a:pPr>
             <a:r>
               <a:rPr sz="1700" b="1">
                 <a:solidFill>
-                  <a:srgbClr val="1F3564"/>
+                  <a:srgbClr val="2E5BFF"/>
                 </a:solidFill>
                 <a:latin typeface="Malgun Gothic"/>
               </a:rPr>
-              <a:t>설계 패턴 — 관심사 분리 + 전략(Strategy) 패턴</a:t>
+              <a:t>▸ 기대 효과</a:t>
             </a:r>
           </a:p>
           <a:p>
@@ -4065,29 +4123,13 @@
               </a:spcBef>
             </a:pPr>
             <a:r>
-              <a:rPr sz="1450" b="0">
+              <a:rPr sz="1400" b="0">
                 <a:solidFill>
                   <a:srgbClr val="222222"/>
                 </a:solidFill>
                 <a:latin typeface="Malgun Gothic"/>
               </a:rPr>
-              <a:t>선택화면 → 컨트롤러 → (영역별 데이터 프로바이더) → 집계 → 대시보드 UI</a:t>
-            </a:r>
-          </a:p>
-          <a:p>
-            <a:pPr>
-              <a:spcBef>
-                <a:spcPts val="800"/>
-              </a:spcBef>
-            </a:pPr>
-            <a:r>
-              <a:rPr sz="1700" b="1">
-                <a:solidFill>
-                  <a:srgbClr val="1F3564"/>
-                </a:solidFill>
-                <a:latin typeface="Malgun Gothic"/>
-              </a:rPr>
-              <a:t>구성 요소</a:t>
+              <a:t>운영 점검 시간 단축·누락 방지, 운영 안전성(읽기 전용) 확보.</a:t>
             </a:r>
           </a:p>
           <a:p>
@@ -4097,13 +4139,29 @@
               </a:spcBef>
             </a:pPr>
             <a:r>
-              <a:rPr sz="1450" b="0">
+              <a:rPr sz="1400" b="0">
                 <a:solidFill>
                   <a:srgbClr val="222222"/>
                 </a:solidFill>
                 <a:latin typeface="Malgun Gothic"/>
               </a:rPr>
-              <a:t>ZIF_MON_DATA_PROVIDER : 데이터 조회 공통 계약(인터페이스)</a:t>
+              <a:t>AI 페어프로그래밍의 사내 개발 생산성 향상 가능성 확인.</a:t>
+            </a:r>
+          </a:p>
+          <a:p>
+            <a:pPr>
+              <a:spcBef>
+                <a:spcPts val="1000"/>
+              </a:spcBef>
+            </a:pPr>
+            <a:r>
+              <a:rPr sz="1700" b="1">
+                <a:solidFill>
+                  <a:srgbClr val="2E5BFF"/>
+                </a:solidFill>
+                <a:latin typeface="Malgun Gothic"/>
+              </a:rPr>
+              <a:t>▸ 향후 계획</a:t>
             </a:r>
           </a:p>
           <a:p>
@@ -4113,13 +4171,13 @@
               </a:spcBef>
             </a:pPr>
             <a:r>
-              <a:rPr sz="1450" b="0">
+              <a:rPr sz="1400" b="0">
                 <a:solidFill>
                   <a:srgbClr val="222222"/>
                 </a:solidFill>
                 <a:latin typeface="Malgun Gothic"/>
               </a:rPr>
-              <a:t>DP_BATCH / DP_DUMP / DP_INTERFACE : SM37 / ST22 / SXI 조회</a:t>
+              <a:t>검증본 정식 오브젝트화 및 기능 고도화.</a:t>
             </a:r>
           </a:p>
           <a:p>
@@ -4129,1531 +4187,13 @@
               </a:spcBef>
             </a:pPr>
             <a:r>
-              <a:rPr sz="1450" b="0">
+              <a:rPr sz="1400" b="0">
                 <a:solidFill>
                   <a:srgbClr val="222222"/>
                 </a:solidFill>
                 <a:latin typeface="Malgun Gothic"/>
               </a:rPr>
-              <a:t>CONTROLLER : 프로바이더 레지스트리·오케스트레이션</a:t>
-            </a:r>
-          </a:p>
-          <a:p>
-            <a:pPr lvl="1">
-              <a:spcBef>
-                <a:spcPts val="200"/>
-              </a:spcBef>
-            </a:pPr>
-            <a:r>
-              <a:rPr sz="1450" b="0">
-                <a:solidFill>
-                  <a:srgbClr val="222222"/>
-                </a:solidFill>
-                <a:latin typeface="Malgun Gothic"/>
-              </a:rPr>
-              <a:t>AGGREGATOR : 영역별 Top-N / 시간대별 추이 집계</a:t>
-            </a:r>
-          </a:p>
-          <a:p>
-            <a:pPr lvl="1">
-              <a:spcBef>
-                <a:spcPts val="200"/>
-              </a:spcBef>
-            </a:pPr>
-            <a:r>
-              <a:rPr sz="1450" b="0">
-                <a:solidFill>
-                  <a:srgbClr val="222222"/>
-                </a:solidFill>
-                <a:latin typeface="Malgun Gothic"/>
-              </a:rPr>
-              <a:t>UI_DASHBOARD : Splitter + 요약 + 차트(IGS) + 3분할 ALV</a:t>
-            </a:r>
-          </a:p>
-          <a:p>
-            <a:pPr lvl="1">
-              <a:spcBef>
-                <a:spcPts val="200"/>
-              </a:spcBef>
-            </a:pPr>
-            <a:r>
-              <a:rPr sz="1450" b="0">
-                <a:solidFill>
-                  <a:srgbClr val="222222"/>
-                </a:solidFill>
-                <a:latin typeface="Malgun Gothic"/>
-              </a:rPr>
-              <a:t>NAVIGATOR : 표준 상세화면 드릴다운(표시 전용) 캡슐화</a:t>
-            </a:r>
-          </a:p>
-          <a:p>
-            <a:pPr>
-              <a:spcBef>
-                <a:spcPts val="800"/>
-              </a:spcBef>
-            </a:pPr>
-            <a:r>
-              <a:rPr sz="1700" b="1">
-                <a:solidFill>
-                  <a:srgbClr val="1F3564"/>
-                </a:solidFill>
-                <a:latin typeface="Malgun Gothic"/>
-              </a:rPr>
-              <a:t>데이터 소스(표준)</a:t>
-            </a:r>
-          </a:p>
-          <a:p>
-            <a:pPr lvl="1">
-              <a:spcBef>
-                <a:spcPts val="200"/>
-              </a:spcBef>
-            </a:pPr>
-            <a:r>
-              <a:rPr sz="1450" b="0">
-                <a:solidFill>
-                  <a:srgbClr val="222222"/>
-                </a:solidFill>
-                <a:latin typeface="Malgun Gothic"/>
-              </a:rPr>
-              <a:t>SM37: TBTCO/TBTCP · ST22: RS_ST22_GET_DUMPS · SXI: SXMSPERROR 외</a:t>
-            </a:r>
-          </a:p>
-        </p:txBody>
-      </p:sp>
-    </p:spTree>
-  </p:cSld>
-  <p:clrMapOvr>
-    <a:masterClrMapping/>
-  </p:clrMapOvr>
-</p:sld>
-</file>
-
-<file path=ppt/slides/slide5.xml><?xml version="1.0" encoding="utf-8"?>
-<p:sld xmlns:a="http://schemas.openxmlformats.org/drawingml/2006/main" xmlns:p="http://schemas.openxmlformats.org/presentationml/2006/main" xmlns:r="http://schemas.openxmlformats.org/officeDocument/2006/relationships">
-  <p:cSld>
-    <p:spTree>
-      <p:nvGrpSpPr>
-        <p:cNvPr id="1" name=""/>
-        <p:cNvGrpSpPr/>
-        <p:nvPr/>
-      </p:nvGrpSpPr>
-      <p:grpSpPr/>
-      <p:sp>
-        <p:nvSpPr>
-          <p:cNvPr id="2" name="Rectangle 1"/>
-          <p:cNvSpPr/>
-          <p:nvPr/>
-        </p:nvSpPr>
-        <p:spPr>
-          <a:xfrm>
-            <a:off x="0" y="0"/>
-            <a:ext cx="12191695" cy="914400"/>
-          </a:xfrm>
-          <a:prstGeom prst="rect">
-            <a:avLst/>
-          </a:prstGeom>
-          <a:solidFill>
-            <a:srgbClr val="1F3564"/>
-          </a:solidFill>
-          <a:ln>
-            <a:noFill/>
-          </a:ln>
-        </p:spPr>
-        <p:style>
-          <a:lnRef idx="1">
-            <a:schemeClr val="accent1"/>
-          </a:lnRef>
-          <a:fillRef idx="3">
-            <a:schemeClr val="accent1"/>
-          </a:fillRef>
-          <a:effectRef idx="2">
-            <a:schemeClr val="accent1"/>
-          </a:effectRef>
-          <a:fontRef idx="minor">
-            <a:schemeClr val="lt1"/>
-          </a:fontRef>
-        </p:style>
-        <p:txBody>
-          <a:bodyPr rtlCol="0" anchor="ctr"/>
-          <a:lstStyle/>
-          <a:p>
-            <a:pPr algn="ctr"/>
-          </a:p>
-        </p:txBody>
-      </p:sp>
-      <p:sp>
-        <p:nvSpPr>
-          <p:cNvPr id="3" name="TextBox 2"/>
-          <p:cNvSpPr txBox="1"/>
-          <p:nvPr/>
-        </p:nvSpPr>
-        <p:spPr>
-          <a:xfrm>
-            <a:off x="548640" y="164592"/>
-            <a:ext cx="11064240" cy="640080"/>
-          </a:xfrm>
-          <a:prstGeom prst="rect">
-            <a:avLst/>
-          </a:prstGeom>
-          <a:noFill/>
-        </p:spPr>
-        <p:txBody>
-          <a:bodyPr wrap="none">
-            <a:spAutoFit/>
-          </a:bodyPr>
-          <a:lstStyle/>
-          <a:p>
-            <a:r>
-              <a:rPr sz="2400" b="1">
-                <a:solidFill>
-                  <a:srgbClr val="FFFFFF"/>
-                </a:solidFill>
-                <a:latin typeface="Malgun Gothic"/>
-              </a:rPr>
-              <a:t>3. 주요 기능</a:t>
-            </a:r>
-          </a:p>
-        </p:txBody>
-      </p:sp>
-      <p:sp>
-        <p:nvSpPr>
-          <p:cNvPr id="4" name="TextBox 3"/>
-          <p:cNvSpPr txBox="1"/>
-          <p:nvPr/>
-        </p:nvSpPr>
-        <p:spPr>
-          <a:xfrm>
-            <a:off x="640080" y="1188720"/>
-            <a:ext cx="10881360" cy="5394960"/>
-          </a:xfrm>
-          <a:prstGeom prst="rect">
-            <a:avLst/>
-          </a:prstGeom>
-          <a:noFill/>
-        </p:spPr>
-        <p:txBody>
-          <a:bodyPr wrap="square">
-            <a:spAutoFit/>
-          </a:bodyPr>
-          <a:lstStyle/>
-          <a:p>
-            <a:pPr>
-              <a:spcBef>
-                <a:spcPts val="800"/>
-              </a:spcBef>
-            </a:pPr>
-            <a:r>
-              <a:rPr sz="1700" b="1">
-                <a:solidFill>
-                  <a:srgbClr val="1F3564"/>
-                </a:solidFill>
-                <a:latin typeface="Malgun Gothic"/>
-              </a:rPr>
-              <a:t>통합 대시보드 (단일 트랜잭션)</a:t>
-            </a:r>
-          </a:p>
-          <a:p>
-            <a:pPr lvl="1">
-              <a:spcBef>
-                <a:spcPts val="200"/>
-              </a:spcBef>
-            </a:pPr>
-            <a:r>
-              <a:rPr sz="1450" b="0">
-                <a:solidFill>
-                  <a:srgbClr val="222222"/>
-                </a:solidFill>
-                <a:latin typeface="Malgun Gothic"/>
-              </a:rPr>
-              <a:t>상단: 영역별 신호등(3단계) + 건수 + 조회기간 한눈 요약</a:t>
-            </a:r>
-          </a:p>
-          <a:p>
-            <a:pPr lvl="1">
-              <a:spcBef>
-                <a:spcPts val="200"/>
-              </a:spcBef>
-            </a:pPr>
-            <a:r>
-              <a:rPr sz="1450" b="0">
-                <a:solidFill>
-                  <a:srgbClr val="222222"/>
-                </a:solidFill>
-                <a:latin typeface="Malgun Gothic"/>
-              </a:rPr>
-              <a:t>중간: 영역별 개별 그래픽 차트(IGS) — Top-N 집중도 / 시간대별 추이 토글</a:t>
-            </a:r>
-          </a:p>
-          <a:p>
-            <a:pPr lvl="1">
-              <a:spcBef>
-                <a:spcPts val="200"/>
-              </a:spcBef>
-            </a:pPr>
-            <a:r>
-              <a:rPr sz="1450" b="0">
-                <a:solidFill>
-                  <a:srgbClr val="222222"/>
-                </a:solidFill>
-                <a:latin typeface="Malgun Gothic"/>
-              </a:rPr>
-              <a:t>하단: SM37/ST22/SXI 3분할 ALV(영역 고정색 강조)</a:t>
-            </a:r>
-          </a:p>
-          <a:p>
-            <a:pPr>
-              <a:spcBef>
-                <a:spcPts val="800"/>
-              </a:spcBef>
-            </a:pPr>
-            <a:r>
-              <a:rPr sz="1700" b="1">
-                <a:solidFill>
-                  <a:srgbClr val="1F3564"/>
-                </a:solidFill>
-                <a:latin typeface="Malgun Gothic"/>
-              </a:rPr>
-              <a:t>조회·필터</a:t>
-            </a:r>
-          </a:p>
-          <a:p>
-            <a:pPr lvl="1">
-              <a:spcBef>
-                <a:spcPts val="200"/>
-              </a:spcBef>
-            </a:pPr>
-            <a:r>
-              <a:rPr sz="1450" b="0">
-                <a:solidFill>
-                  <a:srgbClr val="222222"/>
-                </a:solidFill>
-                <a:latin typeface="Malgun Gothic"/>
-              </a:rPr>
-              <a:t>조회기간(기본 −24H), 영역 On/Off, 잡명/사용자/인터페이스명 필터</a:t>
-            </a:r>
-          </a:p>
-          <a:p>
-            <a:pPr lvl="1">
-              <a:spcBef>
-                <a:spcPts val="200"/>
-              </a:spcBef>
-            </a:pPr>
-            <a:r>
-              <a:rPr sz="1450" b="0">
-                <a:solidFill>
-                  <a:srgbClr val="222222"/>
-                </a:solidFill>
-                <a:latin typeface="Malgun Gothic"/>
-              </a:rPr>
-              <a:t>자정 경계·타임존(UTC↔로컬) 정확 처리, 결과 상한 안내</a:t>
-            </a:r>
-          </a:p>
-          <a:p>
-            <a:pPr>
-              <a:spcBef>
-                <a:spcPts val="800"/>
-              </a:spcBef>
-            </a:pPr>
-            <a:r>
-              <a:rPr sz="1700" b="1">
-                <a:solidFill>
-                  <a:srgbClr val="1F3564"/>
-                </a:solidFill>
-                <a:latin typeface="Malgun Gothic"/>
-              </a:rPr>
-              <a:t>상호작용</a:t>
-            </a:r>
-          </a:p>
-          <a:p>
-            <a:pPr lvl="1">
-              <a:spcBef>
-                <a:spcPts val="200"/>
-              </a:spcBef>
-            </a:pPr>
-            <a:r>
-              <a:rPr sz="1450" b="0">
-                <a:solidFill>
-                  <a:srgbClr val="222222"/>
-                </a:solidFill>
-                <a:latin typeface="Malgun Gothic"/>
-              </a:rPr>
-              <a:t>라인 더블클릭 → 해당 건 상세 로그로 직접 이동(잡로그/덤프/메시지)</a:t>
-            </a:r>
-          </a:p>
-          <a:p>
-            <a:pPr lvl="1">
-              <a:spcBef>
-                <a:spcPts val="200"/>
-              </a:spcBef>
-            </a:pPr>
-            <a:r>
-              <a:rPr sz="1450" b="0">
-                <a:solidFill>
-                  <a:srgbClr val="222222"/>
-                </a:solidFill>
-                <a:latin typeface="Malgun Gothic"/>
-              </a:rPr>
-              <a:t>새로고침(REFRESH) · 자동 새로고침 · 관점 전환(TOGGLE)</a:t>
-            </a:r>
-          </a:p>
-          <a:p>
-            <a:pPr>
-              <a:spcBef>
-                <a:spcPts val="800"/>
-              </a:spcBef>
-            </a:pPr>
-            <a:r>
-              <a:rPr sz="1700" b="1">
-                <a:solidFill>
-                  <a:srgbClr val="1F3564"/>
-                </a:solidFill>
-                <a:latin typeface="Malgun Gothic"/>
-              </a:rPr>
-              <a:t>보안</a:t>
-            </a:r>
-          </a:p>
-          <a:p>
-            <a:pPr lvl="1">
-              <a:spcBef>
-                <a:spcPts val="200"/>
-              </a:spcBef>
-            </a:pPr>
-            <a:r>
-              <a:rPr sz="1450" b="0">
-                <a:solidFill>
-                  <a:srgbClr val="222222"/>
-                </a:solidFill>
-                <a:latin typeface="Malgun Gothic"/>
-              </a:rPr>
-              <a:t>영역별 권한 체크 후 없으면 해당 영역만 스킵(타 영역 정상)</a:t>
-            </a:r>
-          </a:p>
-        </p:txBody>
-      </p:sp>
-    </p:spTree>
-  </p:cSld>
-  <p:clrMapOvr>
-    <a:masterClrMapping/>
-  </p:clrMapOvr>
-</p:sld>
-</file>
-
-<file path=ppt/slides/slide6.xml><?xml version="1.0" encoding="utf-8"?>
-<p:sld xmlns:a="http://schemas.openxmlformats.org/drawingml/2006/main" xmlns:p="http://schemas.openxmlformats.org/presentationml/2006/main" xmlns:r="http://schemas.openxmlformats.org/officeDocument/2006/relationships">
-  <p:cSld>
-    <p:spTree>
-      <p:nvGrpSpPr>
-        <p:cNvPr id="1" name=""/>
-        <p:cNvGrpSpPr/>
-        <p:nvPr/>
-      </p:nvGrpSpPr>
-      <p:grpSpPr/>
-      <p:sp>
-        <p:nvSpPr>
-          <p:cNvPr id="2" name="Rectangle 1"/>
-          <p:cNvSpPr/>
-          <p:nvPr/>
-        </p:nvSpPr>
-        <p:spPr>
-          <a:xfrm>
-            <a:off x="0" y="0"/>
-            <a:ext cx="12191695" cy="914400"/>
-          </a:xfrm>
-          <a:prstGeom prst="rect">
-            <a:avLst/>
-          </a:prstGeom>
-          <a:solidFill>
-            <a:srgbClr val="1F3564"/>
-          </a:solidFill>
-          <a:ln>
-            <a:noFill/>
-          </a:ln>
-        </p:spPr>
-        <p:style>
-          <a:lnRef idx="1">
-            <a:schemeClr val="accent1"/>
-          </a:lnRef>
-          <a:fillRef idx="3">
-            <a:schemeClr val="accent1"/>
-          </a:fillRef>
-          <a:effectRef idx="2">
-            <a:schemeClr val="accent1"/>
-          </a:effectRef>
-          <a:fontRef idx="minor">
-            <a:schemeClr val="lt1"/>
-          </a:fontRef>
-        </p:style>
-        <p:txBody>
-          <a:bodyPr rtlCol="0" anchor="ctr"/>
-          <a:lstStyle/>
-          <a:p>
-            <a:pPr algn="ctr"/>
-          </a:p>
-        </p:txBody>
-      </p:sp>
-      <p:sp>
-        <p:nvSpPr>
-          <p:cNvPr id="3" name="TextBox 2"/>
-          <p:cNvSpPr txBox="1"/>
-          <p:nvPr/>
-        </p:nvSpPr>
-        <p:spPr>
-          <a:xfrm>
-            <a:off x="548640" y="164592"/>
-            <a:ext cx="11064240" cy="640080"/>
-          </a:xfrm>
-          <a:prstGeom prst="rect">
-            <a:avLst/>
-          </a:prstGeom>
-          <a:noFill/>
-        </p:spPr>
-        <p:txBody>
-          <a:bodyPr wrap="none">
-            <a:spAutoFit/>
-          </a:bodyPr>
-          <a:lstStyle/>
-          <a:p>
-            <a:r>
-              <a:rPr sz="2400" b="1">
-                <a:solidFill>
-                  <a:srgbClr val="FFFFFF"/>
-                </a:solidFill>
-                <a:latin typeface="Malgun Gothic"/>
-              </a:rPr>
-              <a:t>4. 진행 경과</a:t>
-            </a:r>
-          </a:p>
-        </p:txBody>
-      </p:sp>
-      <p:sp>
-        <p:nvSpPr>
-          <p:cNvPr id="4" name="TextBox 3"/>
-          <p:cNvSpPr txBox="1"/>
-          <p:nvPr/>
-        </p:nvSpPr>
-        <p:spPr>
-          <a:xfrm>
-            <a:off x="640080" y="1188720"/>
-            <a:ext cx="10881360" cy="5394960"/>
-          </a:xfrm>
-          <a:prstGeom prst="rect">
-            <a:avLst/>
-          </a:prstGeom>
-          <a:noFill/>
-        </p:spPr>
-        <p:txBody>
-          <a:bodyPr wrap="square">
-            <a:spAutoFit/>
-          </a:bodyPr>
-          <a:lstStyle/>
-          <a:p>
-            <a:pPr>
-              <a:spcBef>
-                <a:spcPts val="800"/>
-              </a:spcBef>
-            </a:pPr>
-            <a:r>
-              <a:rPr sz="1700" b="1">
-                <a:solidFill>
-                  <a:srgbClr val="1F3564"/>
-                </a:solidFill>
-                <a:latin typeface="Malgun Gothic"/>
-              </a:rPr>
-              <a:t>설계 (문서화)</a:t>
-            </a:r>
-          </a:p>
-          <a:p>
-            <a:pPr lvl="1">
-              <a:spcBef>
-                <a:spcPts val="200"/>
-              </a:spcBef>
-            </a:pPr>
-            <a:r>
-              <a:rPr sz="1450" b="0">
-                <a:solidFill>
-                  <a:srgbClr val="222222"/>
-                </a:solidFill>
-                <a:latin typeface="Malgun Gothic"/>
-              </a:rPr>
-              <a:t>상세 설계서 작성 v0.1 → v0.4 (요구사항·데이터소스·화면·로직·권한·테스트)</a:t>
-            </a:r>
-          </a:p>
-          <a:p>
-            <a:pPr lvl="1">
-              <a:spcBef>
-                <a:spcPts val="200"/>
-              </a:spcBef>
-            </a:pPr>
-            <a:r>
-              <a:rPr sz="1450" b="0">
-                <a:solidFill>
-                  <a:srgbClr val="222222"/>
-                </a:solidFill>
-                <a:latin typeface="Malgun Gothic"/>
-              </a:rPr>
-              <a:t>Open Issue(O-1~O-11) 추적·확정 관리</a:t>
-            </a:r>
-          </a:p>
-          <a:p>
-            <a:pPr>
-              <a:spcBef>
-                <a:spcPts val="800"/>
-              </a:spcBef>
-            </a:pPr>
-            <a:r>
-              <a:rPr sz="1700" b="1">
-                <a:solidFill>
-                  <a:srgbClr val="1F3564"/>
-                </a:solidFill>
-                <a:latin typeface="Malgun Gothic"/>
-              </a:rPr>
-              <a:t>권한 객체 확정 (O-7)</a:t>
-            </a:r>
-          </a:p>
-          <a:p>
-            <a:pPr lvl="1">
-              <a:spcBef>
-                <a:spcPts val="200"/>
-              </a:spcBef>
-            </a:pPr>
-            <a:r>
-              <a:rPr sz="1450" b="0">
-                <a:solidFill>
-                  <a:srgbClr val="222222"/>
-                </a:solidFill>
-                <a:latin typeface="Malgun Gothic"/>
-              </a:rPr>
-              <a:t>STAUTHTRACE 추적 결과로 실제 체크 객체 확정</a:t>
-            </a:r>
-          </a:p>
-          <a:p>
-            <a:pPr lvl="1">
-              <a:spcBef>
-                <a:spcPts val="200"/>
-              </a:spcBef>
-            </a:pPr>
-            <a:r>
-              <a:rPr sz="1450" b="0">
-                <a:solidFill>
-                  <a:srgbClr val="222222"/>
-                </a:solidFill>
-                <a:latin typeface="Malgun Gothic"/>
-              </a:rPr>
-              <a:t>SM37 S_BTCH_JOB · ST22 S_ABAPDUMP(후보 S_ADMI_FCD 정정) · SXI S_XMB_MONI</a:t>
-            </a:r>
-          </a:p>
-          <a:p>
-            <a:pPr>
-              <a:spcBef>
-                <a:spcPts val="800"/>
-              </a:spcBef>
-            </a:pPr>
-            <a:r>
-              <a:rPr sz="1700" b="1">
-                <a:solidFill>
-                  <a:srgbClr val="1F3564"/>
-                </a:solidFill>
-                <a:latin typeface="Malgun Gothic"/>
-              </a:rPr>
-              <a:t>구현 (로컬 우선 방식)</a:t>
-            </a:r>
-          </a:p>
-          <a:p>
-            <a:pPr lvl="1">
-              <a:spcBef>
-                <a:spcPts val="200"/>
-              </a:spcBef>
-            </a:pPr>
-            <a:r>
-              <a:rPr sz="1450" b="0">
-                <a:solidFill>
-                  <a:srgbClr val="222222"/>
-                </a:solidFill>
-                <a:latin typeface="Malgun Gothic"/>
-              </a:rPr>
-              <a:t>단일 실행형 리포트 + 로컬 클래스로 우선 검증 → 이후 글로벌 분리 예정</a:t>
-            </a:r>
-          </a:p>
-          <a:p>
-            <a:pPr lvl="1">
-              <a:spcBef>
-                <a:spcPts val="200"/>
-              </a:spcBef>
-            </a:pPr>
-            <a:r>
-              <a:rPr sz="1450" b="0">
-                <a:solidFill>
-                  <a:srgbClr val="222222"/>
-                </a:solidFill>
-                <a:latin typeface="Malgun Gothic"/>
-              </a:rPr>
-              <a:t>대시보드/차트/드릴다운/새로고침 등 반복 개선(iteration)으로 완성도 향상</a:t>
-            </a:r>
-          </a:p>
-        </p:txBody>
-      </p:sp>
-    </p:spTree>
-  </p:cSld>
-  <p:clrMapOvr>
-    <a:masterClrMapping/>
-  </p:clrMapOvr>
-</p:sld>
-</file>
-
-<file path=ppt/slides/slide7.xml><?xml version="1.0" encoding="utf-8"?>
-<p:sld xmlns:a="http://schemas.openxmlformats.org/drawingml/2006/main" xmlns:p="http://schemas.openxmlformats.org/presentationml/2006/main" xmlns:r="http://schemas.openxmlformats.org/officeDocument/2006/relationships">
-  <p:cSld>
-    <p:spTree>
-      <p:nvGrpSpPr>
-        <p:cNvPr id="1" name=""/>
-        <p:cNvGrpSpPr/>
-        <p:nvPr/>
-      </p:nvGrpSpPr>
-      <p:grpSpPr/>
-      <p:sp>
-        <p:nvSpPr>
-          <p:cNvPr id="2" name="Rectangle 1"/>
-          <p:cNvSpPr/>
-          <p:nvPr/>
-        </p:nvSpPr>
-        <p:spPr>
-          <a:xfrm>
-            <a:off x="0" y="0"/>
-            <a:ext cx="12191695" cy="914400"/>
-          </a:xfrm>
-          <a:prstGeom prst="rect">
-            <a:avLst/>
-          </a:prstGeom>
-          <a:solidFill>
-            <a:srgbClr val="1F3564"/>
-          </a:solidFill>
-          <a:ln>
-            <a:noFill/>
-          </a:ln>
-        </p:spPr>
-        <p:style>
-          <a:lnRef idx="1">
-            <a:schemeClr val="accent1"/>
-          </a:lnRef>
-          <a:fillRef idx="3">
-            <a:schemeClr val="accent1"/>
-          </a:fillRef>
-          <a:effectRef idx="2">
-            <a:schemeClr val="accent1"/>
-          </a:effectRef>
-          <a:fontRef idx="minor">
-            <a:schemeClr val="lt1"/>
-          </a:fontRef>
-        </p:style>
-        <p:txBody>
-          <a:bodyPr rtlCol="0" anchor="ctr"/>
-          <a:lstStyle/>
-          <a:p>
-            <a:pPr algn="ctr"/>
-          </a:p>
-        </p:txBody>
-      </p:sp>
-      <p:sp>
-        <p:nvSpPr>
-          <p:cNvPr id="3" name="TextBox 2"/>
-          <p:cNvSpPr txBox="1"/>
-          <p:nvPr/>
-        </p:nvSpPr>
-        <p:spPr>
-          <a:xfrm>
-            <a:off x="548640" y="164592"/>
-            <a:ext cx="11064240" cy="640080"/>
-          </a:xfrm>
-          <a:prstGeom prst="rect">
-            <a:avLst/>
-          </a:prstGeom>
-          <a:noFill/>
-        </p:spPr>
-        <p:txBody>
-          <a:bodyPr wrap="none">
-            <a:spAutoFit/>
-          </a:bodyPr>
-          <a:lstStyle/>
-          <a:p>
-            <a:r>
-              <a:rPr sz="2400" b="1">
-                <a:solidFill>
-                  <a:srgbClr val="FFFFFF"/>
-                </a:solidFill>
-                <a:latin typeface="Malgun Gothic"/>
-              </a:rPr>
-              <a:t>5. Cursor(AI) 활용 방식</a:t>
-            </a:r>
-          </a:p>
-        </p:txBody>
-      </p:sp>
-      <p:sp>
-        <p:nvSpPr>
-          <p:cNvPr id="4" name="TextBox 3"/>
-          <p:cNvSpPr txBox="1"/>
-          <p:nvPr/>
-        </p:nvSpPr>
-        <p:spPr>
-          <a:xfrm>
-            <a:off x="640080" y="1188720"/>
-            <a:ext cx="10881360" cy="5394960"/>
-          </a:xfrm>
-          <a:prstGeom prst="rect">
-            <a:avLst/>
-          </a:prstGeom>
-          <a:noFill/>
-        </p:spPr>
-        <p:txBody>
-          <a:bodyPr wrap="square">
-            <a:spAutoFit/>
-          </a:bodyPr>
-          <a:lstStyle/>
-          <a:p>
-            <a:pPr>
-              <a:spcBef>
-                <a:spcPts val="800"/>
-              </a:spcBef>
-            </a:pPr>
-            <a:r>
-              <a:rPr sz="1700" b="1">
-                <a:solidFill>
-                  <a:srgbClr val="1F3564"/>
-                </a:solidFill>
-                <a:latin typeface="Malgun Gothic"/>
-              </a:rPr>
-              <a:t>설계 문서 자동 작성·개정</a:t>
-            </a:r>
-          </a:p>
-          <a:p>
-            <a:pPr lvl="1">
-              <a:spcBef>
-                <a:spcPts val="200"/>
-              </a:spcBef>
-            </a:pPr>
-            <a:r>
-              <a:rPr sz="1450" b="0">
-                <a:solidFill>
-                  <a:srgbClr val="222222"/>
-                </a:solidFill>
-                <a:latin typeface="Malgun Gothic"/>
-              </a:rPr>
-              <a:t>설계서 구조화, 결정사항/Open Issue 반영, 버전 이력 자동 관리</a:t>
-            </a:r>
-          </a:p>
-          <a:p>
-            <a:pPr>
-              <a:spcBef>
-                <a:spcPts val="800"/>
-              </a:spcBef>
-            </a:pPr>
-            <a:r>
-              <a:rPr sz="1700" b="1">
-                <a:solidFill>
-                  <a:srgbClr val="1F3564"/>
-                </a:solidFill>
-                <a:latin typeface="Malgun Gothic"/>
-              </a:rPr>
-              <a:t>자료 분석 자동화</a:t>
-            </a:r>
-          </a:p>
-          <a:p>
-            <a:pPr lvl="1">
-              <a:spcBef>
-                <a:spcPts val="200"/>
-              </a:spcBef>
-            </a:pPr>
-            <a:r>
-              <a:rPr sz="1450" b="0">
-                <a:solidFill>
-                  <a:srgbClr val="222222"/>
-                </a:solidFill>
-                <a:latin typeface="Malgun Gothic"/>
-              </a:rPr>
-              <a:t>STAUTHTRACE 엑셀을 직접 파싱 → 권한 객체/필드/값 자동 도출</a:t>
-            </a:r>
-          </a:p>
-          <a:p>
-            <a:pPr>
-              <a:spcBef>
-                <a:spcPts val="800"/>
-              </a:spcBef>
-            </a:pPr>
-            <a:r>
-              <a:rPr sz="1700" b="1">
-                <a:solidFill>
-                  <a:srgbClr val="1F3564"/>
-                </a:solidFill>
-                <a:latin typeface="Malgun Gothic"/>
-              </a:rPr>
-              <a:t>표준 API 조사 자동화</a:t>
-            </a:r>
-          </a:p>
-          <a:p>
-            <a:pPr lvl="1">
-              <a:spcBef>
-                <a:spcPts val="200"/>
-              </a:spcBef>
-            </a:pPr>
-            <a:r>
-              <a:rPr sz="1450" b="0">
-                <a:solidFill>
-                  <a:srgbClr val="222222"/>
-                </a:solidFill>
-                <a:latin typeface="Malgun Gothic"/>
-              </a:rPr>
-              <a:t>웹/문서 검색으로 표준 FM·클래스 시그니처 확인</a:t>
-            </a:r>
-          </a:p>
-          <a:p>
-            <a:pPr lvl="1">
-              <a:spcBef>
-                <a:spcPts val="200"/>
-              </a:spcBef>
-            </a:pPr>
-            <a:r>
-              <a:rPr sz="1450" b="0">
-                <a:solidFill>
-                  <a:srgbClr val="222222"/>
-                </a:solidFill>
-                <a:latin typeface="Malgun Gothic"/>
-              </a:rPr>
-              <a:t>RS_SNAP_DUMP_DISPLAY, SXMB_DISPLAY_MESSAGE_MONITOR, CL_GUI_CHART_ENGINE(XML)</a:t>
-            </a:r>
-          </a:p>
-          <a:p>
-            <a:pPr>
-              <a:spcBef>
-                <a:spcPts val="800"/>
-              </a:spcBef>
-            </a:pPr>
-            <a:r>
-              <a:rPr sz="1700" b="1">
-                <a:solidFill>
-                  <a:srgbClr val="1F3564"/>
-                </a:solidFill>
-                <a:latin typeface="Malgun Gothic"/>
-              </a:rPr>
-              <a:t>반복 개발 루프(설계→코딩→오류수정)</a:t>
-            </a:r>
-          </a:p>
-          <a:p>
-            <a:pPr lvl="1">
-              <a:spcBef>
-                <a:spcPts val="200"/>
-              </a:spcBef>
-            </a:pPr>
-            <a:r>
-              <a:rPr sz="1450" b="0">
-                <a:solidFill>
-                  <a:srgbClr val="222222"/>
-                </a:solidFill>
-                <a:latin typeface="Malgun Gothic"/>
-              </a:rPr>
-              <a:t>구문/형식 오류를 즉시 진단·수정(파라미터명, 형식호환, IGS XML 등)</a:t>
-            </a:r>
-          </a:p>
-          <a:p>
-            <a:pPr lvl="1">
-              <a:spcBef>
-                <a:spcPts val="200"/>
-              </a:spcBef>
-            </a:pPr>
-            <a:r>
-              <a:rPr sz="1450" b="0">
-                <a:solidFill>
-                  <a:srgbClr val="222222"/>
-                </a:solidFill>
-                <a:latin typeface="Malgun Gothic"/>
-              </a:rPr>
-              <a:t>전체 소스 일괄 생성·출력, 복사-붙여넣기 지원</a:t>
-            </a:r>
-          </a:p>
-          <a:p>
-            <a:pPr>
-              <a:spcBef>
-                <a:spcPts val="800"/>
-              </a:spcBef>
-            </a:pPr>
-            <a:r>
-              <a:rPr sz="1700" b="1">
-                <a:solidFill>
-                  <a:srgbClr val="1F3564"/>
-                </a:solidFill>
-                <a:latin typeface="Malgun Gothic"/>
-              </a:rPr>
-              <a:t>표준·규칙 자동 적용</a:t>
-            </a:r>
-          </a:p>
-          <a:p>
-            <a:pPr lvl="1">
-              <a:spcBef>
-                <a:spcPts val="200"/>
-              </a:spcBef>
-            </a:pPr>
-            <a:r>
-              <a:rPr sz="1450" b="0">
-                <a:solidFill>
-                  <a:srgbClr val="222222"/>
-                </a:solidFill>
-                <a:latin typeface="Malgun Gothic"/>
-              </a:rPr>
-              <a:t>읽기전용 원칙·명명규칙을 프로젝트 규칙(Rules/Skills)으로 상시 적용</a:t>
-            </a:r>
-          </a:p>
-        </p:txBody>
-      </p:sp>
-    </p:spTree>
-  </p:cSld>
-  <p:clrMapOvr>
-    <a:masterClrMapping/>
-  </p:clrMapOvr>
-</p:sld>
-</file>
-
-<file path=ppt/slides/slide8.xml><?xml version="1.0" encoding="utf-8"?>
-<p:sld xmlns:a="http://schemas.openxmlformats.org/drawingml/2006/main" xmlns:p="http://schemas.openxmlformats.org/presentationml/2006/main" xmlns:r="http://schemas.openxmlformats.org/officeDocument/2006/relationships">
-  <p:cSld>
-    <p:spTree>
-      <p:nvGrpSpPr>
-        <p:cNvPr id="1" name=""/>
-        <p:cNvGrpSpPr/>
-        <p:nvPr/>
-      </p:nvGrpSpPr>
-      <p:grpSpPr/>
-      <p:sp>
-        <p:nvSpPr>
-          <p:cNvPr id="2" name="Rectangle 1"/>
-          <p:cNvSpPr/>
-          <p:nvPr/>
-        </p:nvSpPr>
-        <p:spPr>
-          <a:xfrm>
-            <a:off x="0" y="0"/>
-            <a:ext cx="12191695" cy="914400"/>
-          </a:xfrm>
-          <a:prstGeom prst="rect">
-            <a:avLst/>
-          </a:prstGeom>
-          <a:solidFill>
-            <a:srgbClr val="1F3564"/>
-          </a:solidFill>
-          <a:ln>
-            <a:noFill/>
-          </a:ln>
-        </p:spPr>
-        <p:style>
-          <a:lnRef idx="1">
-            <a:schemeClr val="accent1"/>
-          </a:lnRef>
-          <a:fillRef idx="3">
-            <a:schemeClr val="accent1"/>
-          </a:fillRef>
-          <a:effectRef idx="2">
-            <a:schemeClr val="accent1"/>
-          </a:effectRef>
-          <a:fontRef idx="minor">
-            <a:schemeClr val="lt1"/>
-          </a:fontRef>
-        </p:style>
-        <p:txBody>
-          <a:bodyPr rtlCol="0" anchor="ctr"/>
-          <a:lstStyle/>
-          <a:p>
-            <a:pPr algn="ctr"/>
-          </a:p>
-        </p:txBody>
-      </p:sp>
-      <p:sp>
-        <p:nvSpPr>
-          <p:cNvPr id="3" name="TextBox 2"/>
-          <p:cNvSpPr txBox="1"/>
-          <p:nvPr/>
-        </p:nvSpPr>
-        <p:spPr>
-          <a:xfrm>
-            <a:off x="548640" y="164592"/>
-            <a:ext cx="11064240" cy="640080"/>
-          </a:xfrm>
-          <a:prstGeom prst="rect">
-            <a:avLst/>
-          </a:prstGeom>
-          <a:noFill/>
-        </p:spPr>
-        <p:txBody>
-          <a:bodyPr wrap="none">
-            <a:spAutoFit/>
-          </a:bodyPr>
-          <a:lstStyle/>
-          <a:p>
-            <a:r>
-              <a:rPr sz="2400" b="1">
-                <a:solidFill>
-                  <a:srgbClr val="FFFFFF"/>
-                </a:solidFill>
-                <a:latin typeface="Malgun Gothic"/>
-              </a:rPr>
-              <a:t>6. 효율성 · 성과</a:t>
-            </a:r>
-          </a:p>
-        </p:txBody>
-      </p:sp>
-      <p:sp>
-        <p:nvSpPr>
-          <p:cNvPr id="4" name="TextBox 3"/>
-          <p:cNvSpPr txBox="1"/>
-          <p:nvPr/>
-        </p:nvSpPr>
-        <p:spPr>
-          <a:xfrm>
-            <a:off x="640080" y="1188720"/>
-            <a:ext cx="10881360" cy="5394960"/>
-          </a:xfrm>
-          <a:prstGeom prst="rect">
-            <a:avLst/>
-          </a:prstGeom>
-          <a:noFill/>
-        </p:spPr>
-        <p:txBody>
-          <a:bodyPr wrap="square">
-            <a:spAutoFit/>
-          </a:bodyPr>
-          <a:lstStyle/>
-          <a:p>
-            <a:pPr>
-              <a:spcBef>
-                <a:spcPts val="800"/>
-              </a:spcBef>
-            </a:pPr>
-            <a:r>
-              <a:rPr sz="1700" b="1">
-                <a:solidFill>
-                  <a:srgbClr val="1F3564"/>
-                </a:solidFill>
-                <a:latin typeface="Malgun Gothic"/>
-              </a:rPr>
-              <a:t>정성적 효과</a:t>
-            </a:r>
-          </a:p>
-          <a:p>
-            <a:pPr lvl="1">
-              <a:spcBef>
-                <a:spcPts val="200"/>
-              </a:spcBef>
-            </a:pPr>
-            <a:r>
-              <a:rPr sz="1450" b="0">
-                <a:solidFill>
-                  <a:srgbClr val="222222"/>
-                </a:solidFill>
-                <a:latin typeface="Malgun Gothic"/>
-              </a:rPr>
-              <a:t>설계-구현-검토를 한 흐름으로: 문서/코드/오류대응 컨텍스트 유지</a:t>
-            </a:r>
-          </a:p>
-          <a:p>
-            <a:pPr lvl="1">
-              <a:spcBef>
-                <a:spcPts val="200"/>
-              </a:spcBef>
-            </a:pPr>
-            <a:r>
-              <a:rPr sz="1450" b="0">
-                <a:solidFill>
-                  <a:srgbClr val="222222"/>
-                </a:solidFill>
-                <a:latin typeface="Malgun Gothic"/>
-              </a:rPr>
-              <a:t>표준 오브젝트(FM/권한객체) 탐색을 대화로 즉시 해결 → 리서치 부담 대폭 감소</a:t>
-            </a:r>
-          </a:p>
-          <a:p>
-            <a:pPr lvl="1">
-              <a:spcBef>
-                <a:spcPts val="200"/>
-              </a:spcBef>
-            </a:pPr>
-            <a:r>
-              <a:rPr sz="1450" b="0">
-                <a:solidFill>
-                  <a:srgbClr val="222222"/>
-                </a:solidFill>
-                <a:latin typeface="Malgun Gothic"/>
-              </a:rPr>
-              <a:t>읽기전용·명명규칙 등 사내 표준을 일관 적용(휴먼 에러 감소)</a:t>
-            </a:r>
-          </a:p>
-          <a:p>
-            <a:pPr lvl="1">
-              <a:spcBef>
-                <a:spcPts val="200"/>
-              </a:spcBef>
-            </a:pPr>
-            <a:r>
-              <a:rPr sz="1450" b="0">
-                <a:solidFill>
-                  <a:srgbClr val="222222"/>
-                </a:solidFill>
-                <a:latin typeface="Malgun Gothic"/>
-              </a:rPr>
-              <a:t>아키텍처(인터페이스 기반) 유지로 신규 영역 확장 용이</a:t>
-            </a:r>
-          </a:p>
-          <a:p>
-            <a:pPr>
-              <a:spcBef>
-                <a:spcPts val="800"/>
-              </a:spcBef>
-            </a:pPr>
-            <a:r>
-              <a:rPr sz="1700" b="1">
-                <a:solidFill>
-                  <a:srgbClr val="1F3564"/>
-                </a:solidFill>
-                <a:latin typeface="Malgun Gothic"/>
-              </a:rPr>
-              <a:t>정량적 효과(추정)</a:t>
-            </a:r>
-          </a:p>
-          <a:p>
-            <a:pPr lvl="1">
-              <a:spcBef>
-                <a:spcPts val="200"/>
-              </a:spcBef>
-            </a:pPr>
-            <a:r>
-              <a:rPr sz="1450" b="0">
-                <a:solidFill>
-                  <a:srgbClr val="222222"/>
-                </a:solidFill>
-                <a:latin typeface="Malgun Gothic"/>
-              </a:rPr>
-              <a:t>설계서 작성/개정 시간 대폭 단축(수작업 대비)</a:t>
-            </a:r>
-          </a:p>
-          <a:p>
-            <a:pPr lvl="1">
-              <a:spcBef>
-                <a:spcPts val="200"/>
-              </a:spcBef>
-            </a:pPr>
-            <a:r>
-              <a:rPr sz="1450" b="0">
-                <a:solidFill>
-                  <a:srgbClr val="222222"/>
-                </a:solidFill>
-                <a:latin typeface="Malgun Gothic"/>
-              </a:rPr>
-              <a:t>표준 API/파라미터 조사 시간 절감(문서 탐색 → 대화형 확인)</a:t>
-            </a:r>
-          </a:p>
-          <a:p>
-            <a:pPr lvl="1">
-              <a:spcBef>
-                <a:spcPts val="200"/>
-              </a:spcBef>
-            </a:pPr>
-            <a:r>
-              <a:rPr sz="1450" b="0">
-                <a:solidFill>
-                  <a:srgbClr val="222222"/>
-                </a:solidFill>
-                <a:latin typeface="Malgun Gothic"/>
-              </a:rPr>
-              <a:t>오류 수정 사이클(원인 파악→수정) 단축, 반복 개선 회수↑</a:t>
-            </a:r>
-          </a:p>
-          <a:p>
-            <a:pPr>
-              <a:spcBef>
-                <a:spcPts val="800"/>
-              </a:spcBef>
-            </a:pPr>
-            <a:r>
-              <a:rPr sz="1700" b="1">
-                <a:solidFill>
-                  <a:srgbClr val="1F3564"/>
-                </a:solidFill>
-                <a:latin typeface="Malgun Gothic"/>
-              </a:rPr>
-              <a:t>산출물</a:t>
-            </a:r>
-          </a:p>
-          <a:p>
-            <a:pPr lvl="1">
-              <a:spcBef>
-                <a:spcPts val="200"/>
-              </a:spcBef>
-            </a:pPr>
-            <a:r>
-              <a:rPr sz="1450" b="0">
-                <a:solidFill>
-                  <a:srgbClr val="222222"/>
-                </a:solidFill>
-                <a:latin typeface="Malgun Gothic"/>
-              </a:rPr>
-              <a:t>설계서 v0.4, 실행형 리포트 소스, 빌드 가이드(화면/상태/텍스트), 권한 확정표</a:t>
-            </a:r>
-          </a:p>
-        </p:txBody>
-      </p:sp>
-    </p:spTree>
-  </p:cSld>
-  <p:clrMapOvr>
-    <a:masterClrMapping/>
-  </p:clrMapOvr>
-</p:sld>
-</file>
-
-<file path=ppt/slides/slide9.xml><?xml version="1.0" encoding="utf-8"?>
-<p:sld xmlns:a="http://schemas.openxmlformats.org/drawingml/2006/main" xmlns:p="http://schemas.openxmlformats.org/presentationml/2006/main" xmlns:r="http://schemas.openxmlformats.org/officeDocument/2006/relationships">
-  <p:cSld>
-    <p:spTree>
-      <p:nvGrpSpPr>
-        <p:cNvPr id="1" name=""/>
-        <p:cNvGrpSpPr/>
-        <p:nvPr/>
-      </p:nvGrpSpPr>
-      <p:grpSpPr/>
-      <p:sp>
-        <p:nvSpPr>
-          <p:cNvPr id="2" name="Rectangle 1"/>
-          <p:cNvSpPr/>
-          <p:nvPr/>
-        </p:nvSpPr>
-        <p:spPr>
-          <a:xfrm>
-            <a:off x="0" y="0"/>
-            <a:ext cx="12191695" cy="914400"/>
-          </a:xfrm>
-          <a:prstGeom prst="rect">
-            <a:avLst/>
-          </a:prstGeom>
-          <a:solidFill>
-            <a:srgbClr val="1F3564"/>
-          </a:solidFill>
-          <a:ln>
-            <a:noFill/>
-          </a:ln>
-        </p:spPr>
-        <p:style>
-          <a:lnRef idx="1">
-            <a:schemeClr val="accent1"/>
-          </a:lnRef>
-          <a:fillRef idx="3">
-            <a:schemeClr val="accent1"/>
-          </a:fillRef>
-          <a:effectRef idx="2">
-            <a:schemeClr val="accent1"/>
-          </a:effectRef>
-          <a:fontRef idx="minor">
-            <a:schemeClr val="lt1"/>
-          </a:fontRef>
-        </p:style>
-        <p:txBody>
-          <a:bodyPr rtlCol="0" anchor="ctr"/>
-          <a:lstStyle/>
-          <a:p>
-            <a:pPr algn="ctr"/>
-          </a:p>
-        </p:txBody>
-      </p:sp>
-      <p:sp>
-        <p:nvSpPr>
-          <p:cNvPr id="3" name="TextBox 2"/>
-          <p:cNvSpPr txBox="1"/>
-          <p:nvPr/>
-        </p:nvSpPr>
-        <p:spPr>
-          <a:xfrm>
-            <a:off x="548640" y="164592"/>
-            <a:ext cx="11064240" cy="640080"/>
-          </a:xfrm>
-          <a:prstGeom prst="rect">
-            <a:avLst/>
-          </a:prstGeom>
-          <a:noFill/>
-        </p:spPr>
-        <p:txBody>
-          <a:bodyPr wrap="none">
-            <a:spAutoFit/>
-          </a:bodyPr>
-          <a:lstStyle/>
-          <a:p>
-            <a:r>
-              <a:rPr sz="2400" b="1">
-                <a:solidFill>
-                  <a:srgbClr val="FFFFFF"/>
-                </a:solidFill>
-                <a:latin typeface="Malgun Gothic"/>
-              </a:rPr>
-              <a:t>7. 기대 효과 및 향후 계획</a:t>
-            </a:r>
-          </a:p>
-        </p:txBody>
-      </p:sp>
-      <p:sp>
-        <p:nvSpPr>
-          <p:cNvPr id="4" name="TextBox 3"/>
-          <p:cNvSpPr txBox="1"/>
-          <p:nvPr/>
-        </p:nvSpPr>
-        <p:spPr>
-          <a:xfrm>
-            <a:off x="640080" y="1188720"/>
-            <a:ext cx="10881360" cy="5394960"/>
-          </a:xfrm>
-          <a:prstGeom prst="rect">
-            <a:avLst/>
-          </a:prstGeom>
-          <a:noFill/>
-        </p:spPr>
-        <p:txBody>
-          <a:bodyPr wrap="square">
-            <a:spAutoFit/>
-          </a:bodyPr>
-          <a:lstStyle/>
-          <a:p>
-            <a:pPr>
-              <a:spcBef>
-                <a:spcPts val="800"/>
-              </a:spcBef>
-            </a:pPr>
-            <a:r>
-              <a:rPr sz="1700" b="1">
-                <a:solidFill>
-                  <a:srgbClr val="1F3564"/>
-                </a:solidFill>
-                <a:latin typeface="Malgun Gothic"/>
-              </a:rPr>
-              <a:t>기대 효과</a:t>
-            </a:r>
-          </a:p>
-          <a:p>
-            <a:pPr lvl="1">
-              <a:spcBef>
-                <a:spcPts val="200"/>
-              </a:spcBef>
-            </a:pPr>
-            <a:r>
-              <a:rPr sz="1450" b="0">
-                <a:solidFill>
-                  <a:srgbClr val="222222"/>
-                </a:solidFill>
-                <a:latin typeface="Malgun Gothic"/>
-              </a:rPr>
-              <a:t>일일 운영 점검 시간 단축 및 점검 누락 방지</a:t>
-            </a:r>
-          </a:p>
-          <a:p>
-            <a:pPr lvl="1">
-              <a:spcBef>
-                <a:spcPts val="200"/>
-              </a:spcBef>
-            </a:pPr>
-            <a:r>
-              <a:rPr sz="1450" b="0">
-                <a:solidFill>
-                  <a:srgbClr val="222222"/>
-                </a:solidFill>
-                <a:latin typeface="Malgun Gothic"/>
-              </a:rPr>
-              <a:t>에러 집중도(Top-N)·추이로 반복 원인 신속 식별</a:t>
-            </a:r>
-          </a:p>
-          <a:p>
-            <a:pPr lvl="1">
-              <a:spcBef>
-                <a:spcPts val="200"/>
-              </a:spcBef>
-            </a:pPr>
-            <a:r>
-              <a:rPr sz="1450" b="0">
-                <a:solidFill>
-                  <a:srgbClr val="222222"/>
-                </a:solidFill>
-                <a:latin typeface="Malgun Gothic"/>
-              </a:rPr>
-              <a:t>읽기전용 보장으로 운영 안전성 확보</a:t>
-            </a:r>
-          </a:p>
-          <a:p>
-            <a:pPr>
-              <a:spcBef>
-                <a:spcPts val="800"/>
-              </a:spcBef>
-            </a:pPr>
-            <a:r>
-              <a:rPr sz="1700" b="1">
-                <a:solidFill>
-                  <a:srgbClr val="1F3564"/>
-                </a:solidFill>
-                <a:latin typeface="Malgun Gothic"/>
-              </a:rPr>
-              <a:t>향후 계획</a:t>
-            </a:r>
-          </a:p>
-          <a:p>
-            <a:pPr lvl="1">
-              <a:spcBef>
-                <a:spcPts val="200"/>
-              </a:spcBef>
-            </a:pPr>
-            <a:r>
-              <a:rPr sz="1450" b="0">
-                <a:solidFill>
-                  <a:srgbClr val="222222"/>
-                </a:solidFill>
-                <a:latin typeface="Malgun Gothic"/>
-              </a:rPr>
-              <a:t>로컬 클래스 → 글로벌 오브젝트(DDIC/클래스/메시지클래스/트랜잭션) 분리</a:t>
-            </a:r>
-          </a:p>
-          <a:p>
-            <a:pPr lvl="1">
-              <a:spcBef>
-                <a:spcPts val="200"/>
-              </a:spcBef>
-            </a:pPr>
-            <a:r>
-              <a:rPr sz="1450" b="0">
-                <a:solidFill>
-                  <a:srgbClr val="222222"/>
-                </a:solidFill>
-                <a:latin typeface="Malgun Gothic"/>
-              </a:rPr>
-              <a:t>IGS 그래픽 차트 고도화(색상 규약·값 라벨), 다국어(메시지클래스) 적용</a:t>
-            </a:r>
-          </a:p>
-          <a:p>
-            <a:pPr lvl="1">
-              <a:spcBef>
-                <a:spcPts val="200"/>
-              </a:spcBef>
-            </a:pPr>
-            <a:r>
-              <a:rPr sz="1450" b="0">
-                <a:solidFill>
-                  <a:srgbClr val="222222"/>
-                </a:solidFill>
-                <a:latin typeface="Malgun Gothic"/>
-              </a:rPr>
-              <a:t>자동 새로고침 관제 모드, 임계치 알림(운영 정책 검토)</a:t>
-            </a:r>
-          </a:p>
-          <a:p>
-            <a:pPr lvl="1">
-              <a:spcBef>
-                <a:spcPts val="200"/>
-              </a:spcBef>
-            </a:pPr>
-            <a:r>
-              <a:rPr sz="1450" b="0">
-                <a:solidFill>
-                  <a:srgbClr val="222222"/>
-                </a:solidFill>
-                <a:latin typeface="Malgun Gothic"/>
-              </a:rPr>
-              <a:t>신규 모니터링 영역 확장(SM21/RZ20 등) — 프로바이더 추가만으로</a:t>
+              <a:t>정량 효과 실측(개발 소요시간 전/후 비교) 및 타 과제 확대 적용 검토.</a:t>
             </a:r>
           </a:p>
         </p:txBody>

--- a/docs/report/Y_OPS_MONITOR_V2_발표자료.pptx
+++ b/docs/report/Y_OPS_MONITOR_V2_발표자료.pptx
@@ -3100,18 +3100,19 @@
         </p:nvSpPr>
         <p:spPr>
           <a:xfrm>
-            <a:off x="0" y="2103120"/>
-            <a:ext cx="12191695" cy="2286000"/>
+            <a:off x="0" y="0"/>
+            <a:ext cx="12191695" cy="6858000"/>
           </a:xfrm>
           <a:prstGeom prst="rect">
             <a:avLst/>
           </a:prstGeom>
           <a:solidFill>
-            <a:srgbClr val="1F3564"/>
+            <a:srgbClr val="FFFFFF"/>
           </a:solidFill>
           <a:ln>
             <a:noFill/>
           </a:ln>
+          <a:effectLst/>
         </p:spPr>
         <p:style>
           <a:lnRef idx="1">
@@ -3137,14 +3138,102 @@
       </p:sp>
       <p:sp>
         <p:nvSpPr>
-          <p:cNvPr id="3" name="TextBox 2"/>
+          <p:cNvPr id="3" name="Rectangle 2"/>
+          <p:cNvSpPr/>
+          <p:nvPr/>
+        </p:nvSpPr>
+        <p:spPr>
+          <a:xfrm>
+            <a:off x="0" y="0"/>
+            <a:ext cx="320040" cy="6858000"/>
+          </a:xfrm>
+          <a:prstGeom prst="rect">
+            <a:avLst/>
+          </a:prstGeom>
+          <a:solidFill>
+            <a:srgbClr val="142A54"/>
+          </a:solidFill>
+          <a:ln>
+            <a:noFill/>
+          </a:ln>
+          <a:effectLst/>
+        </p:spPr>
+        <p:style>
+          <a:lnRef idx="1">
+            <a:schemeClr val="accent1"/>
+          </a:lnRef>
+          <a:fillRef idx="3">
+            <a:schemeClr val="accent1"/>
+          </a:fillRef>
+          <a:effectRef idx="2">
+            <a:schemeClr val="accent1"/>
+          </a:effectRef>
+          <a:fontRef idx="minor">
+            <a:schemeClr val="lt1"/>
+          </a:fontRef>
+        </p:style>
+        <p:txBody>
+          <a:bodyPr rtlCol="0" anchor="ctr"/>
+          <a:lstStyle/>
+          <a:p>
+            <a:pPr algn="ctr"/>
+          </a:p>
+        </p:txBody>
+      </p:sp>
+      <p:sp>
+        <p:nvSpPr>
+          <p:cNvPr id="4" name="Rectangle 3"/>
+          <p:cNvSpPr/>
+          <p:nvPr/>
+        </p:nvSpPr>
+        <p:spPr>
+          <a:xfrm>
+            <a:off x="320040" y="0"/>
+            <a:ext cx="73152" cy="6858000"/>
+          </a:xfrm>
+          <a:prstGeom prst="rect">
+            <a:avLst/>
+          </a:prstGeom>
+          <a:solidFill>
+            <a:srgbClr val="E8A31C"/>
+          </a:solidFill>
+          <a:ln>
+            <a:noFill/>
+          </a:ln>
+          <a:effectLst/>
+        </p:spPr>
+        <p:style>
+          <a:lnRef idx="1">
+            <a:schemeClr val="accent1"/>
+          </a:lnRef>
+          <a:fillRef idx="3">
+            <a:schemeClr val="accent1"/>
+          </a:fillRef>
+          <a:effectRef idx="2">
+            <a:schemeClr val="accent1"/>
+          </a:effectRef>
+          <a:fontRef idx="minor">
+            <a:schemeClr val="lt1"/>
+          </a:fontRef>
+        </p:style>
+        <p:txBody>
+          <a:bodyPr rtlCol="0" anchor="ctr"/>
+          <a:lstStyle/>
+          <a:p>
+            <a:pPr algn="ctr"/>
+          </a:p>
+        </p:txBody>
+      </p:sp>
+      <p:sp>
+        <p:nvSpPr>
+          <p:cNvPr id="5" name="TextBox 4"/>
           <p:cNvSpPr txBox="1"/>
           <p:nvPr/>
         </p:nvSpPr>
         <p:spPr>
           <a:xfrm>
-            <a:off x="731520" y="2377440"/>
-            <a:ext cx="10698480" cy="1463040"/>
+            <a:off x="822960" y="1371600"/>
+            <a:ext cx="10607040" cy="457200"/>
           </a:xfrm>
           <a:prstGeom prst="rect">
             <a:avLst/>
@@ -3157,39 +3246,33 @@
           </a:bodyPr>
           <a:lstStyle/>
           <a:p>
-            <a:r>
-              <a:rPr sz="3400" b="1">
-                <a:solidFill>
-                  <a:srgbClr val="FFFFFF"/>
-                </a:solidFill>
-                <a:latin typeface="Malgun Gothic"/>
-              </a:rPr>
-              <a:t>AI(Cursor) 활용 개발 성과 보고</a:t>
-            </a:r>
-          </a:p>
-          <a:p>
-            <a:r>
-              <a:rPr sz="1700" b="0">
-                <a:solidFill>
-                  <a:srgbClr val="D5DEF5"/>
-                </a:solidFill>
-                <a:latin typeface="Malgun Gothic"/>
-              </a:rPr>
-              <a:t>통합 운영 모니터링(SM37·ST22·SXI) 개발을 통한 AI 페어프로그래밍 효율성 검증</a:t>
-            </a:r>
-          </a:p>
-        </p:txBody>
-      </p:sp>
-      <p:sp>
-        <p:nvSpPr>
-          <p:cNvPr id="4" name="TextBox 3"/>
+            <a:pPr>
+              <a:spcBef>
+                <a:spcPts val="0"/>
+              </a:spcBef>
+            </a:pPr>
+            <a:r>
+              <a:rPr sz="1500" b="1">
+                <a:solidFill>
+                  <a:srgbClr val="2E5BFF"/>
+                </a:solidFill>
+                <a:latin typeface="Malgun Gothic"/>
+              </a:rPr>
+              <a:t>AI 활용 개발 성과 보고</a:t>
+            </a:r>
+          </a:p>
+        </p:txBody>
+      </p:sp>
+      <p:sp>
+        <p:nvSpPr>
+          <p:cNvPr id="6" name="TextBox 5"/>
           <p:cNvSpPr txBox="1"/>
           <p:nvPr/>
         </p:nvSpPr>
         <p:spPr>
           <a:xfrm>
-            <a:off x="731520" y="6126480"/>
-            <a:ext cx="10698480" cy="457200"/>
+            <a:off x="822960" y="1874519"/>
+            <a:ext cx="10789920" cy="2011680"/>
           </a:xfrm>
           <a:prstGeom prst="rect">
             <a:avLst/>
@@ -3197,15 +3280,345 @@
           <a:noFill/>
         </p:spPr>
         <p:txBody>
-          <a:bodyPr wrap="none">
+          <a:bodyPr wrap="square">
             <a:spAutoFit/>
           </a:bodyPr>
           <a:lstStyle/>
           <a:p>
-            <a:r>
-              <a:rPr sz="1200" b="0">
-                <a:solidFill>
-                  <a:srgbClr val="555555"/>
+            <a:pPr>
+              <a:spcBef>
+                <a:spcPts val="0"/>
+              </a:spcBef>
+            </a:pPr>
+            <a:r>
+              <a:rPr sz="4000" b="1">
+                <a:solidFill>
+                  <a:srgbClr val="142A54"/>
+                </a:solidFill>
+                <a:latin typeface="Malgun Gothic"/>
+              </a:rPr>
+              <a:t>Cursor(AI)로 개발한</a:t>
+            </a:r>
+          </a:p>
+          <a:p>
+            <a:pPr>
+              <a:spcBef>
+                <a:spcPts val="400"/>
+              </a:spcBef>
+            </a:pPr>
+            <a:r>
+              <a:rPr sz="4000" b="1">
+                <a:solidFill>
+                  <a:srgbClr val="142A54"/>
+                </a:solidFill>
+                <a:latin typeface="Malgun Gothic"/>
+              </a:rPr>
+              <a:t>통합 운영 모니터링 대시보드</a:t>
+            </a:r>
+          </a:p>
+        </p:txBody>
+      </p:sp>
+      <p:sp>
+        <p:nvSpPr>
+          <p:cNvPr id="7" name="Rectangle 6"/>
+          <p:cNvSpPr/>
+          <p:nvPr/>
+        </p:nvSpPr>
+        <p:spPr>
+          <a:xfrm>
+            <a:off x="868680" y="3794760"/>
+            <a:ext cx="2011680" cy="63500"/>
+          </a:xfrm>
+          <a:prstGeom prst="rect">
+            <a:avLst/>
+          </a:prstGeom>
+          <a:solidFill>
+            <a:srgbClr val="E8A31C"/>
+          </a:solidFill>
+          <a:ln>
+            <a:noFill/>
+          </a:ln>
+          <a:effectLst/>
+        </p:spPr>
+        <p:style>
+          <a:lnRef idx="1">
+            <a:schemeClr val="accent1"/>
+          </a:lnRef>
+          <a:fillRef idx="3">
+            <a:schemeClr val="accent1"/>
+          </a:fillRef>
+          <a:effectRef idx="2">
+            <a:schemeClr val="accent1"/>
+          </a:effectRef>
+          <a:fontRef idx="minor">
+            <a:schemeClr val="lt1"/>
+          </a:fontRef>
+        </p:style>
+        <p:txBody>
+          <a:bodyPr rtlCol="0" anchor="ctr"/>
+          <a:lstStyle/>
+          <a:p>
+            <a:pPr algn="ctr"/>
+          </a:p>
+        </p:txBody>
+      </p:sp>
+      <p:sp>
+        <p:nvSpPr>
+          <p:cNvPr id="8" name="TextBox 7"/>
+          <p:cNvSpPr txBox="1"/>
+          <p:nvPr/>
+        </p:nvSpPr>
+        <p:spPr>
+          <a:xfrm>
+            <a:off x="822960" y="4023360"/>
+            <a:ext cx="10607040" cy="914400"/>
+          </a:xfrm>
+          <a:prstGeom prst="rect">
+            <a:avLst/>
+          </a:prstGeom>
+          <a:noFill/>
+        </p:spPr>
+        <p:txBody>
+          <a:bodyPr wrap="square">
+            <a:spAutoFit/>
+          </a:bodyPr>
+          <a:lstStyle/>
+          <a:p>
+            <a:pPr>
+              <a:spcBef>
+                <a:spcPts val="0"/>
+              </a:spcBef>
+            </a:pPr>
+            <a:r>
+              <a:rPr sz="1600" b="0">
+                <a:solidFill>
+                  <a:srgbClr val="5A5A5A"/>
+                </a:solidFill>
+                <a:latin typeface="Malgun Gothic"/>
+              </a:rPr>
+              <a:t>SM37(배치) · ST22(런타임 덤프) · SXI(인터페이스) 3개 점검을 하나로 통합</a:t>
+            </a:r>
+          </a:p>
+          <a:p>
+            <a:pPr>
+              <a:spcBef>
+                <a:spcPts val="400"/>
+              </a:spcBef>
+            </a:pPr>
+            <a:r>
+              <a:rPr sz="1600" b="0">
+                <a:solidFill>
+                  <a:srgbClr val="5A5A5A"/>
+                </a:solidFill>
+                <a:latin typeface="Malgun Gothic"/>
+              </a:rPr>
+              <a:t>AI 페어프로그래밍을 통한 설계·구현·검증 생산성 검증</a:t>
+            </a:r>
+          </a:p>
+        </p:txBody>
+      </p:sp>
+      <p:sp>
+        <p:nvSpPr>
+          <p:cNvPr id="9" name="Rounded Rectangle 8"/>
+          <p:cNvSpPr/>
+          <p:nvPr/>
+        </p:nvSpPr>
+        <p:spPr>
+          <a:xfrm>
+            <a:off x="822960" y="5212080"/>
+            <a:ext cx="2468880" cy="502920"/>
+          </a:xfrm>
+          <a:prstGeom prst="roundRect">
+            <a:avLst/>
+          </a:prstGeom>
+          <a:solidFill>
+            <a:srgbClr val="EAF0FF"/>
+          </a:solidFill>
+          <a:ln>
+            <a:noFill/>
+          </a:ln>
+          <a:effectLst/>
+        </p:spPr>
+        <p:style>
+          <a:lnRef idx="1">
+            <a:schemeClr val="accent1"/>
+          </a:lnRef>
+          <a:fillRef idx="3">
+            <a:schemeClr val="accent1"/>
+          </a:fillRef>
+          <a:effectRef idx="2">
+            <a:schemeClr val="accent1"/>
+          </a:effectRef>
+          <a:fontRef idx="minor">
+            <a:schemeClr val="lt1"/>
+          </a:fontRef>
+        </p:style>
+        <p:txBody>
+          <a:bodyPr rtlCol="0" anchor="ctr"/>
+          <a:lstStyle/>
+          <a:p>
+            <a:pPr algn="ctr">
+              <a:spcBef>
+                <a:spcPts val="0"/>
+              </a:spcBef>
+            </a:pPr>
+            <a:r>
+              <a:rPr sz="1250" b="1">
+                <a:solidFill>
+                  <a:srgbClr val="142A54"/>
+                </a:solidFill>
+                <a:latin typeface="Malgun Gothic"/>
+              </a:rPr>
+              <a:t>통합 대시보드</a:t>
+            </a:r>
+          </a:p>
+        </p:txBody>
+      </p:sp>
+      <p:sp>
+        <p:nvSpPr>
+          <p:cNvPr id="10" name="Rounded Rectangle 9"/>
+          <p:cNvSpPr/>
+          <p:nvPr/>
+        </p:nvSpPr>
+        <p:spPr>
+          <a:xfrm>
+            <a:off x="3474720" y="5212080"/>
+            <a:ext cx="2468880" cy="502920"/>
+          </a:xfrm>
+          <a:prstGeom prst="roundRect">
+            <a:avLst/>
+          </a:prstGeom>
+          <a:solidFill>
+            <a:srgbClr val="EAF0FF"/>
+          </a:solidFill>
+          <a:ln>
+            <a:noFill/>
+          </a:ln>
+          <a:effectLst/>
+        </p:spPr>
+        <p:style>
+          <a:lnRef idx="1">
+            <a:schemeClr val="accent1"/>
+          </a:lnRef>
+          <a:fillRef idx="3">
+            <a:schemeClr val="accent1"/>
+          </a:fillRef>
+          <a:effectRef idx="2">
+            <a:schemeClr val="accent1"/>
+          </a:effectRef>
+          <a:fontRef idx="minor">
+            <a:schemeClr val="lt1"/>
+          </a:fontRef>
+        </p:style>
+        <p:txBody>
+          <a:bodyPr rtlCol="0" anchor="ctr"/>
+          <a:lstStyle/>
+          <a:p>
+            <a:pPr algn="ctr">
+              <a:spcBef>
+                <a:spcPts val="0"/>
+              </a:spcBef>
+            </a:pPr>
+            <a:r>
+              <a:rPr sz="1250" b="1">
+                <a:solidFill>
+                  <a:srgbClr val="142A54"/>
+                </a:solidFill>
+                <a:latin typeface="Malgun Gothic"/>
+              </a:rPr>
+              <a:t>읽기 전용(안전)</a:t>
+            </a:r>
+          </a:p>
+        </p:txBody>
+      </p:sp>
+      <p:sp>
+        <p:nvSpPr>
+          <p:cNvPr id="11" name="Rounded Rectangle 10"/>
+          <p:cNvSpPr/>
+          <p:nvPr/>
+        </p:nvSpPr>
+        <p:spPr>
+          <a:xfrm>
+            <a:off x="6126480" y="5212080"/>
+            <a:ext cx="2468880" cy="502920"/>
+          </a:xfrm>
+          <a:prstGeom prst="roundRect">
+            <a:avLst/>
+          </a:prstGeom>
+          <a:solidFill>
+            <a:srgbClr val="EAF0FF"/>
+          </a:solidFill>
+          <a:ln>
+            <a:noFill/>
+          </a:ln>
+          <a:effectLst/>
+        </p:spPr>
+        <p:style>
+          <a:lnRef idx="1">
+            <a:schemeClr val="accent1"/>
+          </a:lnRef>
+          <a:fillRef idx="3">
+            <a:schemeClr val="accent1"/>
+          </a:fillRef>
+          <a:effectRef idx="2">
+            <a:schemeClr val="accent1"/>
+          </a:effectRef>
+          <a:fontRef idx="minor">
+            <a:schemeClr val="lt1"/>
+          </a:fontRef>
+        </p:style>
+        <p:txBody>
+          <a:bodyPr rtlCol="0" anchor="ctr"/>
+          <a:lstStyle/>
+          <a:p>
+            <a:pPr algn="ctr">
+              <a:spcBef>
+                <a:spcPts val="0"/>
+              </a:spcBef>
+            </a:pPr>
+            <a:r>
+              <a:rPr sz="1250" b="1">
+                <a:solidFill>
+                  <a:srgbClr val="142A54"/>
+                </a:solidFill>
+                <a:latin typeface="Malgun Gothic"/>
+              </a:rPr>
+              <a:t>AI 페어프로그래밍</a:t>
+            </a:r>
+          </a:p>
+        </p:txBody>
+      </p:sp>
+      <p:sp>
+        <p:nvSpPr>
+          <p:cNvPr id="12" name="TextBox 11"/>
+          <p:cNvSpPr txBox="1"/>
+          <p:nvPr/>
+        </p:nvSpPr>
+        <p:spPr>
+          <a:xfrm>
+            <a:off x="822960" y="6126480"/>
+            <a:ext cx="10607040" cy="365760"/>
+          </a:xfrm>
+          <a:prstGeom prst="rect">
+            <a:avLst/>
+          </a:prstGeom>
+          <a:noFill/>
+        </p:spPr>
+        <p:txBody>
+          <a:bodyPr wrap="square">
+            <a:spAutoFit/>
+          </a:bodyPr>
+          <a:lstStyle/>
+          <a:p>
+            <a:pPr>
+              <a:spcBef>
+                <a:spcPts val="0"/>
+              </a:spcBef>
+            </a:pPr>
+            <a:r>
+              <a:rPr sz="1100" b="0">
+                <a:solidFill>
+                  <a:srgbClr val="5A5A5A"/>
                 </a:solidFill>
                 <a:latin typeface="Malgun Gothic"/>
               </a:rPr>
@@ -3241,17 +3654,18 @@
         <p:spPr>
           <a:xfrm>
             <a:off x="0" y="0"/>
-            <a:ext cx="12191695" cy="868680"/>
+            <a:ext cx="12191695" cy="6858000"/>
           </a:xfrm>
           <a:prstGeom prst="rect">
             <a:avLst/>
           </a:prstGeom>
           <a:solidFill>
-            <a:srgbClr val="1F3564"/>
+            <a:srgbClr val="F6F8FC"/>
           </a:solidFill>
           <a:ln>
             <a:noFill/>
           </a:ln>
+          <a:effectLst/>
         </p:spPr>
         <p:style>
           <a:lnRef idx="1">
@@ -3283,8 +3697,8 @@
         </p:nvSpPr>
         <p:spPr>
           <a:xfrm>
-            <a:off x="548640" y="146304"/>
-            <a:ext cx="11064240" cy="594360"/>
+            <a:off x="640080" y="411480"/>
+            <a:ext cx="10972800" cy="365760"/>
           </a:xfrm>
           <a:prstGeom prst="rect">
             <a:avLst/>
@@ -3292,19 +3706,24 @@
           <a:noFill/>
         </p:spPr>
         <p:txBody>
-          <a:bodyPr wrap="none">
+          <a:bodyPr wrap="square">
             <a:spAutoFit/>
           </a:bodyPr>
           <a:lstStyle/>
           <a:p>
-            <a:r>
-              <a:rPr sz="2400" b="1">
-                <a:solidFill>
-                  <a:srgbClr val="FFFFFF"/>
-                </a:solidFill>
-                <a:latin typeface="Malgun Gothic"/>
-              </a:rPr>
-              <a:t>1. 프로젝트 개요</a:t>
+            <a:pPr>
+              <a:spcBef>
+                <a:spcPts val="0"/>
+              </a:spcBef>
+            </a:pPr>
+            <a:r>
+              <a:rPr sz="1300" b="1">
+                <a:solidFill>
+                  <a:srgbClr val="2E5BFF"/>
+                </a:solidFill>
+                <a:latin typeface="Malgun Gothic"/>
+              </a:rPr>
+              <a:t>01  PROJECT OVERVIEW</a:t>
             </a:r>
           </a:p>
         </p:txBody>
@@ -3317,8 +3736,8 @@
         </p:nvSpPr>
         <p:spPr>
           <a:xfrm>
-            <a:off x="640080" y="1097280"/>
-            <a:ext cx="10881360" cy="5486400"/>
+            <a:off x="640080" y="731520"/>
+            <a:ext cx="10972800" cy="640080"/>
           </a:xfrm>
           <a:prstGeom prst="rect">
             <a:avLst/>
@@ -3333,97 +3752,454 @@
           <a:p>
             <a:pPr>
               <a:spcBef>
+                <a:spcPts val="0"/>
+              </a:spcBef>
+            </a:pPr>
+            <a:r>
+              <a:rPr sz="2600" b="1">
+                <a:solidFill>
+                  <a:srgbClr val="142A54"/>
+                </a:solidFill>
+                <a:latin typeface="Malgun Gothic"/>
+              </a:rPr>
+              <a:t>3개 점검 화면을 1개 통합 대시보드로</a:t>
+            </a:r>
+          </a:p>
+        </p:txBody>
+      </p:sp>
+      <p:sp>
+        <p:nvSpPr>
+          <p:cNvPr id="5" name="Rectangle 4"/>
+          <p:cNvSpPr/>
+          <p:nvPr/>
+        </p:nvSpPr>
+        <p:spPr>
+          <a:xfrm>
+            <a:off x="658368" y="1371600"/>
+            <a:ext cx="1371600" cy="50800"/>
+          </a:xfrm>
+          <a:prstGeom prst="rect">
+            <a:avLst/>
+          </a:prstGeom>
+          <a:solidFill>
+            <a:srgbClr val="E8A31C"/>
+          </a:solidFill>
+          <a:ln>
+            <a:noFill/>
+          </a:ln>
+          <a:effectLst/>
+        </p:spPr>
+        <p:style>
+          <a:lnRef idx="1">
+            <a:schemeClr val="accent1"/>
+          </a:lnRef>
+          <a:fillRef idx="3">
+            <a:schemeClr val="accent1"/>
+          </a:fillRef>
+          <a:effectRef idx="2">
+            <a:schemeClr val="accent1"/>
+          </a:effectRef>
+          <a:fontRef idx="minor">
+            <a:schemeClr val="lt1"/>
+          </a:fontRef>
+        </p:style>
+        <p:txBody>
+          <a:bodyPr rtlCol="0" anchor="ctr"/>
+          <a:lstStyle/>
+          <a:p>
+            <a:pPr algn="ctr"/>
+          </a:p>
+        </p:txBody>
+      </p:sp>
+      <p:sp>
+        <p:nvSpPr>
+          <p:cNvPr id="6" name="Rounded Rectangle 5"/>
+          <p:cNvSpPr/>
+          <p:nvPr/>
+        </p:nvSpPr>
+        <p:spPr>
+          <a:xfrm>
+            <a:off x="731520" y="1965960"/>
+            <a:ext cx="4297680" cy="3108960"/>
+          </a:xfrm>
+          <a:prstGeom prst="roundRect">
+            <a:avLst/>
+          </a:prstGeom>
+          <a:solidFill>
+            <a:srgbClr val="FFFFFF"/>
+          </a:solidFill>
+          <a:ln w="12700">
+            <a:solidFill>
+              <a:srgbClr val="DDE3EF"/>
+            </a:solidFill>
+          </a:ln>
+          <a:effectLst/>
+        </p:spPr>
+        <p:style>
+          <a:lnRef idx="1">
+            <a:schemeClr val="accent1"/>
+          </a:lnRef>
+          <a:fillRef idx="3">
+            <a:schemeClr val="accent1"/>
+          </a:fillRef>
+          <a:effectRef idx="2">
+            <a:schemeClr val="accent1"/>
+          </a:effectRef>
+          <a:fontRef idx="minor">
+            <a:schemeClr val="lt1"/>
+          </a:fontRef>
+        </p:style>
+        <p:txBody>
+          <a:bodyPr rtlCol="0" anchor="ctr" lIns="274320" tIns="182880" wrap="square"/>
+          <a:lstStyle/>
+          <a:p>
+            <a:pPr algn="ctr">
+              <a:spcBef>
+                <a:spcPts val="0"/>
+              </a:spcBef>
+            </a:pPr>
+            <a:r>
+              <a:rPr sz="1500" b="1">
+                <a:solidFill>
+                  <a:srgbClr val="5A5A5A"/>
+                </a:solidFill>
+                <a:latin typeface="Malgun Gothic"/>
+              </a:rPr>
+              <a:t>AS-IS  (현행)</a:t>
+            </a:r>
+          </a:p>
+          <a:p>
+            <a:pPr>
+              <a:spcBef>
+                <a:spcPts val="800"/>
+              </a:spcBef>
+            </a:pPr>
+            <a:r>
+              <a:rPr sz="1250" b="0">
+                <a:solidFill>
+                  <a:srgbClr val="222833"/>
+                </a:solidFill>
+                <a:latin typeface="Malgun Gothic"/>
+              </a:rPr>
+              <a:t>매일 3개 트랜잭션을 개별 실행·확인</a:t>
+            </a:r>
+          </a:p>
+          <a:p>
+            <a:pPr>
+              <a:spcBef>
                 <a:spcPts val="1000"/>
               </a:spcBef>
             </a:pPr>
             <a:r>
-              <a:rPr sz="1700" b="1">
+              <a:rPr sz="1300" b="0">
+                <a:solidFill>
+                  <a:srgbClr val="222833"/>
+                </a:solidFill>
+                <a:latin typeface="Malgun Gothic"/>
+              </a:rPr>
+              <a:t>•  SM37  배치 잡 에러</a:t>
+            </a:r>
+          </a:p>
+          <a:p>
+            <a:pPr>
+              <a:spcBef>
+                <a:spcPts val="600"/>
+              </a:spcBef>
+            </a:pPr>
+            <a:r>
+              <a:rPr sz="1300" b="0">
+                <a:solidFill>
+                  <a:srgbClr val="222833"/>
+                </a:solidFill>
+                <a:latin typeface="Malgun Gothic"/>
+              </a:rPr>
+              <a:t>•  ST22  런타임 덤프</a:t>
+            </a:r>
+          </a:p>
+          <a:p>
+            <a:pPr>
+              <a:spcBef>
+                <a:spcPts val="600"/>
+              </a:spcBef>
+            </a:pPr>
+            <a:r>
+              <a:rPr sz="1300" b="0">
+                <a:solidFill>
+                  <a:srgbClr val="222833"/>
+                </a:solidFill>
+                <a:latin typeface="Malgun Gothic"/>
+              </a:rPr>
+              <a:t>•  SXI_MONITOR  인터페이스 에러</a:t>
+            </a:r>
+          </a:p>
+          <a:p>
+            <a:pPr>
+              <a:spcBef>
+                <a:spcPts val="1200"/>
+              </a:spcBef>
+            </a:pPr>
+            <a:r>
+              <a:rPr sz="1200" b="1">
+                <a:solidFill>
+                  <a:srgbClr val="C0392B"/>
+                </a:solidFill>
+                <a:latin typeface="Malgun Gothic"/>
+              </a:rPr>
+              <a:t>→ 화면 전환 잦음 · 점검 누락/지연 위험</a:t>
+            </a:r>
+          </a:p>
+        </p:txBody>
+      </p:sp>
+      <p:sp>
+        <p:nvSpPr>
+          <p:cNvPr id="7" name="Right Arrow 6"/>
+          <p:cNvSpPr/>
+          <p:nvPr/>
+        </p:nvSpPr>
+        <p:spPr>
+          <a:xfrm>
+            <a:off x="5212080" y="3108960"/>
+            <a:ext cx="1234440" cy="868680"/>
+          </a:xfrm>
+          <a:prstGeom prst="rightArrow">
+            <a:avLst/>
+          </a:prstGeom>
+          <a:solidFill>
+            <a:srgbClr val="E8A31C"/>
+          </a:solidFill>
+          <a:ln>
+            <a:noFill/>
+          </a:ln>
+          <a:effectLst/>
+        </p:spPr>
+        <p:style>
+          <a:lnRef idx="1">
+            <a:schemeClr val="accent1"/>
+          </a:lnRef>
+          <a:fillRef idx="3">
+            <a:schemeClr val="accent1"/>
+          </a:fillRef>
+          <a:effectRef idx="2">
+            <a:schemeClr val="accent1"/>
+          </a:effectRef>
+          <a:fontRef idx="minor">
+            <a:schemeClr val="lt1"/>
+          </a:fontRef>
+        </p:style>
+        <p:txBody>
+          <a:bodyPr rtlCol="0" anchor="ctr"/>
+          <a:lstStyle/>
+          <a:p>
+            <a:pPr algn="ctr"/>
+          </a:p>
+        </p:txBody>
+      </p:sp>
+      <p:sp>
+        <p:nvSpPr>
+          <p:cNvPr id="8" name="Rounded Rectangle 7"/>
+          <p:cNvSpPr/>
+          <p:nvPr/>
+        </p:nvSpPr>
+        <p:spPr>
+          <a:xfrm>
+            <a:off x="6629400" y="1965960"/>
+            <a:ext cx="4800600" cy="3108960"/>
+          </a:xfrm>
+          <a:prstGeom prst="roundRect">
+            <a:avLst/>
+          </a:prstGeom>
+          <a:solidFill>
+            <a:srgbClr val="142A54"/>
+          </a:solidFill>
+          <a:ln>
+            <a:noFill/>
+          </a:ln>
+          <a:effectLst/>
+        </p:spPr>
+        <p:style>
+          <a:lnRef idx="1">
+            <a:schemeClr val="accent1"/>
+          </a:lnRef>
+          <a:fillRef idx="3">
+            <a:schemeClr val="accent1"/>
+          </a:fillRef>
+          <a:effectRef idx="2">
+            <a:schemeClr val="accent1"/>
+          </a:effectRef>
+          <a:fontRef idx="minor">
+            <a:schemeClr val="lt1"/>
+          </a:fontRef>
+        </p:style>
+        <p:txBody>
+          <a:bodyPr rtlCol="0" anchor="ctr" lIns="274320" tIns="182880" wrap="square"/>
+          <a:lstStyle/>
+          <a:p>
+            <a:pPr algn="ctr">
+              <a:spcBef>
+                <a:spcPts val="0"/>
+              </a:spcBef>
+            </a:pPr>
+            <a:r>
+              <a:rPr sz="1500" b="1">
+                <a:solidFill>
+                  <a:srgbClr val="E8A31C"/>
+                </a:solidFill>
+                <a:latin typeface="Malgun Gothic"/>
+              </a:rPr>
+              <a:t>TO-BE  (개선)</a:t>
+            </a:r>
+          </a:p>
+          <a:p>
+            <a:pPr>
+              <a:spcBef>
+                <a:spcPts val="800"/>
+              </a:spcBef>
+            </a:pPr>
+            <a:r>
+              <a:rPr sz="1300" b="1">
+                <a:solidFill>
+                  <a:srgbClr val="FFFFFF"/>
+                </a:solidFill>
+                <a:latin typeface="Malgun Gothic"/>
+              </a:rPr>
+              <a:t>단일 트랜잭션 통합 대시보드 (읽기 전용)</a:t>
+            </a:r>
+          </a:p>
+          <a:p>
+            <a:pPr>
+              <a:spcBef>
+                <a:spcPts val="1000"/>
+              </a:spcBef>
+            </a:pPr>
+            <a:r>
+              <a:rPr sz="1250" b="0">
+                <a:solidFill>
+                  <a:srgbClr val="FFFFFF"/>
+                </a:solidFill>
+                <a:latin typeface="Malgun Gothic"/>
+              </a:rPr>
+              <a:t>•  상단 : 영역별 신호등 + 건수 요약</a:t>
+            </a:r>
+          </a:p>
+          <a:p>
+            <a:pPr>
+              <a:spcBef>
+                <a:spcPts val="600"/>
+              </a:spcBef>
+            </a:pPr>
+            <a:r>
+              <a:rPr sz="1250" b="0">
+                <a:solidFill>
+                  <a:srgbClr val="FFFFFF"/>
+                </a:solidFill>
+                <a:latin typeface="Malgun Gothic"/>
+              </a:rPr>
+              <a:t>•  중간 : 영역별 에러 집중도 차트</a:t>
+            </a:r>
+          </a:p>
+          <a:p>
+            <a:pPr>
+              <a:spcBef>
+                <a:spcPts val="600"/>
+              </a:spcBef>
+            </a:pPr>
+            <a:r>
+              <a:rPr sz="1250" b="0">
+                <a:solidFill>
+                  <a:srgbClr val="FFFFFF"/>
+                </a:solidFill>
+                <a:latin typeface="Malgun Gothic"/>
+              </a:rPr>
+              <a:t>•  하단 : 상세 목록 + 더블클릭 상세 이동</a:t>
+            </a:r>
+          </a:p>
+          <a:p>
+            <a:pPr>
+              <a:spcBef>
+                <a:spcPts val="1200"/>
+              </a:spcBef>
+            </a:pPr>
+            <a:r>
+              <a:rPr sz="1200" b="1">
+                <a:solidFill>
+                  <a:srgbClr val="FFD97A"/>
+                </a:solidFill>
+                <a:latin typeface="Malgun Gothic"/>
+              </a:rPr>
+              <a:t>→ 한눈에 파악 · 점검시간 단축 · 누락 방지</a:t>
+            </a:r>
+          </a:p>
+        </p:txBody>
+      </p:sp>
+      <p:sp>
+        <p:nvSpPr>
+          <p:cNvPr id="9" name="Rounded Rectangle 8"/>
+          <p:cNvSpPr/>
+          <p:nvPr/>
+        </p:nvSpPr>
+        <p:spPr>
+          <a:xfrm>
+            <a:off x="731520" y="5257800"/>
+            <a:ext cx="10698480" cy="1051560"/>
+          </a:xfrm>
+          <a:prstGeom prst="roundRect">
+            <a:avLst/>
+          </a:prstGeom>
+          <a:solidFill>
+            <a:srgbClr val="EAF0FF"/>
+          </a:solidFill>
+          <a:ln>
+            <a:noFill/>
+          </a:ln>
+          <a:effectLst/>
+        </p:spPr>
+        <p:style>
+          <a:lnRef idx="1">
+            <a:schemeClr val="accent1"/>
+          </a:lnRef>
+          <a:fillRef idx="3">
+            <a:schemeClr val="accent1"/>
+          </a:fillRef>
+          <a:effectRef idx="2">
+            <a:schemeClr val="accent1"/>
+          </a:effectRef>
+          <a:fontRef idx="minor">
+            <a:schemeClr val="lt1"/>
+          </a:fontRef>
+        </p:style>
+        <p:txBody>
+          <a:bodyPr rtlCol="0" anchor="ctr" lIns="274320" wrap="square"/>
+          <a:lstStyle/>
+          <a:p>
+            <a:pPr algn="ctr">
+              <a:spcBef>
+                <a:spcPts val="0"/>
+              </a:spcBef>
+            </a:pPr>
+            <a:r>
+              <a:rPr sz="1300" b="1">
                 <a:solidFill>
                   <a:srgbClr val="2E5BFF"/>
                 </a:solidFill>
                 <a:latin typeface="Malgun Gothic"/>
               </a:rPr>
-              <a:t>▸ 무엇을</a:t>
-            </a:r>
-          </a:p>
-          <a:p>
-            <a:pPr lvl="1">
-              <a:spcBef>
-                <a:spcPts val="200"/>
-              </a:spcBef>
-            </a:pPr>
-            <a:r>
-              <a:rPr sz="1400" b="0">
-                <a:solidFill>
-                  <a:srgbClr val="222222"/>
-                </a:solidFill>
-                <a:latin typeface="Malgun Gothic"/>
-              </a:rPr>
-              <a:t>운영자가 매일 개별 확인하던 3개 점검 화면(배치/런타임덤프/인터페이스)을 단일 대시보드로 통합(읽기 전용).</a:t>
+              <a:t>본 보고의 초점</a:t>
             </a:r>
           </a:p>
           <a:p>
             <a:pPr>
               <a:spcBef>
-                <a:spcPts val="1000"/>
-              </a:spcBef>
-            </a:pPr>
-            <a:r>
-              <a:rPr sz="1700" b="1">
-                <a:solidFill>
-                  <a:srgbClr val="2E5BFF"/>
-                </a:solidFill>
-                <a:latin typeface="Malgun Gothic"/>
-              </a:rPr>
-              <a:t>▸ 왜</a:t>
-            </a:r>
-          </a:p>
-          <a:p>
-            <a:pPr lvl="1">
-              <a:spcBef>
-                <a:spcPts val="200"/>
-              </a:spcBef>
-            </a:pPr>
-            <a:r>
-              <a:rPr sz="1400" b="0">
-                <a:solidFill>
-                  <a:srgbClr val="222222"/>
-                </a:solidFill>
-                <a:latin typeface="Malgun Gothic"/>
-              </a:rPr>
-              <a:t>점검 시간 단축·누락 방지, 반복 원인 신속 식별.</a:t>
-            </a:r>
-          </a:p>
-          <a:p>
-            <a:pPr>
-              <a:spcBef>
-                <a:spcPts val="1000"/>
-              </a:spcBef>
-            </a:pPr>
-            <a:r>
-              <a:rPr sz="1700" b="1">
-                <a:solidFill>
-                  <a:srgbClr val="2E5BFF"/>
-                </a:solidFill>
-                <a:latin typeface="Malgun Gothic"/>
-              </a:rPr>
-              <a:t>▸ 보고의 초점</a:t>
-            </a:r>
-          </a:p>
-          <a:p>
-            <a:pPr lvl="1">
-              <a:spcBef>
-                <a:spcPts val="200"/>
-              </a:spcBef>
-            </a:pPr>
-            <a:r>
-              <a:rPr sz="1400" b="0">
-                <a:solidFill>
-                  <a:srgbClr val="222222"/>
-                </a:solidFill>
-                <a:latin typeface="Malgun Gothic"/>
-              </a:rPr>
-              <a:t>결과물 자체보다, AI(Cursor)를 개발 전 과정에 활용해 얻은 생산성·품질 효과를 보고.</a:t>
+                <a:spcPts val="400"/>
+              </a:spcBef>
+            </a:pPr>
+            <a:r>
+              <a:rPr sz="1300" b="0">
+                <a:solidFill>
+                  <a:srgbClr val="222833"/>
+                </a:solidFill>
+                <a:latin typeface="Malgun Gothic"/>
+              </a:rPr>
+              <a:t>개발 결과물 자체보다, 개발 전 과정(설계·구현·검증)에 AI(Cursor)를 활용해 얻은 생산성·품질 효과에 있습니다.</a:t>
             </a:r>
           </a:p>
         </p:txBody>
@@ -3455,17 +4231,18 @@
         <p:spPr>
           <a:xfrm>
             <a:off x="0" y="0"/>
-            <a:ext cx="12191695" cy="868680"/>
+            <a:ext cx="12191695" cy="6858000"/>
           </a:xfrm>
           <a:prstGeom prst="rect">
             <a:avLst/>
           </a:prstGeom>
           <a:solidFill>
-            <a:srgbClr val="1F3564"/>
+            <a:srgbClr val="F6F8FC"/>
           </a:solidFill>
           <a:ln>
             <a:noFill/>
           </a:ln>
+          <a:effectLst/>
         </p:spPr>
         <p:style>
           <a:lnRef idx="1">
@@ -3497,8 +4274,8 @@
         </p:nvSpPr>
         <p:spPr>
           <a:xfrm>
-            <a:off x="548640" y="146304"/>
-            <a:ext cx="11064240" cy="594360"/>
+            <a:off x="640080" y="411480"/>
+            <a:ext cx="10972800" cy="365760"/>
           </a:xfrm>
           <a:prstGeom prst="rect">
             <a:avLst/>
@@ -3506,19 +4283,24 @@
           <a:noFill/>
         </p:spPr>
         <p:txBody>
-          <a:bodyPr wrap="none">
+          <a:bodyPr wrap="square">
             <a:spAutoFit/>
           </a:bodyPr>
           <a:lstStyle/>
           <a:p>
-            <a:r>
-              <a:rPr sz="2400" b="1">
-                <a:solidFill>
-                  <a:srgbClr val="FFFFFF"/>
-                </a:solidFill>
-                <a:latin typeface="Malgun Gothic"/>
-              </a:rPr>
-              <a:t>2. AI(Cursor) 활용 방식</a:t>
+            <a:pPr>
+              <a:spcBef>
+                <a:spcPts val="0"/>
+              </a:spcBef>
+            </a:pPr>
+            <a:r>
+              <a:rPr sz="1300" b="1">
+                <a:solidFill>
+                  <a:srgbClr val="2E5BFF"/>
+                </a:solidFill>
+                <a:latin typeface="Malgun Gothic"/>
+              </a:rPr>
+              <a:t>02  HOW WE USED AI (CURSOR)</a:t>
             </a:r>
           </a:p>
         </p:txBody>
@@ -3531,8 +4313,8 @@
         </p:nvSpPr>
         <p:spPr>
           <a:xfrm>
-            <a:off x="640080" y="1097280"/>
-            <a:ext cx="10881360" cy="5486400"/>
+            <a:off x="640080" y="731520"/>
+            <a:ext cx="10972800" cy="640080"/>
           </a:xfrm>
           <a:prstGeom prst="rect">
             <a:avLst/>
@@ -3547,161 +4329,854 @@
           <a:p>
             <a:pPr>
               <a:spcBef>
-                <a:spcPts val="1000"/>
-              </a:spcBef>
-            </a:pPr>
-            <a:r>
-              <a:rPr sz="1700" b="1">
+                <a:spcPts val="0"/>
+              </a:spcBef>
+            </a:pPr>
+            <a:r>
+              <a:rPr sz="2600" b="1">
+                <a:solidFill>
+                  <a:srgbClr val="142A54"/>
+                </a:solidFill>
+                <a:latin typeface="Malgun Gothic"/>
+              </a:rPr>
+              <a:t>AI(Cursor)를 개발 전 과정에 활용</a:t>
+            </a:r>
+          </a:p>
+        </p:txBody>
+      </p:sp>
+      <p:sp>
+        <p:nvSpPr>
+          <p:cNvPr id="5" name="Rectangle 4"/>
+          <p:cNvSpPr/>
+          <p:nvPr/>
+        </p:nvSpPr>
+        <p:spPr>
+          <a:xfrm>
+            <a:off x="658368" y="1371600"/>
+            <a:ext cx="1371600" cy="50800"/>
+          </a:xfrm>
+          <a:prstGeom prst="rect">
+            <a:avLst/>
+          </a:prstGeom>
+          <a:solidFill>
+            <a:srgbClr val="E8A31C"/>
+          </a:solidFill>
+          <a:ln>
+            <a:noFill/>
+          </a:ln>
+          <a:effectLst/>
+        </p:spPr>
+        <p:style>
+          <a:lnRef idx="1">
+            <a:schemeClr val="accent1"/>
+          </a:lnRef>
+          <a:fillRef idx="3">
+            <a:schemeClr val="accent1"/>
+          </a:fillRef>
+          <a:effectRef idx="2">
+            <a:schemeClr val="accent1"/>
+          </a:effectRef>
+          <a:fontRef idx="minor">
+            <a:schemeClr val="lt1"/>
+          </a:fontRef>
+        </p:style>
+        <p:txBody>
+          <a:bodyPr rtlCol="0" anchor="ctr"/>
+          <a:lstStyle/>
+          <a:p>
+            <a:pPr algn="ctr"/>
+          </a:p>
+        </p:txBody>
+      </p:sp>
+      <p:sp>
+        <p:nvSpPr>
+          <p:cNvPr id="6" name="Rounded Rectangle 5"/>
+          <p:cNvSpPr/>
+          <p:nvPr/>
+        </p:nvSpPr>
+        <p:spPr>
+          <a:xfrm>
+            <a:off x="640080" y="1783080"/>
+            <a:ext cx="3456432" cy="1783080"/>
+          </a:xfrm>
+          <a:prstGeom prst="roundRect">
+            <a:avLst/>
+          </a:prstGeom>
+          <a:solidFill>
+            <a:srgbClr val="FFFFFF"/>
+          </a:solidFill>
+          <a:ln w="12700">
+            <a:solidFill>
+              <a:srgbClr val="DDE3EF"/>
+            </a:solidFill>
+          </a:ln>
+          <a:effectLst/>
+        </p:spPr>
+        <p:style>
+          <a:lnRef idx="1">
+            <a:schemeClr val="accent1"/>
+          </a:lnRef>
+          <a:fillRef idx="3">
+            <a:schemeClr val="accent1"/>
+          </a:fillRef>
+          <a:effectRef idx="2">
+            <a:schemeClr val="accent1"/>
+          </a:effectRef>
+          <a:fontRef idx="minor">
+            <a:schemeClr val="lt1"/>
+          </a:fontRef>
+        </p:style>
+        <p:txBody>
+          <a:bodyPr rtlCol="0" anchor="ctr" wrap="square" lIns="274320" tIns="146304" rIns="164592" bIns="109728"/>
+          <a:lstStyle/>
+          <a:p>
+            <a:pPr algn="ctr">
+              <a:spcBef>
+                <a:spcPts val="0"/>
+              </a:spcBef>
+            </a:pPr>
+            <a:r>
+              <a:rPr sz="1500" b="1">
                 <a:solidFill>
                   <a:srgbClr val="2E5BFF"/>
                 </a:solidFill>
                 <a:latin typeface="Malgun Gothic"/>
               </a:rPr>
-              <a:t>▸ 설계 문서 자동화</a:t>
-            </a:r>
-          </a:p>
-          <a:p>
-            <a:pPr lvl="1">
-              <a:spcBef>
-                <a:spcPts val="200"/>
-              </a:spcBef>
-            </a:pPr>
-            <a:r>
-              <a:rPr sz="1400" b="0">
-                <a:solidFill>
-                  <a:srgbClr val="222222"/>
-                </a:solidFill>
-                <a:latin typeface="Malgun Gothic"/>
-              </a:rPr>
-              <a:t>설계서 작성·개정, 결정사항/미결과제 이력 관리를 대화로 진행.</a:t>
+              <a:t>①   </a:t>
+            </a:r>
+            <a:r>
+              <a:rPr sz="1500" b="1">
+                <a:solidFill>
+                  <a:srgbClr val="142A54"/>
+                </a:solidFill>
+                <a:latin typeface="Malgun Gothic"/>
+              </a:rPr>
+              <a:t>설계 문서 자동화</a:t>
             </a:r>
           </a:p>
           <a:p>
             <a:pPr>
               <a:spcBef>
-                <a:spcPts val="1000"/>
-              </a:spcBef>
-            </a:pPr>
-            <a:r>
-              <a:rPr sz="1700" b="1">
+                <a:spcPts val="400"/>
+              </a:spcBef>
+            </a:pPr>
+            <a:r>
+              <a:rPr sz="1150" b="0">
+                <a:solidFill>
+                  <a:srgbClr val="222833"/>
+                </a:solidFill>
+                <a:latin typeface="Malgun Gothic"/>
+              </a:rPr>
+              <a:t>설계서 작성·개정과 결정/미결과제</a:t>
+            </a:r>
+          </a:p>
+          <a:p>
+            <a:pPr>
+              <a:spcBef>
+                <a:spcPts val="400"/>
+              </a:spcBef>
+            </a:pPr>
+            <a:r>
+              <a:rPr sz="1150" b="0">
+                <a:solidFill>
+                  <a:srgbClr val="222833"/>
+                </a:solidFill>
+                <a:latin typeface="Malgun Gothic"/>
+              </a:rPr>
+              <a:t>이력 관리를 대화로 진행</a:t>
+            </a:r>
+          </a:p>
+        </p:txBody>
+      </p:sp>
+      <p:sp>
+        <p:nvSpPr>
+          <p:cNvPr id="7" name="Rounded Rectangle 6"/>
+          <p:cNvSpPr/>
+          <p:nvPr/>
+        </p:nvSpPr>
+        <p:spPr>
+          <a:xfrm>
+            <a:off x="640080" y="1783080"/>
+            <a:ext cx="118872" cy="1783080"/>
+          </a:xfrm>
+          <a:prstGeom prst="roundRect">
+            <a:avLst/>
+          </a:prstGeom>
+          <a:solidFill>
+            <a:srgbClr val="2E5BFF"/>
+          </a:solidFill>
+          <a:ln>
+            <a:noFill/>
+          </a:ln>
+          <a:effectLst/>
+        </p:spPr>
+        <p:style>
+          <a:lnRef idx="1">
+            <a:schemeClr val="accent1"/>
+          </a:lnRef>
+          <a:fillRef idx="3">
+            <a:schemeClr val="accent1"/>
+          </a:fillRef>
+          <a:effectRef idx="2">
+            <a:schemeClr val="accent1"/>
+          </a:effectRef>
+          <a:fontRef idx="minor">
+            <a:schemeClr val="lt1"/>
+          </a:fontRef>
+        </p:style>
+        <p:txBody>
+          <a:bodyPr rtlCol="0" anchor="ctr"/>
+          <a:lstStyle/>
+          <a:p>
+            <a:pPr algn="ctr"/>
+          </a:p>
+        </p:txBody>
+      </p:sp>
+      <p:sp>
+        <p:nvSpPr>
+          <p:cNvPr id="8" name="Rounded Rectangle 7"/>
+          <p:cNvSpPr/>
+          <p:nvPr/>
+        </p:nvSpPr>
+        <p:spPr>
+          <a:xfrm>
+            <a:off x="4370832" y="1783080"/>
+            <a:ext cx="3456432" cy="1783080"/>
+          </a:xfrm>
+          <a:prstGeom prst="roundRect">
+            <a:avLst/>
+          </a:prstGeom>
+          <a:solidFill>
+            <a:srgbClr val="FFFFFF"/>
+          </a:solidFill>
+          <a:ln w="12700">
+            <a:solidFill>
+              <a:srgbClr val="DDE3EF"/>
+            </a:solidFill>
+          </a:ln>
+          <a:effectLst/>
+        </p:spPr>
+        <p:style>
+          <a:lnRef idx="1">
+            <a:schemeClr val="accent1"/>
+          </a:lnRef>
+          <a:fillRef idx="3">
+            <a:schemeClr val="accent1"/>
+          </a:fillRef>
+          <a:effectRef idx="2">
+            <a:schemeClr val="accent1"/>
+          </a:effectRef>
+          <a:fontRef idx="minor">
+            <a:schemeClr val="lt1"/>
+          </a:fontRef>
+        </p:style>
+        <p:txBody>
+          <a:bodyPr rtlCol="0" anchor="ctr" wrap="square" lIns="274320" tIns="146304" rIns="164592" bIns="109728"/>
+          <a:lstStyle/>
+          <a:p>
+            <a:pPr algn="ctr">
+              <a:spcBef>
+                <a:spcPts val="0"/>
+              </a:spcBef>
+            </a:pPr>
+            <a:r>
+              <a:rPr sz="1500" b="1">
+                <a:solidFill>
+                  <a:srgbClr val="149E8A"/>
+                </a:solidFill>
+                <a:latin typeface="Malgun Gothic"/>
+              </a:rPr>
+              <a:t>②   </a:t>
+            </a:r>
+            <a:r>
+              <a:rPr sz="1500" b="1">
+                <a:solidFill>
+                  <a:srgbClr val="142A54"/>
+                </a:solidFill>
+                <a:latin typeface="Malgun Gothic"/>
+              </a:rPr>
+              <a:t>자료 분석 자동화</a:t>
+            </a:r>
+          </a:p>
+          <a:p>
+            <a:pPr>
+              <a:spcBef>
+                <a:spcPts val="400"/>
+              </a:spcBef>
+            </a:pPr>
+            <a:r>
+              <a:rPr sz="1150" b="0">
+                <a:solidFill>
+                  <a:srgbClr val="222833"/>
+                </a:solidFill>
+                <a:latin typeface="Malgun Gothic"/>
+              </a:rPr>
+              <a:t>권한 추적(STAUTHTRACE) 엑셀을</a:t>
+            </a:r>
+          </a:p>
+          <a:p>
+            <a:pPr>
+              <a:spcBef>
+                <a:spcPts val="400"/>
+              </a:spcBef>
+            </a:pPr>
+            <a:r>
+              <a:rPr sz="1150" b="0">
+                <a:solidFill>
+                  <a:srgbClr val="222833"/>
+                </a:solidFill>
+                <a:latin typeface="Malgun Gothic"/>
+              </a:rPr>
+              <a:t>직접 분석 → 필요 권한 자동 도출</a:t>
+            </a:r>
+          </a:p>
+        </p:txBody>
+      </p:sp>
+      <p:sp>
+        <p:nvSpPr>
+          <p:cNvPr id="9" name="Rounded Rectangle 8"/>
+          <p:cNvSpPr/>
+          <p:nvPr/>
+        </p:nvSpPr>
+        <p:spPr>
+          <a:xfrm>
+            <a:off x="4370832" y="1783080"/>
+            <a:ext cx="118872" cy="1783080"/>
+          </a:xfrm>
+          <a:prstGeom prst="roundRect">
+            <a:avLst/>
+          </a:prstGeom>
+          <a:solidFill>
+            <a:srgbClr val="149E8A"/>
+          </a:solidFill>
+          <a:ln>
+            <a:noFill/>
+          </a:ln>
+          <a:effectLst/>
+        </p:spPr>
+        <p:style>
+          <a:lnRef idx="1">
+            <a:schemeClr val="accent1"/>
+          </a:lnRef>
+          <a:fillRef idx="3">
+            <a:schemeClr val="accent1"/>
+          </a:fillRef>
+          <a:effectRef idx="2">
+            <a:schemeClr val="accent1"/>
+          </a:effectRef>
+          <a:fontRef idx="minor">
+            <a:schemeClr val="lt1"/>
+          </a:fontRef>
+        </p:style>
+        <p:txBody>
+          <a:bodyPr rtlCol="0" anchor="ctr"/>
+          <a:lstStyle/>
+          <a:p>
+            <a:pPr algn="ctr"/>
+          </a:p>
+        </p:txBody>
+      </p:sp>
+      <p:sp>
+        <p:nvSpPr>
+          <p:cNvPr id="10" name="Rounded Rectangle 9"/>
+          <p:cNvSpPr/>
+          <p:nvPr/>
+        </p:nvSpPr>
+        <p:spPr>
+          <a:xfrm>
+            <a:off x="8101584" y="1783080"/>
+            <a:ext cx="3456432" cy="1783080"/>
+          </a:xfrm>
+          <a:prstGeom prst="roundRect">
+            <a:avLst/>
+          </a:prstGeom>
+          <a:solidFill>
+            <a:srgbClr val="FFFFFF"/>
+          </a:solidFill>
+          <a:ln w="12700">
+            <a:solidFill>
+              <a:srgbClr val="DDE3EF"/>
+            </a:solidFill>
+          </a:ln>
+          <a:effectLst/>
+        </p:spPr>
+        <p:style>
+          <a:lnRef idx="1">
+            <a:schemeClr val="accent1"/>
+          </a:lnRef>
+          <a:fillRef idx="3">
+            <a:schemeClr val="accent1"/>
+          </a:fillRef>
+          <a:effectRef idx="2">
+            <a:schemeClr val="accent1"/>
+          </a:effectRef>
+          <a:fontRef idx="minor">
+            <a:schemeClr val="lt1"/>
+          </a:fontRef>
+        </p:style>
+        <p:txBody>
+          <a:bodyPr rtlCol="0" anchor="ctr" wrap="square" lIns="274320" tIns="146304" rIns="164592" bIns="109728"/>
+          <a:lstStyle/>
+          <a:p>
+            <a:pPr algn="ctr">
+              <a:spcBef>
+                <a:spcPts val="0"/>
+              </a:spcBef>
+            </a:pPr>
+            <a:r>
+              <a:rPr sz="1500" b="1">
+                <a:solidFill>
+                  <a:srgbClr val="E8A31C"/>
+                </a:solidFill>
+                <a:latin typeface="Malgun Gothic"/>
+              </a:rPr>
+              <a:t>③   </a:t>
+            </a:r>
+            <a:r>
+              <a:rPr sz="1500" b="1">
+                <a:solidFill>
+                  <a:srgbClr val="142A54"/>
+                </a:solidFill>
+                <a:latin typeface="Malgun Gothic"/>
+              </a:rPr>
+              <a:t>표준 기능 조사 자동화</a:t>
+            </a:r>
+          </a:p>
+          <a:p>
+            <a:pPr>
+              <a:spcBef>
+                <a:spcPts val="400"/>
+              </a:spcBef>
+            </a:pPr>
+            <a:r>
+              <a:rPr sz="1150" b="0">
+                <a:solidFill>
+                  <a:srgbClr val="222833"/>
+                </a:solidFill>
+                <a:latin typeface="Malgun Gothic"/>
+              </a:rPr>
+              <a:t>SAP 표준 기능·사용법을 즉시</a:t>
+            </a:r>
+          </a:p>
+          <a:p>
+            <a:pPr>
+              <a:spcBef>
+                <a:spcPts val="400"/>
+              </a:spcBef>
+            </a:pPr>
+            <a:r>
+              <a:rPr sz="1150" b="0">
+                <a:solidFill>
+                  <a:srgbClr val="222833"/>
+                </a:solidFill>
+                <a:latin typeface="Malgun Gothic"/>
+              </a:rPr>
+              <a:t>조사·확인(수작업 탐색 대체)</a:t>
+            </a:r>
+          </a:p>
+        </p:txBody>
+      </p:sp>
+      <p:sp>
+        <p:nvSpPr>
+          <p:cNvPr id="11" name="Rounded Rectangle 10"/>
+          <p:cNvSpPr/>
+          <p:nvPr/>
+        </p:nvSpPr>
+        <p:spPr>
+          <a:xfrm>
+            <a:off x="8101584" y="1783080"/>
+            <a:ext cx="118872" cy="1783080"/>
+          </a:xfrm>
+          <a:prstGeom prst="roundRect">
+            <a:avLst/>
+          </a:prstGeom>
+          <a:solidFill>
+            <a:srgbClr val="E8A31C"/>
+          </a:solidFill>
+          <a:ln>
+            <a:noFill/>
+          </a:ln>
+          <a:effectLst/>
+        </p:spPr>
+        <p:style>
+          <a:lnRef idx="1">
+            <a:schemeClr val="accent1"/>
+          </a:lnRef>
+          <a:fillRef idx="3">
+            <a:schemeClr val="accent1"/>
+          </a:fillRef>
+          <a:effectRef idx="2">
+            <a:schemeClr val="accent1"/>
+          </a:effectRef>
+          <a:fontRef idx="minor">
+            <a:schemeClr val="lt1"/>
+          </a:fontRef>
+        </p:style>
+        <p:txBody>
+          <a:bodyPr rtlCol="0" anchor="ctr"/>
+          <a:lstStyle/>
+          <a:p>
+            <a:pPr algn="ctr"/>
+          </a:p>
+        </p:txBody>
+      </p:sp>
+      <p:sp>
+        <p:nvSpPr>
+          <p:cNvPr id="12" name="Rounded Rectangle 11"/>
+          <p:cNvSpPr/>
+          <p:nvPr/>
+        </p:nvSpPr>
+        <p:spPr>
+          <a:xfrm>
+            <a:off x="640080" y="3822192"/>
+            <a:ext cx="3456432" cy="1783080"/>
+          </a:xfrm>
+          <a:prstGeom prst="roundRect">
+            <a:avLst/>
+          </a:prstGeom>
+          <a:solidFill>
+            <a:srgbClr val="FFFFFF"/>
+          </a:solidFill>
+          <a:ln w="12700">
+            <a:solidFill>
+              <a:srgbClr val="DDE3EF"/>
+            </a:solidFill>
+          </a:ln>
+          <a:effectLst/>
+        </p:spPr>
+        <p:style>
+          <a:lnRef idx="1">
+            <a:schemeClr val="accent1"/>
+          </a:lnRef>
+          <a:fillRef idx="3">
+            <a:schemeClr val="accent1"/>
+          </a:fillRef>
+          <a:effectRef idx="2">
+            <a:schemeClr val="accent1"/>
+          </a:effectRef>
+          <a:fontRef idx="minor">
+            <a:schemeClr val="lt1"/>
+          </a:fontRef>
+        </p:style>
+        <p:txBody>
+          <a:bodyPr rtlCol="0" anchor="ctr" wrap="square" lIns="274320" tIns="146304" rIns="164592" bIns="109728"/>
+          <a:lstStyle/>
+          <a:p>
+            <a:pPr algn="ctr">
+              <a:spcBef>
+                <a:spcPts val="0"/>
+              </a:spcBef>
+            </a:pPr>
+            <a:r>
+              <a:rPr sz="1500" b="1">
                 <a:solidFill>
                   <a:srgbClr val="2E5BFF"/>
                 </a:solidFill>
                 <a:latin typeface="Malgun Gothic"/>
               </a:rPr>
-              <a:t>▸ 자료 분석 자동화</a:t>
-            </a:r>
-          </a:p>
-          <a:p>
-            <a:pPr lvl="1">
-              <a:spcBef>
-                <a:spcPts val="200"/>
-              </a:spcBef>
-            </a:pPr>
-            <a:r>
-              <a:rPr sz="1400" b="0">
-                <a:solidFill>
-                  <a:srgbClr val="222222"/>
-                </a:solidFill>
-                <a:latin typeface="Malgun Gothic"/>
-              </a:rPr>
-              <a:t>권한 추적 결과(STAUTHTRACE 엑셀)를 직접 분석해 필요한 권한을 자동 도출.</a:t>
+              <a:t>④   </a:t>
+            </a:r>
+            <a:r>
+              <a:rPr sz="1500" b="1">
+                <a:solidFill>
+                  <a:srgbClr val="142A54"/>
+                </a:solidFill>
+                <a:latin typeface="Malgun Gothic"/>
+              </a:rPr>
+              <a:t>개발–검증 반복 루프</a:t>
             </a:r>
           </a:p>
           <a:p>
             <a:pPr>
               <a:spcBef>
-                <a:spcPts val="1000"/>
-              </a:spcBef>
-            </a:pPr>
-            <a:r>
-              <a:rPr sz="1700" b="1">
-                <a:solidFill>
-                  <a:srgbClr val="2E5BFF"/>
-                </a:solidFill>
-                <a:latin typeface="Malgun Gothic"/>
-              </a:rPr>
-              <a:t>▸ 표준 기능 조사 자동화</a:t>
-            </a:r>
-          </a:p>
-          <a:p>
-            <a:pPr lvl="1">
-              <a:spcBef>
-                <a:spcPts val="200"/>
-              </a:spcBef>
-            </a:pPr>
-            <a:r>
-              <a:rPr sz="1400" b="0">
-                <a:solidFill>
-                  <a:srgbClr val="222222"/>
-                </a:solidFill>
-                <a:latin typeface="Malgun Gothic"/>
-              </a:rPr>
-              <a:t>개발에 필요한 SAP 표준 기능/사용법을 즉시 조사·확인(수작업 문서 탐색 대체).</a:t>
+                <a:spcPts val="400"/>
+              </a:spcBef>
+            </a:pPr>
+            <a:r>
+              <a:rPr sz="1150" b="0">
+                <a:solidFill>
+                  <a:srgbClr val="222833"/>
+                </a:solidFill>
+                <a:latin typeface="Malgun Gothic"/>
+              </a:rPr>
+              <a:t>코드 생성 → 오류 진단 → 즉시</a:t>
             </a:r>
           </a:p>
           <a:p>
             <a:pPr>
               <a:spcBef>
-                <a:spcPts val="1000"/>
-              </a:spcBef>
-            </a:pPr>
-            <a:r>
-              <a:rPr sz="1700" b="1">
-                <a:solidFill>
-                  <a:srgbClr val="2E5BFF"/>
-                </a:solidFill>
-                <a:latin typeface="Malgun Gothic"/>
-              </a:rPr>
-              <a:t>▸ 개발-검증 반복 루프</a:t>
-            </a:r>
-          </a:p>
-          <a:p>
-            <a:pPr lvl="1">
-              <a:spcBef>
-                <a:spcPts val="200"/>
-              </a:spcBef>
-            </a:pPr>
-            <a:r>
-              <a:rPr sz="1400" b="0">
-                <a:solidFill>
-                  <a:srgbClr val="222222"/>
-                </a:solidFill>
-                <a:latin typeface="Malgun Gothic"/>
-              </a:rPr>
-              <a:t>코드 생성 → 오류 진단 → 즉시 수정을 빠르게 반복하여 완성도 향상.</a:t>
+                <a:spcPts val="400"/>
+              </a:spcBef>
+            </a:pPr>
+            <a:r>
+              <a:rPr sz="1150" b="0">
+                <a:solidFill>
+                  <a:srgbClr val="222833"/>
+                </a:solidFill>
+                <a:latin typeface="Malgun Gothic"/>
+              </a:rPr>
+              <a:t>수정을 빠르게 반복</a:t>
+            </a:r>
+          </a:p>
+        </p:txBody>
+      </p:sp>
+      <p:sp>
+        <p:nvSpPr>
+          <p:cNvPr id="13" name="Rounded Rectangle 12"/>
+          <p:cNvSpPr/>
+          <p:nvPr/>
+        </p:nvSpPr>
+        <p:spPr>
+          <a:xfrm>
+            <a:off x="640080" y="3822192"/>
+            <a:ext cx="118872" cy="1783080"/>
+          </a:xfrm>
+          <a:prstGeom prst="roundRect">
+            <a:avLst/>
+          </a:prstGeom>
+          <a:solidFill>
+            <a:srgbClr val="2E5BFF"/>
+          </a:solidFill>
+          <a:ln>
+            <a:noFill/>
+          </a:ln>
+          <a:effectLst/>
+        </p:spPr>
+        <p:style>
+          <a:lnRef idx="1">
+            <a:schemeClr val="accent1"/>
+          </a:lnRef>
+          <a:fillRef idx="3">
+            <a:schemeClr val="accent1"/>
+          </a:fillRef>
+          <a:effectRef idx="2">
+            <a:schemeClr val="accent1"/>
+          </a:effectRef>
+          <a:fontRef idx="minor">
+            <a:schemeClr val="lt1"/>
+          </a:fontRef>
+        </p:style>
+        <p:txBody>
+          <a:bodyPr rtlCol="0" anchor="ctr"/>
+          <a:lstStyle/>
+          <a:p>
+            <a:pPr algn="ctr"/>
+          </a:p>
+        </p:txBody>
+      </p:sp>
+      <p:sp>
+        <p:nvSpPr>
+          <p:cNvPr id="14" name="Rounded Rectangle 13"/>
+          <p:cNvSpPr/>
+          <p:nvPr/>
+        </p:nvSpPr>
+        <p:spPr>
+          <a:xfrm>
+            <a:off x="4370832" y="3822192"/>
+            <a:ext cx="3456432" cy="1783080"/>
+          </a:xfrm>
+          <a:prstGeom prst="roundRect">
+            <a:avLst/>
+          </a:prstGeom>
+          <a:solidFill>
+            <a:srgbClr val="FFFFFF"/>
+          </a:solidFill>
+          <a:ln w="12700">
+            <a:solidFill>
+              <a:srgbClr val="DDE3EF"/>
+            </a:solidFill>
+          </a:ln>
+          <a:effectLst/>
+        </p:spPr>
+        <p:style>
+          <a:lnRef idx="1">
+            <a:schemeClr val="accent1"/>
+          </a:lnRef>
+          <a:fillRef idx="3">
+            <a:schemeClr val="accent1"/>
+          </a:fillRef>
+          <a:effectRef idx="2">
+            <a:schemeClr val="accent1"/>
+          </a:effectRef>
+          <a:fontRef idx="minor">
+            <a:schemeClr val="lt1"/>
+          </a:fontRef>
+        </p:style>
+        <p:txBody>
+          <a:bodyPr rtlCol="0" anchor="ctr" wrap="square" lIns="274320" tIns="146304" rIns="164592" bIns="109728"/>
+          <a:lstStyle/>
+          <a:p>
+            <a:pPr algn="ctr">
+              <a:spcBef>
+                <a:spcPts val="0"/>
+              </a:spcBef>
+            </a:pPr>
+            <a:r>
+              <a:rPr sz="1500" b="1">
+                <a:solidFill>
+                  <a:srgbClr val="149E8A"/>
+                </a:solidFill>
+                <a:latin typeface="Malgun Gothic"/>
+              </a:rPr>
+              <a:t>⑤   </a:t>
+            </a:r>
+            <a:r>
+              <a:rPr sz="1500" b="1">
+                <a:solidFill>
+                  <a:srgbClr val="142A54"/>
+                </a:solidFill>
+                <a:latin typeface="Malgun Gothic"/>
+              </a:rPr>
+              <a:t>표준·규칙 자동 준수</a:t>
             </a:r>
           </a:p>
           <a:p>
             <a:pPr>
               <a:spcBef>
-                <a:spcPts val="1000"/>
-              </a:spcBef>
-            </a:pPr>
-            <a:r>
-              <a:rPr sz="1700" b="1">
-                <a:solidFill>
-                  <a:srgbClr val="2E5BFF"/>
-                </a:solidFill>
-                <a:latin typeface="Malgun Gothic"/>
-              </a:rPr>
-              <a:t>▸ 표준·규칙 자동 준수</a:t>
-            </a:r>
-          </a:p>
-          <a:p>
-            <a:pPr lvl="1">
-              <a:spcBef>
-                <a:spcPts val="200"/>
-              </a:spcBef>
-            </a:pPr>
-            <a:r>
-              <a:rPr sz="1400" b="0">
-                <a:solidFill>
-                  <a:srgbClr val="222222"/>
-                </a:solidFill>
-                <a:latin typeface="Malgun Gothic"/>
-              </a:rPr>
-              <a:t>“읽기 전용”·명명규칙 등 사내 개발 표준을 규칙으로 상시 자동 적용.</a:t>
+                <a:spcPts val="400"/>
+              </a:spcBef>
+            </a:pPr>
+            <a:r>
+              <a:rPr sz="1150" b="0">
+                <a:solidFill>
+                  <a:srgbClr val="222833"/>
+                </a:solidFill>
+                <a:latin typeface="Malgun Gothic"/>
+              </a:rPr>
+              <a:t>“읽기 전용”·명명규칙 등 사내</a:t>
+            </a:r>
+          </a:p>
+          <a:p>
+            <a:pPr>
+              <a:spcBef>
+                <a:spcPts val="400"/>
+              </a:spcBef>
+            </a:pPr>
+            <a:r>
+              <a:rPr sz="1150" b="0">
+                <a:solidFill>
+                  <a:srgbClr val="222833"/>
+                </a:solidFill>
+                <a:latin typeface="Malgun Gothic"/>
+              </a:rPr>
+              <a:t>표준을 규칙으로 상시 적용</a:t>
+            </a:r>
+          </a:p>
+        </p:txBody>
+      </p:sp>
+      <p:sp>
+        <p:nvSpPr>
+          <p:cNvPr id="15" name="Rounded Rectangle 14"/>
+          <p:cNvSpPr/>
+          <p:nvPr/>
+        </p:nvSpPr>
+        <p:spPr>
+          <a:xfrm>
+            <a:off x="4370832" y="3822192"/>
+            <a:ext cx="118872" cy="1783080"/>
+          </a:xfrm>
+          <a:prstGeom prst="roundRect">
+            <a:avLst/>
+          </a:prstGeom>
+          <a:solidFill>
+            <a:srgbClr val="149E8A"/>
+          </a:solidFill>
+          <a:ln>
+            <a:noFill/>
+          </a:ln>
+          <a:effectLst/>
+        </p:spPr>
+        <p:style>
+          <a:lnRef idx="1">
+            <a:schemeClr val="accent1"/>
+          </a:lnRef>
+          <a:fillRef idx="3">
+            <a:schemeClr val="accent1"/>
+          </a:fillRef>
+          <a:effectRef idx="2">
+            <a:schemeClr val="accent1"/>
+          </a:effectRef>
+          <a:fontRef idx="minor">
+            <a:schemeClr val="lt1"/>
+          </a:fontRef>
+        </p:style>
+        <p:txBody>
+          <a:bodyPr rtlCol="0" anchor="ctr"/>
+          <a:lstStyle/>
+          <a:p>
+            <a:pPr algn="ctr"/>
+          </a:p>
+        </p:txBody>
+      </p:sp>
+      <p:sp>
+        <p:nvSpPr>
+          <p:cNvPr id="16" name="Rounded Rectangle 15"/>
+          <p:cNvSpPr/>
+          <p:nvPr/>
+        </p:nvSpPr>
+        <p:spPr>
+          <a:xfrm>
+            <a:off x="8101584" y="3822192"/>
+            <a:ext cx="3456432" cy="1783080"/>
+          </a:xfrm>
+          <a:prstGeom prst="roundRect">
+            <a:avLst/>
+          </a:prstGeom>
+          <a:solidFill>
+            <a:srgbClr val="142A54"/>
+          </a:solidFill>
+          <a:ln>
+            <a:noFill/>
+          </a:ln>
+          <a:effectLst/>
+        </p:spPr>
+        <p:style>
+          <a:lnRef idx="1">
+            <a:schemeClr val="accent1"/>
+          </a:lnRef>
+          <a:fillRef idx="3">
+            <a:schemeClr val="accent1"/>
+          </a:fillRef>
+          <a:effectRef idx="2">
+            <a:schemeClr val="accent1"/>
+          </a:effectRef>
+          <a:fontRef idx="minor">
+            <a:schemeClr val="lt1"/>
+          </a:fontRef>
+        </p:style>
+        <p:txBody>
+          <a:bodyPr rtlCol="0" anchor="ctr" lIns="256032" wrap="square"/>
+          <a:lstStyle/>
+          <a:p>
+            <a:pPr algn="ctr">
+              <a:spcBef>
+                <a:spcPts val="0"/>
+              </a:spcBef>
+            </a:pPr>
+            <a:r>
+              <a:rPr sz="1350" b="1">
+                <a:solidFill>
+                  <a:srgbClr val="FFFFFF"/>
+                </a:solidFill>
+                <a:latin typeface="Malgun Gothic"/>
+              </a:rPr>
+              <a:t>AI가 “조사–초안–수정”을</a:t>
+            </a:r>
+          </a:p>
+          <a:p>
+            <a:pPr>
+              <a:spcBef>
+                <a:spcPts val="400"/>
+              </a:spcBef>
+            </a:pPr>
+            <a:r>
+              <a:rPr sz="1350" b="1">
+                <a:solidFill>
+                  <a:srgbClr val="E8A31C"/>
+                </a:solidFill>
+                <a:latin typeface="Malgun Gothic"/>
+              </a:rPr>
+              <a:t>대신하고, 개발자는 검토·의사결정에 집중</a:t>
             </a:r>
           </a:p>
         </p:txBody>
@@ -3733,17 +5208,18 @@
         <p:spPr>
           <a:xfrm>
             <a:off x="0" y="0"/>
-            <a:ext cx="12191695" cy="868680"/>
+            <a:ext cx="12191695" cy="6858000"/>
           </a:xfrm>
           <a:prstGeom prst="rect">
             <a:avLst/>
           </a:prstGeom>
           <a:solidFill>
-            <a:srgbClr val="1F3564"/>
+            <a:srgbClr val="F6F8FC"/>
           </a:solidFill>
           <a:ln>
             <a:noFill/>
           </a:ln>
+          <a:effectLst/>
         </p:spPr>
         <p:style>
           <a:lnRef idx="1">
@@ -3775,8 +5251,8 @@
         </p:nvSpPr>
         <p:spPr>
           <a:xfrm>
-            <a:off x="548640" y="146304"/>
-            <a:ext cx="11064240" cy="594360"/>
+            <a:off x="640080" y="411480"/>
+            <a:ext cx="10972800" cy="365760"/>
           </a:xfrm>
           <a:prstGeom prst="rect">
             <a:avLst/>
@@ -3784,19 +5260,24 @@
           <a:noFill/>
         </p:spPr>
         <p:txBody>
-          <a:bodyPr wrap="none">
+          <a:bodyPr wrap="square">
             <a:spAutoFit/>
           </a:bodyPr>
           <a:lstStyle/>
           <a:p>
-            <a:r>
-              <a:rPr sz="2400" b="1">
-                <a:solidFill>
-                  <a:srgbClr val="FFFFFF"/>
-                </a:solidFill>
-                <a:latin typeface="Malgun Gothic"/>
-              </a:rPr>
-              <a:t>3. 효율성 · 성과</a:t>
+            <a:pPr>
+              <a:spcBef>
+                <a:spcPts val="0"/>
+              </a:spcBef>
+            </a:pPr>
+            <a:r>
+              <a:rPr sz="1300" b="1">
+                <a:solidFill>
+                  <a:srgbClr val="2E5BFF"/>
+                </a:solidFill>
+                <a:latin typeface="Malgun Gothic"/>
+              </a:rPr>
+              <a:t>03  EFFICIENCY &amp; OUTCOME</a:t>
             </a:r>
           </a:p>
         </p:txBody>
@@ -3809,8 +5290,8 @@
         </p:nvSpPr>
         <p:spPr>
           <a:xfrm>
-            <a:off x="640080" y="1097280"/>
-            <a:ext cx="10881360" cy="5486400"/>
+            <a:off x="640080" y="731520"/>
+            <a:ext cx="10972800" cy="640080"/>
           </a:xfrm>
           <a:prstGeom prst="rect">
             <a:avLst/>
@@ -3825,161 +5306,624 @@
           <a:p>
             <a:pPr>
               <a:spcBef>
-                <a:spcPts val="1000"/>
-              </a:spcBef>
-            </a:pPr>
-            <a:r>
-              <a:rPr sz="1700" b="1">
+                <a:spcPts val="0"/>
+              </a:spcBef>
+            </a:pPr>
+            <a:r>
+              <a:rPr sz="2600" b="1">
+                <a:solidFill>
+                  <a:srgbClr val="142A54"/>
+                </a:solidFill>
+                <a:latin typeface="Malgun Gothic"/>
+              </a:rPr>
+              <a:t>효율성 · 성과 (정성 위주 · 추정)</a:t>
+            </a:r>
+          </a:p>
+        </p:txBody>
+      </p:sp>
+      <p:sp>
+        <p:nvSpPr>
+          <p:cNvPr id="5" name="Rectangle 4"/>
+          <p:cNvSpPr/>
+          <p:nvPr/>
+        </p:nvSpPr>
+        <p:spPr>
+          <a:xfrm>
+            <a:off x="658368" y="1371600"/>
+            <a:ext cx="1371600" cy="50800"/>
+          </a:xfrm>
+          <a:prstGeom prst="rect">
+            <a:avLst/>
+          </a:prstGeom>
+          <a:solidFill>
+            <a:srgbClr val="E8A31C"/>
+          </a:solidFill>
+          <a:ln>
+            <a:noFill/>
+          </a:ln>
+          <a:effectLst/>
+        </p:spPr>
+        <p:style>
+          <a:lnRef idx="1">
+            <a:schemeClr val="accent1"/>
+          </a:lnRef>
+          <a:fillRef idx="3">
+            <a:schemeClr val="accent1"/>
+          </a:fillRef>
+          <a:effectRef idx="2">
+            <a:schemeClr val="accent1"/>
+          </a:effectRef>
+          <a:fontRef idx="minor">
+            <a:schemeClr val="lt1"/>
+          </a:fontRef>
+        </p:style>
+        <p:txBody>
+          <a:bodyPr rtlCol="0" anchor="ctr"/>
+          <a:lstStyle/>
+          <a:p>
+            <a:pPr algn="ctr"/>
+          </a:p>
+        </p:txBody>
+      </p:sp>
+      <p:sp>
+        <p:nvSpPr>
+          <p:cNvPr id="6" name="Rounded Rectangle 5"/>
+          <p:cNvSpPr/>
+          <p:nvPr/>
+        </p:nvSpPr>
+        <p:spPr>
+          <a:xfrm>
+            <a:off x="640080" y="1783080"/>
+            <a:ext cx="3456432" cy="2148840"/>
+          </a:xfrm>
+          <a:prstGeom prst="roundRect">
+            <a:avLst/>
+          </a:prstGeom>
+          <a:solidFill>
+            <a:srgbClr val="FFFFFF"/>
+          </a:solidFill>
+          <a:ln w="12700">
+            <a:solidFill>
+              <a:srgbClr val="DDE3EF"/>
+            </a:solidFill>
+          </a:ln>
+          <a:effectLst/>
+        </p:spPr>
+        <p:style>
+          <a:lnRef idx="1">
+            <a:schemeClr val="accent1"/>
+          </a:lnRef>
+          <a:fillRef idx="3">
+            <a:schemeClr val="accent1"/>
+          </a:fillRef>
+          <a:effectRef idx="2">
+            <a:schemeClr val="accent1"/>
+          </a:effectRef>
+          <a:fontRef idx="minor">
+            <a:schemeClr val="lt1"/>
+          </a:fontRef>
+        </p:style>
+        <p:txBody>
+          <a:bodyPr rtlCol="0" anchor="ctr" lIns="237744" tIns="777240" wrap="square"/>
+          <a:lstStyle/>
+          <a:p>
+            <a:pPr algn="ctr">
+              <a:spcBef>
+                <a:spcPts val="800"/>
+              </a:spcBef>
+            </a:pPr>
+            <a:r>
+              <a:rPr sz="1200" b="0">
+                <a:solidFill>
+                  <a:srgbClr val="222833"/>
+                </a:solidFill>
+                <a:latin typeface="Malgun Gothic"/>
+              </a:rPr>
+              <a:t>•  설계–구현–검토를 한 흐름으로 진행(맥락 유지)</a:t>
+            </a:r>
+          </a:p>
+          <a:p>
+            <a:pPr>
+              <a:spcBef>
+                <a:spcPts val="800"/>
+              </a:spcBef>
+            </a:pPr>
+            <a:r>
+              <a:rPr sz="1200" b="0">
+                <a:solidFill>
+                  <a:srgbClr val="222833"/>
+                </a:solidFill>
+                <a:latin typeface="Malgun Gothic"/>
+              </a:rPr>
+              <a:t>•  요구 변경 즉시 반영 → 완성도 조기 확보</a:t>
+            </a:r>
+          </a:p>
+        </p:txBody>
+      </p:sp>
+      <p:sp>
+        <p:nvSpPr>
+          <p:cNvPr id="7" name="Rounded Rectangle 6"/>
+          <p:cNvSpPr/>
+          <p:nvPr/>
+        </p:nvSpPr>
+        <p:spPr>
+          <a:xfrm>
+            <a:off x="640080" y="1783080"/>
+            <a:ext cx="3456432" cy="566928"/>
+          </a:xfrm>
+          <a:prstGeom prst="roundRect">
+            <a:avLst/>
+          </a:prstGeom>
+          <a:solidFill>
+            <a:srgbClr val="2E5BFF"/>
+          </a:solidFill>
+          <a:ln>
+            <a:noFill/>
+          </a:ln>
+          <a:effectLst/>
+        </p:spPr>
+        <p:style>
+          <a:lnRef idx="1">
+            <a:schemeClr val="accent1"/>
+          </a:lnRef>
+          <a:fillRef idx="3">
+            <a:schemeClr val="accent1"/>
+          </a:fillRef>
+          <a:effectRef idx="2">
+            <a:schemeClr val="accent1"/>
+          </a:effectRef>
+          <a:fontRef idx="minor">
+            <a:schemeClr val="lt1"/>
+          </a:fontRef>
+        </p:style>
+        <p:txBody>
+          <a:bodyPr rtlCol="0" anchor="ctr"/>
+          <a:lstStyle/>
+          <a:p>
+            <a:pPr algn="ctr"/>
+          </a:p>
+        </p:txBody>
+      </p:sp>
+      <p:sp>
+        <p:nvSpPr>
+          <p:cNvPr id="8" name="TextBox 7"/>
+          <p:cNvSpPr txBox="1"/>
+          <p:nvPr/>
+        </p:nvSpPr>
+        <p:spPr>
+          <a:xfrm>
+            <a:off x="640080" y="1783080"/>
+            <a:ext cx="3456432" cy="566928"/>
+          </a:xfrm>
+          <a:prstGeom prst="rect">
+            <a:avLst/>
+          </a:prstGeom>
+          <a:noFill/>
+        </p:spPr>
+        <p:txBody>
+          <a:bodyPr wrap="square" anchor="ctr">
+            <a:spAutoFit/>
+          </a:bodyPr>
+          <a:lstStyle/>
+          <a:p>
+            <a:pPr algn="ctr">
+              <a:spcBef>
+                <a:spcPts val="0"/>
+              </a:spcBef>
+            </a:pPr>
+            <a:r>
+              <a:rPr sz="1450" b="1">
+                <a:solidFill>
+                  <a:srgbClr val="FFFFFF"/>
+                </a:solidFill>
+                <a:latin typeface="Malgun Gothic"/>
+              </a:rPr>
+              <a:t>개발 생산성</a:t>
+            </a:r>
+          </a:p>
+        </p:txBody>
+      </p:sp>
+      <p:sp>
+        <p:nvSpPr>
+          <p:cNvPr id="9" name="Rounded Rectangle 8"/>
+          <p:cNvSpPr/>
+          <p:nvPr/>
+        </p:nvSpPr>
+        <p:spPr>
+          <a:xfrm>
+            <a:off x="4370832" y="1783080"/>
+            <a:ext cx="3456432" cy="2148840"/>
+          </a:xfrm>
+          <a:prstGeom prst="roundRect">
+            <a:avLst/>
+          </a:prstGeom>
+          <a:solidFill>
+            <a:srgbClr val="FFFFFF"/>
+          </a:solidFill>
+          <a:ln w="12700">
+            <a:solidFill>
+              <a:srgbClr val="DDE3EF"/>
+            </a:solidFill>
+          </a:ln>
+          <a:effectLst/>
+        </p:spPr>
+        <p:style>
+          <a:lnRef idx="1">
+            <a:schemeClr val="accent1"/>
+          </a:lnRef>
+          <a:fillRef idx="3">
+            <a:schemeClr val="accent1"/>
+          </a:fillRef>
+          <a:effectRef idx="2">
+            <a:schemeClr val="accent1"/>
+          </a:effectRef>
+          <a:fontRef idx="minor">
+            <a:schemeClr val="lt1"/>
+          </a:fontRef>
+        </p:style>
+        <p:txBody>
+          <a:bodyPr rtlCol="0" anchor="ctr" lIns="237744" tIns="777240" wrap="square"/>
+          <a:lstStyle/>
+          <a:p>
+            <a:pPr algn="ctr">
+              <a:spcBef>
+                <a:spcPts val="800"/>
+              </a:spcBef>
+            </a:pPr>
+            <a:r>
+              <a:rPr sz="1200" b="0">
+                <a:solidFill>
+                  <a:srgbClr val="222833"/>
+                </a:solidFill>
+                <a:latin typeface="Malgun Gothic"/>
+              </a:rPr>
+              <a:t>•  표준 기능/사용법 조사를 대화로 즉시 해결</a:t>
+            </a:r>
+          </a:p>
+          <a:p>
+            <a:pPr>
+              <a:spcBef>
+                <a:spcPts val="800"/>
+              </a:spcBef>
+            </a:pPr>
+            <a:r>
+              <a:rPr sz="1200" b="0">
+                <a:solidFill>
+                  <a:srgbClr val="222833"/>
+                </a:solidFill>
+                <a:latin typeface="Malgun Gothic"/>
+              </a:rPr>
+              <a:t>•  문서 탐색 시간 절감</a:t>
+            </a:r>
+          </a:p>
+        </p:txBody>
+      </p:sp>
+      <p:sp>
+        <p:nvSpPr>
+          <p:cNvPr id="10" name="Rounded Rectangle 9"/>
+          <p:cNvSpPr/>
+          <p:nvPr/>
+        </p:nvSpPr>
+        <p:spPr>
+          <a:xfrm>
+            <a:off x="4370832" y="1783080"/>
+            <a:ext cx="3456432" cy="566928"/>
+          </a:xfrm>
+          <a:prstGeom prst="roundRect">
+            <a:avLst/>
+          </a:prstGeom>
+          <a:solidFill>
+            <a:srgbClr val="149E8A"/>
+          </a:solidFill>
+          <a:ln>
+            <a:noFill/>
+          </a:ln>
+          <a:effectLst/>
+        </p:spPr>
+        <p:style>
+          <a:lnRef idx="1">
+            <a:schemeClr val="accent1"/>
+          </a:lnRef>
+          <a:fillRef idx="3">
+            <a:schemeClr val="accent1"/>
+          </a:fillRef>
+          <a:effectRef idx="2">
+            <a:schemeClr val="accent1"/>
+          </a:effectRef>
+          <a:fontRef idx="minor">
+            <a:schemeClr val="lt1"/>
+          </a:fontRef>
+        </p:style>
+        <p:txBody>
+          <a:bodyPr rtlCol="0" anchor="ctr"/>
+          <a:lstStyle/>
+          <a:p>
+            <a:pPr algn="ctr"/>
+          </a:p>
+        </p:txBody>
+      </p:sp>
+      <p:sp>
+        <p:nvSpPr>
+          <p:cNvPr id="11" name="TextBox 10"/>
+          <p:cNvSpPr txBox="1"/>
+          <p:nvPr/>
+        </p:nvSpPr>
+        <p:spPr>
+          <a:xfrm>
+            <a:off x="4370832" y="1783080"/>
+            <a:ext cx="3456432" cy="566928"/>
+          </a:xfrm>
+          <a:prstGeom prst="rect">
+            <a:avLst/>
+          </a:prstGeom>
+          <a:noFill/>
+        </p:spPr>
+        <p:txBody>
+          <a:bodyPr wrap="square" anchor="ctr">
+            <a:spAutoFit/>
+          </a:bodyPr>
+          <a:lstStyle/>
+          <a:p>
+            <a:pPr algn="ctr">
+              <a:spcBef>
+                <a:spcPts val="0"/>
+              </a:spcBef>
+            </a:pPr>
+            <a:r>
+              <a:rPr sz="1450" b="1">
+                <a:solidFill>
+                  <a:srgbClr val="FFFFFF"/>
+                </a:solidFill>
+                <a:latin typeface="Malgun Gothic"/>
+              </a:rPr>
+              <a:t>리서치 부담 감소</a:t>
+            </a:r>
+          </a:p>
+        </p:txBody>
+      </p:sp>
+      <p:sp>
+        <p:nvSpPr>
+          <p:cNvPr id="12" name="Rounded Rectangle 11"/>
+          <p:cNvSpPr/>
+          <p:nvPr/>
+        </p:nvSpPr>
+        <p:spPr>
+          <a:xfrm>
+            <a:off x="8101584" y="1783080"/>
+            <a:ext cx="3456432" cy="2148840"/>
+          </a:xfrm>
+          <a:prstGeom prst="roundRect">
+            <a:avLst/>
+          </a:prstGeom>
+          <a:solidFill>
+            <a:srgbClr val="FFFFFF"/>
+          </a:solidFill>
+          <a:ln w="12700">
+            <a:solidFill>
+              <a:srgbClr val="DDE3EF"/>
+            </a:solidFill>
+          </a:ln>
+          <a:effectLst/>
+        </p:spPr>
+        <p:style>
+          <a:lnRef idx="1">
+            <a:schemeClr val="accent1"/>
+          </a:lnRef>
+          <a:fillRef idx="3">
+            <a:schemeClr val="accent1"/>
+          </a:fillRef>
+          <a:effectRef idx="2">
+            <a:schemeClr val="accent1"/>
+          </a:effectRef>
+          <a:fontRef idx="minor">
+            <a:schemeClr val="lt1"/>
+          </a:fontRef>
+        </p:style>
+        <p:txBody>
+          <a:bodyPr rtlCol="0" anchor="ctr" lIns="237744" tIns="777240" wrap="square"/>
+          <a:lstStyle/>
+          <a:p>
+            <a:pPr algn="ctr">
+              <a:spcBef>
+                <a:spcPts val="800"/>
+              </a:spcBef>
+            </a:pPr>
+            <a:r>
+              <a:rPr sz="1200" b="0">
+                <a:solidFill>
+                  <a:srgbClr val="222833"/>
+                </a:solidFill>
+                <a:latin typeface="Malgun Gothic"/>
+              </a:rPr>
+              <a:t>•  사내 표준의 일관 적용</a:t>
+            </a:r>
+          </a:p>
+          <a:p>
+            <a:pPr>
+              <a:spcBef>
+                <a:spcPts val="800"/>
+              </a:spcBef>
+            </a:pPr>
+            <a:r>
+              <a:rPr sz="1200" b="0">
+                <a:solidFill>
+                  <a:srgbClr val="222833"/>
+                </a:solidFill>
+                <a:latin typeface="Malgun Gothic"/>
+              </a:rPr>
+              <a:t>•  휴먼 에러 · 재작업 감소</a:t>
+            </a:r>
+          </a:p>
+        </p:txBody>
+      </p:sp>
+      <p:sp>
+        <p:nvSpPr>
+          <p:cNvPr id="13" name="Rounded Rectangle 12"/>
+          <p:cNvSpPr/>
+          <p:nvPr/>
+        </p:nvSpPr>
+        <p:spPr>
+          <a:xfrm>
+            <a:off x="8101584" y="1783080"/>
+            <a:ext cx="3456432" cy="566928"/>
+          </a:xfrm>
+          <a:prstGeom prst="roundRect">
+            <a:avLst/>
+          </a:prstGeom>
+          <a:solidFill>
+            <a:srgbClr val="E8A31C"/>
+          </a:solidFill>
+          <a:ln>
+            <a:noFill/>
+          </a:ln>
+          <a:effectLst/>
+        </p:spPr>
+        <p:style>
+          <a:lnRef idx="1">
+            <a:schemeClr val="accent1"/>
+          </a:lnRef>
+          <a:fillRef idx="3">
+            <a:schemeClr val="accent1"/>
+          </a:fillRef>
+          <a:effectRef idx="2">
+            <a:schemeClr val="accent1"/>
+          </a:effectRef>
+          <a:fontRef idx="minor">
+            <a:schemeClr val="lt1"/>
+          </a:fontRef>
+        </p:style>
+        <p:txBody>
+          <a:bodyPr rtlCol="0" anchor="ctr"/>
+          <a:lstStyle/>
+          <a:p>
+            <a:pPr algn="ctr"/>
+          </a:p>
+        </p:txBody>
+      </p:sp>
+      <p:sp>
+        <p:nvSpPr>
+          <p:cNvPr id="14" name="TextBox 13"/>
+          <p:cNvSpPr txBox="1"/>
+          <p:nvPr/>
+        </p:nvSpPr>
+        <p:spPr>
+          <a:xfrm>
+            <a:off x="8101584" y="1783080"/>
+            <a:ext cx="3456432" cy="566928"/>
+          </a:xfrm>
+          <a:prstGeom prst="rect">
+            <a:avLst/>
+          </a:prstGeom>
+          <a:noFill/>
+        </p:spPr>
+        <p:txBody>
+          <a:bodyPr wrap="square" anchor="ctr">
+            <a:spAutoFit/>
+          </a:bodyPr>
+          <a:lstStyle/>
+          <a:p>
+            <a:pPr algn="ctr">
+              <a:spcBef>
+                <a:spcPts val="0"/>
+              </a:spcBef>
+            </a:pPr>
+            <a:r>
+              <a:rPr sz="1450" b="1">
+                <a:solidFill>
+                  <a:srgbClr val="FFFFFF"/>
+                </a:solidFill>
+                <a:latin typeface="Malgun Gothic"/>
+              </a:rPr>
+              <a:t>품질 · 표준 준수</a:t>
+            </a:r>
+          </a:p>
+        </p:txBody>
+      </p:sp>
+      <p:sp>
+        <p:nvSpPr>
+          <p:cNvPr id="15" name="Rounded Rectangle 14"/>
+          <p:cNvSpPr/>
+          <p:nvPr/>
+        </p:nvSpPr>
+        <p:spPr>
+          <a:xfrm>
+            <a:off x="640080" y="4206240"/>
+            <a:ext cx="10908792" cy="1554480"/>
+          </a:xfrm>
+          <a:prstGeom prst="roundRect">
+            <a:avLst/>
+          </a:prstGeom>
+          <a:solidFill>
+            <a:srgbClr val="EAF0FF"/>
+          </a:solidFill>
+          <a:ln>
+            <a:noFill/>
+          </a:ln>
+          <a:effectLst/>
+        </p:spPr>
+        <p:style>
+          <a:lnRef idx="1">
+            <a:schemeClr val="accent1"/>
+          </a:lnRef>
+          <a:fillRef idx="3">
+            <a:schemeClr val="accent1"/>
+          </a:fillRef>
+          <a:effectRef idx="2">
+            <a:schemeClr val="accent1"/>
+          </a:effectRef>
+          <a:fontRef idx="minor">
+            <a:schemeClr val="lt1"/>
+          </a:fontRef>
+        </p:style>
+        <p:txBody>
+          <a:bodyPr rtlCol="0" anchor="ctr" lIns="320040" tIns="182880" wrap="square"/>
+          <a:lstStyle/>
+          <a:p>
+            <a:pPr algn="ctr">
+              <a:spcBef>
+                <a:spcPts val="0"/>
+              </a:spcBef>
+            </a:pPr>
+            <a:r>
+              <a:rPr sz="1400" b="1">
                 <a:solidFill>
                   <a:srgbClr val="2E5BFF"/>
                 </a:solidFill>
                 <a:latin typeface="Malgun Gothic"/>
               </a:rPr>
-              <a:t>▸ 개발 생산성 (정성)</a:t>
-            </a:r>
-          </a:p>
-          <a:p>
-            <a:pPr lvl="1">
-              <a:spcBef>
-                <a:spcPts val="200"/>
-              </a:spcBef>
-            </a:pPr>
-            <a:r>
-              <a:rPr sz="1400" b="0">
-                <a:solidFill>
-                  <a:srgbClr val="222222"/>
-                </a:solidFill>
-                <a:latin typeface="Malgun Gothic"/>
-              </a:rPr>
-              <a:t>설계–구현–검토를 하나의 흐름으로 진행(맥락 유지) → 진행 속도 향상.</a:t>
-            </a:r>
-          </a:p>
-          <a:p>
-            <a:pPr lvl="1">
-              <a:spcBef>
-                <a:spcPts val="200"/>
-              </a:spcBef>
-            </a:pPr>
-            <a:r>
-              <a:rPr sz="1400" b="0">
-                <a:solidFill>
-                  <a:srgbClr val="222222"/>
-                </a:solidFill>
-                <a:latin typeface="Malgun Gothic"/>
-              </a:rPr>
-              <a:t>반복 개선(요구 변경 즉시 반영) 회수 증가로 완성도 조기 확보.</a:t>
+              <a:t>효과 규모 (추정)</a:t>
             </a:r>
           </a:p>
           <a:p>
             <a:pPr>
               <a:spcBef>
-                <a:spcPts val="1000"/>
-              </a:spcBef>
-            </a:pPr>
-            <a:r>
-              <a:rPr sz="1700" b="1">
-                <a:solidFill>
-                  <a:srgbClr val="2E5BFF"/>
-                </a:solidFill>
-                <a:latin typeface="Malgun Gothic"/>
-              </a:rPr>
-              <a:t>▸ 리서치 부담 감소 (정성)</a:t>
-            </a:r>
-          </a:p>
-          <a:p>
-            <a:pPr lvl="1">
-              <a:spcBef>
-                <a:spcPts val="200"/>
-              </a:spcBef>
-            </a:pPr>
-            <a:r>
-              <a:rPr sz="1400" b="0">
-                <a:solidFill>
-                  <a:srgbClr val="222222"/>
-                </a:solidFill>
-                <a:latin typeface="Malgun Gothic"/>
-              </a:rPr>
-              <a:t>표준 기능/사용법 조사를 대화로 즉시 해결 → 탐색 시간 절감.</a:t>
+                <a:spcPts val="600"/>
+              </a:spcBef>
+            </a:pPr>
+            <a:r>
+              <a:rPr sz="1300" b="0">
+                <a:solidFill>
+                  <a:srgbClr val="222833"/>
+                </a:solidFill>
+                <a:latin typeface="Malgun Gothic"/>
+              </a:rPr>
+              <a:t>설계 문서화 · 표준 API 조사 · 오류 수정 사이클 시간이 수작업 대비 크게 단축된 것으로 추정됩니다.</a:t>
             </a:r>
           </a:p>
           <a:p>
             <a:pPr>
               <a:spcBef>
-                <a:spcPts val="1000"/>
-              </a:spcBef>
-            </a:pPr>
-            <a:r>
-              <a:rPr sz="1700" b="1">
-                <a:solidFill>
-                  <a:srgbClr val="2E5BFF"/>
-                </a:solidFill>
-                <a:latin typeface="Malgun Gothic"/>
-              </a:rPr>
-              <a:t>▸ 품질·표준 준수 (정성)</a:t>
-            </a:r>
-          </a:p>
-          <a:p>
-            <a:pPr lvl="1">
-              <a:spcBef>
-                <a:spcPts val="200"/>
-              </a:spcBef>
-            </a:pPr>
-            <a:r>
-              <a:rPr sz="1400" b="0">
-                <a:solidFill>
-                  <a:srgbClr val="222222"/>
-                </a:solidFill>
-                <a:latin typeface="Malgun Gothic"/>
-              </a:rPr>
-              <a:t>사내 표준의 일관 적용으로 휴먼 에러·재작업 감소.</a:t>
-            </a:r>
-          </a:p>
-          <a:p>
-            <a:pPr>
-              <a:spcBef>
-                <a:spcPts val="1000"/>
-              </a:spcBef>
-            </a:pPr>
-            <a:r>
-              <a:rPr sz="1700" b="1">
-                <a:solidFill>
-                  <a:srgbClr val="2E5BFF"/>
-                </a:solidFill>
-                <a:latin typeface="Malgun Gothic"/>
-              </a:rPr>
-              <a:t>▸ 효과 규모 (추정)</a:t>
-            </a:r>
-          </a:p>
-          <a:p>
-            <a:pPr lvl="1">
-              <a:spcBef>
-                <a:spcPts val="200"/>
-              </a:spcBef>
-            </a:pPr>
-            <a:r>
-              <a:rPr sz="1400" b="0">
-                <a:solidFill>
-                  <a:srgbClr val="222222"/>
-                </a:solidFill>
-                <a:latin typeface="Malgun Gothic"/>
-              </a:rPr>
-              <a:t>설계 문서화·표준 조사·오류 수정 사이클 시간이 수작업 대비 크게 단축(추정).</a:t>
-            </a:r>
-          </a:p>
-          <a:p>
-            <a:pPr lvl="1">
-              <a:spcBef>
-                <a:spcPts val="200"/>
-              </a:spcBef>
-            </a:pPr>
-            <a:r>
-              <a:rPr sz="1400" b="0">
-                <a:solidFill>
-                  <a:srgbClr val="222222"/>
-                </a:solidFill>
-                <a:latin typeface="Malgun Gothic"/>
-              </a:rPr>
-              <a:t>※ 정량 수치는 향후 실측하여 보완 예정.</a:t>
+                <a:spcPts val="600"/>
+              </a:spcBef>
+            </a:pPr>
+            <a:r>
+              <a:rPr sz="1150" b="0">
+                <a:solidFill>
+                  <a:srgbClr val="5A5A5A"/>
+                </a:solidFill>
+                <a:latin typeface="Malgun Gothic"/>
+              </a:rPr>
+              <a:t>※ 정량 수치는 향후 개발 소요시간 전/후 비교로 실측하여 보완 예정</a:t>
             </a:r>
           </a:p>
         </p:txBody>
@@ -4011,17 +5955,18 @@
         <p:spPr>
           <a:xfrm>
             <a:off x="0" y="0"/>
-            <a:ext cx="12191695" cy="868680"/>
+            <a:ext cx="12191695" cy="6858000"/>
           </a:xfrm>
           <a:prstGeom prst="rect">
             <a:avLst/>
           </a:prstGeom>
           <a:solidFill>
-            <a:srgbClr val="1F3564"/>
+            <a:srgbClr val="F6F8FC"/>
           </a:solidFill>
           <a:ln>
             <a:noFill/>
           </a:ln>
+          <a:effectLst/>
         </p:spPr>
         <p:style>
           <a:lnRef idx="1">
@@ -4053,8 +5998,8 @@
         </p:nvSpPr>
         <p:spPr>
           <a:xfrm>
-            <a:off x="548640" y="146304"/>
-            <a:ext cx="11064240" cy="594360"/>
+            <a:off x="640080" y="411480"/>
+            <a:ext cx="10972800" cy="365760"/>
           </a:xfrm>
           <a:prstGeom prst="rect">
             <a:avLst/>
@@ -4062,19 +6007,24 @@
           <a:noFill/>
         </p:spPr>
         <p:txBody>
-          <a:bodyPr wrap="none">
+          <a:bodyPr wrap="square">
             <a:spAutoFit/>
           </a:bodyPr>
           <a:lstStyle/>
           <a:p>
-            <a:r>
-              <a:rPr sz="2400" b="1">
-                <a:solidFill>
-                  <a:srgbClr val="FFFFFF"/>
-                </a:solidFill>
-                <a:latin typeface="Malgun Gothic"/>
-              </a:rPr>
-              <a:t>4. 기대 효과 및 향후 계획</a:t>
+            <a:pPr>
+              <a:spcBef>
+                <a:spcPts val="0"/>
+              </a:spcBef>
+            </a:pPr>
+            <a:r>
+              <a:rPr sz="1300" b="1">
+                <a:solidFill>
+                  <a:srgbClr val="2E5BFF"/>
+                </a:solidFill>
+                <a:latin typeface="Malgun Gothic"/>
+              </a:rPr>
+              <a:t>04  IMPACT &amp; NEXT STEPS</a:t>
             </a:r>
           </a:p>
         </p:txBody>
@@ -4087,8 +6037,8 @@
         </p:nvSpPr>
         <p:spPr>
           <a:xfrm>
-            <a:off x="640080" y="1097280"/>
-            <a:ext cx="10881360" cy="5486400"/>
+            <a:off x="640080" y="731520"/>
+            <a:ext cx="10972800" cy="640080"/>
           </a:xfrm>
           <a:prstGeom prst="rect">
             <a:avLst/>
@@ -4103,49 +6053,310 @@
           <a:p>
             <a:pPr>
               <a:spcBef>
+                <a:spcPts val="0"/>
+              </a:spcBef>
+            </a:pPr>
+            <a:r>
+              <a:rPr sz="2600" b="1">
+                <a:solidFill>
+                  <a:srgbClr val="142A54"/>
+                </a:solidFill>
+                <a:latin typeface="Malgun Gothic"/>
+              </a:rPr>
+              <a:t>기대 효과 및 향후 계획</a:t>
+            </a:r>
+          </a:p>
+        </p:txBody>
+      </p:sp>
+      <p:sp>
+        <p:nvSpPr>
+          <p:cNvPr id="5" name="Rectangle 4"/>
+          <p:cNvSpPr/>
+          <p:nvPr/>
+        </p:nvSpPr>
+        <p:spPr>
+          <a:xfrm>
+            <a:off x="658368" y="1371600"/>
+            <a:ext cx="1371600" cy="50800"/>
+          </a:xfrm>
+          <a:prstGeom prst="rect">
+            <a:avLst/>
+          </a:prstGeom>
+          <a:solidFill>
+            <a:srgbClr val="E8A31C"/>
+          </a:solidFill>
+          <a:ln>
+            <a:noFill/>
+          </a:ln>
+          <a:effectLst/>
+        </p:spPr>
+        <p:style>
+          <a:lnRef idx="1">
+            <a:schemeClr val="accent1"/>
+          </a:lnRef>
+          <a:fillRef idx="3">
+            <a:schemeClr val="accent1"/>
+          </a:fillRef>
+          <a:effectRef idx="2">
+            <a:schemeClr val="accent1"/>
+          </a:effectRef>
+          <a:fontRef idx="minor">
+            <a:schemeClr val="lt1"/>
+          </a:fontRef>
+        </p:style>
+        <p:txBody>
+          <a:bodyPr rtlCol="0" anchor="ctr"/>
+          <a:lstStyle/>
+          <a:p>
+            <a:pPr algn="ctr"/>
+          </a:p>
+        </p:txBody>
+      </p:sp>
+      <p:sp>
+        <p:nvSpPr>
+          <p:cNvPr id="6" name="Rounded Rectangle 5"/>
+          <p:cNvSpPr/>
+          <p:nvPr/>
+        </p:nvSpPr>
+        <p:spPr>
+          <a:xfrm>
+            <a:off x="640080" y="1783080"/>
+            <a:ext cx="5349240" cy="2926080"/>
+          </a:xfrm>
+          <a:prstGeom prst="roundRect">
+            <a:avLst/>
+          </a:prstGeom>
+          <a:solidFill>
+            <a:srgbClr val="FFFFFF"/>
+          </a:solidFill>
+          <a:ln w="12700">
+            <a:solidFill>
+              <a:srgbClr val="DDE3EF"/>
+            </a:solidFill>
+          </a:ln>
+          <a:effectLst/>
+        </p:spPr>
+        <p:style>
+          <a:lnRef idx="1">
+            <a:schemeClr val="accent1"/>
+          </a:lnRef>
+          <a:fillRef idx="3">
+            <a:schemeClr val="accent1"/>
+          </a:fillRef>
+          <a:effectRef idx="2">
+            <a:schemeClr val="accent1"/>
+          </a:effectRef>
+          <a:fontRef idx="minor">
+            <a:schemeClr val="lt1"/>
+          </a:fontRef>
+        </p:style>
+        <p:txBody>
+          <a:bodyPr rtlCol="0" anchor="ctr" lIns="274320" tIns="777240" wrap="square"/>
+          <a:lstStyle/>
+          <a:p>
+            <a:pPr algn="ctr">
+              <a:spcBef>
+                <a:spcPts val="800"/>
+              </a:spcBef>
+            </a:pPr>
+            <a:r>
+              <a:rPr sz="1300" b="0">
+                <a:solidFill>
+                  <a:srgbClr val="222833"/>
+                </a:solidFill>
+                <a:latin typeface="Malgun Gothic"/>
+              </a:rPr>
+              <a:t>•  운영 점검 시간 단축 · 점검 누락 방지</a:t>
+            </a:r>
+          </a:p>
+          <a:p>
+            <a:pPr>
+              <a:spcBef>
                 <a:spcPts val="1000"/>
               </a:spcBef>
             </a:pPr>
             <a:r>
-              <a:rPr sz="1700" b="1">
-                <a:solidFill>
-                  <a:srgbClr val="2E5BFF"/>
-                </a:solidFill>
-                <a:latin typeface="Malgun Gothic"/>
-              </a:rPr>
-              <a:t>▸ 기대 효과</a:t>
-            </a:r>
-          </a:p>
-          <a:p>
-            <a:pPr lvl="1">
+              <a:rPr sz="1300" b="0">
+                <a:solidFill>
+                  <a:srgbClr val="222833"/>
+                </a:solidFill>
+                <a:latin typeface="Malgun Gothic"/>
+              </a:rPr>
+              <a:t>•  읽기 전용 설계로 운영 안전성 확보</a:t>
+            </a:r>
+          </a:p>
+          <a:p>
+            <a:pPr>
+              <a:spcBef>
+                <a:spcPts val="1000"/>
+              </a:spcBef>
+            </a:pPr>
+            <a:r>
+              <a:rPr sz="1300" b="0">
+                <a:solidFill>
+                  <a:srgbClr val="222833"/>
+                </a:solidFill>
+                <a:latin typeface="Malgun Gothic"/>
+              </a:rPr>
+              <a:t>•  AI 페어프로그래밍의 사내 개발</a:t>
+            </a:r>
+          </a:p>
+          <a:p>
+            <a:pPr>
               <a:spcBef>
                 <a:spcPts val="200"/>
               </a:spcBef>
             </a:pPr>
             <a:r>
-              <a:rPr sz="1400" b="0">
-                <a:solidFill>
-                  <a:srgbClr val="222222"/>
-                </a:solidFill>
-                <a:latin typeface="Malgun Gothic"/>
-              </a:rPr>
-              <a:t>운영 점검 시간 단축·누락 방지, 운영 안전성(읽기 전용) 확보.</a:t>
-            </a:r>
-          </a:p>
-          <a:p>
-            <a:pPr lvl="1">
-              <a:spcBef>
-                <a:spcPts val="200"/>
-              </a:spcBef>
-            </a:pPr>
-            <a:r>
-              <a:rPr sz="1400" b="0">
-                <a:solidFill>
-                  <a:srgbClr val="222222"/>
-                </a:solidFill>
-                <a:latin typeface="Malgun Gothic"/>
-              </a:rPr>
-              <a:t>AI 페어프로그래밍의 사내 개발 생산성 향상 가능성 확인.</a:t>
+              <a:rPr sz="1300" b="0">
+                <a:solidFill>
+                  <a:srgbClr val="222833"/>
+                </a:solidFill>
+                <a:latin typeface="Malgun Gothic"/>
+              </a:rPr>
+              <a:t>    생산성 향상 가능성 확인</a:t>
+            </a:r>
+          </a:p>
+        </p:txBody>
+      </p:sp>
+      <p:sp>
+        <p:nvSpPr>
+          <p:cNvPr id="7" name="Rounded Rectangle 6"/>
+          <p:cNvSpPr/>
+          <p:nvPr/>
+        </p:nvSpPr>
+        <p:spPr>
+          <a:xfrm>
+            <a:off x="640080" y="1783080"/>
+            <a:ext cx="5349240" cy="566928"/>
+          </a:xfrm>
+          <a:prstGeom prst="roundRect">
+            <a:avLst/>
+          </a:prstGeom>
+          <a:solidFill>
+            <a:srgbClr val="142A54"/>
+          </a:solidFill>
+          <a:ln>
+            <a:noFill/>
+          </a:ln>
+          <a:effectLst/>
+        </p:spPr>
+        <p:style>
+          <a:lnRef idx="1">
+            <a:schemeClr val="accent1"/>
+          </a:lnRef>
+          <a:fillRef idx="3">
+            <a:schemeClr val="accent1"/>
+          </a:fillRef>
+          <a:effectRef idx="2">
+            <a:schemeClr val="accent1"/>
+          </a:effectRef>
+          <a:fontRef idx="minor">
+            <a:schemeClr val="lt1"/>
+          </a:fontRef>
+        </p:style>
+        <p:txBody>
+          <a:bodyPr rtlCol="0" anchor="ctr"/>
+          <a:lstStyle/>
+          <a:p>
+            <a:pPr algn="ctr"/>
+          </a:p>
+        </p:txBody>
+      </p:sp>
+      <p:sp>
+        <p:nvSpPr>
+          <p:cNvPr id="8" name="TextBox 7"/>
+          <p:cNvSpPr txBox="1"/>
+          <p:nvPr/>
+        </p:nvSpPr>
+        <p:spPr>
+          <a:xfrm>
+            <a:off x="640080" y="1783080"/>
+            <a:ext cx="5349240" cy="566928"/>
+          </a:xfrm>
+          <a:prstGeom prst="rect">
+            <a:avLst/>
+          </a:prstGeom>
+          <a:noFill/>
+        </p:spPr>
+        <p:txBody>
+          <a:bodyPr wrap="square" anchor="ctr">
+            <a:spAutoFit/>
+          </a:bodyPr>
+          <a:lstStyle/>
+          <a:p>
+            <a:pPr algn="ctr">
+              <a:spcBef>
+                <a:spcPts val="0"/>
+              </a:spcBef>
+            </a:pPr>
+            <a:r>
+              <a:rPr sz="1500" b="1">
+                <a:solidFill>
+                  <a:srgbClr val="FFFFFF"/>
+                </a:solidFill>
+                <a:latin typeface="Malgun Gothic"/>
+              </a:rPr>
+              <a:t>기대 효과</a:t>
+            </a:r>
+          </a:p>
+        </p:txBody>
+      </p:sp>
+      <p:sp>
+        <p:nvSpPr>
+          <p:cNvPr id="9" name="Rounded Rectangle 8"/>
+          <p:cNvSpPr/>
+          <p:nvPr/>
+        </p:nvSpPr>
+        <p:spPr>
+          <a:xfrm>
+            <a:off x="6172200" y="1783080"/>
+            <a:ext cx="5349240" cy="2926080"/>
+          </a:xfrm>
+          <a:prstGeom prst="roundRect">
+            <a:avLst/>
+          </a:prstGeom>
+          <a:solidFill>
+            <a:srgbClr val="FFFFFF"/>
+          </a:solidFill>
+          <a:ln w="12700">
+            <a:solidFill>
+              <a:srgbClr val="DDE3EF"/>
+            </a:solidFill>
+          </a:ln>
+          <a:effectLst/>
+        </p:spPr>
+        <p:style>
+          <a:lnRef idx="1">
+            <a:schemeClr val="accent1"/>
+          </a:lnRef>
+          <a:fillRef idx="3">
+            <a:schemeClr val="accent1"/>
+          </a:fillRef>
+          <a:effectRef idx="2">
+            <a:schemeClr val="accent1"/>
+          </a:effectRef>
+          <a:fontRef idx="minor">
+            <a:schemeClr val="lt1"/>
+          </a:fontRef>
+        </p:style>
+        <p:txBody>
+          <a:bodyPr rtlCol="0" anchor="ctr" lIns="274320" tIns="777240" wrap="square"/>
+          <a:lstStyle/>
+          <a:p>
+            <a:pPr algn="ctr">
+              <a:spcBef>
+                <a:spcPts val="800"/>
+              </a:spcBef>
+            </a:pPr>
+            <a:r>
+              <a:rPr sz="1300" b="0">
+                <a:solidFill>
+                  <a:srgbClr val="222833"/>
+                </a:solidFill>
+                <a:latin typeface="Malgun Gothic"/>
+              </a:rPr>
+              <a:t>•  검증본 정식 오브젝트화 및 기능 고도화</a:t>
             </a:r>
           </a:p>
           <a:p>
@@ -4155,45 +6366,185 @@
               </a:spcBef>
             </a:pPr>
             <a:r>
-              <a:rPr sz="1700" b="1">
-                <a:solidFill>
-                  <a:srgbClr val="2E5BFF"/>
-                </a:solidFill>
-                <a:latin typeface="Malgun Gothic"/>
-              </a:rPr>
-              <a:t>▸ 향후 계획</a:t>
-            </a:r>
-          </a:p>
-          <a:p>
-            <a:pPr lvl="1">
-              <a:spcBef>
-                <a:spcPts val="200"/>
-              </a:spcBef>
-            </a:pPr>
-            <a:r>
-              <a:rPr sz="1400" b="0">
-                <a:solidFill>
-                  <a:srgbClr val="222222"/>
-                </a:solidFill>
-                <a:latin typeface="Malgun Gothic"/>
-              </a:rPr>
-              <a:t>검증본 정식 오브젝트화 및 기능 고도화.</a:t>
-            </a:r>
-          </a:p>
-          <a:p>
-            <a:pPr lvl="1">
-              <a:spcBef>
-                <a:spcPts val="200"/>
-              </a:spcBef>
-            </a:pPr>
-            <a:r>
-              <a:rPr sz="1400" b="0">
-                <a:solidFill>
-                  <a:srgbClr val="222222"/>
-                </a:solidFill>
-                <a:latin typeface="Malgun Gothic"/>
-              </a:rPr>
-              <a:t>정량 효과 실측(개발 소요시간 전/후 비교) 및 타 과제 확대 적용 검토.</a:t>
+              <a:rPr sz="1300" b="0">
+                <a:solidFill>
+                  <a:srgbClr val="222833"/>
+                </a:solidFill>
+                <a:latin typeface="Malgun Gothic"/>
+              </a:rPr>
+              <a:t>•  정량 효과 실측(개발 소요시간 전/후 비교)</a:t>
+            </a:r>
+          </a:p>
+          <a:p>
+            <a:pPr>
+              <a:spcBef>
+                <a:spcPts val="1000"/>
+              </a:spcBef>
+            </a:pPr>
+            <a:r>
+              <a:rPr sz="1300" b="0">
+                <a:solidFill>
+                  <a:srgbClr val="222833"/>
+                </a:solidFill>
+                <a:latin typeface="Malgun Gothic"/>
+              </a:rPr>
+              <a:t>•  타 개발 과제로 AI 활용 확대 적용 검토</a:t>
+            </a:r>
+          </a:p>
+        </p:txBody>
+      </p:sp>
+      <p:sp>
+        <p:nvSpPr>
+          <p:cNvPr id="10" name="Rounded Rectangle 9"/>
+          <p:cNvSpPr/>
+          <p:nvPr/>
+        </p:nvSpPr>
+        <p:spPr>
+          <a:xfrm>
+            <a:off x="6172200" y="1783080"/>
+            <a:ext cx="5349240" cy="566928"/>
+          </a:xfrm>
+          <a:prstGeom prst="roundRect">
+            <a:avLst/>
+          </a:prstGeom>
+          <a:solidFill>
+            <a:srgbClr val="E8A31C"/>
+          </a:solidFill>
+          <a:ln>
+            <a:noFill/>
+          </a:ln>
+          <a:effectLst/>
+        </p:spPr>
+        <p:style>
+          <a:lnRef idx="1">
+            <a:schemeClr val="accent1"/>
+          </a:lnRef>
+          <a:fillRef idx="3">
+            <a:schemeClr val="accent1"/>
+          </a:fillRef>
+          <a:effectRef idx="2">
+            <a:schemeClr val="accent1"/>
+          </a:effectRef>
+          <a:fontRef idx="minor">
+            <a:schemeClr val="lt1"/>
+          </a:fontRef>
+        </p:style>
+        <p:txBody>
+          <a:bodyPr rtlCol="0" anchor="ctr"/>
+          <a:lstStyle/>
+          <a:p>
+            <a:pPr algn="ctr"/>
+          </a:p>
+        </p:txBody>
+      </p:sp>
+      <p:sp>
+        <p:nvSpPr>
+          <p:cNvPr id="11" name="TextBox 10"/>
+          <p:cNvSpPr txBox="1"/>
+          <p:nvPr/>
+        </p:nvSpPr>
+        <p:spPr>
+          <a:xfrm>
+            <a:off x="6172200" y="1783080"/>
+            <a:ext cx="5349240" cy="566928"/>
+          </a:xfrm>
+          <a:prstGeom prst="rect">
+            <a:avLst/>
+          </a:prstGeom>
+          <a:noFill/>
+        </p:spPr>
+        <p:txBody>
+          <a:bodyPr wrap="square" anchor="ctr">
+            <a:spAutoFit/>
+          </a:bodyPr>
+          <a:lstStyle/>
+          <a:p>
+            <a:pPr algn="ctr">
+              <a:spcBef>
+                <a:spcPts val="0"/>
+              </a:spcBef>
+            </a:pPr>
+            <a:r>
+              <a:rPr sz="1500" b="1">
+                <a:solidFill>
+                  <a:srgbClr val="FFFFFF"/>
+                </a:solidFill>
+                <a:latin typeface="Malgun Gothic"/>
+              </a:rPr>
+              <a:t>향후 계획</a:t>
+            </a:r>
+          </a:p>
+        </p:txBody>
+      </p:sp>
+      <p:sp>
+        <p:nvSpPr>
+          <p:cNvPr id="12" name="Rounded Rectangle 11"/>
+          <p:cNvSpPr/>
+          <p:nvPr/>
+        </p:nvSpPr>
+        <p:spPr>
+          <a:xfrm>
+            <a:off x="640080" y="5029200"/>
+            <a:ext cx="10881360" cy="1051560"/>
+          </a:xfrm>
+          <a:prstGeom prst="roundRect">
+            <a:avLst/>
+          </a:prstGeom>
+          <a:solidFill>
+            <a:srgbClr val="142A54"/>
+          </a:solidFill>
+          <a:ln>
+            <a:noFill/>
+          </a:ln>
+          <a:effectLst/>
+        </p:spPr>
+        <p:style>
+          <a:lnRef idx="1">
+            <a:schemeClr val="accent1"/>
+          </a:lnRef>
+          <a:fillRef idx="3">
+            <a:schemeClr val="accent1"/>
+          </a:fillRef>
+          <a:effectRef idx="2">
+            <a:schemeClr val="accent1"/>
+          </a:effectRef>
+          <a:fontRef idx="minor">
+            <a:schemeClr val="lt1"/>
+          </a:fontRef>
+        </p:style>
+        <p:txBody>
+          <a:bodyPr rtlCol="0" anchor="ctr" lIns="320040" wrap="square"/>
+          <a:lstStyle/>
+          <a:p>
+            <a:pPr algn="ctr">
+              <a:spcBef>
+                <a:spcPts val="0"/>
+              </a:spcBef>
+            </a:pPr>
+            <a:r>
+              <a:rPr sz="1250" b="1">
+                <a:solidFill>
+                  <a:srgbClr val="E8A31C"/>
+                </a:solidFill>
+                <a:latin typeface="Malgun Gothic"/>
+              </a:rPr>
+              <a:t>핵심 메시지</a:t>
+            </a:r>
+          </a:p>
+          <a:p>
+            <a:pPr>
+              <a:spcBef>
+                <a:spcPts val="300"/>
+              </a:spcBef>
+            </a:pPr>
+            <a:r>
+              <a:rPr sz="1500" b="1">
+                <a:solidFill>
+                  <a:srgbClr val="FFFFFF"/>
+                </a:solidFill>
+                <a:latin typeface="Malgun Gothic"/>
+              </a:rPr>
+              <a:t>운영 점검의 통합·자동화 + AI 페어프로그래밍으로 개발 생산성을 높였습니다.</a:t>
             </a:r>
           </a:p>
         </p:txBody>

--- a/docs/report/Y_OPS_MONITOR_V2_발표자료.pptx
+++ b/docs/report/Y_OPS_MONITOR_V2_발표자료.pptx
@@ -10,6 +10,7 @@
     <p:sldId id="258" r:id="rId9"/>
     <p:sldId id="259" r:id="rId10"/>
     <p:sldId id="260" r:id="rId11"/>
+    <p:sldId id="261" r:id="rId12"/>
   </p:sldIdLst>
   <p:sldSz cx="12191695" cy="6858000" type="screen4x3"/>
   <p:notesSz cx="6858000" cy="9144000"/>
@@ -5277,7 +5278,7 @@
                 </a:solidFill>
                 <a:latin typeface="Malgun Gothic"/>
               </a:rPr>
-              <a:t>03  EFFICIENCY &amp; OUTCOME</a:t>
+              <a:t>03  STANDARDS AS CODE (RULES / SKILLS)</a:t>
             </a:r>
           </a:p>
         </p:txBody>
@@ -5316,7 +5317,7 @@
                 </a:solidFill>
                 <a:latin typeface="Malgun Gothic"/>
               </a:rPr>
-              <a:t>효율성 · 성과 (정성 위주 · 추정)</a:t>
+              <a:t>AI 규칙·스킬(.md)로 개발 표준 내재화</a:t>
             </a:r>
           </a:p>
         </p:txBody>
@@ -5374,7 +5375,7 @@
         <p:spPr>
           <a:xfrm>
             <a:off x="640080" y="1783080"/>
-            <a:ext cx="3456432" cy="2148840"/>
+            <a:ext cx="5349240" cy="2880360"/>
           </a:xfrm>
           <a:prstGeom prst="roundRect">
             <a:avLst/>
@@ -5404,11 +5405,27 @@
           </a:fontRef>
         </p:style>
         <p:txBody>
-          <a:bodyPr rtlCol="0" anchor="ctr" lIns="237744" tIns="777240" wrap="square"/>
+          <a:bodyPr rtlCol="0" anchor="ctr" lIns="274320" tIns="731520" wrap="square"/>
           <a:lstStyle/>
           <a:p>
             <a:pPr algn="ctr">
               <a:spcBef>
+                <a:spcPts val="600"/>
+              </a:spcBef>
+            </a:pPr>
+            <a:r>
+              <a:rPr sz="1200" b="1">
+                <a:solidFill>
+                  <a:srgbClr val="2E5BFF"/>
+                </a:solidFill>
+                <a:latin typeface="Malgun Gothic"/>
+              </a:rPr>
+              <a:t>.cursor/rules/abap-project-conventions</a:t>
+            </a:r>
+          </a:p>
+          <a:p>
+            <a:pPr>
+              <a:spcBef>
                 <a:spcPts val="800"/>
               </a:spcBef>
             </a:pPr>
@@ -5419,23 +5436,55 @@
                 </a:solidFill>
                 <a:latin typeface="Malgun Gothic"/>
               </a:rPr>
-              <a:t>•  설계–구현–검토를 한 흐름으로 진행(맥락 유지)</a:t>
+              <a:t>•  읽기 전용(변경·COMMIT·LOCK 금지) 불변식</a:t>
             </a:r>
           </a:p>
           <a:p>
             <a:pPr>
               <a:spcBef>
+                <a:spcPts val="600"/>
+              </a:spcBef>
+            </a:pPr>
+            <a:r>
+              <a:rPr sz="1200" b="0">
+                <a:solidFill>
+                  <a:srgbClr val="222833"/>
+                </a:solidFill>
+                <a:latin typeface="Malgun Gothic"/>
+              </a:rPr>
+              <a:t>•  SAP 표준 테이블/FM 만 사용</a:t>
+            </a:r>
+          </a:p>
+          <a:p>
+            <a:pPr>
+              <a:spcBef>
+                <a:spcPts val="600"/>
+              </a:spcBef>
+            </a:pPr>
+            <a:r>
+              <a:rPr sz="1200" b="0">
+                <a:solidFill>
+                  <a:srgbClr val="222833"/>
+                </a:solidFill>
+                <a:latin typeface="Malgun Gothic"/>
+              </a:rPr>
+              <a:t>•  명명규칙 · 인터페이스 기반 OO 구조</a:t>
+            </a:r>
+          </a:p>
+          <a:p>
+            <a:pPr>
+              <a:spcBef>
                 <a:spcPts val="800"/>
               </a:spcBef>
             </a:pPr>
             <a:r>
-              <a:rPr sz="1200" b="0">
-                <a:solidFill>
-                  <a:srgbClr val="222833"/>
-                </a:solidFill>
-                <a:latin typeface="Malgun Gothic"/>
-              </a:rPr>
-              <a:t>•  요구 변경 즉시 반영 → 완성도 조기 확보</a:t>
+              <a:rPr sz="1200" b="1">
+                <a:solidFill>
+                  <a:srgbClr val="149E8A"/>
+                </a:solidFill>
+                <a:latin typeface="Malgun Gothic"/>
+              </a:rPr>
+              <a:t>→ 매 작업마다 자동 준수(재지시 불필요)</a:t>
             </a:r>
           </a:p>
         </p:txBody>
@@ -5449,13 +5498,13 @@
         <p:spPr>
           <a:xfrm>
             <a:off x="640080" y="1783080"/>
-            <a:ext cx="3456432" cy="566928"/>
+            <a:ext cx="5349240" cy="566928"/>
           </a:xfrm>
           <a:prstGeom prst="roundRect">
             <a:avLst/>
           </a:prstGeom>
           <a:solidFill>
-            <a:srgbClr val="2E5BFF"/>
+            <a:srgbClr val="142A54"/>
           </a:solidFill>
           <a:ln>
             <a:noFill/>
@@ -5493,7 +5542,7 @@
         <p:spPr>
           <a:xfrm>
             <a:off x="640080" y="1783080"/>
-            <a:ext cx="3456432" cy="566928"/>
+            <a:ext cx="5349240" cy="566928"/>
           </a:xfrm>
           <a:prstGeom prst="rect">
             <a:avLst/>
@@ -5512,13 +5561,13 @@
               </a:spcBef>
             </a:pPr>
             <a:r>
-              <a:rPr sz="1450" b="1">
+              <a:rPr sz="1400" b="1">
                 <a:solidFill>
                   <a:srgbClr val="FFFFFF"/>
                 </a:solidFill>
                 <a:latin typeface="Malgun Gothic"/>
               </a:rPr>
-              <a:t>개발 생산성</a:t>
+              <a:t>상시 규칙  Rules  ·  항상 자동 적용</a:t>
             </a:r>
           </a:p>
         </p:txBody>
@@ -5531,8 +5580,8 @@
         </p:nvSpPr>
         <p:spPr>
           <a:xfrm>
-            <a:off x="4370832" y="1783080"/>
-            <a:ext cx="3456432" cy="2148840"/>
+            <a:off x="6172200" y="1783080"/>
+            <a:ext cx="5349240" cy="2880360"/>
           </a:xfrm>
           <a:prstGeom prst="roundRect">
             <a:avLst/>
@@ -5562,11 +5611,27 @@
           </a:fontRef>
         </p:style>
         <p:txBody>
-          <a:bodyPr rtlCol="0" anchor="ctr" lIns="237744" tIns="777240" wrap="square"/>
+          <a:bodyPr rtlCol="0" anchor="ctr" lIns="274320" tIns="731520" wrap="square"/>
           <a:lstStyle/>
           <a:p>
             <a:pPr algn="ctr">
               <a:spcBef>
+                <a:spcPts val="600"/>
+              </a:spcBef>
+            </a:pPr>
+            <a:r>
+              <a:rPr sz="1200" b="1">
+                <a:solidFill>
+                  <a:srgbClr val="E8A31C"/>
+                </a:solidFill>
+                <a:latin typeface="Malgun Gothic"/>
+              </a:rPr>
+              <a:t>.cursor/skills  (작업 유형별 검증 플레이북)</a:t>
+            </a:r>
+          </a:p>
+          <a:p>
+            <a:pPr>
+              <a:spcBef>
                 <a:spcPts val="800"/>
               </a:spcBef>
             </a:pPr>
@@ -5577,23 +5642,55 @@
                 </a:solidFill>
                 <a:latin typeface="Malgun Gothic"/>
               </a:rPr>
-              <a:t>•  표준 기능/사용법 조사를 대화로 즉시 해결</a:t>
+              <a:t>•  읽기전용 모니터링 · 클린 OO ABAP</a:t>
             </a:r>
           </a:p>
           <a:p>
             <a:pPr>
               <a:spcBef>
+                <a:spcPts val="600"/>
+              </a:spcBef>
+            </a:pPr>
+            <a:r>
+              <a:rPr sz="1200" b="0">
+                <a:solidFill>
+                  <a:srgbClr val="222833"/>
+                </a:solidFill>
+                <a:latin typeface="Malgun Gothic"/>
+              </a:rPr>
+              <a:t>•  코드리뷰 · 성능 튜닝 · 체계적 디버깅</a:t>
+            </a:r>
+          </a:p>
+          <a:p>
+            <a:pPr>
+              <a:spcBef>
+                <a:spcPts val="600"/>
+              </a:spcBef>
+            </a:pPr>
+            <a:r>
+              <a:rPr sz="1200" b="0">
+                <a:solidFill>
+                  <a:srgbClr val="222833"/>
+                </a:solidFill>
+                <a:latin typeface="Malgun Gothic"/>
+              </a:rPr>
+              <a:t>•  설계서 작성 · 커밋 메시지 · PR 작성</a:t>
+            </a:r>
+          </a:p>
+          <a:p>
+            <a:pPr>
+              <a:spcBef>
                 <a:spcPts val="800"/>
               </a:spcBef>
             </a:pPr>
             <a:r>
-              <a:rPr sz="1200" b="0">
-                <a:solidFill>
-                  <a:srgbClr val="222833"/>
-                </a:solidFill>
-                <a:latin typeface="Malgun Gothic"/>
-              </a:rPr>
-              <a:t>•  문서 탐색 시간 절감</a:t>
+              <a:rPr sz="1200" b="1">
+                <a:solidFill>
+                  <a:srgbClr val="149E8A"/>
+                </a:solidFill>
+                <a:latin typeface="Malgun Gothic"/>
+              </a:rPr>
+              <a:t>→ 검증된 절차 재사용(품질 균일화)</a:t>
             </a:r>
           </a:p>
         </p:txBody>
@@ -5606,166 +5703,8 @@
         </p:nvSpPr>
         <p:spPr>
           <a:xfrm>
-            <a:off x="4370832" y="1783080"/>
-            <a:ext cx="3456432" cy="566928"/>
-          </a:xfrm>
-          <a:prstGeom prst="roundRect">
-            <a:avLst/>
-          </a:prstGeom>
-          <a:solidFill>
-            <a:srgbClr val="149E8A"/>
-          </a:solidFill>
-          <a:ln>
-            <a:noFill/>
-          </a:ln>
-          <a:effectLst/>
-        </p:spPr>
-        <p:style>
-          <a:lnRef idx="1">
-            <a:schemeClr val="accent1"/>
-          </a:lnRef>
-          <a:fillRef idx="3">
-            <a:schemeClr val="accent1"/>
-          </a:fillRef>
-          <a:effectRef idx="2">
-            <a:schemeClr val="accent1"/>
-          </a:effectRef>
-          <a:fontRef idx="minor">
-            <a:schemeClr val="lt1"/>
-          </a:fontRef>
-        </p:style>
-        <p:txBody>
-          <a:bodyPr rtlCol="0" anchor="ctr"/>
-          <a:lstStyle/>
-          <a:p>
-            <a:pPr algn="ctr"/>
-          </a:p>
-        </p:txBody>
-      </p:sp>
-      <p:sp>
-        <p:nvSpPr>
-          <p:cNvPr id="11" name="TextBox 10"/>
-          <p:cNvSpPr txBox="1"/>
-          <p:nvPr/>
-        </p:nvSpPr>
-        <p:spPr>
-          <a:xfrm>
-            <a:off x="4370832" y="1783080"/>
-            <a:ext cx="3456432" cy="566928"/>
-          </a:xfrm>
-          <a:prstGeom prst="rect">
-            <a:avLst/>
-          </a:prstGeom>
-          <a:noFill/>
-        </p:spPr>
-        <p:txBody>
-          <a:bodyPr wrap="square" anchor="ctr">
-            <a:spAutoFit/>
-          </a:bodyPr>
-          <a:lstStyle/>
-          <a:p>
-            <a:pPr algn="ctr">
-              <a:spcBef>
-                <a:spcPts val="0"/>
-              </a:spcBef>
-            </a:pPr>
-            <a:r>
-              <a:rPr sz="1450" b="1">
-                <a:solidFill>
-                  <a:srgbClr val="FFFFFF"/>
-                </a:solidFill>
-                <a:latin typeface="Malgun Gothic"/>
-              </a:rPr>
-              <a:t>리서치 부담 감소</a:t>
-            </a:r>
-          </a:p>
-        </p:txBody>
-      </p:sp>
-      <p:sp>
-        <p:nvSpPr>
-          <p:cNvPr id="12" name="Rounded Rectangle 11"/>
-          <p:cNvSpPr/>
-          <p:nvPr/>
-        </p:nvSpPr>
-        <p:spPr>
-          <a:xfrm>
-            <a:off x="8101584" y="1783080"/>
-            <a:ext cx="3456432" cy="2148840"/>
-          </a:xfrm>
-          <a:prstGeom prst="roundRect">
-            <a:avLst/>
-          </a:prstGeom>
-          <a:solidFill>
-            <a:srgbClr val="FFFFFF"/>
-          </a:solidFill>
-          <a:ln w="12700">
-            <a:solidFill>
-              <a:srgbClr val="DDE3EF"/>
-            </a:solidFill>
-          </a:ln>
-          <a:effectLst/>
-        </p:spPr>
-        <p:style>
-          <a:lnRef idx="1">
-            <a:schemeClr val="accent1"/>
-          </a:lnRef>
-          <a:fillRef idx="3">
-            <a:schemeClr val="accent1"/>
-          </a:fillRef>
-          <a:effectRef idx="2">
-            <a:schemeClr val="accent1"/>
-          </a:effectRef>
-          <a:fontRef idx="minor">
-            <a:schemeClr val="lt1"/>
-          </a:fontRef>
-        </p:style>
-        <p:txBody>
-          <a:bodyPr rtlCol="0" anchor="ctr" lIns="237744" tIns="777240" wrap="square"/>
-          <a:lstStyle/>
-          <a:p>
-            <a:pPr algn="ctr">
-              <a:spcBef>
-                <a:spcPts val="800"/>
-              </a:spcBef>
-            </a:pPr>
-            <a:r>
-              <a:rPr sz="1200" b="0">
-                <a:solidFill>
-                  <a:srgbClr val="222833"/>
-                </a:solidFill>
-                <a:latin typeface="Malgun Gothic"/>
-              </a:rPr>
-              <a:t>•  사내 표준의 일관 적용</a:t>
-            </a:r>
-          </a:p>
-          <a:p>
-            <a:pPr>
-              <a:spcBef>
-                <a:spcPts val="800"/>
-              </a:spcBef>
-            </a:pPr>
-            <a:r>
-              <a:rPr sz="1200" b="0">
-                <a:solidFill>
-                  <a:srgbClr val="222833"/>
-                </a:solidFill>
-                <a:latin typeface="Malgun Gothic"/>
-              </a:rPr>
-              <a:t>•  휴먼 에러 · 재작업 감소</a:t>
-            </a:r>
-          </a:p>
-        </p:txBody>
-      </p:sp>
-      <p:sp>
-        <p:nvSpPr>
-          <p:cNvPr id="13" name="Rounded Rectangle 12"/>
-          <p:cNvSpPr/>
-          <p:nvPr/>
-        </p:nvSpPr>
-        <p:spPr>
-          <a:xfrm>
-            <a:off x="8101584" y="1783080"/>
-            <a:ext cx="3456432" cy="566928"/>
+            <a:off x="6172200" y="1783080"/>
+            <a:ext cx="5349240" cy="566928"/>
           </a:xfrm>
           <a:prstGeom prst="roundRect">
             <a:avLst/>
@@ -5802,14 +5741,14 @@
       </p:sp>
       <p:sp>
         <p:nvSpPr>
-          <p:cNvPr id="14" name="TextBox 13"/>
+          <p:cNvPr id="11" name="TextBox 10"/>
           <p:cNvSpPr txBox="1"/>
           <p:nvPr/>
         </p:nvSpPr>
         <p:spPr>
           <a:xfrm>
-            <a:off x="8101584" y="1783080"/>
-            <a:ext cx="3456432" cy="566928"/>
+            <a:off x="6172200" y="1783080"/>
+            <a:ext cx="5349240" cy="566928"/>
           </a:xfrm>
           <a:prstGeom prst="rect">
             <a:avLst/>
@@ -5828,27 +5767,27 @@
               </a:spcBef>
             </a:pPr>
             <a:r>
-              <a:rPr sz="1450" b="1">
+              <a:rPr sz="1400" b="1">
                 <a:solidFill>
                   <a:srgbClr val="FFFFFF"/>
                 </a:solidFill>
                 <a:latin typeface="Malgun Gothic"/>
               </a:rPr>
-              <a:t>품질 · 표준 준수</a:t>
-            </a:r>
-          </a:p>
-        </p:txBody>
-      </p:sp>
-      <p:sp>
-        <p:nvSpPr>
-          <p:cNvPr id="15" name="Rounded Rectangle 14"/>
+              <a:t>온디맨드 스킬  Skills  ·  필요 시 호출</a:t>
+            </a:r>
+          </a:p>
+        </p:txBody>
+      </p:sp>
+      <p:sp>
+        <p:nvSpPr>
+          <p:cNvPr id="12" name="Rounded Rectangle 11"/>
           <p:cNvSpPr/>
           <p:nvPr/>
         </p:nvSpPr>
         <p:spPr>
           <a:xfrm>
-            <a:off x="640080" y="4206240"/>
-            <a:ext cx="10908792" cy="1554480"/>
+            <a:off x="640080" y="4937760"/>
+            <a:ext cx="10881360" cy="1234440"/>
           </a:xfrm>
           <a:prstGeom prst="roundRect">
             <a:avLst/>
@@ -5876,7 +5815,7 @@
           </a:fontRef>
         </p:style>
         <p:txBody>
-          <a:bodyPr rtlCol="0" anchor="ctr" lIns="320040" tIns="182880" wrap="square"/>
+          <a:bodyPr rtlCol="0" anchor="ctr" lIns="320040" tIns="164592" wrap="square"/>
           <a:lstStyle/>
           <a:p>
             <a:pPr algn="ctr">
@@ -5885,13 +5824,13 @@
               </a:spcBef>
             </a:pPr>
             <a:r>
-              <a:rPr sz="1400" b="1">
+              <a:rPr sz="1350" b="1">
                 <a:solidFill>
                   <a:srgbClr val="2E5BFF"/>
                 </a:solidFill>
                 <a:latin typeface="Malgun Gothic"/>
               </a:rPr>
-              <a:t>효과 규모 (추정)</a:t>
+              <a:t>md 파일 활용 효율 효과</a:t>
             </a:r>
           </a:p>
           <a:p>
@@ -5907,13 +5846,13 @@
                 </a:solidFill>
                 <a:latin typeface="Malgun Gothic"/>
               </a:rPr>
-              <a:t>설계 문서화 · 표준 API 조사 · 오류 수정 사이클 시간이 수작업 대비 크게 단축된 것으로 추정됩니다.</a:t>
+              <a:t>표준을 매번 설명할 필요 없이 일관 적용 → 재작업·휴먼에러 감소 · 리뷰/문서 품질 균일화 · 신규 인력 온보딩 가속.</a:t>
             </a:r>
           </a:p>
           <a:p>
             <a:pPr>
               <a:spcBef>
-                <a:spcPts val="600"/>
+                <a:spcPts val="500"/>
               </a:spcBef>
             </a:pPr>
             <a:r>
@@ -5923,7 +5862,7 @@
                 </a:solidFill>
                 <a:latin typeface="Malgun Gothic"/>
               </a:rPr>
-              <a:t>※ 정량 수치는 향후 개발 소요시간 전/후 비교로 실측하여 보완 예정</a:t>
+              <a:t>규칙/스킬을 코드처럼 버전관리(.md) → 팀 전체가 동일 기준으로 재사용·개선.</a:t>
             </a:r>
           </a:p>
         </p:txBody>
@@ -6024,7 +5963,754 @@
                 </a:solidFill>
                 <a:latin typeface="Malgun Gothic"/>
               </a:rPr>
-              <a:t>04  IMPACT &amp; NEXT STEPS</a:t>
+              <a:t>04  EFFICIENCY &amp; OUTCOME</a:t>
+            </a:r>
+          </a:p>
+        </p:txBody>
+      </p:sp>
+      <p:sp>
+        <p:nvSpPr>
+          <p:cNvPr id="4" name="TextBox 3"/>
+          <p:cNvSpPr txBox="1"/>
+          <p:nvPr/>
+        </p:nvSpPr>
+        <p:spPr>
+          <a:xfrm>
+            <a:off x="640080" y="731520"/>
+            <a:ext cx="10972800" cy="640080"/>
+          </a:xfrm>
+          <a:prstGeom prst="rect">
+            <a:avLst/>
+          </a:prstGeom>
+          <a:noFill/>
+        </p:spPr>
+        <p:txBody>
+          <a:bodyPr wrap="square">
+            <a:spAutoFit/>
+          </a:bodyPr>
+          <a:lstStyle/>
+          <a:p>
+            <a:pPr>
+              <a:spcBef>
+                <a:spcPts val="0"/>
+              </a:spcBef>
+            </a:pPr>
+            <a:r>
+              <a:rPr sz="2600" b="1">
+                <a:solidFill>
+                  <a:srgbClr val="142A54"/>
+                </a:solidFill>
+                <a:latin typeface="Malgun Gothic"/>
+              </a:rPr>
+              <a:t>효율성 · 성과 (정성 위주 · 추정)</a:t>
+            </a:r>
+          </a:p>
+        </p:txBody>
+      </p:sp>
+      <p:sp>
+        <p:nvSpPr>
+          <p:cNvPr id="5" name="Rectangle 4"/>
+          <p:cNvSpPr/>
+          <p:nvPr/>
+        </p:nvSpPr>
+        <p:spPr>
+          <a:xfrm>
+            <a:off x="658368" y="1371600"/>
+            <a:ext cx="1371600" cy="50800"/>
+          </a:xfrm>
+          <a:prstGeom prst="rect">
+            <a:avLst/>
+          </a:prstGeom>
+          <a:solidFill>
+            <a:srgbClr val="E8A31C"/>
+          </a:solidFill>
+          <a:ln>
+            <a:noFill/>
+          </a:ln>
+          <a:effectLst/>
+        </p:spPr>
+        <p:style>
+          <a:lnRef idx="1">
+            <a:schemeClr val="accent1"/>
+          </a:lnRef>
+          <a:fillRef idx="3">
+            <a:schemeClr val="accent1"/>
+          </a:fillRef>
+          <a:effectRef idx="2">
+            <a:schemeClr val="accent1"/>
+          </a:effectRef>
+          <a:fontRef idx="minor">
+            <a:schemeClr val="lt1"/>
+          </a:fontRef>
+        </p:style>
+        <p:txBody>
+          <a:bodyPr rtlCol="0" anchor="ctr"/>
+          <a:lstStyle/>
+          <a:p>
+            <a:pPr algn="ctr"/>
+          </a:p>
+        </p:txBody>
+      </p:sp>
+      <p:sp>
+        <p:nvSpPr>
+          <p:cNvPr id="6" name="Rounded Rectangle 5"/>
+          <p:cNvSpPr/>
+          <p:nvPr/>
+        </p:nvSpPr>
+        <p:spPr>
+          <a:xfrm>
+            <a:off x="640080" y="1783080"/>
+            <a:ext cx="3456432" cy="2148840"/>
+          </a:xfrm>
+          <a:prstGeom prst="roundRect">
+            <a:avLst/>
+          </a:prstGeom>
+          <a:solidFill>
+            <a:srgbClr val="FFFFFF"/>
+          </a:solidFill>
+          <a:ln w="12700">
+            <a:solidFill>
+              <a:srgbClr val="DDE3EF"/>
+            </a:solidFill>
+          </a:ln>
+          <a:effectLst/>
+        </p:spPr>
+        <p:style>
+          <a:lnRef idx="1">
+            <a:schemeClr val="accent1"/>
+          </a:lnRef>
+          <a:fillRef idx="3">
+            <a:schemeClr val="accent1"/>
+          </a:fillRef>
+          <a:effectRef idx="2">
+            <a:schemeClr val="accent1"/>
+          </a:effectRef>
+          <a:fontRef idx="minor">
+            <a:schemeClr val="lt1"/>
+          </a:fontRef>
+        </p:style>
+        <p:txBody>
+          <a:bodyPr rtlCol="0" anchor="ctr" lIns="237744" tIns="777240" wrap="square"/>
+          <a:lstStyle/>
+          <a:p>
+            <a:pPr algn="ctr">
+              <a:spcBef>
+                <a:spcPts val="800"/>
+              </a:spcBef>
+            </a:pPr>
+            <a:r>
+              <a:rPr sz="1200" b="0">
+                <a:solidFill>
+                  <a:srgbClr val="222833"/>
+                </a:solidFill>
+                <a:latin typeface="Malgun Gothic"/>
+              </a:rPr>
+              <a:t>•  설계–구현–검토를 한 흐름으로 진행(맥락 유지)</a:t>
+            </a:r>
+          </a:p>
+          <a:p>
+            <a:pPr>
+              <a:spcBef>
+                <a:spcPts val="800"/>
+              </a:spcBef>
+            </a:pPr>
+            <a:r>
+              <a:rPr sz="1200" b="0">
+                <a:solidFill>
+                  <a:srgbClr val="222833"/>
+                </a:solidFill>
+                <a:latin typeface="Malgun Gothic"/>
+              </a:rPr>
+              <a:t>•  요구 변경 즉시 반영 → 완성도 조기 확보</a:t>
+            </a:r>
+          </a:p>
+        </p:txBody>
+      </p:sp>
+      <p:sp>
+        <p:nvSpPr>
+          <p:cNvPr id="7" name="Rounded Rectangle 6"/>
+          <p:cNvSpPr/>
+          <p:nvPr/>
+        </p:nvSpPr>
+        <p:spPr>
+          <a:xfrm>
+            <a:off x="640080" y="1783080"/>
+            <a:ext cx="3456432" cy="566928"/>
+          </a:xfrm>
+          <a:prstGeom prst="roundRect">
+            <a:avLst/>
+          </a:prstGeom>
+          <a:solidFill>
+            <a:srgbClr val="2E5BFF"/>
+          </a:solidFill>
+          <a:ln>
+            <a:noFill/>
+          </a:ln>
+          <a:effectLst/>
+        </p:spPr>
+        <p:style>
+          <a:lnRef idx="1">
+            <a:schemeClr val="accent1"/>
+          </a:lnRef>
+          <a:fillRef idx="3">
+            <a:schemeClr val="accent1"/>
+          </a:fillRef>
+          <a:effectRef idx="2">
+            <a:schemeClr val="accent1"/>
+          </a:effectRef>
+          <a:fontRef idx="minor">
+            <a:schemeClr val="lt1"/>
+          </a:fontRef>
+        </p:style>
+        <p:txBody>
+          <a:bodyPr rtlCol="0" anchor="ctr"/>
+          <a:lstStyle/>
+          <a:p>
+            <a:pPr algn="ctr"/>
+          </a:p>
+        </p:txBody>
+      </p:sp>
+      <p:sp>
+        <p:nvSpPr>
+          <p:cNvPr id="8" name="TextBox 7"/>
+          <p:cNvSpPr txBox="1"/>
+          <p:nvPr/>
+        </p:nvSpPr>
+        <p:spPr>
+          <a:xfrm>
+            <a:off x="640080" y="1783080"/>
+            <a:ext cx="3456432" cy="566928"/>
+          </a:xfrm>
+          <a:prstGeom prst="rect">
+            <a:avLst/>
+          </a:prstGeom>
+          <a:noFill/>
+        </p:spPr>
+        <p:txBody>
+          <a:bodyPr wrap="square" anchor="ctr">
+            <a:spAutoFit/>
+          </a:bodyPr>
+          <a:lstStyle/>
+          <a:p>
+            <a:pPr algn="ctr">
+              <a:spcBef>
+                <a:spcPts val="0"/>
+              </a:spcBef>
+            </a:pPr>
+            <a:r>
+              <a:rPr sz="1450" b="1">
+                <a:solidFill>
+                  <a:srgbClr val="FFFFFF"/>
+                </a:solidFill>
+                <a:latin typeface="Malgun Gothic"/>
+              </a:rPr>
+              <a:t>개발 생산성</a:t>
+            </a:r>
+          </a:p>
+        </p:txBody>
+      </p:sp>
+      <p:sp>
+        <p:nvSpPr>
+          <p:cNvPr id="9" name="Rounded Rectangle 8"/>
+          <p:cNvSpPr/>
+          <p:nvPr/>
+        </p:nvSpPr>
+        <p:spPr>
+          <a:xfrm>
+            <a:off x="4370832" y="1783080"/>
+            <a:ext cx="3456432" cy="2148840"/>
+          </a:xfrm>
+          <a:prstGeom prst="roundRect">
+            <a:avLst/>
+          </a:prstGeom>
+          <a:solidFill>
+            <a:srgbClr val="FFFFFF"/>
+          </a:solidFill>
+          <a:ln w="12700">
+            <a:solidFill>
+              <a:srgbClr val="DDE3EF"/>
+            </a:solidFill>
+          </a:ln>
+          <a:effectLst/>
+        </p:spPr>
+        <p:style>
+          <a:lnRef idx="1">
+            <a:schemeClr val="accent1"/>
+          </a:lnRef>
+          <a:fillRef idx="3">
+            <a:schemeClr val="accent1"/>
+          </a:fillRef>
+          <a:effectRef idx="2">
+            <a:schemeClr val="accent1"/>
+          </a:effectRef>
+          <a:fontRef idx="minor">
+            <a:schemeClr val="lt1"/>
+          </a:fontRef>
+        </p:style>
+        <p:txBody>
+          <a:bodyPr rtlCol="0" anchor="ctr" lIns="237744" tIns="777240" wrap="square"/>
+          <a:lstStyle/>
+          <a:p>
+            <a:pPr algn="ctr">
+              <a:spcBef>
+                <a:spcPts val="800"/>
+              </a:spcBef>
+            </a:pPr>
+            <a:r>
+              <a:rPr sz="1200" b="0">
+                <a:solidFill>
+                  <a:srgbClr val="222833"/>
+                </a:solidFill>
+                <a:latin typeface="Malgun Gothic"/>
+              </a:rPr>
+              <a:t>•  표준 기능/사용법 조사를 대화로 즉시 해결</a:t>
+            </a:r>
+          </a:p>
+          <a:p>
+            <a:pPr>
+              <a:spcBef>
+                <a:spcPts val="800"/>
+              </a:spcBef>
+            </a:pPr>
+            <a:r>
+              <a:rPr sz="1200" b="0">
+                <a:solidFill>
+                  <a:srgbClr val="222833"/>
+                </a:solidFill>
+                <a:latin typeface="Malgun Gothic"/>
+              </a:rPr>
+              <a:t>•  문서 탐색 시간 절감</a:t>
+            </a:r>
+          </a:p>
+        </p:txBody>
+      </p:sp>
+      <p:sp>
+        <p:nvSpPr>
+          <p:cNvPr id="10" name="Rounded Rectangle 9"/>
+          <p:cNvSpPr/>
+          <p:nvPr/>
+        </p:nvSpPr>
+        <p:spPr>
+          <a:xfrm>
+            <a:off x="4370832" y="1783080"/>
+            <a:ext cx="3456432" cy="566928"/>
+          </a:xfrm>
+          <a:prstGeom prst="roundRect">
+            <a:avLst/>
+          </a:prstGeom>
+          <a:solidFill>
+            <a:srgbClr val="149E8A"/>
+          </a:solidFill>
+          <a:ln>
+            <a:noFill/>
+          </a:ln>
+          <a:effectLst/>
+        </p:spPr>
+        <p:style>
+          <a:lnRef idx="1">
+            <a:schemeClr val="accent1"/>
+          </a:lnRef>
+          <a:fillRef idx="3">
+            <a:schemeClr val="accent1"/>
+          </a:fillRef>
+          <a:effectRef idx="2">
+            <a:schemeClr val="accent1"/>
+          </a:effectRef>
+          <a:fontRef idx="minor">
+            <a:schemeClr val="lt1"/>
+          </a:fontRef>
+        </p:style>
+        <p:txBody>
+          <a:bodyPr rtlCol="0" anchor="ctr"/>
+          <a:lstStyle/>
+          <a:p>
+            <a:pPr algn="ctr"/>
+          </a:p>
+        </p:txBody>
+      </p:sp>
+      <p:sp>
+        <p:nvSpPr>
+          <p:cNvPr id="11" name="TextBox 10"/>
+          <p:cNvSpPr txBox="1"/>
+          <p:nvPr/>
+        </p:nvSpPr>
+        <p:spPr>
+          <a:xfrm>
+            <a:off x="4370832" y="1783080"/>
+            <a:ext cx="3456432" cy="566928"/>
+          </a:xfrm>
+          <a:prstGeom prst="rect">
+            <a:avLst/>
+          </a:prstGeom>
+          <a:noFill/>
+        </p:spPr>
+        <p:txBody>
+          <a:bodyPr wrap="square" anchor="ctr">
+            <a:spAutoFit/>
+          </a:bodyPr>
+          <a:lstStyle/>
+          <a:p>
+            <a:pPr algn="ctr">
+              <a:spcBef>
+                <a:spcPts val="0"/>
+              </a:spcBef>
+            </a:pPr>
+            <a:r>
+              <a:rPr sz="1450" b="1">
+                <a:solidFill>
+                  <a:srgbClr val="FFFFFF"/>
+                </a:solidFill>
+                <a:latin typeface="Malgun Gothic"/>
+              </a:rPr>
+              <a:t>리서치 부담 감소</a:t>
+            </a:r>
+          </a:p>
+        </p:txBody>
+      </p:sp>
+      <p:sp>
+        <p:nvSpPr>
+          <p:cNvPr id="12" name="Rounded Rectangle 11"/>
+          <p:cNvSpPr/>
+          <p:nvPr/>
+        </p:nvSpPr>
+        <p:spPr>
+          <a:xfrm>
+            <a:off x="8101584" y="1783080"/>
+            <a:ext cx="3456432" cy="2148840"/>
+          </a:xfrm>
+          <a:prstGeom prst="roundRect">
+            <a:avLst/>
+          </a:prstGeom>
+          <a:solidFill>
+            <a:srgbClr val="FFFFFF"/>
+          </a:solidFill>
+          <a:ln w="12700">
+            <a:solidFill>
+              <a:srgbClr val="DDE3EF"/>
+            </a:solidFill>
+          </a:ln>
+          <a:effectLst/>
+        </p:spPr>
+        <p:style>
+          <a:lnRef idx="1">
+            <a:schemeClr val="accent1"/>
+          </a:lnRef>
+          <a:fillRef idx="3">
+            <a:schemeClr val="accent1"/>
+          </a:fillRef>
+          <a:effectRef idx="2">
+            <a:schemeClr val="accent1"/>
+          </a:effectRef>
+          <a:fontRef idx="minor">
+            <a:schemeClr val="lt1"/>
+          </a:fontRef>
+        </p:style>
+        <p:txBody>
+          <a:bodyPr rtlCol="0" anchor="ctr" lIns="237744" tIns="777240" wrap="square"/>
+          <a:lstStyle/>
+          <a:p>
+            <a:pPr algn="ctr">
+              <a:spcBef>
+                <a:spcPts val="800"/>
+              </a:spcBef>
+            </a:pPr>
+            <a:r>
+              <a:rPr sz="1200" b="0">
+                <a:solidFill>
+                  <a:srgbClr val="222833"/>
+                </a:solidFill>
+                <a:latin typeface="Malgun Gothic"/>
+              </a:rPr>
+              <a:t>•  사내 표준의 일관 적용</a:t>
+            </a:r>
+          </a:p>
+          <a:p>
+            <a:pPr>
+              <a:spcBef>
+                <a:spcPts val="800"/>
+              </a:spcBef>
+            </a:pPr>
+            <a:r>
+              <a:rPr sz="1200" b="0">
+                <a:solidFill>
+                  <a:srgbClr val="222833"/>
+                </a:solidFill>
+                <a:latin typeface="Malgun Gothic"/>
+              </a:rPr>
+              <a:t>•  휴먼 에러 · 재작업 감소</a:t>
+            </a:r>
+          </a:p>
+        </p:txBody>
+      </p:sp>
+      <p:sp>
+        <p:nvSpPr>
+          <p:cNvPr id="13" name="Rounded Rectangle 12"/>
+          <p:cNvSpPr/>
+          <p:nvPr/>
+        </p:nvSpPr>
+        <p:spPr>
+          <a:xfrm>
+            <a:off x="8101584" y="1783080"/>
+            <a:ext cx="3456432" cy="566928"/>
+          </a:xfrm>
+          <a:prstGeom prst="roundRect">
+            <a:avLst/>
+          </a:prstGeom>
+          <a:solidFill>
+            <a:srgbClr val="E8A31C"/>
+          </a:solidFill>
+          <a:ln>
+            <a:noFill/>
+          </a:ln>
+          <a:effectLst/>
+        </p:spPr>
+        <p:style>
+          <a:lnRef idx="1">
+            <a:schemeClr val="accent1"/>
+          </a:lnRef>
+          <a:fillRef idx="3">
+            <a:schemeClr val="accent1"/>
+          </a:fillRef>
+          <a:effectRef idx="2">
+            <a:schemeClr val="accent1"/>
+          </a:effectRef>
+          <a:fontRef idx="minor">
+            <a:schemeClr val="lt1"/>
+          </a:fontRef>
+        </p:style>
+        <p:txBody>
+          <a:bodyPr rtlCol="0" anchor="ctr"/>
+          <a:lstStyle/>
+          <a:p>
+            <a:pPr algn="ctr"/>
+          </a:p>
+        </p:txBody>
+      </p:sp>
+      <p:sp>
+        <p:nvSpPr>
+          <p:cNvPr id="14" name="TextBox 13"/>
+          <p:cNvSpPr txBox="1"/>
+          <p:nvPr/>
+        </p:nvSpPr>
+        <p:spPr>
+          <a:xfrm>
+            <a:off x="8101584" y="1783080"/>
+            <a:ext cx="3456432" cy="566928"/>
+          </a:xfrm>
+          <a:prstGeom prst="rect">
+            <a:avLst/>
+          </a:prstGeom>
+          <a:noFill/>
+        </p:spPr>
+        <p:txBody>
+          <a:bodyPr wrap="square" anchor="ctr">
+            <a:spAutoFit/>
+          </a:bodyPr>
+          <a:lstStyle/>
+          <a:p>
+            <a:pPr algn="ctr">
+              <a:spcBef>
+                <a:spcPts val="0"/>
+              </a:spcBef>
+            </a:pPr>
+            <a:r>
+              <a:rPr sz="1450" b="1">
+                <a:solidFill>
+                  <a:srgbClr val="FFFFFF"/>
+                </a:solidFill>
+                <a:latin typeface="Malgun Gothic"/>
+              </a:rPr>
+              <a:t>품질 · 표준 준수</a:t>
+            </a:r>
+          </a:p>
+        </p:txBody>
+      </p:sp>
+      <p:sp>
+        <p:nvSpPr>
+          <p:cNvPr id="15" name="Rounded Rectangle 14"/>
+          <p:cNvSpPr/>
+          <p:nvPr/>
+        </p:nvSpPr>
+        <p:spPr>
+          <a:xfrm>
+            <a:off x="640080" y="4206240"/>
+            <a:ext cx="10908792" cy="1554480"/>
+          </a:xfrm>
+          <a:prstGeom prst="roundRect">
+            <a:avLst/>
+          </a:prstGeom>
+          <a:solidFill>
+            <a:srgbClr val="EAF0FF"/>
+          </a:solidFill>
+          <a:ln>
+            <a:noFill/>
+          </a:ln>
+          <a:effectLst/>
+        </p:spPr>
+        <p:style>
+          <a:lnRef idx="1">
+            <a:schemeClr val="accent1"/>
+          </a:lnRef>
+          <a:fillRef idx="3">
+            <a:schemeClr val="accent1"/>
+          </a:fillRef>
+          <a:effectRef idx="2">
+            <a:schemeClr val="accent1"/>
+          </a:effectRef>
+          <a:fontRef idx="minor">
+            <a:schemeClr val="lt1"/>
+          </a:fontRef>
+        </p:style>
+        <p:txBody>
+          <a:bodyPr rtlCol="0" anchor="ctr" lIns="320040" tIns="182880" wrap="square"/>
+          <a:lstStyle/>
+          <a:p>
+            <a:pPr algn="ctr">
+              <a:spcBef>
+                <a:spcPts val="0"/>
+              </a:spcBef>
+            </a:pPr>
+            <a:r>
+              <a:rPr sz="1400" b="1">
+                <a:solidFill>
+                  <a:srgbClr val="2E5BFF"/>
+                </a:solidFill>
+                <a:latin typeface="Malgun Gothic"/>
+              </a:rPr>
+              <a:t>효과 규모 (추정)</a:t>
+            </a:r>
+          </a:p>
+          <a:p>
+            <a:pPr>
+              <a:spcBef>
+                <a:spcPts val="600"/>
+              </a:spcBef>
+            </a:pPr>
+            <a:r>
+              <a:rPr sz="1300" b="0">
+                <a:solidFill>
+                  <a:srgbClr val="222833"/>
+                </a:solidFill>
+                <a:latin typeface="Malgun Gothic"/>
+              </a:rPr>
+              <a:t>설계 문서화 · 표준 API 조사 · 오류 수정 사이클 시간이 수작업 대비 크게 단축된 것으로 추정됩니다.</a:t>
+            </a:r>
+          </a:p>
+          <a:p>
+            <a:pPr>
+              <a:spcBef>
+                <a:spcPts val="600"/>
+              </a:spcBef>
+            </a:pPr>
+            <a:r>
+              <a:rPr sz="1150" b="0">
+                <a:solidFill>
+                  <a:srgbClr val="5A5A5A"/>
+                </a:solidFill>
+                <a:latin typeface="Malgun Gothic"/>
+              </a:rPr>
+              <a:t>※ 정량 수치는 향후 개발 소요시간 전/후 비교로 실측하여 보완 예정</a:t>
+            </a:r>
+          </a:p>
+        </p:txBody>
+      </p:sp>
+    </p:spTree>
+  </p:cSld>
+  <p:clrMapOvr>
+    <a:masterClrMapping/>
+  </p:clrMapOvr>
+</p:sld>
+</file>
+
+<file path=ppt/slides/slide6.xml><?xml version="1.0" encoding="utf-8"?>
+<p:sld xmlns:a="http://schemas.openxmlformats.org/drawingml/2006/main" xmlns:p="http://schemas.openxmlformats.org/presentationml/2006/main" xmlns:r="http://schemas.openxmlformats.org/officeDocument/2006/relationships">
+  <p:cSld>
+    <p:spTree>
+      <p:nvGrpSpPr>
+        <p:cNvPr id="1" name=""/>
+        <p:cNvGrpSpPr/>
+        <p:nvPr/>
+      </p:nvGrpSpPr>
+      <p:grpSpPr/>
+      <p:sp>
+        <p:nvSpPr>
+          <p:cNvPr id="2" name="Rectangle 1"/>
+          <p:cNvSpPr/>
+          <p:nvPr/>
+        </p:nvSpPr>
+        <p:spPr>
+          <a:xfrm>
+            <a:off x="0" y="0"/>
+            <a:ext cx="12191695" cy="6858000"/>
+          </a:xfrm>
+          <a:prstGeom prst="rect">
+            <a:avLst/>
+          </a:prstGeom>
+          <a:solidFill>
+            <a:srgbClr val="F6F8FC"/>
+          </a:solidFill>
+          <a:ln>
+            <a:noFill/>
+          </a:ln>
+          <a:effectLst/>
+        </p:spPr>
+        <p:style>
+          <a:lnRef idx="1">
+            <a:schemeClr val="accent1"/>
+          </a:lnRef>
+          <a:fillRef idx="3">
+            <a:schemeClr val="accent1"/>
+          </a:fillRef>
+          <a:effectRef idx="2">
+            <a:schemeClr val="accent1"/>
+          </a:effectRef>
+          <a:fontRef idx="minor">
+            <a:schemeClr val="lt1"/>
+          </a:fontRef>
+        </p:style>
+        <p:txBody>
+          <a:bodyPr rtlCol="0" anchor="ctr"/>
+          <a:lstStyle/>
+          <a:p>
+            <a:pPr algn="ctr"/>
+          </a:p>
+        </p:txBody>
+      </p:sp>
+      <p:sp>
+        <p:nvSpPr>
+          <p:cNvPr id="3" name="TextBox 2"/>
+          <p:cNvSpPr txBox="1"/>
+          <p:nvPr/>
+        </p:nvSpPr>
+        <p:spPr>
+          <a:xfrm>
+            <a:off x="640080" y="411480"/>
+            <a:ext cx="10972800" cy="365760"/>
+          </a:xfrm>
+          <a:prstGeom prst="rect">
+            <a:avLst/>
+          </a:prstGeom>
+          <a:noFill/>
+        </p:spPr>
+        <p:txBody>
+          <a:bodyPr wrap="square">
+            <a:spAutoFit/>
+          </a:bodyPr>
+          <a:lstStyle/>
+          <a:p>
+            <a:pPr>
+              <a:spcBef>
+                <a:spcPts val="0"/>
+              </a:spcBef>
+            </a:pPr>
+            <a:r>
+              <a:rPr sz="1300" b="1">
+                <a:solidFill>
+                  <a:srgbClr val="2E5BFF"/>
+                </a:solidFill>
+                <a:latin typeface="Malgun Gothic"/>
+              </a:rPr>
+              <a:t>05  IMPACT &amp; NEXT STEPS</a:t>
             </a:r>
           </a:p>
         </p:txBody>

--- a/docs/report/Y_OPS_MONITOR_V2_발표자료.pptx
+++ b/docs/report/Y_OPS_MONITOR_V2_발표자료.pptx
@@ -509,12 +509,17 @@
           <a:lstStyle/>
           <a:p>
             <a:r>
-              <a:t>【0:00–0:40】 인사 및 목적 한 문장.</a:t>
-            </a:r>
-          </a:p>
-          <a:p>
-            <a:r>
-              <a:t>“오늘은 결과물 데모보다, AI를 개발 전 과정에 적용해 얻은 생산성·품질 효과를 중심으로 보고드리겠습니다.”</a:t>
+              <a:t>【0:00–0:45】</a:t>
+            </a:r>
+          </a:p>
+          <a:p>
+            <a:r>
+              <a:t>인사 후 한 문장으로 프레임을 고정합니다.</a:t>
+            </a:r>
+          </a:p>
+          <a:p>
+            <a:r>
+              <a:t>“오늘은 프로그램 기능 설명이 아닙니다. AI를 어떻게 써야 일이 빨라지고 품질이 유지되는지, 그리고 우리가 어떤 방향으로 가야 하는지를 말씀드리겠습니다.”</a:t>
             </a:r>
           </a:p>
         </p:txBody>
@@ -584,7 +589,12 @@
           <a:lstStyle/>
           <a:p>
             <a:r>
-              <a:t>【0:40–1:10】 아젠다를 한 줄씩 짚고, 오늘은 데모보다 방법론·효과에 비중을 둔다고 안내.</a:t>
+              <a:t>【0:45–1:30】</a:t>
+            </a:r>
+          </a:p>
+          <a:p>
+            <a:r>
+              <a:t>두 질문만 남기고 넘어갑니다. “기능 데모는 필요하시면 별도로 드리겠습니다.”</a:t>
             </a:r>
           </a:p>
         </p:txBody>
@@ -654,12 +664,12 @@
           <a:lstStyle/>
           <a:p>
             <a:r>
-              <a:t>【1:10–2:20】 운영자가 매일 겪는 현실을 짧게.</a:t>
-            </a:r>
-          </a:p>
-          <a:p>
-            <a:r>
-              <a:t>“기능이 없어서가 아니라, 정보가 흩어져 있어 점검 비용이 큽니다.”</a:t>
+              <a:t>【1:30–2:40】</a:t>
+            </a:r>
+          </a:p>
+          <a:p>
+            <a:r>
+              <a:t>비판이 아니라 공통 함정입니다. “우리는 이 네 가지를 피하기 위해 규칙을 먼저 고정했습니다.”</a:t>
             </a:r>
           </a:p>
         </p:txBody>
@@ -729,12 +739,12 @@
           <a:lstStyle/>
           <a:p>
             <a:r>
-              <a:t>【2:20–3:40】 솔루션은 1분 내로 압축.</a:t>
-            </a:r>
-          </a:p>
-          <a:p>
-            <a:r>
-              <a:t>“핵심은 통합 뷰 + 읽기 전용 안전장치입니다. 데모는 필요 시 별도.”</a:t>
+              <a:t>【2:40–4:10】 핵심 슬라이드.</a:t>
+            </a:r>
+          </a:p>
+          <a:p>
+            <a:r>
+              <a:t>“효율의 본질은 모델 성능이 아니라, 범위·표준·검증이 고정되어 있는 구조입니다.”</a:t>
             </a:r>
           </a:p>
         </p:txBody>
@@ -804,12 +814,12 @@
           <a:lstStyle/>
           <a:p>
             <a:r>
-              <a:t>【3:40–5:20】 핵심 슬라이드. 5개 단계별로 실제 사례 한 문장씩.</a:t>
-            </a:r>
-          </a:p>
-          <a:p>
-            <a:r>
-              <a:t>예: “권한은 STAUTHTRACE 엑셀을 AI가 읽어 객체를 도출했고, 사람은 최종 값만 확정했습니다.”</a:t>
+              <a:t>【4:10–5:30】</a:t>
+            </a:r>
+          </a:p>
+          <a:p>
+            <a:r>
+              <a:t>프로그램 기능을 길게 설명하지 않습니다. “사례는 증거일 뿐, 메시지는 사용 구조입니다.”</a:t>
             </a:r>
           </a:p>
         </p:txBody>
@@ -879,7 +889,12 @@
           <a:lstStyle/>
           <a:p>
             <a:r>
-              <a:t>【5:20–6:50】 “프롬프트를 잘 쓰는 것”이 아니라 “표준을 코드처럼 저장소에 고정”한 점이 차별점이라고 강조.</a:t>
+              <a:t>【5:30–7:00】</a:t>
+            </a:r>
+          </a:p>
+          <a:p>
+            <a:r>
+              <a:t>상무님께 가장 전달하고 싶은 슬라이드. “도구 도입만으로는 부족하고, 규칙 자산화가 필요합니다.”</a:t>
             </a:r>
           </a:p>
         </p:txBody>
@@ -949,7 +964,12 @@
           <a:lstStyle/>
           <a:p>
             <a:r>
-              <a:t>【6:50–8:10】 숫자를 과장하지 말 것. “추정”임을 분명히 하고, 실측 계획을 다음 슬라이드와 연결.</a:t>
+              <a:t>【7:00–8:40】</a:t>
+            </a:r>
+          </a:p>
+          <a:p>
+            <a:r>
+              <a:t>방향은 네 줄로만. “다음 과제는 기능이 아니라, 이 네 가지를 조직 습관으로 만드는 일입니다.”</a:t>
             </a:r>
           </a:p>
         </p:txBody>
@@ -1019,12 +1039,17 @@
           <a:lstStyle/>
           <a:p>
             <a:r>
-              <a:t>【8:10–9:40】 기대효과 → 향후계획 → 핵심메시지.</a:t>
-            </a:r>
-          </a:p>
-          <a:p>
-            <a:r>
-              <a:t>【9:40–10:00】 Q&amp;A 유도. 예상 질문: 정량 수치, 보안/권한, 운영 적용 일정, 타 과제 확대.</a:t>
+              <a:t>【8:40–10:00】</a:t>
+            </a:r>
+          </a:p>
+          <a:p>
+            <a:r>
+              <a:t>핵심 메시지 한 번 반복 후 Q&amp;A.</a:t>
+            </a:r>
+          </a:p>
+          <a:p>
+            <a:r>
+              <a:t>예상 질문: 보안/데이터, 정량 수치, 적용 범위, 교육 방식.</a:t>
             </a:r>
           </a:p>
         </p:txBody>
@@ -4045,7 +4070,7 @@
             <a:avLst/>
           </a:prstGeom>
           <a:solidFill>
-            <a:srgbClr val="FFFFFF"/>
+            <a:srgbClr val="0B1220"/>
           </a:solidFill>
           <a:ln>
             <a:noFill/>
@@ -4083,13 +4108,13 @@
         <p:spPr>
           <a:xfrm>
             <a:off x="0" y="0"/>
-            <a:ext cx="256032" cy="6858000"/>
+            <a:ext cx="164592" cy="6858000"/>
           </a:xfrm>
           <a:prstGeom prst="rect">
             <a:avLst/>
           </a:prstGeom>
           <a:solidFill>
-            <a:srgbClr val="0F1F3D"/>
+            <a:srgbClr val="B88A2E"/>
           </a:solidFill>
           <a:ln>
             <a:noFill/>
@@ -4120,20 +4145,184 @@
       </p:sp>
       <p:sp>
         <p:nvSpPr>
-          <p:cNvPr id="4" name="Rectangle 3"/>
+          <p:cNvPr id="4" name="TextBox 3"/>
+          <p:cNvSpPr txBox="1"/>
+          <p:nvPr/>
+        </p:nvSpPr>
+        <p:spPr>
+          <a:xfrm>
+            <a:off x="822960" y="1645920"/>
+            <a:ext cx="10515600" cy="320040"/>
+          </a:xfrm>
+          <a:prstGeom prst="rect">
+            <a:avLst/>
+          </a:prstGeom>
+          <a:noFill/>
+        </p:spPr>
+        <p:txBody>
+          <a:bodyPr wrap="square">
+            <a:spAutoFit/>
+          </a:bodyPr>
+          <a:lstStyle/>
+          <a:p>
+            <a:pPr>
+              <a:spcBef>
+                <a:spcPts val="0"/>
+              </a:spcBef>
+              <a:spcAft>
+                <a:spcPts val="0"/>
+              </a:spcAft>
+            </a:pPr>
+            <a:r>
+              <a:rPr sz="1100" b="1">
+                <a:solidFill>
+                  <a:srgbClr val="B88A2E"/>
+                </a:solidFill>
+                <a:latin typeface="Malgun Gothic"/>
+              </a:rPr>
+              <a:t>INTERNAL BRIEFING</a:t>
+            </a:r>
+          </a:p>
+        </p:txBody>
+      </p:sp>
+      <p:sp>
+        <p:nvSpPr>
+          <p:cNvPr id="5" name="TextBox 4"/>
+          <p:cNvSpPr txBox="1"/>
+          <p:nvPr/>
+        </p:nvSpPr>
+        <p:spPr>
+          <a:xfrm>
+            <a:off x="822960" y="2103120"/>
+            <a:ext cx="10789920" cy="1371600"/>
+          </a:xfrm>
+          <a:prstGeom prst="rect">
+            <a:avLst/>
+          </a:prstGeom>
+          <a:noFill/>
+        </p:spPr>
+        <p:txBody>
+          <a:bodyPr wrap="square">
+            <a:spAutoFit/>
+          </a:bodyPr>
+          <a:lstStyle/>
+          <a:p>
+            <a:pPr>
+              <a:spcBef>
+                <a:spcPts val="0"/>
+              </a:spcBef>
+              <a:spcAft>
+                <a:spcPts val="0"/>
+              </a:spcAft>
+            </a:pPr>
+            <a:r>
+              <a:rPr sz="3400" b="1">
+                <a:solidFill>
+                  <a:srgbClr val="FFFFFF"/>
+                </a:solidFill>
+                <a:latin typeface="Malgun Gothic"/>
+              </a:rPr>
+              <a:t>AI를 쓰는 것과</a:t>
+            </a:r>
+          </a:p>
+          <a:p>
+            <a:pPr>
+              <a:spcBef>
+                <a:spcPts val="800"/>
+              </a:spcBef>
+              <a:spcAft>
+                <a:spcPts val="0"/>
+              </a:spcAft>
+            </a:pPr>
+            <a:r>
+              <a:rPr sz="3400" b="1">
+                <a:solidFill>
+                  <a:srgbClr val="FFFFFF"/>
+                </a:solidFill>
+                <a:latin typeface="Malgun Gothic"/>
+              </a:rPr>
+              <a:t>AI를 잘 쓰는 것은 다릅니다</a:t>
+            </a:r>
+          </a:p>
+        </p:txBody>
+      </p:sp>
+      <p:sp>
+        <p:nvSpPr>
+          <p:cNvPr id="6" name="TextBox 5"/>
+          <p:cNvSpPr txBox="1"/>
+          <p:nvPr/>
+        </p:nvSpPr>
+        <p:spPr>
+          <a:xfrm>
+            <a:off x="822960" y="3749039"/>
+            <a:ext cx="10515600" cy="731520"/>
+          </a:xfrm>
+          <a:prstGeom prst="rect">
+            <a:avLst/>
+          </a:prstGeom>
+          <a:noFill/>
+        </p:spPr>
+        <p:txBody>
+          <a:bodyPr wrap="square">
+            <a:spAutoFit/>
+          </a:bodyPr>
+          <a:lstStyle/>
+          <a:p>
+            <a:pPr>
+              <a:spcBef>
+                <a:spcPts val="0"/>
+              </a:spcBef>
+              <a:spcAft>
+                <a:spcPts val="0"/>
+              </a:spcAft>
+            </a:pPr>
+            <a:r>
+              <a:rPr sz="1600" b="0">
+                <a:solidFill>
+                  <a:srgbClr val="8B95A5"/>
+                </a:solidFill>
+                <a:latin typeface="Malgun Gothic"/>
+              </a:rPr>
+              <a:t>개발 업무에서의 AI 활용 효율과, 조직이 가져가야 할 방향</a:t>
+            </a:r>
+          </a:p>
+          <a:p>
+            <a:pPr>
+              <a:spcBef>
+                <a:spcPts val="800"/>
+              </a:spcBef>
+              <a:spcAft>
+                <a:spcPts val="0"/>
+              </a:spcAft>
+            </a:pPr>
+            <a:r>
+              <a:rPr sz="1400" b="0">
+                <a:solidFill>
+                  <a:srgbClr val="5A6678"/>
+                </a:solidFill>
+                <a:latin typeface="Malgun Gothic"/>
+              </a:rPr>
+              <a:t>사례: SAP 통합 운영 모니터링 개발 (Cursor 적용)</a:t>
+            </a:r>
+          </a:p>
+        </p:txBody>
+      </p:sp>
+      <p:sp>
+        <p:nvSpPr>
+          <p:cNvPr id="7" name="Rectangle 6"/>
           <p:cNvSpPr/>
           <p:nvPr/>
         </p:nvSpPr>
         <p:spPr>
           <a:xfrm>
-            <a:off x="256032" y="0"/>
-            <a:ext cx="54864" cy="6858000"/>
+            <a:off x="0" y="5806440"/>
+            <a:ext cx="12191695" cy="1051560"/>
           </a:xfrm>
           <a:prstGeom prst="rect">
             <a:avLst/>
           </a:prstGeom>
           <a:solidFill>
-            <a:srgbClr val="C48A1A"/>
+            <a:srgbClr val="121C2E"/>
           </a:solidFill>
           <a:ln>
             <a:noFill/>
@@ -4164,14 +4353,14 @@
       </p:sp>
       <p:sp>
         <p:nvSpPr>
-          <p:cNvPr id="5" name="TextBox 4"/>
+          <p:cNvPr id="8" name="TextBox 7"/>
           <p:cNvSpPr txBox="1"/>
           <p:nvPr/>
         </p:nvSpPr>
         <p:spPr>
           <a:xfrm>
-            <a:off x="777240" y="1417320"/>
-            <a:ext cx="10515600" cy="365760"/>
+            <a:off x="822960" y="5943600"/>
+            <a:ext cx="2560320" cy="731520"/>
           </a:xfrm>
           <a:prstGeom prst="rect">
             <a:avLst/>
@@ -4193,160 +4382,13 @@
               </a:spcAft>
             </a:pPr>
             <a:r>
-              <a:rPr sz="1300" b="1">
-                <a:solidFill>
-                  <a:srgbClr val="1E4D8C"/>
+              <a:rPr sz="900" b="1">
+                <a:solidFill>
+                  <a:srgbClr val="B88A2E"/>
                 </a:solidFill>
                 <a:latin typeface="Malgun Gothic"/>
               </a:rPr>
-              <a:t>AI 활용 개발 성과 보고</a:t>
-            </a:r>
-          </a:p>
-        </p:txBody>
-      </p:sp>
-      <p:sp>
-        <p:nvSpPr>
-          <p:cNvPr id="6" name="TextBox 5"/>
-          <p:cNvSpPr txBox="1"/>
-          <p:nvPr/>
-        </p:nvSpPr>
-        <p:spPr>
-          <a:xfrm>
-            <a:off x="777240" y="1920240"/>
-            <a:ext cx="10789920" cy="1463040"/>
-          </a:xfrm>
-          <a:prstGeom prst="rect">
-            <a:avLst/>
-          </a:prstGeom>
-          <a:noFill/>
-        </p:spPr>
-        <p:txBody>
-          <a:bodyPr wrap="square">
-            <a:spAutoFit/>
-          </a:bodyPr>
-          <a:lstStyle/>
-          <a:p>
-            <a:pPr>
-              <a:spcBef>
-                <a:spcPts val="0"/>
-              </a:spcBef>
-              <a:spcAft>
-                <a:spcPts val="0"/>
-              </a:spcAft>
-            </a:pPr>
-            <a:r>
-              <a:rPr sz="3200" b="1">
-                <a:solidFill>
-                  <a:srgbClr val="0F1F3D"/>
-                </a:solidFill>
-                <a:latin typeface="Malgun Gothic"/>
-              </a:rPr>
-              <a:t>Cursor 기반 AI 페어프로그래밍으로</a:t>
-            </a:r>
-          </a:p>
-          <a:p>
-            <a:pPr>
-              <a:spcBef>
-                <a:spcPts val="600"/>
-              </a:spcBef>
-              <a:spcAft>
-                <a:spcPts val="0"/>
-              </a:spcAft>
-            </a:pPr>
-            <a:r>
-              <a:rPr sz="3200" b="1">
-                <a:solidFill>
-                  <a:srgbClr val="0F1F3D"/>
-                </a:solidFill>
-                <a:latin typeface="Malgun Gothic"/>
-              </a:rPr>
-              <a:t>구축한 통합 운영 모니터링</a:t>
-            </a:r>
-          </a:p>
-        </p:txBody>
-      </p:sp>
-      <p:sp>
-        <p:nvSpPr>
-          <p:cNvPr id="7" name="Rectangle 6"/>
-          <p:cNvSpPr/>
-          <p:nvPr/>
-        </p:nvSpPr>
-        <p:spPr>
-          <a:xfrm>
-            <a:off x="822960" y="3611880"/>
-            <a:ext cx="1645920" cy="50800"/>
-          </a:xfrm>
-          <a:prstGeom prst="rect">
-            <a:avLst/>
-          </a:prstGeom>
-          <a:solidFill>
-            <a:srgbClr val="C48A1A"/>
-          </a:solidFill>
-          <a:ln>
-            <a:noFill/>
-          </a:ln>
-          <a:effectLst/>
-        </p:spPr>
-        <p:style>
-          <a:lnRef idx="1">
-            <a:schemeClr val="accent1"/>
-          </a:lnRef>
-          <a:fillRef idx="3">
-            <a:schemeClr val="accent1"/>
-          </a:fillRef>
-          <a:effectRef idx="2">
-            <a:schemeClr val="accent1"/>
-          </a:effectRef>
-          <a:fontRef idx="minor">
-            <a:schemeClr val="lt1"/>
-          </a:fontRef>
-        </p:style>
-        <p:txBody>
-          <a:bodyPr rtlCol="0" anchor="ctr"/>
-          <a:lstStyle/>
-          <a:p>
-            <a:pPr algn="ctr"/>
-          </a:p>
-        </p:txBody>
-      </p:sp>
-      <p:sp>
-        <p:nvSpPr>
-          <p:cNvPr id="8" name="TextBox 7"/>
-          <p:cNvSpPr txBox="1"/>
-          <p:nvPr/>
-        </p:nvSpPr>
-        <p:spPr>
-          <a:xfrm>
-            <a:off x="777240" y="3886200"/>
-            <a:ext cx="10515600" cy="822960"/>
-          </a:xfrm>
-          <a:prstGeom prst="rect">
-            <a:avLst/>
-          </a:prstGeom>
-          <a:noFill/>
-        </p:spPr>
-        <p:txBody>
-          <a:bodyPr wrap="square">
-            <a:spAutoFit/>
-          </a:bodyPr>
-          <a:lstStyle/>
-          <a:p>
-            <a:pPr>
-              <a:spcBef>
-                <a:spcPts val="0"/>
-              </a:spcBef>
-              <a:spcAft>
-                <a:spcPts val="0"/>
-              </a:spcAft>
-            </a:pPr>
-            <a:r>
-              <a:rPr sz="1500" b="0">
-                <a:solidFill>
-                  <a:srgbClr val="5B677A"/>
-                </a:solidFill>
-                <a:latin typeface="Malgun Gothic"/>
-              </a:rPr>
-              <a:t>SM37 · ST22 · SXI_MONITOR 점검을 단일 대시보드로 통합하고,</a:t>
+              <a:t>Audience</a:t>
             </a:r>
           </a:p>
           <a:p>
@@ -4359,60 +4401,40 @@
               </a:spcAft>
             </a:pPr>
             <a:r>
-              <a:rPr sz="1500" b="0">
-                <a:solidFill>
-                  <a:srgbClr val="5B677A"/>
+              <a:rPr sz="1300" b="0">
+                <a:solidFill>
+                  <a:srgbClr val="FFFFFF"/>
                 </a:solidFill>
                 <a:latin typeface="Malgun Gothic"/>
               </a:rPr>
-              <a:t>개발 전 과정에 AI를 적용해 생산성·품질 표준화 효과를 검증한 사례입니다.</a:t>
-            </a:r>
-          </a:p>
-        </p:txBody>
-      </p:sp>
-      <p:sp>
-        <p:nvSpPr>
-          <p:cNvPr id="9" name="Rounded Rectangle 8"/>
-          <p:cNvSpPr/>
-          <p:nvPr/>
-        </p:nvSpPr>
-        <p:spPr>
-          <a:xfrm>
-            <a:off x="777240" y="5074920"/>
-            <a:ext cx="2606040" cy="777240"/>
-          </a:xfrm>
-          <a:prstGeom prst="roundRect">
-            <a:avLst/>
-          </a:prstGeom>
-          <a:solidFill>
-            <a:srgbClr val="F3F5F9"/>
-          </a:solidFill>
-          <a:ln w="12700">
-            <a:solidFill>
-              <a:srgbClr val="D8DEE9"/>
-            </a:solidFill>
-          </a:ln>
-          <a:effectLst/>
-        </p:spPr>
-        <p:style>
-          <a:lnRef idx="1">
-            <a:schemeClr val="accent1"/>
-          </a:lnRef>
-          <a:fillRef idx="3">
-            <a:schemeClr val="accent1"/>
-          </a:fillRef>
-          <a:effectRef idx="2">
-            <a:schemeClr val="accent1"/>
-          </a:effectRef>
-          <a:fontRef idx="minor">
-            <a:schemeClr val="lt1"/>
-          </a:fontRef>
-        </p:style>
-        <p:txBody>
-          <a:bodyPr rtlCol="0" anchor="ctr" lIns="164592" tIns="109728"/>
-          <a:lstStyle/>
-          <a:p>
-            <a:pPr algn="ctr">
+              <a:t>상무님 포함 동료</a:t>
+            </a:r>
+          </a:p>
+        </p:txBody>
+      </p:sp>
+      <p:sp>
+        <p:nvSpPr>
+          <p:cNvPr id="9" name="TextBox 8"/>
+          <p:cNvSpPr txBox="1"/>
+          <p:nvPr/>
+        </p:nvSpPr>
+        <p:spPr>
+          <a:xfrm>
+            <a:off x="3611880" y="5943600"/>
+            <a:ext cx="2560320" cy="731520"/>
+          </a:xfrm>
+          <a:prstGeom prst="rect">
+            <a:avLst/>
+          </a:prstGeom>
+          <a:noFill/>
+        </p:spPr>
+        <p:txBody>
+          <a:bodyPr wrap="square">
+            <a:spAutoFit/>
+          </a:bodyPr>
+          <a:lstStyle/>
+          <a:p>
+            <a:pPr>
               <a:spcBef>
                 <a:spcPts val="0"/>
               </a:spcBef>
@@ -4421,109 +4443,28 @@
               </a:spcAft>
             </a:pPr>
             <a:r>
-              <a:rPr sz="1000" b="1">
-                <a:solidFill>
-                  <a:srgbClr val="1E4D8C"/>
+              <a:rPr sz="900" b="1">
+                <a:solidFill>
+                  <a:srgbClr val="B88A2E"/>
                 </a:solidFill>
                 <a:latin typeface="Malgun Gothic"/>
               </a:rPr>
-              <a:t>대상</a:t>
+              <a:t>Duration</a:t>
             </a:r>
           </a:p>
           <a:p>
             <a:pPr>
               <a:spcBef>
-                <a:spcPts val="200"/>
+                <a:spcPts val="400"/>
               </a:spcBef>
               <a:spcAft>
                 <a:spcPts val="0"/>
               </a:spcAft>
             </a:pPr>
             <a:r>
-              <a:rPr sz="1200" b="1">
-                <a:solidFill>
-                  <a:srgbClr val="0F1F3D"/>
-                </a:solidFill>
-                <a:latin typeface="Malgun Gothic"/>
-              </a:rPr>
-              <a:t>상무님 포함 사내 동료</a:t>
-            </a:r>
-          </a:p>
-        </p:txBody>
-      </p:sp>
-      <p:sp>
-        <p:nvSpPr>
-          <p:cNvPr id="10" name="Rounded Rectangle 9"/>
-          <p:cNvSpPr/>
-          <p:nvPr/>
-        </p:nvSpPr>
-        <p:spPr>
-          <a:xfrm>
-            <a:off x="3520440" y="5074920"/>
-            <a:ext cx="2606040" cy="777240"/>
-          </a:xfrm>
-          <a:prstGeom prst="roundRect">
-            <a:avLst/>
-          </a:prstGeom>
-          <a:solidFill>
-            <a:srgbClr val="F3F5F9"/>
-          </a:solidFill>
-          <a:ln w="12700">
-            <a:solidFill>
-              <a:srgbClr val="D8DEE9"/>
-            </a:solidFill>
-          </a:ln>
-          <a:effectLst/>
-        </p:spPr>
-        <p:style>
-          <a:lnRef idx="1">
-            <a:schemeClr val="accent1"/>
-          </a:lnRef>
-          <a:fillRef idx="3">
-            <a:schemeClr val="accent1"/>
-          </a:fillRef>
-          <a:effectRef idx="2">
-            <a:schemeClr val="accent1"/>
-          </a:effectRef>
-          <a:fontRef idx="minor">
-            <a:schemeClr val="lt1"/>
-          </a:fontRef>
-        </p:style>
-        <p:txBody>
-          <a:bodyPr rtlCol="0" anchor="ctr" lIns="164592" tIns="109728"/>
-          <a:lstStyle/>
-          <a:p>
-            <a:pPr algn="ctr">
-              <a:spcBef>
-                <a:spcPts val="0"/>
-              </a:spcBef>
-              <a:spcAft>
-                <a:spcPts val="0"/>
-              </a:spcAft>
-            </a:pPr>
-            <a:r>
-              <a:rPr sz="1000" b="1">
-                <a:solidFill>
-                  <a:srgbClr val="1E4D8C"/>
-                </a:solidFill>
-                <a:latin typeface="Malgun Gothic"/>
-              </a:rPr>
-              <a:t>시간</a:t>
-            </a:r>
-          </a:p>
-          <a:p>
-            <a:pPr>
-              <a:spcBef>
-                <a:spcPts val="200"/>
-              </a:spcBef>
-              <a:spcAft>
-                <a:spcPts val="0"/>
-              </a:spcAft>
-            </a:pPr>
-            <a:r>
-              <a:rPr sz="1200" b="1">
-                <a:solidFill>
-                  <a:srgbClr val="0F1F3D"/>
+              <a:rPr sz="1300" b="0">
+                <a:solidFill>
+                  <a:srgbClr val="FFFFFF"/>
                 </a:solidFill>
                 <a:latin typeface="Malgun Gothic"/>
               </a:rPr>
@@ -4534,176 +4475,14 @@
       </p:sp>
       <p:sp>
         <p:nvSpPr>
-          <p:cNvPr id="11" name="Rounded Rectangle 10"/>
-          <p:cNvSpPr/>
-          <p:nvPr/>
-        </p:nvSpPr>
-        <p:spPr>
-          <a:xfrm>
-            <a:off x="6263640" y="5074920"/>
-            <a:ext cx="2606040" cy="777240"/>
-          </a:xfrm>
-          <a:prstGeom prst="roundRect">
-            <a:avLst/>
-          </a:prstGeom>
-          <a:solidFill>
-            <a:srgbClr val="F3F5F9"/>
-          </a:solidFill>
-          <a:ln w="12700">
-            <a:solidFill>
-              <a:srgbClr val="D8DEE9"/>
-            </a:solidFill>
-          </a:ln>
-          <a:effectLst/>
-        </p:spPr>
-        <p:style>
-          <a:lnRef idx="1">
-            <a:schemeClr val="accent1"/>
-          </a:lnRef>
-          <a:fillRef idx="3">
-            <a:schemeClr val="accent1"/>
-          </a:fillRef>
-          <a:effectRef idx="2">
-            <a:schemeClr val="accent1"/>
-          </a:effectRef>
-          <a:fontRef idx="minor">
-            <a:schemeClr val="lt1"/>
-          </a:fontRef>
-        </p:style>
-        <p:txBody>
-          <a:bodyPr rtlCol="0" anchor="ctr" lIns="164592" tIns="109728"/>
-          <a:lstStyle/>
-          <a:p>
-            <a:pPr algn="ctr">
-              <a:spcBef>
-                <a:spcPts val="0"/>
-              </a:spcBef>
-              <a:spcAft>
-                <a:spcPts val="0"/>
-              </a:spcAft>
-            </a:pPr>
-            <a:r>
-              <a:rPr sz="1000" b="1">
-                <a:solidFill>
-                  <a:srgbClr val="1E4D8C"/>
-                </a:solidFill>
-                <a:latin typeface="Malgun Gothic"/>
-              </a:rPr>
-              <a:t>범위</a:t>
-            </a:r>
-          </a:p>
-          <a:p>
-            <a:pPr>
-              <a:spcBef>
-                <a:spcPts val="200"/>
-              </a:spcBef>
-              <a:spcAft>
-                <a:spcPts val="0"/>
-              </a:spcAft>
-            </a:pPr>
-            <a:r>
-              <a:rPr sz="1200" b="1">
-                <a:solidFill>
-                  <a:srgbClr val="0F1F3D"/>
-                </a:solidFill>
-                <a:latin typeface="Malgun Gothic"/>
-              </a:rPr>
-              <a:t>SAP S/4HANA · ABAP</a:t>
-            </a:r>
-          </a:p>
-        </p:txBody>
-      </p:sp>
-      <p:sp>
-        <p:nvSpPr>
-          <p:cNvPr id="12" name="Rounded Rectangle 11"/>
-          <p:cNvSpPr/>
-          <p:nvPr/>
-        </p:nvSpPr>
-        <p:spPr>
-          <a:xfrm>
-            <a:off x="9006840" y="5074920"/>
-            <a:ext cx="2606040" cy="777240"/>
-          </a:xfrm>
-          <a:prstGeom prst="roundRect">
-            <a:avLst/>
-          </a:prstGeom>
-          <a:solidFill>
-            <a:srgbClr val="F3F5F9"/>
-          </a:solidFill>
-          <a:ln w="12700">
-            <a:solidFill>
-              <a:srgbClr val="D8DEE9"/>
-            </a:solidFill>
-          </a:ln>
-          <a:effectLst/>
-        </p:spPr>
-        <p:style>
-          <a:lnRef idx="1">
-            <a:schemeClr val="accent1"/>
-          </a:lnRef>
-          <a:fillRef idx="3">
-            <a:schemeClr val="accent1"/>
-          </a:fillRef>
-          <a:effectRef idx="2">
-            <a:schemeClr val="accent1"/>
-          </a:effectRef>
-          <a:fontRef idx="minor">
-            <a:schemeClr val="lt1"/>
-          </a:fontRef>
-        </p:style>
-        <p:txBody>
-          <a:bodyPr rtlCol="0" anchor="ctr" lIns="164592" tIns="109728"/>
-          <a:lstStyle/>
-          <a:p>
-            <a:pPr algn="ctr">
-              <a:spcBef>
-                <a:spcPts val="0"/>
-              </a:spcBef>
-              <a:spcAft>
-                <a:spcPts val="0"/>
-              </a:spcAft>
-            </a:pPr>
-            <a:r>
-              <a:rPr sz="1000" b="1">
-                <a:solidFill>
-                  <a:srgbClr val="1E4D8C"/>
-                </a:solidFill>
-                <a:latin typeface="Malgun Gothic"/>
-              </a:rPr>
-              <a:t>도구</a:t>
-            </a:r>
-          </a:p>
-          <a:p>
-            <a:pPr>
-              <a:spcBef>
-                <a:spcPts val="200"/>
-              </a:spcBef>
-              <a:spcAft>
-                <a:spcPts val="0"/>
-              </a:spcAft>
-            </a:pPr>
-            <a:r>
-              <a:rPr sz="1200" b="1">
-                <a:solidFill>
-                  <a:srgbClr val="0F1F3D"/>
-                </a:solidFill>
-                <a:latin typeface="Malgun Gothic"/>
-              </a:rPr>
-              <a:t>Cursor (AI)</a:t>
-            </a:r>
-          </a:p>
-        </p:txBody>
-      </p:sp>
-      <p:sp>
-        <p:nvSpPr>
-          <p:cNvPr id="13" name="TextBox 12"/>
+          <p:cNvPr id="10" name="TextBox 9"/>
           <p:cNvSpPr txBox="1"/>
           <p:nvPr/>
         </p:nvSpPr>
         <p:spPr>
           <a:xfrm>
-            <a:off x="777240" y="6126480"/>
-            <a:ext cx="10515600" cy="320040"/>
+            <a:off x="6400800" y="5943600"/>
+            <a:ext cx="2560320" cy="731520"/>
           </a:xfrm>
           <a:prstGeom prst="rect">
             <a:avLst/>
@@ -4725,13 +4504,93 @@
               </a:spcAft>
             </a:pPr>
             <a:r>
-              <a:rPr sz="1000" b="0">
-                <a:solidFill>
-                  <a:srgbClr val="8A93A6"/>
+              <a:rPr sz="900" b="1">
+                <a:solidFill>
+                  <a:srgbClr val="B88A2E"/>
                 </a:solidFill>
                 <a:latin typeface="Malgun Gothic"/>
               </a:rPr>
-              <a:t>Confidential  ·  Internal Use Only</a:t>
+              <a:t>Focus</a:t>
+            </a:r>
+          </a:p>
+          <a:p>
+            <a:pPr>
+              <a:spcBef>
+                <a:spcPts val="400"/>
+              </a:spcBef>
+              <a:spcAft>
+                <a:spcPts val="0"/>
+              </a:spcAft>
+            </a:pPr>
+            <a:r>
+              <a:rPr sz="1300" b="0">
+                <a:solidFill>
+                  <a:srgbClr val="FFFFFF"/>
+                </a:solidFill>
+                <a:latin typeface="Malgun Gothic"/>
+              </a:rPr>
+              <a:t>효율 · 방향</a:t>
+            </a:r>
+          </a:p>
+        </p:txBody>
+      </p:sp>
+      <p:sp>
+        <p:nvSpPr>
+          <p:cNvPr id="11" name="TextBox 10"/>
+          <p:cNvSpPr txBox="1"/>
+          <p:nvPr/>
+        </p:nvSpPr>
+        <p:spPr>
+          <a:xfrm>
+            <a:off x="9189720" y="5943600"/>
+            <a:ext cx="2560320" cy="731520"/>
+          </a:xfrm>
+          <a:prstGeom prst="rect">
+            <a:avLst/>
+          </a:prstGeom>
+          <a:noFill/>
+        </p:spPr>
+        <p:txBody>
+          <a:bodyPr wrap="square">
+            <a:spAutoFit/>
+          </a:bodyPr>
+          <a:lstStyle/>
+          <a:p>
+            <a:pPr>
+              <a:spcBef>
+                <a:spcPts val="0"/>
+              </a:spcBef>
+              <a:spcAft>
+                <a:spcPts val="0"/>
+              </a:spcAft>
+            </a:pPr>
+            <a:r>
+              <a:rPr sz="900" b="1">
+                <a:solidFill>
+                  <a:srgbClr val="B88A2E"/>
+                </a:solidFill>
+                <a:latin typeface="Malgun Gothic"/>
+              </a:rPr>
+              <a:t>Tool</a:t>
+            </a:r>
+          </a:p>
+          <a:p>
+            <a:pPr>
+              <a:spcBef>
+                <a:spcPts val="400"/>
+              </a:spcBef>
+              <a:spcAft>
+                <a:spcPts val="0"/>
+              </a:spcAft>
+            </a:pPr>
+            <a:r>
+              <a:rPr sz="1300" b="0">
+                <a:solidFill>
+                  <a:srgbClr val="FFFFFF"/>
+                </a:solidFill>
+                <a:latin typeface="Malgun Gothic"/>
+              </a:rPr>
+              <a:t>Cursor</a:t>
             </a:r>
           </a:p>
         </p:txBody>
@@ -4769,7 +4628,7 @@
             <a:avLst/>
           </a:prstGeom>
           <a:solidFill>
-            <a:srgbClr val="F3F5F9"/>
+            <a:srgbClr val="F7F8FA"/>
           </a:solidFill>
           <a:ln>
             <a:noFill/>
@@ -4807,13 +4666,13 @@
         <p:spPr>
           <a:xfrm>
             <a:off x="0" y="0"/>
-            <a:ext cx="12191695" cy="73152"/>
+            <a:ext cx="12191695" cy="54864"/>
           </a:xfrm>
           <a:prstGeom prst="rect">
             <a:avLst/>
           </a:prstGeom>
           <a:solidFill>
-            <a:srgbClr val="0F1F3D"/>
+            <a:srgbClr val="0B1220"/>
           </a:solidFill>
           <a:ln>
             <a:noFill/>
@@ -4850,8 +4709,8 @@
         </p:nvSpPr>
         <p:spPr>
           <a:xfrm>
-            <a:off x="640080" y="256032"/>
-            <a:ext cx="9144000" cy="292608"/>
+            <a:off x="594360" y="320040"/>
+            <a:ext cx="10972800" cy="256032"/>
           </a:xfrm>
           <a:prstGeom prst="rect">
             <a:avLst/>
@@ -4873,13 +4732,13 @@
               </a:spcAft>
             </a:pPr>
             <a:r>
-              <a:rPr sz="1100" b="1">
-                <a:solidFill>
-                  <a:srgbClr val="1E4D8C"/>
+              <a:rPr sz="1000" b="1">
+                <a:solidFill>
+                  <a:srgbClr val="1A568A"/>
                 </a:solidFill>
                 <a:latin typeface="Malgun Gothic"/>
               </a:rPr>
-              <a:t>01  AGENDA</a:t>
+              <a:t>FRAME</a:t>
             </a:r>
           </a:p>
         </p:txBody>
@@ -4892,8 +4751,8 @@
         </p:nvSpPr>
         <p:spPr>
           <a:xfrm>
-            <a:off x="640080" y="502920"/>
-            <a:ext cx="10515600" cy="502920"/>
+            <a:off x="594360" y="594360"/>
+            <a:ext cx="10972800" cy="502920"/>
           </a:xfrm>
           <a:prstGeom prst="rect">
             <a:avLst/>
@@ -4915,33 +4774,75 @@
               </a:spcAft>
             </a:pPr>
             <a:r>
-              <a:rPr sz="2400" b="1">
-                <a:solidFill>
-                  <a:srgbClr val="0F1F3D"/>
+              <a:rPr sz="2600" b="1">
+                <a:solidFill>
+                  <a:srgbClr val="0B1220"/>
                 </a:solidFill>
                 <a:latin typeface="Malgun Gothic"/>
               </a:rPr>
-              <a:t>오늘 말씀드릴 내용</a:t>
-            </a:r>
-          </a:p>
-        </p:txBody>
-      </p:sp>
-      <p:sp>
-        <p:nvSpPr>
-          <p:cNvPr id="6" name="Rectangle 5"/>
+              <a:t>오늘 논의의 두 가지 질문</a:t>
+            </a:r>
+          </a:p>
+        </p:txBody>
+      </p:sp>
+      <p:sp>
+        <p:nvSpPr>
+          <p:cNvPr id="6" name="TextBox 5"/>
+          <p:cNvSpPr txBox="1"/>
+          <p:nvPr/>
+        </p:nvSpPr>
+        <p:spPr>
+          <a:xfrm>
+            <a:off x="594360" y="1097280"/>
+            <a:ext cx="10972800" cy="320040"/>
+          </a:xfrm>
+          <a:prstGeom prst="rect">
+            <a:avLst/>
+          </a:prstGeom>
+          <a:noFill/>
+        </p:spPr>
+        <p:txBody>
+          <a:bodyPr wrap="square">
+            <a:spAutoFit/>
+          </a:bodyPr>
+          <a:lstStyle/>
+          <a:p>
+            <a:pPr>
+              <a:spcBef>
+                <a:spcPts val="0"/>
+              </a:spcBef>
+              <a:spcAft>
+                <a:spcPts val="0"/>
+              </a:spcAft>
+            </a:pPr>
+            <a:r>
+              <a:rPr sz="1300" b="0">
+                <a:solidFill>
+                  <a:srgbClr val="5A6678"/>
+                </a:solidFill>
+                <a:latin typeface="Malgun Gothic"/>
+              </a:rPr>
+              <a:t>프로그램 소개가 아니라, 일하는 방식에 대한 이야기입니다</a:t>
+            </a:r>
+          </a:p>
+        </p:txBody>
+      </p:sp>
+      <p:sp>
+        <p:nvSpPr>
+          <p:cNvPr id="7" name="Rectangle 6"/>
           <p:cNvSpPr/>
           <p:nvPr/>
         </p:nvSpPr>
         <p:spPr>
           <a:xfrm>
-            <a:off x="658368" y="1051560"/>
-            <a:ext cx="1097280" cy="44450"/>
+            <a:off x="594360" y="1417320"/>
+            <a:ext cx="822960" cy="38100"/>
           </a:xfrm>
           <a:prstGeom prst="rect">
             <a:avLst/>
           </a:prstGeom>
           <a:solidFill>
-            <a:srgbClr val="C48A1A"/>
+            <a:srgbClr val="B88A2E"/>
           </a:solidFill>
           <a:ln>
             <a:noFill/>
@@ -4972,20 +4873,20 @@
       </p:sp>
       <p:sp>
         <p:nvSpPr>
-          <p:cNvPr id="7" name="Rectangle 6"/>
+          <p:cNvPr id="8" name="Rectangle 7"/>
           <p:cNvSpPr/>
           <p:nvPr/>
         </p:nvSpPr>
         <p:spPr>
           <a:xfrm>
-            <a:off x="0" y="6537960"/>
-            <a:ext cx="12191695" cy="320040"/>
+            <a:off x="0" y="6583680"/>
+            <a:ext cx="12191695" cy="274320"/>
           </a:xfrm>
           <a:prstGeom prst="rect">
             <a:avLst/>
           </a:prstGeom>
           <a:solidFill>
-            <a:srgbClr val="0F1F3D"/>
+            <a:srgbClr val="0B1220"/>
           </a:solidFill>
           <a:ln>
             <a:noFill/>
@@ -5016,14 +4917,14 @@
       </p:sp>
       <p:sp>
         <p:nvSpPr>
-          <p:cNvPr id="8" name="TextBox 7"/>
+          <p:cNvPr id="9" name="TextBox 8"/>
           <p:cNvSpPr txBox="1"/>
           <p:nvPr/>
         </p:nvSpPr>
         <p:spPr>
           <a:xfrm>
-            <a:off x="640080" y="6565392"/>
-            <a:ext cx="8229600" cy="256032"/>
+            <a:off x="594360" y="6601968"/>
+            <a:ext cx="8229600" cy="237744"/>
           </a:xfrm>
           <a:prstGeom prst="rect">
             <a:avLst/>
@@ -5047,25 +4948,25 @@
             <a:r>
               <a:rPr sz="900" b="0">
                 <a:solidFill>
-                  <a:srgbClr val="FFFFFF"/>
+                  <a:srgbClr val="8B95A5"/>
                 </a:solidFill>
                 <a:latin typeface="Malgun Gothic"/>
               </a:rPr>
-              <a:t>통합 운영 모니터링  ·  AI 활용 개발 성과 보고</a:t>
-            </a:r>
-          </a:p>
-        </p:txBody>
-      </p:sp>
-      <p:sp>
-        <p:nvSpPr>
-          <p:cNvPr id="9" name="TextBox 8"/>
+              <a:t>AI 활용 효율성  ·  향후 방향</a:t>
+            </a:r>
+          </a:p>
+        </p:txBody>
+      </p:sp>
+      <p:sp>
+        <p:nvSpPr>
+          <p:cNvPr id="10" name="TextBox 9"/>
           <p:cNvSpPr txBox="1"/>
           <p:nvPr/>
         </p:nvSpPr>
         <p:spPr>
           <a:xfrm>
-            <a:off x="10241280" y="6565392"/>
-            <a:ext cx="1371600" cy="256032"/>
+            <a:off x="10332720" y="6601968"/>
+            <a:ext cx="1280160" cy="237744"/>
           </a:xfrm>
           <a:prstGeom prst="rect">
             <a:avLst/>
@@ -5089,25 +4990,25 @@
             <a:r>
               <a:rPr sz="900" b="0">
                 <a:solidFill>
-                  <a:srgbClr val="FFFFFF"/>
+                  <a:srgbClr val="8B95A5"/>
                 </a:solidFill>
                 <a:latin typeface="Malgun Gothic"/>
               </a:rPr>
-              <a:t>2 / 8</a:t>
-            </a:r>
-          </a:p>
-        </p:txBody>
-      </p:sp>
-      <p:sp>
-        <p:nvSpPr>
-          <p:cNvPr id="10" name="Rounded Rectangle 9"/>
+              <a:t>2  /  8</a:t>
+            </a:r>
+          </a:p>
+        </p:txBody>
+      </p:sp>
+      <p:sp>
+        <p:nvSpPr>
+          <p:cNvPr id="11" name="Rounded Rectangle 10"/>
           <p:cNvSpPr/>
           <p:nvPr/>
         </p:nvSpPr>
         <p:spPr>
           <a:xfrm>
-            <a:off x="640080" y="1417320"/>
-            <a:ext cx="10881360" cy="822960"/>
+            <a:off x="594360" y="1920240"/>
+            <a:ext cx="5394960" cy="3840480"/>
           </a:xfrm>
           <a:prstGeom prst="roundRect">
             <a:avLst/>
@@ -5117,7 +5018,7 @@
           </a:solidFill>
           <a:ln w="12700">
             <a:solidFill>
-              <a:srgbClr val="D8DEE9"/>
+              <a:srgbClr val="E2E6ED"/>
             </a:solidFill>
           </a:ln>
           <a:effectLst/>
@@ -5146,23 +5047,170 @@
       </p:sp>
       <p:sp>
         <p:nvSpPr>
-          <p:cNvPr id="11" name="Rounded Rectangle 10"/>
+          <p:cNvPr id="12" name="TextBox 11"/>
+          <p:cNvSpPr txBox="1"/>
+          <p:nvPr/>
+        </p:nvSpPr>
+        <p:spPr>
+          <a:xfrm>
+            <a:off x="960120" y="2194560"/>
+            <a:ext cx="4663440" cy="320040"/>
+          </a:xfrm>
+          <a:prstGeom prst="rect">
+            <a:avLst/>
+          </a:prstGeom>
+          <a:noFill/>
+        </p:spPr>
+        <p:txBody>
+          <a:bodyPr wrap="square">
+            <a:spAutoFit/>
+          </a:bodyPr>
+          <a:lstStyle/>
+          <a:p>
+            <a:pPr>
+              <a:spcBef>
+                <a:spcPts val="0"/>
+              </a:spcBef>
+              <a:spcAft>
+                <a:spcPts val="0"/>
+              </a:spcAft>
+            </a:pPr>
+            <a:r>
+              <a:rPr sz="1200" b="1">
+                <a:solidFill>
+                  <a:srgbClr val="1A568A"/>
+                </a:solidFill>
+                <a:latin typeface="Malgun Gothic"/>
+              </a:rPr>
+              <a:t>01   효율</a:t>
+            </a:r>
+          </a:p>
+        </p:txBody>
+      </p:sp>
+      <p:sp>
+        <p:nvSpPr>
+          <p:cNvPr id="13" name="TextBox 12"/>
+          <p:cNvSpPr txBox="1"/>
+          <p:nvPr/>
+        </p:nvSpPr>
+        <p:spPr>
+          <a:xfrm>
+            <a:off x="960120" y="2743200"/>
+            <a:ext cx="4663440" cy="1463040"/>
+          </a:xfrm>
+          <a:prstGeom prst="rect">
+            <a:avLst/>
+          </a:prstGeom>
+          <a:noFill/>
+        </p:spPr>
+        <p:txBody>
+          <a:bodyPr wrap="square">
+            <a:spAutoFit/>
+          </a:bodyPr>
+          <a:lstStyle/>
+          <a:p>
+            <a:pPr>
+              <a:spcBef>
+                <a:spcPts val="0"/>
+              </a:spcBef>
+              <a:spcAft>
+                <a:spcPts val="0"/>
+              </a:spcAft>
+            </a:pPr>
+            <a:r>
+              <a:rPr sz="2000" b="1">
+                <a:solidFill>
+                  <a:srgbClr val="0B1220"/>
+                </a:solidFill>
+                <a:latin typeface="Malgun Gothic"/>
+              </a:rPr>
+              <a:t>AI를 어디에, 어떻게 붙일 때</a:t>
+            </a:r>
+          </a:p>
+          <a:p>
+            <a:pPr>
+              <a:spcBef>
+                <a:spcPts val="600"/>
+              </a:spcBef>
+              <a:spcAft>
+                <a:spcPts val="0"/>
+              </a:spcAft>
+            </a:pPr>
+            <a:r>
+              <a:rPr sz="2000" b="1">
+                <a:solidFill>
+                  <a:srgbClr val="0B1220"/>
+                </a:solidFill>
+                <a:latin typeface="Malgun Gothic"/>
+              </a:rPr>
+              <a:t>실제 생산성이 올라가는가</a:t>
+            </a:r>
+          </a:p>
+        </p:txBody>
+      </p:sp>
+      <p:sp>
+        <p:nvSpPr>
+          <p:cNvPr id="14" name="TextBox 13"/>
+          <p:cNvSpPr txBox="1"/>
+          <p:nvPr/>
+        </p:nvSpPr>
+        <p:spPr>
+          <a:xfrm>
+            <a:off x="960120" y="4754880"/>
+            <a:ext cx="4663440" cy="548640"/>
+          </a:xfrm>
+          <a:prstGeom prst="rect">
+            <a:avLst/>
+          </a:prstGeom>
+          <a:noFill/>
+        </p:spPr>
+        <p:txBody>
+          <a:bodyPr wrap="square">
+            <a:spAutoFit/>
+          </a:bodyPr>
+          <a:lstStyle/>
+          <a:p>
+            <a:pPr>
+              <a:spcBef>
+                <a:spcPts val="0"/>
+              </a:spcBef>
+              <a:spcAft>
+                <a:spcPts val="0"/>
+              </a:spcAft>
+            </a:pPr>
+            <a:r>
+              <a:rPr sz="1200" b="0">
+                <a:solidFill>
+                  <a:srgbClr val="5A6678"/>
+                </a:solidFill>
+                <a:latin typeface="Malgun Gothic"/>
+              </a:rPr>
+              <a:t>조사 · 초안 · 반복 수정 · 표준 적용</a:t>
+            </a:r>
+          </a:p>
+        </p:txBody>
+      </p:sp>
+      <p:sp>
+        <p:nvSpPr>
+          <p:cNvPr id="15" name="Rounded Rectangle 14"/>
           <p:cNvSpPr/>
           <p:nvPr/>
         </p:nvSpPr>
         <p:spPr>
           <a:xfrm>
-            <a:off x="640080" y="1417320"/>
-            <a:ext cx="1005840" cy="822960"/>
+            <a:off x="6217920" y="1920240"/>
+            <a:ext cx="5394960" cy="3840480"/>
           </a:xfrm>
           <a:prstGeom prst="roundRect">
             <a:avLst/>
           </a:prstGeom>
           <a:solidFill>
-            <a:srgbClr val="0F1F3D"/>
+            <a:srgbClr val="FFFFFF"/>
           </a:solidFill>
-          <a:ln>
-            <a:noFill/>
+          <a:ln w="12700">
+            <a:solidFill>
+              <a:srgbClr val="E2E6ED"/>
+            </a:solidFill>
           </a:ln>
           <a:effectLst/>
         </p:spPr>
@@ -5190,56 +5238,14 @@
       </p:sp>
       <p:sp>
         <p:nvSpPr>
-          <p:cNvPr id="12" name="TextBox 11"/>
+          <p:cNvPr id="16" name="TextBox 15"/>
           <p:cNvSpPr txBox="1"/>
           <p:nvPr/>
         </p:nvSpPr>
         <p:spPr>
           <a:xfrm>
-            <a:off x="640080" y="1417320"/>
-            <a:ext cx="1005840" cy="822960"/>
-          </a:xfrm>
-          <a:prstGeom prst="rect">
-            <a:avLst/>
-          </a:prstGeom>
-          <a:noFill/>
-        </p:spPr>
-        <p:txBody>
-          <a:bodyPr wrap="square" anchor="ctr">
-            <a:spAutoFit/>
-          </a:bodyPr>
-          <a:lstStyle/>
-          <a:p>
-            <a:pPr algn="ctr">
-              <a:spcBef>
-                <a:spcPts val="0"/>
-              </a:spcBef>
-              <a:spcAft>
-                <a:spcPts val="0"/>
-              </a:spcAft>
-            </a:pPr>
-            <a:r>
-              <a:rPr sz="1800" b="1">
-                <a:solidFill>
-                  <a:srgbClr val="FFFFFF"/>
-                </a:solidFill>
-                <a:latin typeface="Malgun Gothic"/>
-              </a:rPr>
-              <a:t>01</a:t>
-            </a:r>
-          </a:p>
-        </p:txBody>
-      </p:sp>
-      <p:sp>
-        <p:nvSpPr>
-          <p:cNvPr id="13" name="TextBox 12"/>
-          <p:cNvSpPr txBox="1"/>
-          <p:nvPr/>
-        </p:nvSpPr>
-        <p:spPr>
-          <a:xfrm>
-            <a:off x="1874519" y="1581912"/>
-            <a:ext cx="9144000" cy="320040"/>
+            <a:off x="6583680" y="2194560"/>
+            <a:ext cx="4663440" cy="320040"/>
           </a:xfrm>
           <a:prstGeom prst="rect">
             <a:avLst/>
@@ -5261,27 +5267,27 @@
               </a:spcAft>
             </a:pPr>
             <a:r>
-              <a:rPr sz="1600" b="1">
-                <a:solidFill>
-                  <a:srgbClr val="0F1F3D"/>
+              <a:rPr sz="1200" b="1">
+                <a:solidFill>
+                  <a:srgbClr val="1A568A"/>
                 </a:solidFill>
                 <a:latin typeface="Malgun Gothic"/>
               </a:rPr>
-              <a:t>왜 이 과제인가</a:t>
-            </a:r>
-          </a:p>
-        </p:txBody>
-      </p:sp>
-      <p:sp>
-        <p:nvSpPr>
-          <p:cNvPr id="14" name="TextBox 13"/>
+              <a:t>02   방향</a:t>
+            </a:r>
+          </a:p>
+        </p:txBody>
+      </p:sp>
+      <p:sp>
+        <p:nvSpPr>
+          <p:cNvPr id="17" name="TextBox 16"/>
           <p:cNvSpPr txBox="1"/>
           <p:nvPr/>
         </p:nvSpPr>
         <p:spPr>
           <a:xfrm>
-            <a:off x="1874519" y="1856232"/>
-            <a:ext cx="9144000" cy="274320"/>
+            <a:off x="6583680" y="2743200"/>
+            <a:ext cx="4663440" cy="1463040"/>
           </a:xfrm>
           <a:prstGeom prst="rect">
             <a:avLst/>
@@ -5303,145 +5309,32 @@
               </a:spcAft>
             </a:pPr>
             <a:r>
-              <a:rPr sz="1200" b="0">
-                <a:solidFill>
-                  <a:srgbClr val="5B677A"/>
+              <a:rPr sz="2000" b="1">
+                <a:solidFill>
+                  <a:srgbClr val="0B1220"/>
                 </a:solidFill>
                 <a:latin typeface="Malgun Gothic"/>
               </a:rPr>
-              <a:t>운영 점검의 분산과 누락 리스크</a:t>
-            </a:r>
-          </a:p>
-        </p:txBody>
-      </p:sp>
-      <p:sp>
-        <p:nvSpPr>
-          <p:cNvPr id="15" name="Rounded Rectangle 14"/>
-          <p:cNvSpPr/>
-          <p:nvPr/>
-        </p:nvSpPr>
-        <p:spPr>
-          <a:xfrm>
-            <a:off x="640080" y="2350008"/>
-            <a:ext cx="10881360" cy="822960"/>
-          </a:xfrm>
-          <a:prstGeom prst="roundRect">
-            <a:avLst/>
-          </a:prstGeom>
-          <a:solidFill>
-            <a:srgbClr val="FFFFFF"/>
-          </a:solidFill>
-          <a:ln w="12700">
-            <a:solidFill>
-              <a:srgbClr val="D8DEE9"/>
-            </a:solidFill>
-          </a:ln>
-          <a:effectLst/>
-        </p:spPr>
-        <p:style>
-          <a:lnRef idx="1">
-            <a:schemeClr val="accent1"/>
-          </a:lnRef>
-          <a:fillRef idx="3">
-            <a:schemeClr val="accent1"/>
-          </a:fillRef>
-          <a:effectRef idx="2">
-            <a:schemeClr val="accent1"/>
-          </a:effectRef>
-          <a:fontRef idx="minor">
-            <a:schemeClr val="lt1"/>
-          </a:fontRef>
-        </p:style>
-        <p:txBody>
-          <a:bodyPr rtlCol="0" anchor="ctr"/>
-          <a:lstStyle/>
-          <a:p>
-            <a:pPr algn="ctr"/>
-          </a:p>
-        </p:txBody>
-      </p:sp>
-      <p:sp>
-        <p:nvSpPr>
-          <p:cNvPr id="16" name="Rounded Rectangle 15"/>
-          <p:cNvSpPr/>
-          <p:nvPr/>
-        </p:nvSpPr>
-        <p:spPr>
-          <a:xfrm>
-            <a:off x="640080" y="2350008"/>
-            <a:ext cx="1005840" cy="822960"/>
-          </a:xfrm>
-          <a:prstGeom prst="roundRect">
-            <a:avLst/>
-          </a:prstGeom>
-          <a:solidFill>
-            <a:srgbClr val="0F1F3D"/>
-          </a:solidFill>
-          <a:ln>
-            <a:noFill/>
-          </a:ln>
-          <a:effectLst/>
-        </p:spPr>
-        <p:style>
-          <a:lnRef idx="1">
-            <a:schemeClr val="accent1"/>
-          </a:lnRef>
-          <a:fillRef idx="3">
-            <a:schemeClr val="accent1"/>
-          </a:fillRef>
-          <a:effectRef idx="2">
-            <a:schemeClr val="accent1"/>
-          </a:effectRef>
-          <a:fontRef idx="minor">
-            <a:schemeClr val="lt1"/>
-          </a:fontRef>
-        </p:style>
-        <p:txBody>
-          <a:bodyPr rtlCol="0" anchor="ctr"/>
-          <a:lstStyle/>
-          <a:p>
-            <a:pPr algn="ctr"/>
-          </a:p>
-        </p:txBody>
-      </p:sp>
-      <p:sp>
-        <p:nvSpPr>
-          <p:cNvPr id="17" name="TextBox 16"/>
-          <p:cNvSpPr txBox="1"/>
-          <p:nvPr/>
-        </p:nvSpPr>
-        <p:spPr>
-          <a:xfrm>
-            <a:off x="640080" y="2350008"/>
-            <a:ext cx="1005840" cy="822960"/>
-          </a:xfrm>
-          <a:prstGeom prst="rect">
-            <a:avLst/>
-          </a:prstGeom>
-          <a:noFill/>
-        </p:spPr>
-        <p:txBody>
-          <a:bodyPr wrap="square" anchor="ctr">
-            <a:spAutoFit/>
-          </a:bodyPr>
-          <a:lstStyle/>
-          <a:p>
-            <a:pPr algn="ctr">
+              <a:t>개인 역량에 맡기지 않고</a:t>
+            </a:r>
+          </a:p>
+          <a:p>
+            <a:pPr>
               <a:spcBef>
-                <a:spcPts val="0"/>
+                <a:spcPts val="600"/>
               </a:spcBef>
               <a:spcAft>
                 <a:spcPts val="0"/>
               </a:spcAft>
             </a:pPr>
             <a:r>
-              <a:rPr sz="1800" b="1">
-                <a:solidFill>
-                  <a:srgbClr val="FFFFFF"/>
+              <a:rPr sz="2000" b="1">
+                <a:solidFill>
+                  <a:srgbClr val="0B1220"/>
                 </a:solidFill>
                 <a:latin typeface="Malgun Gothic"/>
               </a:rPr>
-              <a:t>02</a:t>
+              <a:t>조직 역량으로 남기려면 무엇이 필요한가</a:t>
             </a:r>
           </a:p>
         </p:txBody>
@@ -5454,8 +5347,8 @@
         </p:nvSpPr>
         <p:spPr>
           <a:xfrm>
-            <a:off x="1874519" y="2514600"/>
-            <a:ext cx="9144000" cy="320040"/>
+            <a:off x="6583680" y="4754880"/>
+            <a:ext cx="4663440" cy="548640"/>
           </a:xfrm>
           <a:prstGeom prst="rect">
             <a:avLst/>
@@ -5477,703 +5370,13 @@
               </a:spcAft>
             </a:pPr>
             <a:r>
-              <a:rPr sz="1600" b="1">
-                <a:solidFill>
-                  <a:srgbClr val="0F1F3D"/>
+              <a:rPr sz="1200" b="0">
+                <a:solidFill>
+                  <a:srgbClr val="5A6678"/>
                 </a:solidFill>
                 <a:latin typeface="Malgun Gothic"/>
               </a:rPr>
-              <a:t>무엇을 만들었는가</a:t>
-            </a:r>
-          </a:p>
-        </p:txBody>
-      </p:sp>
-      <p:sp>
-        <p:nvSpPr>
-          <p:cNvPr id="19" name="TextBox 18"/>
-          <p:cNvSpPr txBox="1"/>
-          <p:nvPr/>
-        </p:nvSpPr>
-        <p:spPr>
-          <a:xfrm>
-            <a:off x="1874519" y="2788920"/>
-            <a:ext cx="9144000" cy="274320"/>
-          </a:xfrm>
-          <a:prstGeom prst="rect">
-            <a:avLst/>
-          </a:prstGeom>
-          <a:noFill/>
-        </p:spPr>
-        <p:txBody>
-          <a:bodyPr wrap="square">
-            <a:spAutoFit/>
-          </a:bodyPr>
-          <a:lstStyle/>
-          <a:p>
-            <a:pPr>
-              <a:spcBef>
-                <a:spcPts val="0"/>
-              </a:spcBef>
-              <a:spcAft>
-                <a:spcPts val="0"/>
-              </a:spcAft>
-            </a:pPr>
-            <a:r>
-              <a:rPr sz="1200" b="0">
-                <a:solidFill>
-                  <a:srgbClr val="5B677A"/>
-                </a:solidFill>
-                <a:latin typeface="Malgun Gothic"/>
-              </a:rPr>
-              <a:t>읽기 전용 통합 모니터링 대시보드</a:t>
-            </a:r>
-          </a:p>
-        </p:txBody>
-      </p:sp>
-      <p:sp>
-        <p:nvSpPr>
-          <p:cNvPr id="20" name="Rounded Rectangle 19"/>
-          <p:cNvSpPr/>
-          <p:nvPr/>
-        </p:nvSpPr>
-        <p:spPr>
-          <a:xfrm>
-            <a:off x="640080" y="3282696"/>
-            <a:ext cx="10881360" cy="822960"/>
-          </a:xfrm>
-          <a:prstGeom prst="roundRect">
-            <a:avLst/>
-          </a:prstGeom>
-          <a:solidFill>
-            <a:srgbClr val="FFFFFF"/>
-          </a:solidFill>
-          <a:ln w="12700">
-            <a:solidFill>
-              <a:srgbClr val="D8DEE9"/>
-            </a:solidFill>
-          </a:ln>
-          <a:effectLst/>
-        </p:spPr>
-        <p:style>
-          <a:lnRef idx="1">
-            <a:schemeClr val="accent1"/>
-          </a:lnRef>
-          <a:fillRef idx="3">
-            <a:schemeClr val="accent1"/>
-          </a:fillRef>
-          <a:effectRef idx="2">
-            <a:schemeClr val="accent1"/>
-          </a:effectRef>
-          <a:fontRef idx="minor">
-            <a:schemeClr val="lt1"/>
-          </a:fontRef>
-        </p:style>
-        <p:txBody>
-          <a:bodyPr rtlCol="0" anchor="ctr"/>
-          <a:lstStyle/>
-          <a:p>
-            <a:pPr algn="ctr"/>
-          </a:p>
-        </p:txBody>
-      </p:sp>
-      <p:sp>
-        <p:nvSpPr>
-          <p:cNvPr id="21" name="Rounded Rectangle 20"/>
-          <p:cNvSpPr/>
-          <p:nvPr/>
-        </p:nvSpPr>
-        <p:spPr>
-          <a:xfrm>
-            <a:off x="640080" y="3282696"/>
-            <a:ext cx="1005840" cy="822960"/>
-          </a:xfrm>
-          <a:prstGeom prst="roundRect">
-            <a:avLst/>
-          </a:prstGeom>
-          <a:solidFill>
-            <a:srgbClr val="0F1F3D"/>
-          </a:solidFill>
-          <a:ln>
-            <a:noFill/>
-          </a:ln>
-          <a:effectLst/>
-        </p:spPr>
-        <p:style>
-          <a:lnRef idx="1">
-            <a:schemeClr val="accent1"/>
-          </a:lnRef>
-          <a:fillRef idx="3">
-            <a:schemeClr val="accent1"/>
-          </a:fillRef>
-          <a:effectRef idx="2">
-            <a:schemeClr val="accent1"/>
-          </a:effectRef>
-          <a:fontRef idx="minor">
-            <a:schemeClr val="lt1"/>
-          </a:fontRef>
-        </p:style>
-        <p:txBody>
-          <a:bodyPr rtlCol="0" anchor="ctr"/>
-          <a:lstStyle/>
-          <a:p>
-            <a:pPr algn="ctr"/>
-          </a:p>
-        </p:txBody>
-      </p:sp>
-      <p:sp>
-        <p:nvSpPr>
-          <p:cNvPr id="22" name="TextBox 21"/>
-          <p:cNvSpPr txBox="1"/>
-          <p:nvPr/>
-        </p:nvSpPr>
-        <p:spPr>
-          <a:xfrm>
-            <a:off x="640080" y="3282696"/>
-            <a:ext cx="1005840" cy="822960"/>
-          </a:xfrm>
-          <a:prstGeom prst="rect">
-            <a:avLst/>
-          </a:prstGeom>
-          <a:noFill/>
-        </p:spPr>
-        <p:txBody>
-          <a:bodyPr wrap="square" anchor="ctr">
-            <a:spAutoFit/>
-          </a:bodyPr>
-          <a:lstStyle/>
-          <a:p>
-            <a:pPr algn="ctr">
-              <a:spcBef>
-                <a:spcPts val="0"/>
-              </a:spcBef>
-              <a:spcAft>
-                <a:spcPts val="0"/>
-              </a:spcAft>
-            </a:pPr>
-            <a:r>
-              <a:rPr sz="1800" b="1">
-                <a:solidFill>
-                  <a:srgbClr val="FFFFFF"/>
-                </a:solidFill>
-                <a:latin typeface="Malgun Gothic"/>
-              </a:rPr>
-              <a:t>03</a:t>
-            </a:r>
-          </a:p>
-        </p:txBody>
-      </p:sp>
-      <p:sp>
-        <p:nvSpPr>
-          <p:cNvPr id="23" name="TextBox 22"/>
-          <p:cNvSpPr txBox="1"/>
-          <p:nvPr/>
-        </p:nvSpPr>
-        <p:spPr>
-          <a:xfrm>
-            <a:off x="1874519" y="3447288"/>
-            <a:ext cx="9144000" cy="320040"/>
-          </a:xfrm>
-          <a:prstGeom prst="rect">
-            <a:avLst/>
-          </a:prstGeom>
-          <a:noFill/>
-        </p:spPr>
-        <p:txBody>
-          <a:bodyPr wrap="square">
-            <a:spAutoFit/>
-          </a:bodyPr>
-          <a:lstStyle/>
-          <a:p>
-            <a:pPr>
-              <a:spcBef>
-                <a:spcPts val="0"/>
-              </a:spcBef>
-              <a:spcAft>
-                <a:spcPts val="0"/>
-              </a:spcAft>
-            </a:pPr>
-            <a:r>
-              <a:rPr sz="1600" b="1">
-                <a:solidFill>
-                  <a:srgbClr val="0F1F3D"/>
-                </a:solidFill>
-                <a:latin typeface="Malgun Gothic"/>
-              </a:rPr>
-              <a:t>어떻게 개발했는가</a:t>
-            </a:r>
-          </a:p>
-        </p:txBody>
-      </p:sp>
-      <p:sp>
-        <p:nvSpPr>
-          <p:cNvPr id="24" name="TextBox 23"/>
-          <p:cNvSpPr txBox="1"/>
-          <p:nvPr/>
-        </p:nvSpPr>
-        <p:spPr>
-          <a:xfrm>
-            <a:off x="1874519" y="3721608"/>
-            <a:ext cx="9144000" cy="274320"/>
-          </a:xfrm>
-          <a:prstGeom prst="rect">
-            <a:avLst/>
-          </a:prstGeom>
-          <a:noFill/>
-        </p:spPr>
-        <p:txBody>
-          <a:bodyPr wrap="square">
-            <a:spAutoFit/>
-          </a:bodyPr>
-          <a:lstStyle/>
-          <a:p>
-            <a:pPr>
-              <a:spcBef>
-                <a:spcPts val="0"/>
-              </a:spcBef>
-              <a:spcAft>
-                <a:spcPts val="0"/>
-              </a:spcAft>
-            </a:pPr>
-            <a:r>
-              <a:rPr sz="1200" b="0">
-                <a:solidFill>
-                  <a:srgbClr val="5B677A"/>
-                </a:solidFill>
-                <a:latin typeface="Malgun Gothic"/>
-              </a:rPr>
-              <a:t>Cursor AI 페어프로그래밍 적용 방식</a:t>
-            </a:r>
-          </a:p>
-        </p:txBody>
-      </p:sp>
-      <p:sp>
-        <p:nvSpPr>
-          <p:cNvPr id="25" name="Rounded Rectangle 24"/>
-          <p:cNvSpPr/>
-          <p:nvPr/>
-        </p:nvSpPr>
-        <p:spPr>
-          <a:xfrm>
-            <a:off x="640080" y="4215384"/>
-            <a:ext cx="10881360" cy="822960"/>
-          </a:xfrm>
-          <a:prstGeom prst="roundRect">
-            <a:avLst/>
-          </a:prstGeom>
-          <a:solidFill>
-            <a:srgbClr val="FFFFFF"/>
-          </a:solidFill>
-          <a:ln w="12700">
-            <a:solidFill>
-              <a:srgbClr val="D8DEE9"/>
-            </a:solidFill>
-          </a:ln>
-          <a:effectLst/>
-        </p:spPr>
-        <p:style>
-          <a:lnRef idx="1">
-            <a:schemeClr val="accent1"/>
-          </a:lnRef>
-          <a:fillRef idx="3">
-            <a:schemeClr val="accent1"/>
-          </a:fillRef>
-          <a:effectRef idx="2">
-            <a:schemeClr val="accent1"/>
-          </a:effectRef>
-          <a:fontRef idx="minor">
-            <a:schemeClr val="lt1"/>
-          </a:fontRef>
-        </p:style>
-        <p:txBody>
-          <a:bodyPr rtlCol="0" anchor="ctr"/>
-          <a:lstStyle/>
-          <a:p>
-            <a:pPr algn="ctr"/>
-          </a:p>
-        </p:txBody>
-      </p:sp>
-      <p:sp>
-        <p:nvSpPr>
-          <p:cNvPr id="26" name="Rounded Rectangle 25"/>
-          <p:cNvSpPr/>
-          <p:nvPr/>
-        </p:nvSpPr>
-        <p:spPr>
-          <a:xfrm>
-            <a:off x="640080" y="4215384"/>
-            <a:ext cx="1005840" cy="822960"/>
-          </a:xfrm>
-          <a:prstGeom prst="roundRect">
-            <a:avLst/>
-          </a:prstGeom>
-          <a:solidFill>
-            <a:srgbClr val="0F1F3D"/>
-          </a:solidFill>
-          <a:ln>
-            <a:noFill/>
-          </a:ln>
-          <a:effectLst/>
-        </p:spPr>
-        <p:style>
-          <a:lnRef idx="1">
-            <a:schemeClr val="accent1"/>
-          </a:lnRef>
-          <a:fillRef idx="3">
-            <a:schemeClr val="accent1"/>
-          </a:fillRef>
-          <a:effectRef idx="2">
-            <a:schemeClr val="accent1"/>
-          </a:effectRef>
-          <a:fontRef idx="minor">
-            <a:schemeClr val="lt1"/>
-          </a:fontRef>
-        </p:style>
-        <p:txBody>
-          <a:bodyPr rtlCol="0" anchor="ctr"/>
-          <a:lstStyle/>
-          <a:p>
-            <a:pPr algn="ctr"/>
-          </a:p>
-        </p:txBody>
-      </p:sp>
-      <p:sp>
-        <p:nvSpPr>
-          <p:cNvPr id="27" name="TextBox 26"/>
-          <p:cNvSpPr txBox="1"/>
-          <p:nvPr/>
-        </p:nvSpPr>
-        <p:spPr>
-          <a:xfrm>
-            <a:off x="640080" y="4215384"/>
-            <a:ext cx="1005840" cy="822960"/>
-          </a:xfrm>
-          <a:prstGeom prst="rect">
-            <a:avLst/>
-          </a:prstGeom>
-          <a:noFill/>
-        </p:spPr>
-        <p:txBody>
-          <a:bodyPr wrap="square" anchor="ctr">
-            <a:spAutoFit/>
-          </a:bodyPr>
-          <a:lstStyle/>
-          <a:p>
-            <a:pPr algn="ctr">
-              <a:spcBef>
-                <a:spcPts val="0"/>
-              </a:spcBef>
-              <a:spcAft>
-                <a:spcPts val="0"/>
-              </a:spcAft>
-            </a:pPr>
-            <a:r>
-              <a:rPr sz="1800" b="1">
-                <a:solidFill>
-                  <a:srgbClr val="FFFFFF"/>
-                </a:solidFill>
-                <a:latin typeface="Malgun Gothic"/>
-              </a:rPr>
-              <a:t>04</a:t>
-            </a:r>
-          </a:p>
-        </p:txBody>
-      </p:sp>
-      <p:sp>
-        <p:nvSpPr>
-          <p:cNvPr id="28" name="TextBox 27"/>
-          <p:cNvSpPr txBox="1"/>
-          <p:nvPr/>
-        </p:nvSpPr>
-        <p:spPr>
-          <a:xfrm>
-            <a:off x="1874519" y="4379976"/>
-            <a:ext cx="9144000" cy="320040"/>
-          </a:xfrm>
-          <a:prstGeom prst="rect">
-            <a:avLst/>
-          </a:prstGeom>
-          <a:noFill/>
-        </p:spPr>
-        <p:txBody>
-          <a:bodyPr wrap="square">
-            <a:spAutoFit/>
-          </a:bodyPr>
-          <a:lstStyle/>
-          <a:p>
-            <a:pPr>
-              <a:spcBef>
-                <a:spcPts val="0"/>
-              </a:spcBef>
-              <a:spcAft>
-                <a:spcPts val="0"/>
-              </a:spcAft>
-            </a:pPr>
-            <a:r>
-              <a:rPr sz="1600" b="1">
-                <a:solidFill>
-                  <a:srgbClr val="0F1F3D"/>
-                </a:solidFill>
-                <a:latin typeface="Malgun Gothic"/>
-              </a:rPr>
-              <a:t>표준을 어떻게 고정했는가</a:t>
-            </a:r>
-          </a:p>
-        </p:txBody>
-      </p:sp>
-      <p:sp>
-        <p:nvSpPr>
-          <p:cNvPr id="29" name="TextBox 28"/>
-          <p:cNvSpPr txBox="1"/>
-          <p:nvPr/>
-        </p:nvSpPr>
-        <p:spPr>
-          <a:xfrm>
-            <a:off x="1874519" y="4654296"/>
-            <a:ext cx="9144000" cy="274320"/>
-          </a:xfrm>
-          <a:prstGeom prst="rect">
-            <a:avLst/>
-          </a:prstGeom>
-          <a:noFill/>
-        </p:spPr>
-        <p:txBody>
-          <a:bodyPr wrap="square">
-            <a:spAutoFit/>
-          </a:bodyPr>
-          <a:lstStyle/>
-          <a:p>
-            <a:pPr>
-              <a:spcBef>
-                <a:spcPts val="0"/>
-              </a:spcBef>
-              <a:spcAft>
-                <a:spcPts val="0"/>
-              </a:spcAft>
-            </a:pPr>
-            <a:r>
-              <a:rPr sz="1200" b="0">
-                <a:solidFill>
-                  <a:srgbClr val="5B677A"/>
-                </a:solidFill>
-                <a:latin typeface="Malgun Gothic"/>
-              </a:rPr>
-              <a:t>Rules / Skills(.md) 기반 내재화</a:t>
-            </a:r>
-          </a:p>
-        </p:txBody>
-      </p:sp>
-      <p:sp>
-        <p:nvSpPr>
-          <p:cNvPr id="30" name="Rounded Rectangle 29"/>
-          <p:cNvSpPr/>
-          <p:nvPr/>
-        </p:nvSpPr>
-        <p:spPr>
-          <a:xfrm>
-            <a:off x="640080" y="5148072"/>
-            <a:ext cx="10881360" cy="822960"/>
-          </a:xfrm>
-          <a:prstGeom prst="roundRect">
-            <a:avLst/>
-          </a:prstGeom>
-          <a:solidFill>
-            <a:srgbClr val="FFFFFF"/>
-          </a:solidFill>
-          <a:ln w="12700">
-            <a:solidFill>
-              <a:srgbClr val="D8DEE9"/>
-            </a:solidFill>
-          </a:ln>
-          <a:effectLst/>
-        </p:spPr>
-        <p:style>
-          <a:lnRef idx="1">
-            <a:schemeClr val="accent1"/>
-          </a:lnRef>
-          <a:fillRef idx="3">
-            <a:schemeClr val="accent1"/>
-          </a:fillRef>
-          <a:effectRef idx="2">
-            <a:schemeClr val="accent1"/>
-          </a:effectRef>
-          <a:fontRef idx="minor">
-            <a:schemeClr val="lt1"/>
-          </a:fontRef>
-        </p:style>
-        <p:txBody>
-          <a:bodyPr rtlCol="0" anchor="ctr"/>
-          <a:lstStyle/>
-          <a:p>
-            <a:pPr algn="ctr"/>
-          </a:p>
-        </p:txBody>
-      </p:sp>
-      <p:sp>
-        <p:nvSpPr>
-          <p:cNvPr id="31" name="Rounded Rectangle 30"/>
-          <p:cNvSpPr/>
-          <p:nvPr/>
-        </p:nvSpPr>
-        <p:spPr>
-          <a:xfrm>
-            <a:off x="640080" y="5148072"/>
-            <a:ext cx="1005840" cy="822960"/>
-          </a:xfrm>
-          <a:prstGeom prst="roundRect">
-            <a:avLst/>
-          </a:prstGeom>
-          <a:solidFill>
-            <a:srgbClr val="0F1F3D"/>
-          </a:solidFill>
-          <a:ln>
-            <a:noFill/>
-          </a:ln>
-          <a:effectLst/>
-        </p:spPr>
-        <p:style>
-          <a:lnRef idx="1">
-            <a:schemeClr val="accent1"/>
-          </a:lnRef>
-          <a:fillRef idx="3">
-            <a:schemeClr val="accent1"/>
-          </a:fillRef>
-          <a:effectRef idx="2">
-            <a:schemeClr val="accent1"/>
-          </a:effectRef>
-          <a:fontRef idx="minor">
-            <a:schemeClr val="lt1"/>
-          </a:fontRef>
-        </p:style>
-        <p:txBody>
-          <a:bodyPr rtlCol="0" anchor="ctr"/>
-          <a:lstStyle/>
-          <a:p>
-            <a:pPr algn="ctr"/>
-          </a:p>
-        </p:txBody>
-      </p:sp>
-      <p:sp>
-        <p:nvSpPr>
-          <p:cNvPr id="32" name="TextBox 31"/>
-          <p:cNvSpPr txBox="1"/>
-          <p:nvPr/>
-        </p:nvSpPr>
-        <p:spPr>
-          <a:xfrm>
-            <a:off x="640080" y="5148072"/>
-            <a:ext cx="1005840" cy="822960"/>
-          </a:xfrm>
-          <a:prstGeom prst="rect">
-            <a:avLst/>
-          </a:prstGeom>
-          <a:noFill/>
-        </p:spPr>
-        <p:txBody>
-          <a:bodyPr wrap="square" anchor="ctr">
-            <a:spAutoFit/>
-          </a:bodyPr>
-          <a:lstStyle/>
-          <a:p>
-            <a:pPr algn="ctr">
-              <a:spcBef>
-                <a:spcPts val="0"/>
-              </a:spcBef>
-              <a:spcAft>
-                <a:spcPts val="0"/>
-              </a:spcAft>
-            </a:pPr>
-            <a:r>
-              <a:rPr sz="1800" b="1">
-                <a:solidFill>
-                  <a:srgbClr val="FFFFFF"/>
-                </a:solidFill>
-                <a:latin typeface="Malgun Gothic"/>
-              </a:rPr>
-              <a:t>05</a:t>
-            </a:r>
-          </a:p>
-        </p:txBody>
-      </p:sp>
-      <p:sp>
-        <p:nvSpPr>
-          <p:cNvPr id="33" name="TextBox 32"/>
-          <p:cNvSpPr txBox="1"/>
-          <p:nvPr/>
-        </p:nvSpPr>
-        <p:spPr>
-          <a:xfrm>
-            <a:off x="1874519" y="5312664"/>
-            <a:ext cx="9144000" cy="320040"/>
-          </a:xfrm>
-          <a:prstGeom prst="rect">
-            <a:avLst/>
-          </a:prstGeom>
-          <a:noFill/>
-        </p:spPr>
-        <p:txBody>
-          <a:bodyPr wrap="square">
-            <a:spAutoFit/>
-          </a:bodyPr>
-          <a:lstStyle/>
-          <a:p>
-            <a:pPr>
-              <a:spcBef>
-                <a:spcPts val="0"/>
-              </a:spcBef>
-              <a:spcAft>
-                <a:spcPts val="0"/>
-              </a:spcAft>
-            </a:pPr>
-            <a:r>
-              <a:rPr sz="1600" b="1">
-                <a:solidFill>
-                  <a:srgbClr val="0F1F3D"/>
-                </a:solidFill>
-                <a:latin typeface="Malgun Gothic"/>
-              </a:rPr>
-              <a:t>어떤 효과가 있었는가</a:t>
-            </a:r>
-          </a:p>
-        </p:txBody>
-      </p:sp>
-      <p:sp>
-        <p:nvSpPr>
-          <p:cNvPr id="34" name="TextBox 33"/>
-          <p:cNvSpPr txBox="1"/>
-          <p:nvPr/>
-        </p:nvSpPr>
-        <p:spPr>
-          <a:xfrm>
-            <a:off x="1874519" y="5586984"/>
-            <a:ext cx="9144000" cy="274320"/>
-          </a:xfrm>
-          <a:prstGeom prst="rect">
-            <a:avLst/>
-          </a:prstGeom>
-          <a:noFill/>
-        </p:spPr>
-        <p:txBody>
-          <a:bodyPr wrap="square">
-            <a:spAutoFit/>
-          </a:bodyPr>
-          <a:lstStyle/>
-          <a:p>
-            <a:pPr>
-              <a:spcBef>
-                <a:spcPts val="0"/>
-              </a:spcBef>
-              <a:spcAft>
-                <a:spcPts val="0"/>
-              </a:spcAft>
-            </a:pPr>
-            <a:r>
-              <a:rPr sz="1200" b="0">
-                <a:solidFill>
-                  <a:srgbClr val="5B677A"/>
-                </a:solidFill>
-                <a:latin typeface="Malgun Gothic"/>
-              </a:rPr>
-              <a:t>생산성·품질 효과와 향후 계획</a:t>
+              <a:t>규칙 · 스킬 · 재사용 · 측정</a:t>
             </a:r>
           </a:p>
         </p:txBody>
@@ -6211,7 +5414,7 @@
             <a:avLst/>
           </a:prstGeom>
           <a:solidFill>
-            <a:srgbClr val="F3F5F9"/>
+            <a:srgbClr val="F7F8FA"/>
           </a:solidFill>
           <a:ln>
             <a:noFill/>
@@ -6249,13 +5452,13 @@
         <p:spPr>
           <a:xfrm>
             <a:off x="0" y="0"/>
-            <a:ext cx="12191695" cy="73152"/>
+            <a:ext cx="12191695" cy="54864"/>
           </a:xfrm>
           <a:prstGeom prst="rect">
             <a:avLst/>
           </a:prstGeom>
           <a:solidFill>
-            <a:srgbClr val="0F1F3D"/>
+            <a:srgbClr val="0B1220"/>
           </a:solidFill>
           <a:ln>
             <a:noFill/>
@@ -6292,8 +5495,8 @@
         </p:nvSpPr>
         <p:spPr>
           <a:xfrm>
-            <a:off x="640080" y="256032"/>
-            <a:ext cx="9144000" cy="292608"/>
+            <a:off x="594360" y="320040"/>
+            <a:ext cx="10972800" cy="256032"/>
           </a:xfrm>
           <a:prstGeom prst="rect">
             <a:avLst/>
@@ -6315,13 +5518,13 @@
               </a:spcAft>
             </a:pPr>
             <a:r>
-              <a:rPr sz="1100" b="1">
-                <a:solidFill>
-                  <a:srgbClr val="1E4D8C"/>
+              <a:rPr sz="1000" b="1">
+                <a:solidFill>
+                  <a:srgbClr val="1A568A"/>
                 </a:solidFill>
                 <a:latin typeface="Malgun Gothic"/>
               </a:rPr>
-              <a:t>02  PROBLEM</a:t>
+              <a:t>OBSERVATION</a:t>
             </a:r>
           </a:p>
         </p:txBody>
@@ -6334,8 +5537,8 @@
         </p:nvSpPr>
         <p:spPr>
           <a:xfrm>
-            <a:off x="640080" y="502920"/>
-            <a:ext cx="10515600" cy="502920"/>
+            <a:off x="594360" y="594360"/>
+            <a:ext cx="10972800" cy="502920"/>
           </a:xfrm>
           <a:prstGeom prst="rect">
             <a:avLst/>
@@ -6357,33 +5560,75 @@
               </a:spcAft>
             </a:pPr>
             <a:r>
-              <a:rPr sz="2400" b="1">
-                <a:solidFill>
-                  <a:srgbClr val="0F1F3D"/>
+              <a:rPr sz="2600" b="1">
+                <a:solidFill>
+                  <a:srgbClr val="0B1220"/>
                 </a:solidFill>
                 <a:latin typeface="Malgun Gothic"/>
               </a:rPr>
-              <a:t>운영 점검은 왜 비효율적인가</a:t>
-            </a:r>
-          </a:p>
-        </p:txBody>
-      </p:sp>
-      <p:sp>
-        <p:nvSpPr>
-          <p:cNvPr id="6" name="Rectangle 5"/>
+              <a:t>AI를 도입해도 효율이 안 나는 경우</a:t>
+            </a:r>
+          </a:p>
+        </p:txBody>
+      </p:sp>
+      <p:sp>
+        <p:nvSpPr>
+          <p:cNvPr id="6" name="TextBox 5"/>
+          <p:cNvSpPr txBox="1"/>
+          <p:nvPr/>
+        </p:nvSpPr>
+        <p:spPr>
+          <a:xfrm>
+            <a:off x="594360" y="1097280"/>
+            <a:ext cx="10972800" cy="320040"/>
+          </a:xfrm>
+          <a:prstGeom prst="rect">
+            <a:avLst/>
+          </a:prstGeom>
+          <a:noFill/>
+        </p:spPr>
+        <p:txBody>
+          <a:bodyPr wrap="square">
+            <a:spAutoFit/>
+          </a:bodyPr>
+          <a:lstStyle/>
+          <a:p>
+            <a:pPr>
+              <a:spcBef>
+                <a:spcPts val="0"/>
+              </a:spcBef>
+              <a:spcAft>
+                <a:spcPts val="0"/>
+              </a:spcAft>
+            </a:pPr>
+            <a:r>
+              <a:rPr sz="1300" b="0">
+                <a:solidFill>
+                  <a:srgbClr val="5A6678"/>
+                </a:solidFill>
+                <a:latin typeface="Malgun Gothic"/>
+              </a:rPr>
+              <a:t>도구 문제가 아니라, 사용 방식의 문제입니다</a:t>
+            </a:r>
+          </a:p>
+        </p:txBody>
+      </p:sp>
+      <p:sp>
+        <p:nvSpPr>
+          <p:cNvPr id="7" name="Rectangle 6"/>
           <p:cNvSpPr/>
           <p:nvPr/>
         </p:nvSpPr>
         <p:spPr>
           <a:xfrm>
-            <a:off x="658368" y="1051560"/>
-            <a:ext cx="1097280" cy="44450"/>
+            <a:off x="594360" y="1417320"/>
+            <a:ext cx="822960" cy="38100"/>
           </a:xfrm>
           <a:prstGeom prst="rect">
             <a:avLst/>
           </a:prstGeom>
           <a:solidFill>
-            <a:srgbClr val="C48A1A"/>
+            <a:srgbClr val="B88A2E"/>
           </a:solidFill>
           <a:ln>
             <a:noFill/>
@@ -6414,20 +5659,20 @@
       </p:sp>
       <p:sp>
         <p:nvSpPr>
-          <p:cNvPr id="7" name="Rectangle 6"/>
+          <p:cNvPr id="8" name="Rectangle 7"/>
           <p:cNvSpPr/>
           <p:nvPr/>
         </p:nvSpPr>
         <p:spPr>
           <a:xfrm>
-            <a:off x="0" y="6537960"/>
-            <a:ext cx="12191695" cy="320040"/>
+            <a:off x="0" y="6583680"/>
+            <a:ext cx="12191695" cy="274320"/>
           </a:xfrm>
           <a:prstGeom prst="rect">
             <a:avLst/>
           </a:prstGeom>
           <a:solidFill>
-            <a:srgbClr val="0F1F3D"/>
+            <a:srgbClr val="0B1220"/>
           </a:solidFill>
           <a:ln>
             <a:noFill/>
@@ -6458,14 +5703,14 @@
       </p:sp>
       <p:sp>
         <p:nvSpPr>
-          <p:cNvPr id="8" name="TextBox 7"/>
+          <p:cNvPr id="9" name="TextBox 8"/>
           <p:cNvSpPr txBox="1"/>
           <p:nvPr/>
         </p:nvSpPr>
         <p:spPr>
           <a:xfrm>
-            <a:off x="640080" y="6565392"/>
-            <a:ext cx="8229600" cy="256032"/>
+            <a:off x="594360" y="6601968"/>
+            <a:ext cx="8229600" cy="237744"/>
           </a:xfrm>
           <a:prstGeom prst="rect">
             <a:avLst/>
@@ -6489,25 +5734,25 @@
             <a:r>
               <a:rPr sz="900" b="0">
                 <a:solidFill>
-                  <a:srgbClr val="FFFFFF"/>
+                  <a:srgbClr val="8B95A5"/>
                 </a:solidFill>
                 <a:latin typeface="Malgun Gothic"/>
               </a:rPr>
-              <a:t>통합 운영 모니터링  ·  AI 활용 개발 성과 보고</a:t>
-            </a:r>
-          </a:p>
-        </p:txBody>
-      </p:sp>
-      <p:sp>
-        <p:nvSpPr>
-          <p:cNvPr id="9" name="TextBox 8"/>
+              <a:t>AI 활용 효율성  ·  향후 방향</a:t>
+            </a:r>
+          </a:p>
+        </p:txBody>
+      </p:sp>
+      <p:sp>
+        <p:nvSpPr>
+          <p:cNvPr id="10" name="TextBox 9"/>
           <p:cNvSpPr txBox="1"/>
           <p:nvPr/>
         </p:nvSpPr>
         <p:spPr>
           <a:xfrm>
-            <a:off x="10241280" y="6565392"/>
-            <a:ext cx="1371600" cy="256032"/>
+            <a:off x="10332720" y="6601968"/>
+            <a:ext cx="1280160" cy="237744"/>
           </a:xfrm>
           <a:prstGeom prst="rect">
             <a:avLst/>
@@ -6531,25 +5776,25 @@
             <a:r>
               <a:rPr sz="900" b="0">
                 <a:solidFill>
-                  <a:srgbClr val="FFFFFF"/>
+                  <a:srgbClr val="8B95A5"/>
                 </a:solidFill>
                 <a:latin typeface="Malgun Gothic"/>
               </a:rPr>
-              <a:t>3 / 8</a:t>
-            </a:r>
-          </a:p>
-        </p:txBody>
-      </p:sp>
-      <p:sp>
-        <p:nvSpPr>
-          <p:cNvPr id="10" name="Rounded Rectangle 9"/>
+              <a:t>3  /  8</a:t>
+            </a:r>
+          </a:p>
+        </p:txBody>
+      </p:sp>
+      <p:sp>
+        <p:nvSpPr>
+          <p:cNvPr id="11" name="Rounded Rectangle 10"/>
           <p:cNvSpPr/>
           <p:nvPr/>
         </p:nvSpPr>
         <p:spPr>
           <a:xfrm>
-            <a:off x="640080" y="1417320"/>
-            <a:ext cx="3383280" cy="1828800"/>
+            <a:off x="594360" y="1828800"/>
+            <a:ext cx="10972800" cy="960120"/>
           </a:xfrm>
           <a:prstGeom prst="roundRect">
             <a:avLst/>
@@ -6559,7 +5804,7 @@
           </a:solidFill>
           <a:ln w="12700">
             <a:solidFill>
-              <a:srgbClr val="D8DEE9"/>
+              <a:srgbClr val="E2E6ED"/>
             </a:solidFill>
           </a:ln>
           <a:effectLst/>
@@ -6579,10 +5824,80 @@
           </a:fontRef>
         </p:style>
         <p:txBody>
-          <a:bodyPr rtlCol="0" anchor="ctr" lIns="228600" tIns="274320"/>
-          <a:lstStyle/>
-          <a:p>
-            <a:pPr algn="ctr">
+          <a:bodyPr rtlCol="0" anchor="ctr"/>
+          <a:lstStyle/>
+          <a:p>
+            <a:pPr algn="ctr"/>
+          </a:p>
+        </p:txBody>
+      </p:sp>
+      <p:sp>
+        <p:nvSpPr>
+          <p:cNvPr id="12" name="Rectangle 11"/>
+          <p:cNvSpPr/>
+          <p:nvPr/>
+        </p:nvSpPr>
+        <p:spPr>
+          <a:xfrm>
+            <a:off x="594360" y="1828800"/>
+            <a:ext cx="109728" cy="960120"/>
+          </a:xfrm>
+          <a:prstGeom prst="rect">
+            <a:avLst/>
+          </a:prstGeom>
+          <a:solidFill>
+            <a:srgbClr val="B88A2E"/>
+          </a:solidFill>
+          <a:ln>
+            <a:noFill/>
+          </a:ln>
+          <a:effectLst/>
+        </p:spPr>
+        <p:style>
+          <a:lnRef idx="1">
+            <a:schemeClr val="accent1"/>
+          </a:lnRef>
+          <a:fillRef idx="3">
+            <a:schemeClr val="accent1"/>
+          </a:fillRef>
+          <a:effectRef idx="2">
+            <a:schemeClr val="accent1"/>
+          </a:effectRef>
+          <a:fontRef idx="minor">
+            <a:schemeClr val="lt1"/>
+          </a:fontRef>
+        </p:style>
+        <p:txBody>
+          <a:bodyPr rtlCol="0" anchor="ctr"/>
+          <a:lstStyle/>
+          <a:p>
+            <a:pPr algn="ctr"/>
+          </a:p>
+        </p:txBody>
+      </p:sp>
+      <p:sp>
+        <p:nvSpPr>
+          <p:cNvPr id="13" name="TextBox 12"/>
+          <p:cNvSpPr txBox="1"/>
+          <p:nvPr/>
+        </p:nvSpPr>
+        <p:spPr>
+          <a:xfrm>
+            <a:off x="1005840" y="1993392"/>
+            <a:ext cx="10058400" cy="320040"/>
+          </a:xfrm>
+          <a:prstGeom prst="rect">
+            <a:avLst/>
+          </a:prstGeom>
+          <a:noFill/>
+        </p:spPr>
+        <p:txBody>
+          <a:bodyPr wrap="square">
+            <a:spAutoFit/>
+          </a:bodyPr>
+          <a:lstStyle/>
+          <a:p>
+            <a:pPr>
               <a:spcBef>
                 <a:spcPts val="0"/>
               </a:spcBef>
@@ -6591,65 +5906,69 @@
               </a:spcAft>
             </a:pPr>
             <a:r>
-              <a:rPr sz="1400" b="1">
-                <a:solidFill>
-                  <a:srgbClr val="1E4D8C"/>
+              <a:rPr sz="1500" b="1">
+                <a:solidFill>
+                  <a:srgbClr val="0B1220"/>
                 </a:solidFill>
                 <a:latin typeface="Malgun Gothic"/>
               </a:rPr>
-              <a:t>SM37</a:t>
-            </a:r>
-          </a:p>
+              <a:t>매번 다른 지시</a:t>
+            </a:r>
+          </a:p>
+        </p:txBody>
+      </p:sp>
+      <p:sp>
+        <p:nvSpPr>
+          <p:cNvPr id="14" name="TextBox 13"/>
+          <p:cNvSpPr txBox="1"/>
+          <p:nvPr/>
+        </p:nvSpPr>
+        <p:spPr>
+          <a:xfrm>
+            <a:off x="1005840" y="2304288"/>
+            <a:ext cx="10058400" cy="320040"/>
+          </a:xfrm>
+          <a:prstGeom prst="rect">
+            <a:avLst/>
+          </a:prstGeom>
+          <a:noFill/>
+        </p:spPr>
+        <p:txBody>
+          <a:bodyPr wrap="square">
+            <a:spAutoFit/>
+          </a:bodyPr>
+          <a:lstStyle/>
           <a:p>
             <a:pPr>
               <a:spcBef>
-                <a:spcPts val="600"/>
+                <a:spcPts val="0"/>
               </a:spcBef>
               <a:spcAft>
                 <a:spcPts val="0"/>
               </a:spcAft>
             </a:pPr>
             <a:r>
-              <a:rPr sz="1600" b="1">
-                <a:solidFill>
-                  <a:srgbClr val="0F1F3D"/>
+              <a:rPr sz="1300" b="0">
+                <a:solidFill>
+                  <a:srgbClr val="5A6678"/>
                 </a:solidFill>
                 <a:latin typeface="Malgun Gothic"/>
               </a:rPr>
-              <a:t>배치 잡 에러</a:t>
-            </a:r>
-          </a:p>
-          <a:p>
-            <a:pPr>
-              <a:spcBef>
-                <a:spcPts val="400"/>
-              </a:spcBef>
-              <a:spcAft>
-                <a:spcPts val="0"/>
-              </a:spcAft>
-            </a:pPr>
-            <a:r>
-              <a:rPr sz="1100" b="0">
-                <a:solidFill>
-                  <a:srgbClr val="5B677A"/>
-                </a:solidFill>
-                <a:latin typeface="Malgun Gothic"/>
-              </a:rPr>
-              <a:t>잡 실패·로그 확인</a:t>
-            </a:r>
-          </a:p>
-        </p:txBody>
-      </p:sp>
-      <p:sp>
-        <p:nvSpPr>
-          <p:cNvPr id="11" name="Rounded Rectangle 10"/>
+              <a:t>같은 표준을 대화마다 다시 설명 → 결과 편차 발생</a:t>
+            </a:r>
+          </a:p>
+        </p:txBody>
+      </p:sp>
+      <p:sp>
+        <p:nvSpPr>
+          <p:cNvPr id="15" name="Rounded Rectangle 14"/>
           <p:cNvSpPr/>
           <p:nvPr/>
         </p:nvSpPr>
         <p:spPr>
           <a:xfrm>
-            <a:off x="4251960" y="1417320"/>
-            <a:ext cx="3383280" cy="1828800"/>
+            <a:off x="594360" y="2926080"/>
+            <a:ext cx="10972800" cy="960120"/>
           </a:xfrm>
           <a:prstGeom prst="roundRect">
             <a:avLst/>
@@ -6659,7 +5978,7 @@
           </a:solidFill>
           <a:ln w="12700">
             <a:solidFill>
-              <a:srgbClr val="D8DEE9"/>
+              <a:srgbClr val="E2E6ED"/>
             </a:solidFill>
           </a:ln>
           <a:effectLst/>
@@ -6679,10 +5998,80 @@
           </a:fontRef>
         </p:style>
         <p:txBody>
-          <a:bodyPr rtlCol="0" anchor="ctr" lIns="228600" tIns="274320"/>
-          <a:lstStyle/>
-          <a:p>
-            <a:pPr algn="ctr">
+          <a:bodyPr rtlCol="0" anchor="ctr"/>
+          <a:lstStyle/>
+          <a:p>
+            <a:pPr algn="ctr"/>
+          </a:p>
+        </p:txBody>
+      </p:sp>
+      <p:sp>
+        <p:nvSpPr>
+          <p:cNvPr id="16" name="Rectangle 15"/>
+          <p:cNvSpPr/>
+          <p:nvPr/>
+        </p:nvSpPr>
+        <p:spPr>
+          <a:xfrm>
+            <a:off x="594360" y="2926080"/>
+            <a:ext cx="109728" cy="960120"/>
+          </a:xfrm>
+          <a:prstGeom prst="rect">
+            <a:avLst/>
+          </a:prstGeom>
+          <a:solidFill>
+            <a:srgbClr val="B88A2E"/>
+          </a:solidFill>
+          <a:ln>
+            <a:noFill/>
+          </a:ln>
+          <a:effectLst/>
+        </p:spPr>
+        <p:style>
+          <a:lnRef idx="1">
+            <a:schemeClr val="accent1"/>
+          </a:lnRef>
+          <a:fillRef idx="3">
+            <a:schemeClr val="accent1"/>
+          </a:fillRef>
+          <a:effectRef idx="2">
+            <a:schemeClr val="accent1"/>
+          </a:effectRef>
+          <a:fontRef idx="minor">
+            <a:schemeClr val="lt1"/>
+          </a:fontRef>
+        </p:style>
+        <p:txBody>
+          <a:bodyPr rtlCol="0" anchor="ctr"/>
+          <a:lstStyle/>
+          <a:p>
+            <a:pPr algn="ctr"/>
+          </a:p>
+        </p:txBody>
+      </p:sp>
+      <p:sp>
+        <p:nvSpPr>
+          <p:cNvPr id="17" name="TextBox 16"/>
+          <p:cNvSpPr txBox="1"/>
+          <p:nvPr/>
+        </p:nvSpPr>
+        <p:spPr>
+          <a:xfrm>
+            <a:off x="1005840" y="3090672"/>
+            <a:ext cx="10058400" cy="320040"/>
+          </a:xfrm>
+          <a:prstGeom prst="rect">
+            <a:avLst/>
+          </a:prstGeom>
+          <a:noFill/>
+        </p:spPr>
+        <p:txBody>
+          <a:bodyPr wrap="square">
+            <a:spAutoFit/>
+          </a:bodyPr>
+          <a:lstStyle/>
+          <a:p>
+            <a:pPr>
               <a:spcBef>
                 <a:spcPts val="0"/>
               </a:spcBef>
@@ -6691,65 +6080,69 @@
               </a:spcAft>
             </a:pPr>
             <a:r>
-              <a:rPr sz="1400" b="1">
-                <a:solidFill>
-                  <a:srgbClr val="1E4D8C"/>
+              <a:rPr sz="1500" b="1">
+                <a:solidFill>
+                  <a:srgbClr val="0B1220"/>
                 </a:solidFill>
                 <a:latin typeface="Malgun Gothic"/>
               </a:rPr>
-              <a:t>ST22</a:t>
-            </a:r>
-          </a:p>
+              <a:t>조사 없는 생성</a:t>
+            </a:r>
+          </a:p>
+        </p:txBody>
+      </p:sp>
+      <p:sp>
+        <p:nvSpPr>
+          <p:cNvPr id="18" name="TextBox 17"/>
+          <p:cNvSpPr txBox="1"/>
+          <p:nvPr/>
+        </p:nvSpPr>
+        <p:spPr>
+          <a:xfrm>
+            <a:off x="1005840" y="3401568"/>
+            <a:ext cx="10058400" cy="320040"/>
+          </a:xfrm>
+          <a:prstGeom prst="rect">
+            <a:avLst/>
+          </a:prstGeom>
+          <a:noFill/>
+        </p:spPr>
+        <p:txBody>
+          <a:bodyPr wrap="square">
+            <a:spAutoFit/>
+          </a:bodyPr>
+          <a:lstStyle/>
           <a:p>
             <a:pPr>
               <a:spcBef>
-                <a:spcPts val="600"/>
+                <a:spcPts val="0"/>
               </a:spcBef>
               <a:spcAft>
                 <a:spcPts val="0"/>
               </a:spcAft>
             </a:pPr>
             <a:r>
-              <a:rPr sz="1600" b="1">
-                <a:solidFill>
-                  <a:srgbClr val="0F1F3D"/>
+              <a:rPr sz="1300" b="0">
+                <a:solidFill>
+                  <a:srgbClr val="5A6678"/>
                 </a:solidFill>
                 <a:latin typeface="Malgun Gothic"/>
               </a:rPr>
-              <a:t>런타임 덤프</a:t>
-            </a:r>
-          </a:p>
-          <a:p>
-            <a:pPr>
-              <a:spcBef>
-                <a:spcPts val="400"/>
-              </a:spcBef>
-              <a:spcAft>
-                <a:spcPts val="0"/>
-              </a:spcAft>
-            </a:pPr>
-            <a:r>
-              <a:rPr sz="1100" b="0">
-                <a:solidFill>
-                  <a:srgbClr val="5B677A"/>
-                </a:solidFill>
-                <a:latin typeface="Malgun Gothic"/>
-              </a:rPr>
-              <a:t>ABAP 단기 덤프 점검</a:t>
-            </a:r>
-          </a:p>
-        </p:txBody>
-      </p:sp>
-      <p:sp>
-        <p:nvSpPr>
-          <p:cNvPr id="12" name="Rounded Rectangle 11"/>
+              <a:t>근거 없이 코드만 생성 → 검증·재작업 비용 증가</a:t>
+            </a:r>
+          </a:p>
+        </p:txBody>
+      </p:sp>
+      <p:sp>
+        <p:nvSpPr>
+          <p:cNvPr id="19" name="Rounded Rectangle 18"/>
           <p:cNvSpPr/>
           <p:nvPr/>
         </p:nvSpPr>
         <p:spPr>
           <a:xfrm>
-            <a:off x="7863840" y="1417320"/>
-            <a:ext cx="3383280" cy="1828800"/>
+            <a:off x="594360" y="4023360"/>
+            <a:ext cx="10972800" cy="960120"/>
           </a:xfrm>
           <a:prstGeom prst="roundRect">
             <a:avLst/>
@@ -6759,7 +6152,7 @@
           </a:solidFill>
           <a:ln w="12700">
             <a:solidFill>
-              <a:srgbClr val="D8DEE9"/>
+              <a:srgbClr val="E2E6ED"/>
             </a:solidFill>
           </a:ln>
           <a:effectLst/>
@@ -6779,10 +6172,80 @@
           </a:fontRef>
         </p:style>
         <p:txBody>
-          <a:bodyPr rtlCol="0" anchor="ctr" lIns="228600" tIns="274320"/>
-          <a:lstStyle/>
-          <a:p>
-            <a:pPr algn="ctr">
+          <a:bodyPr rtlCol="0" anchor="ctr"/>
+          <a:lstStyle/>
+          <a:p>
+            <a:pPr algn="ctr"/>
+          </a:p>
+        </p:txBody>
+      </p:sp>
+      <p:sp>
+        <p:nvSpPr>
+          <p:cNvPr id="20" name="Rectangle 19"/>
+          <p:cNvSpPr/>
+          <p:nvPr/>
+        </p:nvSpPr>
+        <p:spPr>
+          <a:xfrm>
+            <a:off x="594360" y="4023360"/>
+            <a:ext cx="109728" cy="960120"/>
+          </a:xfrm>
+          <a:prstGeom prst="rect">
+            <a:avLst/>
+          </a:prstGeom>
+          <a:solidFill>
+            <a:srgbClr val="B88A2E"/>
+          </a:solidFill>
+          <a:ln>
+            <a:noFill/>
+          </a:ln>
+          <a:effectLst/>
+        </p:spPr>
+        <p:style>
+          <a:lnRef idx="1">
+            <a:schemeClr val="accent1"/>
+          </a:lnRef>
+          <a:fillRef idx="3">
+            <a:schemeClr val="accent1"/>
+          </a:fillRef>
+          <a:effectRef idx="2">
+            <a:schemeClr val="accent1"/>
+          </a:effectRef>
+          <a:fontRef idx="minor">
+            <a:schemeClr val="lt1"/>
+          </a:fontRef>
+        </p:style>
+        <p:txBody>
+          <a:bodyPr rtlCol="0" anchor="ctr"/>
+          <a:lstStyle/>
+          <a:p>
+            <a:pPr algn="ctr"/>
+          </a:p>
+        </p:txBody>
+      </p:sp>
+      <p:sp>
+        <p:nvSpPr>
+          <p:cNvPr id="21" name="TextBox 20"/>
+          <p:cNvSpPr txBox="1"/>
+          <p:nvPr/>
+        </p:nvSpPr>
+        <p:spPr>
+          <a:xfrm>
+            <a:off x="1005840" y="4187952"/>
+            <a:ext cx="10058400" cy="320040"/>
+          </a:xfrm>
+          <a:prstGeom prst="rect">
+            <a:avLst/>
+          </a:prstGeom>
+          <a:noFill/>
+        </p:spPr>
+        <p:txBody>
+          <a:bodyPr wrap="square">
+            <a:spAutoFit/>
+          </a:bodyPr>
+          <a:lstStyle/>
+          <a:p>
+            <a:pPr>
               <a:spcBef>
                 <a:spcPts val="0"/>
               </a:spcBef>
@@ -6791,65 +6254,69 @@
               </a:spcAft>
             </a:pPr>
             <a:r>
-              <a:rPr sz="1400" b="1">
-                <a:solidFill>
-                  <a:srgbClr val="1E4D8C"/>
+              <a:rPr sz="1500" b="1">
+                <a:solidFill>
+                  <a:srgbClr val="0B1220"/>
                 </a:solidFill>
                 <a:latin typeface="Malgun Gothic"/>
               </a:rPr>
-              <a:t>SXI_MONITOR</a:t>
-            </a:r>
-          </a:p>
+              <a:t>개인 의존</a:t>
+            </a:r>
+          </a:p>
+        </p:txBody>
+      </p:sp>
+      <p:sp>
+        <p:nvSpPr>
+          <p:cNvPr id="22" name="TextBox 21"/>
+          <p:cNvSpPr txBox="1"/>
+          <p:nvPr/>
+        </p:nvSpPr>
+        <p:spPr>
+          <a:xfrm>
+            <a:off x="1005840" y="4498848"/>
+            <a:ext cx="10058400" cy="320040"/>
+          </a:xfrm>
+          <a:prstGeom prst="rect">
+            <a:avLst/>
+          </a:prstGeom>
+          <a:noFill/>
+        </p:spPr>
+        <p:txBody>
+          <a:bodyPr wrap="square">
+            <a:spAutoFit/>
+          </a:bodyPr>
+          <a:lstStyle/>
           <a:p>
             <a:pPr>
               <a:spcBef>
-                <a:spcPts val="600"/>
+                <a:spcPts val="0"/>
               </a:spcBef>
               <a:spcAft>
                 <a:spcPts val="0"/>
               </a:spcAft>
             </a:pPr>
             <a:r>
-              <a:rPr sz="1600" b="1">
-                <a:solidFill>
-                  <a:srgbClr val="0F1F3D"/>
+              <a:rPr sz="1300" b="0">
+                <a:solidFill>
+                  <a:srgbClr val="5A6678"/>
                 </a:solidFill>
                 <a:latin typeface="Malgun Gothic"/>
               </a:rPr>
-              <a:t>인터페이스 에러</a:t>
-            </a:r>
-          </a:p>
-          <a:p>
-            <a:pPr>
-              <a:spcBef>
-                <a:spcPts val="400"/>
-              </a:spcBef>
-              <a:spcAft>
-                <a:spcPts val="0"/>
-              </a:spcAft>
-            </a:pPr>
-            <a:r>
-              <a:rPr sz="1100" b="0">
-                <a:solidFill>
-                  <a:srgbClr val="5B677A"/>
-                </a:solidFill>
-                <a:latin typeface="Malgun Gothic"/>
-              </a:rPr>
-              <a:t>PI/PO 메시지 오류</a:t>
-            </a:r>
-          </a:p>
-        </p:txBody>
-      </p:sp>
-      <p:sp>
-        <p:nvSpPr>
-          <p:cNvPr id="13" name="Rounded Rectangle 12"/>
+              <a:t>잘하는 사람만 잘 씀 → 조직 전체 생산성으로 전이되지 않음</a:t>
+            </a:r>
+          </a:p>
+        </p:txBody>
+      </p:sp>
+      <p:sp>
+        <p:nvSpPr>
+          <p:cNvPr id="23" name="Rounded Rectangle 22"/>
           <p:cNvSpPr/>
           <p:nvPr/>
         </p:nvSpPr>
         <p:spPr>
           <a:xfrm>
-            <a:off x="640080" y="3520440"/>
-            <a:ext cx="10881360" cy="2468880"/>
+            <a:off x="594360" y="5120640"/>
+            <a:ext cx="10972800" cy="960120"/>
           </a:xfrm>
           <a:prstGeom prst="roundRect">
             <a:avLst/>
@@ -6859,7 +6326,7 @@
           </a:solidFill>
           <a:ln w="12700">
             <a:solidFill>
-              <a:srgbClr val="D8DEE9"/>
+              <a:srgbClr val="E2E6ED"/>
             </a:solidFill>
           </a:ln>
           <a:effectLst/>
@@ -6879,10 +6346,80 @@
           </a:fontRef>
         </p:style>
         <p:txBody>
-          <a:bodyPr rtlCol="0" anchor="ctr" lIns="365760" tIns="228600"/>
-          <a:lstStyle/>
-          <a:p>
-            <a:pPr algn="ctr">
+          <a:bodyPr rtlCol="0" anchor="ctr"/>
+          <a:lstStyle/>
+          <a:p>
+            <a:pPr algn="ctr"/>
+          </a:p>
+        </p:txBody>
+      </p:sp>
+      <p:sp>
+        <p:nvSpPr>
+          <p:cNvPr id="24" name="Rectangle 23"/>
+          <p:cNvSpPr/>
+          <p:nvPr/>
+        </p:nvSpPr>
+        <p:spPr>
+          <a:xfrm>
+            <a:off x="594360" y="5120640"/>
+            <a:ext cx="109728" cy="960120"/>
+          </a:xfrm>
+          <a:prstGeom prst="rect">
+            <a:avLst/>
+          </a:prstGeom>
+          <a:solidFill>
+            <a:srgbClr val="B88A2E"/>
+          </a:solidFill>
+          <a:ln>
+            <a:noFill/>
+          </a:ln>
+          <a:effectLst/>
+        </p:spPr>
+        <p:style>
+          <a:lnRef idx="1">
+            <a:schemeClr val="accent1"/>
+          </a:lnRef>
+          <a:fillRef idx="3">
+            <a:schemeClr val="accent1"/>
+          </a:fillRef>
+          <a:effectRef idx="2">
+            <a:schemeClr val="accent1"/>
+          </a:effectRef>
+          <a:fontRef idx="minor">
+            <a:schemeClr val="lt1"/>
+          </a:fontRef>
+        </p:style>
+        <p:txBody>
+          <a:bodyPr rtlCol="0" anchor="ctr"/>
+          <a:lstStyle/>
+          <a:p>
+            <a:pPr algn="ctr"/>
+          </a:p>
+        </p:txBody>
+      </p:sp>
+      <p:sp>
+        <p:nvSpPr>
+          <p:cNvPr id="25" name="TextBox 24"/>
+          <p:cNvSpPr txBox="1"/>
+          <p:nvPr/>
+        </p:nvSpPr>
+        <p:spPr>
+          <a:xfrm>
+            <a:off x="1005840" y="5285232"/>
+            <a:ext cx="10058400" cy="320040"/>
+          </a:xfrm>
+          <a:prstGeom prst="rect">
+            <a:avLst/>
+          </a:prstGeom>
+          <a:noFill/>
+        </p:spPr>
+        <p:txBody>
+          <a:bodyPr wrap="square">
+            <a:spAutoFit/>
+          </a:bodyPr>
+          <a:lstStyle/>
+          <a:p>
+            <a:pPr>
               <a:spcBef>
                 <a:spcPts val="0"/>
               </a:spcBef>
@@ -6891,19 +6428,42 @@
               </a:spcAft>
             </a:pPr>
             <a:r>
-              <a:rPr sz="1400" b="1">
-                <a:solidFill>
-                  <a:srgbClr val="A6332A"/>
+              <a:rPr sz="1500" b="1">
+                <a:solidFill>
+                  <a:srgbClr val="0B1220"/>
                 </a:solidFill>
                 <a:latin typeface="Malgun Gothic"/>
               </a:rPr>
-              <a:t>현행 운영의 구조적 한계</a:t>
-            </a:r>
-          </a:p>
+              <a:t>결과물 중심 평가</a:t>
+            </a:r>
+          </a:p>
+        </p:txBody>
+      </p:sp>
+      <p:sp>
+        <p:nvSpPr>
+          <p:cNvPr id="26" name="TextBox 25"/>
+          <p:cNvSpPr txBox="1"/>
+          <p:nvPr/>
+        </p:nvSpPr>
+        <p:spPr>
+          <a:xfrm>
+            <a:off x="1005840" y="5596128"/>
+            <a:ext cx="10058400" cy="320040"/>
+          </a:xfrm>
+          <a:prstGeom prst="rect">
+            <a:avLst/>
+          </a:prstGeom>
+          <a:noFill/>
+        </p:spPr>
+        <p:txBody>
+          <a:bodyPr wrap="square">
+            <a:spAutoFit/>
+          </a:bodyPr>
+          <a:lstStyle/>
           <a:p>
             <a:pPr>
               <a:spcBef>
-                <a:spcPts val="1000"/>
+                <a:spcPts val="0"/>
               </a:spcBef>
               <a:spcAft>
                 <a:spcPts val="0"/>
@@ -6912,68 +6472,11 @@
             <a:r>
               <a:rPr sz="1300" b="0">
                 <a:solidFill>
-                  <a:srgbClr val="1A2332"/>
+                  <a:srgbClr val="5A6678"/>
                 </a:solidFill>
                 <a:latin typeface="Malgun Gothic"/>
               </a:rPr>
-              <a:t>▸  점검 채널이 3개로 분산되어 매일 트랜잭션을 개별 실행해야 함</a:t>
-            </a:r>
-          </a:p>
-          <a:p>
-            <a:pPr>
-              <a:spcBef>
-                <a:spcPts val="1000"/>
-              </a:spcBef>
-              <a:spcAft>
-                <a:spcPts val="0"/>
-              </a:spcAft>
-            </a:pPr>
-            <a:r>
-              <a:rPr sz="1300" b="0">
-                <a:solidFill>
-                  <a:srgbClr val="1A2332"/>
-                </a:solidFill>
-                <a:latin typeface="Malgun Gothic"/>
-              </a:rPr>
-              <a:t>▸  화면 전환이 잦아 점검 누락·지연 리스크가 상존</a:t>
-            </a:r>
-          </a:p>
-          <a:p>
-            <a:pPr>
-              <a:spcBef>
-                <a:spcPts val="1000"/>
-              </a:spcBef>
-              <a:spcAft>
-                <a:spcPts val="0"/>
-              </a:spcAft>
-            </a:pPr>
-            <a:r>
-              <a:rPr sz="1300" b="0">
-                <a:solidFill>
-                  <a:srgbClr val="1A2332"/>
-                </a:solidFill>
-                <a:latin typeface="Malgun Gothic"/>
-              </a:rPr>
-              <a:t>▸  현황 파악에 시간이 소요되어 “이상 징후 조기 인지”가 어려움</a:t>
-            </a:r>
-          </a:p>
-          <a:p>
-            <a:pPr>
-              <a:spcBef>
-                <a:spcPts val="1000"/>
-              </a:spcBef>
-              <a:spcAft>
-                <a:spcPts val="0"/>
-              </a:spcAft>
-            </a:pPr>
-            <a:r>
-              <a:rPr sz="1300" b="0">
-                <a:solidFill>
-                  <a:srgbClr val="1A2332"/>
-                </a:solidFill>
-                <a:latin typeface="Malgun Gothic"/>
-              </a:rPr>
-              <a:t>▸  동일 점검을 반복하면서도 표준화된 점검 뷰가 부재</a:t>
+              <a:t>산출물 유무만 보고, 재사용·표준화는 남지 않음</a:t>
             </a:r>
           </a:p>
         </p:txBody>
@@ -7011,7 +6514,7 @@
             <a:avLst/>
           </a:prstGeom>
           <a:solidFill>
-            <a:srgbClr val="F3F5F9"/>
+            <a:srgbClr val="F7F8FA"/>
           </a:solidFill>
           <a:ln>
             <a:noFill/>
@@ -7049,13 +6552,13 @@
         <p:spPr>
           <a:xfrm>
             <a:off x="0" y="0"/>
-            <a:ext cx="12191695" cy="73152"/>
+            <a:ext cx="12191695" cy="54864"/>
           </a:xfrm>
           <a:prstGeom prst="rect">
             <a:avLst/>
           </a:prstGeom>
           <a:solidFill>
-            <a:srgbClr val="0F1F3D"/>
+            <a:srgbClr val="0B1220"/>
           </a:solidFill>
           <a:ln>
             <a:noFill/>
@@ -7092,8 +6595,8 @@
         </p:nvSpPr>
         <p:spPr>
           <a:xfrm>
-            <a:off x="640080" y="256032"/>
-            <a:ext cx="9144000" cy="292608"/>
+            <a:off x="594360" y="320040"/>
+            <a:ext cx="10972800" cy="256032"/>
           </a:xfrm>
           <a:prstGeom prst="rect">
             <a:avLst/>
@@ -7115,13 +6618,13 @@
               </a:spcAft>
             </a:pPr>
             <a:r>
-              <a:rPr sz="1100" b="1">
-                <a:solidFill>
-                  <a:srgbClr val="1E4D8C"/>
+              <a:rPr sz="1000" b="1">
+                <a:solidFill>
+                  <a:srgbClr val="1A568A"/>
                 </a:solidFill>
                 <a:latin typeface="Malgun Gothic"/>
               </a:rPr>
-              <a:t>03  SOLUTION</a:t>
+              <a:t>PRINCIPLE</a:t>
             </a:r>
           </a:p>
         </p:txBody>
@@ -7134,8 +6637,8 @@
         </p:nvSpPr>
         <p:spPr>
           <a:xfrm>
-            <a:off x="640080" y="502920"/>
-            <a:ext cx="10515600" cy="502920"/>
+            <a:off x="594360" y="594360"/>
+            <a:ext cx="10972800" cy="502920"/>
           </a:xfrm>
           <a:prstGeom prst="rect">
             <a:avLst/>
@@ -7157,33 +6660,75 @@
               </a:spcAft>
             </a:pPr>
             <a:r>
-              <a:rPr sz="2400" b="1">
-                <a:solidFill>
-                  <a:srgbClr val="0F1F3D"/>
+              <a:rPr sz="2600" b="1">
+                <a:solidFill>
+                  <a:srgbClr val="0B1220"/>
                 </a:solidFill>
                 <a:latin typeface="Malgun Gothic"/>
               </a:rPr>
-              <a:t>단일 화면으로 운영 현황을 한눈에</a:t>
-            </a:r>
-          </a:p>
-        </p:txBody>
-      </p:sp>
-      <p:sp>
-        <p:nvSpPr>
-          <p:cNvPr id="6" name="Rectangle 5"/>
+              <a:t>효율이 나는 AI 활용의 세 가지 조건</a:t>
+            </a:r>
+          </a:p>
+        </p:txBody>
+      </p:sp>
+      <p:sp>
+        <p:nvSpPr>
+          <p:cNvPr id="6" name="TextBox 5"/>
+          <p:cNvSpPr txBox="1"/>
+          <p:nvPr/>
+        </p:nvSpPr>
+        <p:spPr>
+          <a:xfrm>
+            <a:off x="594360" y="1097280"/>
+            <a:ext cx="10972800" cy="320040"/>
+          </a:xfrm>
+          <a:prstGeom prst="rect">
+            <a:avLst/>
+          </a:prstGeom>
+          <a:noFill/>
+        </p:spPr>
+        <p:txBody>
+          <a:bodyPr wrap="square">
+            <a:spAutoFit/>
+          </a:bodyPr>
+          <a:lstStyle/>
+          <a:p>
+            <a:pPr>
+              <a:spcBef>
+                <a:spcPts val="0"/>
+              </a:spcBef>
+              <a:spcAft>
+                <a:spcPts val="0"/>
+              </a:spcAft>
+            </a:pPr>
+            <a:r>
+              <a:rPr sz="1300" b="0">
+                <a:solidFill>
+                  <a:srgbClr val="5A6678"/>
+                </a:solidFill>
+                <a:latin typeface="Malgun Gothic"/>
+              </a:rPr>
+              <a:t>프롬프트 요령이 아니라, 일하는 구조입니다</a:t>
+            </a:r>
+          </a:p>
+        </p:txBody>
+      </p:sp>
+      <p:sp>
+        <p:nvSpPr>
+          <p:cNvPr id="7" name="Rectangle 6"/>
           <p:cNvSpPr/>
           <p:nvPr/>
         </p:nvSpPr>
         <p:spPr>
           <a:xfrm>
-            <a:off x="658368" y="1051560"/>
-            <a:ext cx="1097280" cy="44450"/>
+            <a:off x="594360" y="1417320"/>
+            <a:ext cx="822960" cy="38100"/>
           </a:xfrm>
           <a:prstGeom prst="rect">
             <a:avLst/>
           </a:prstGeom>
           <a:solidFill>
-            <a:srgbClr val="C48A1A"/>
+            <a:srgbClr val="B88A2E"/>
           </a:solidFill>
           <a:ln>
             <a:noFill/>
@@ -7214,20 +6759,20 @@
       </p:sp>
       <p:sp>
         <p:nvSpPr>
-          <p:cNvPr id="7" name="Rectangle 6"/>
+          <p:cNvPr id="8" name="Rectangle 7"/>
           <p:cNvSpPr/>
           <p:nvPr/>
         </p:nvSpPr>
         <p:spPr>
           <a:xfrm>
-            <a:off x="0" y="6537960"/>
-            <a:ext cx="12191695" cy="320040"/>
+            <a:off x="0" y="6583680"/>
+            <a:ext cx="12191695" cy="274320"/>
           </a:xfrm>
           <a:prstGeom prst="rect">
             <a:avLst/>
           </a:prstGeom>
           <a:solidFill>
-            <a:srgbClr val="0F1F3D"/>
+            <a:srgbClr val="0B1220"/>
           </a:solidFill>
           <a:ln>
             <a:noFill/>
@@ -7258,14 +6803,14 @@
       </p:sp>
       <p:sp>
         <p:nvSpPr>
-          <p:cNvPr id="8" name="TextBox 7"/>
+          <p:cNvPr id="9" name="TextBox 8"/>
           <p:cNvSpPr txBox="1"/>
           <p:nvPr/>
         </p:nvSpPr>
         <p:spPr>
           <a:xfrm>
-            <a:off x="640080" y="6565392"/>
-            <a:ext cx="8229600" cy="256032"/>
+            <a:off x="594360" y="6601968"/>
+            <a:ext cx="8229600" cy="237744"/>
           </a:xfrm>
           <a:prstGeom prst="rect">
             <a:avLst/>
@@ -7289,25 +6834,25 @@
             <a:r>
               <a:rPr sz="900" b="0">
                 <a:solidFill>
-                  <a:srgbClr val="FFFFFF"/>
+                  <a:srgbClr val="8B95A5"/>
                 </a:solidFill>
                 <a:latin typeface="Malgun Gothic"/>
               </a:rPr>
-              <a:t>통합 운영 모니터링  ·  AI 활용 개발 성과 보고</a:t>
-            </a:r>
-          </a:p>
-        </p:txBody>
-      </p:sp>
-      <p:sp>
-        <p:nvSpPr>
-          <p:cNvPr id="9" name="TextBox 8"/>
+              <a:t>AI 활용 효율성  ·  향후 방향</a:t>
+            </a:r>
+          </a:p>
+        </p:txBody>
+      </p:sp>
+      <p:sp>
+        <p:nvSpPr>
+          <p:cNvPr id="10" name="TextBox 9"/>
           <p:cNvSpPr txBox="1"/>
           <p:nvPr/>
         </p:nvSpPr>
         <p:spPr>
           <a:xfrm>
-            <a:off x="10241280" y="6565392"/>
-            <a:ext cx="1371600" cy="256032"/>
+            <a:off x="10332720" y="6601968"/>
+            <a:ext cx="1280160" cy="237744"/>
           </a:xfrm>
           <a:prstGeom prst="rect">
             <a:avLst/>
@@ -7331,25 +6876,25 @@
             <a:r>
               <a:rPr sz="900" b="0">
                 <a:solidFill>
-                  <a:srgbClr val="FFFFFF"/>
+                  <a:srgbClr val="8B95A5"/>
                 </a:solidFill>
                 <a:latin typeface="Malgun Gothic"/>
               </a:rPr>
-              <a:t>4 / 8</a:t>
-            </a:r>
-          </a:p>
-        </p:txBody>
-      </p:sp>
-      <p:sp>
-        <p:nvSpPr>
-          <p:cNvPr id="10" name="Rounded Rectangle 9"/>
+              <a:t>4  /  8</a:t>
+            </a:r>
+          </a:p>
+        </p:txBody>
+      </p:sp>
+      <p:sp>
+        <p:nvSpPr>
+          <p:cNvPr id="11" name="Rounded Rectangle 10"/>
           <p:cNvSpPr/>
           <p:nvPr/>
         </p:nvSpPr>
         <p:spPr>
           <a:xfrm>
-            <a:off x="640080" y="1371600"/>
-            <a:ext cx="5486400" cy="4663440"/>
+            <a:off x="594360" y="1828800"/>
+            <a:ext cx="3611880" cy="4114800"/>
           </a:xfrm>
           <a:prstGeom prst="roundRect">
             <a:avLst/>
@@ -7359,7 +6904,7 @@
           </a:solidFill>
           <a:ln w="12700">
             <a:solidFill>
-              <a:srgbClr val="D8DEE9"/>
+              <a:srgbClr val="E2E6ED"/>
             </a:solidFill>
           </a:ln>
           <a:effectLst/>
@@ -7379,10 +6924,80 @@
           </a:fontRef>
         </p:style>
         <p:txBody>
-          <a:bodyPr rtlCol="0" anchor="ctr" lIns="320040" tIns="228600"/>
-          <a:lstStyle/>
-          <a:p>
-            <a:pPr algn="ctr">
+          <a:bodyPr rtlCol="0" anchor="ctr"/>
+          <a:lstStyle/>
+          <a:p>
+            <a:pPr algn="ctr"/>
+          </a:p>
+        </p:txBody>
+      </p:sp>
+      <p:sp>
+        <p:nvSpPr>
+          <p:cNvPr id="12" name="Rectangle 11"/>
+          <p:cNvSpPr/>
+          <p:nvPr/>
+        </p:nvSpPr>
+        <p:spPr>
+          <a:xfrm>
+            <a:off x="594360" y="1828800"/>
+            <a:ext cx="3611880" cy="91440"/>
+          </a:xfrm>
+          <a:prstGeom prst="rect">
+            <a:avLst/>
+          </a:prstGeom>
+          <a:solidFill>
+            <a:srgbClr val="1A568A"/>
+          </a:solidFill>
+          <a:ln>
+            <a:noFill/>
+          </a:ln>
+          <a:effectLst/>
+        </p:spPr>
+        <p:style>
+          <a:lnRef idx="1">
+            <a:schemeClr val="accent1"/>
+          </a:lnRef>
+          <a:fillRef idx="3">
+            <a:schemeClr val="accent1"/>
+          </a:fillRef>
+          <a:effectRef idx="2">
+            <a:schemeClr val="accent1"/>
+          </a:effectRef>
+          <a:fontRef idx="minor">
+            <a:schemeClr val="lt1"/>
+          </a:fontRef>
+        </p:style>
+        <p:txBody>
+          <a:bodyPr rtlCol="0" anchor="ctr"/>
+          <a:lstStyle/>
+          <a:p>
+            <a:pPr algn="ctr"/>
+          </a:p>
+        </p:txBody>
+      </p:sp>
+      <p:sp>
+        <p:nvSpPr>
+          <p:cNvPr id="13" name="TextBox 12"/>
+          <p:cNvSpPr txBox="1"/>
+          <p:nvPr/>
+        </p:nvSpPr>
+        <p:spPr>
+          <a:xfrm>
+            <a:off x="914400" y="2057400"/>
+            <a:ext cx="3108960" cy="365760"/>
+          </a:xfrm>
+          <a:prstGeom prst="rect">
+            <a:avLst/>
+          </a:prstGeom>
+          <a:noFill/>
+        </p:spPr>
+        <p:txBody>
+          <a:bodyPr wrap="square">
+            <a:spAutoFit/>
+          </a:bodyPr>
+          <a:lstStyle/>
+          <a:p>
+            <a:pPr>
               <a:spcBef>
                 <a:spcPts val="0"/>
               </a:spcBef>
@@ -7391,19 +7006,42 @@
               </a:spcAft>
             </a:pPr>
             <a:r>
-              <a:rPr sz="1400" b="1">
-                <a:solidFill>
-                  <a:srgbClr val="1E4D8C"/>
+              <a:rPr sz="1600" b="1">
+                <a:solidFill>
+                  <a:srgbClr val="1A568A"/>
                 </a:solidFill>
                 <a:latin typeface="Malgun Gothic"/>
               </a:rPr>
-              <a:t>대시보드 구성</a:t>
-            </a:r>
-          </a:p>
+              <a:t>범위 고정</a:t>
+            </a:r>
+          </a:p>
+        </p:txBody>
+      </p:sp>
+      <p:sp>
+        <p:nvSpPr>
+          <p:cNvPr id="14" name="TextBox 13"/>
+          <p:cNvSpPr txBox="1"/>
+          <p:nvPr/>
+        </p:nvSpPr>
+        <p:spPr>
+          <a:xfrm>
+            <a:off x="914400" y="2606040"/>
+            <a:ext cx="3108960" cy="1188720"/>
+          </a:xfrm>
+          <a:prstGeom prst="rect">
+            <a:avLst/>
+          </a:prstGeom>
+          <a:noFill/>
+        </p:spPr>
+        <p:txBody>
+          <a:bodyPr wrap="square">
+            <a:spAutoFit/>
+          </a:bodyPr>
+          <a:lstStyle/>
           <a:p>
             <a:pPr>
               <a:spcBef>
-                <a:spcPts val="1600"/>
+                <a:spcPts val="0"/>
               </a:spcBef>
               <a:spcAft>
                 <a:spcPts val="0"/>
@@ -7412,11 +7050,11 @@
             <a:r>
               <a:rPr sz="1500" b="1">
                 <a:solidFill>
-                  <a:srgbClr val="0F1F3D"/>
+                  <a:srgbClr val="0B1220"/>
                 </a:solidFill>
                 <a:latin typeface="Malgun Gothic"/>
               </a:rPr>
-              <a:t>상단 요약</a:t>
+              <a:t>AI가 해도 되는 일과</a:t>
             </a:r>
           </a:p>
           <a:p>
@@ -7429,32 +7067,55 @@
               </a:spcAft>
             </a:pPr>
             <a:r>
-              <a:rPr sz="1200" b="0">
-                <a:solidFill>
-                  <a:srgbClr val="5B677A"/>
+              <a:rPr sz="1500" b="1">
+                <a:solidFill>
+                  <a:srgbClr val="0B1220"/>
                 </a:solidFill>
                 <a:latin typeface="Malgun Gothic"/>
               </a:rPr>
-              <a:t>영역별 건수 · 신호등 · 조회 기간 · 최종 갱신</a:t>
-            </a:r>
-          </a:p>
+              <a:t>사람이 해야 하는 일을 나눕니다</a:t>
+            </a:r>
+          </a:p>
+        </p:txBody>
+      </p:sp>
+      <p:sp>
+        <p:nvSpPr>
+          <p:cNvPr id="15" name="TextBox 14"/>
+          <p:cNvSpPr txBox="1"/>
+          <p:nvPr/>
+        </p:nvSpPr>
+        <p:spPr>
+          <a:xfrm>
+            <a:off x="914400" y="4114800"/>
+            <a:ext cx="3108960" cy="1371600"/>
+          </a:xfrm>
+          <a:prstGeom prst="rect">
+            <a:avLst/>
+          </a:prstGeom>
+          <a:noFill/>
+        </p:spPr>
+        <p:txBody>
+          <a:bodyPr wrap="square">
+            <a:spAutoFit/>
+          </a:bodyPr>
+          <a:lstStyle/>
           <a:p>
             <a:pPr>
               <a:spcBef>
-                <a:spcPts val="1600"/>
+                <a:spcPts val="0"/>
               </a:spcBef>
               <a:spcAft>
                 <a:spcPts val="0"/>
               </a:spcAft>
             </a:pPr>
             <a:r>
-              <a:rPr sz="1500" b="1">
-                <a:solidFill>
-                  <a:srgbClr val="0F1F3D"/>
+              <a:rPr sz="1200" b="0">
+                <a:solidFill>
+                  <a:srgbClr val="5A6678"/>
                 </a:solidFill>
                 <a:latin typeface="Malgun Gothic"/>
               </a:rPr>
-              <a:t>중간 차트</a:t>
+              <a:t>조사·초안·반복 수정 → AI</a:t>
             </a:r>
           </a:p>
           <a:p>
@@ -7469,30 +7130,185 @@
             <a:r>
               <a:rPr sz="1200" b="0">
                 <a:solidFill>
-                  <a:srgbClr val="5B677A"/>
+                  <a:srgbClr val="5A6678"/>
                 </a:solidFill>
                 <a:latin typeface="Malgun Gothic"/>
               </a:rPr>
-              <a:t>영역별 Top-N 에러 집중도 (IGS Chart)</a:t>
-            </a:r>
-          </a:p>
+              <a:t>판단·책임·운영 확정 → 사람</a:t>
+            </a:r>
+          </a:p>
+        </p:txBody>
+      </p:sp>
+      <p:sp>
+        <p:nvSpPr>
+          <p:cNvPr id="16" name="Rounded Rectangle 15"/>
+          <p:cNvSpPr/>
+          <p:nvPr/>
+        </p:nvSpPr>
+        <p:spPr>
+          <a:xfrm>
+            <a:off x="4389120" y="1828800"/>
+            <a:ext cx="3611880" cy="4114800"/>
+          </a:xfrm>
+          <a:prstGeom prst="roundRect">
+            <a:avLst/>
+          </a:prstGeom>
+          <a:solidFill>
+            <a:srgbClr val="FFFFFF"/>
+          </a:solidFill>
+          <a:ln w="12700">
+            <a:solidFill>
+              <a:srgbClr val="E2E6ED"/>
+            </a:solidFill>
+          </a:ln>
+          <a:effectLst/>
+        </p:spPr>
+        <p:style>
+          <a:lnRef idx="1">
+            <a:schemeClr val="accent1"/>
+          </a:lnRef>
+          <a:fillRef idx="3">
+            <a:schemeClr val="accent1"/>
+          </a:fillRef>
+          <a:effectRef idx="2">
+            <a:schemeClr val="accent1"/>
+          </a:effectRef>
+          <a:fontRef idx="minor">
+            <a:schemeClr val="lt1"/>
+          </a:fontRef>
+        </p:style>
+        <p:txBody>
+          <a:bodyPr rtlCol="0" anchor="ctr"/>
+          <a:lstStyle/>
+          <a:p>
+            <a:pPr algn="ctr"/>
+          </a:p>
+        </p:txBody>
+      </p:sp>
+      <p:sp>
+        <p:nvSpPr>
+          <p:cNvPr id="17" name="Rectangle 16"/>
+          <p:cNvSpPr/>
+          <p:nvPr/>
+        </p:nvSpPr>
+        <p:spPr>
+          <a:xfrm>
+            <a:off x="4389120" y="1828800"/>
+            <a:ext cx="3611880" cy="91440"/>
+          </a:xfrm>
+          <a:prstGeom prst="rect">
+            <a:avLst/>
+          </a:prstGeom>
+          <a:solidFill>
+            <a:srgbClr val="1A568A"/>
+          </a:solidFill>
+          <a:ln>
+            <a:noFill/>
+          </a:ln>
+          <a:effectLst/>
+        </p:spPr>
+        <p:style>
+          <a:lnRef idx="1">
+            <a:schemeClr val="accent1"/>
+          </a:lnRef>
+          <a:fillRef idx="3">
+            <a:schemeClr val="accent1"/>
+          </a:fillRef>
+          <a:effectRef idx="2">
+            <a:schemeClr val="accent1"/>
+          </a:effectRef>
+          <a:fontRef idx="minor">
+            <a:schemeClr val="lt1"/>
+          </a:fontRef>
+        </p:style>
+        <p:txBody>
+          <a:bodyPr rtlCol="0" anchor="ctr"/>
+          <a:lstStyle/>
+          <a:p>
+            <a:pPr algn="ctr"/>
+          </a:p>
+        </p:txBody>
+      </p:sp>
+      <p:sp>
+        <p:nvSpPr>
+          <p:cNvPr id="18" name="TextBox 17"/>
+          <p:cNvSpPr txBox="1"/>
+          <p:nvPr/>
+        </p:nvSpPr>
+        <p:spPr>
+          <a:xfrm>
+            <a:off x="4709160" y="2057400"/>
+            <a:ext cx="3108960" cy="365760"/>
+          </a:xfrm>
+          <a:prstGeom prst="rect">
+            <a:avLst/>
+          </a:prstGeom>
+          <a:noFill/>
+        </p:spPr>
+        <p:txBody>
+          <a:bodyPr wrap="square">
+            <a:spAutoFit/>
+          </a:bodyPr>
+          <a:lstStyle/>
           <a:p>
             <a:pPr>
               <a:spcBef>
-                <a:spcPts val="1600"/>
+                <a:spcPts val="0"/>
               </a:spcBef>
               <a:spcAft>
                 <a:spcPts val="0"/>
               </a:spcAft>
             </a:pPr>
             <a:r>
-              <a:rPr sz="1500" b="1">
-                <a:solidFill>
-                  <a:srgbClr val="0F1F3D"/>
+              <a:rPr sz="1600" b="1">
+                <a:solidFill>
+                  <a:srgbClr val="1A568A"/>
                 </a:solidFill>
                 <a:latin typeface="Malgun Gothic"/>
               </a:rPr>
-              <a:t>하단 목록</a:t>
+              <a:t>표준 선반영</a:t>
+            </a:r>
+          </a:p>
+        </p:txBody>
+      </p:sp>
+      <p:sp>
+        <p:nvSpPr>
+          <p:cNvPr id="19" name="TextBox 18"/>
+          <p:cNvSpPr txBox="1"/>
+          <p:nvPr/>
+        </p:nvSpPr>
+        <p:spPr>
+          <a:xfrm>
+            <a:off x="4709160" y="2606040"/>
+            <a:ext cx="3108960" cy="1188720"/>
+          </a:xfrm>
+          <a:prstGeom prst="rect">
+            <a:avLst/>
+          </a:prstGeom>
+          <a:noFill/>
+        </p:spPr>
+        <p:txBody>
+          <a:bodyPr wrap="square">
+            <a:spAutoFit/>
+          </a:bodyPr>
+          <a:lstStyle/>
+          <a:p>
+            <a:pPr>
+              <a:spcBef>
+                <a:spcPts val="0"/>
+              </a:spcBef>
+              <a:spcAft>
+                <a:spcPts val="0"/>
+              </a:spcAft>
+            </a:pPr>
+            <a:r>
+              <a:rPr sz="1500" b="1">
+                <a:solidFill>
+                  <a:srgbClr val="0B1220"/>
+                </a:solidFill>
+                <a:latin typeface="Malgun Gothic"/>
+              </a:rPr>
+              <a:t>매번 지시하지 않도록</a:t>
             </a:r>
           </a:p>
           <a:p>
@@ -7505,38 +7321,61 @@
               </a:spcAft>
             </a:pPr>
             <a:r>
-              <a:rPr sz="1200" b="0">
-                <a:solidFill>
-                  <a:srgbClr val="5B677A"/>
+              <a:rPr sz="1500" b="1">
+                <a:solidFill>
+                  <a:srgbClr val="0B1220"/>
                 </a:solidFill>
                 <a:latin typeface="Malgun Gothic"/>
               </a:rPr>
-              <a:t>상세 ALV · 더블클릭 시 표준 상세 화면 이동</a:t>
-            </a:r>
-          </a:p>
+              <a:t>규칙을 저장소에 둡니다</a:t>
+            </a:r>
+          </a:p>
+        </p:txBody>
+      </p:sp>
+      <p:sp>
+        <p:nvSpPr>
+          <p:cNvPr id="20" name="TextBox 19"/>
+          <p:cNvSpPr txBox="1"/>
+          <p:nvPr/>
+        </p:nvSpPr>
+        <p:spPr>
+          <a:xfrm>
+            <a:off x="4709160" y="4114800"/>
+            <a:ext cx="3108960" cy="1371600"/>
+          </a:xfrm>
+          <a:prstGeom prst="rect">
+            <a:avLst/>
+          </a:prstGeom>
+          <a:noFill/>
+        </p:spPr>
+        <p:txBody>
+          <a:bodyPr wrap="square">
+            <a:spAutoFit/>
+          </a:bodyPr>
+          <a:lstStyle/>
           <a:p>
             <a:pPr>
               <a:spcBef>
-                <a:spcPts val="2000"/>
+                <a:spcPts val="0"/>
               </a:spcBef>
               <a:spcAft>
                 <a:spcPts val="0"/>
               </a:spcAft>
             </a:pPr>
             <a:r>
-              <a:rPr sz="1400" b="1">
-                <a:solidFill>
-                  <a:srgbClr val="1E4D8C"/>
+              <a:rPr sz="1200" b="0">
+                <a:solidFill>
+                  <a:srgbClr val="5A6678"/>
                 </a:solidFill>
                 <a:latin typeface="Malgun Gothic"/>
               </a:rPr>
-              <a:t>설계 원칙</a:t>
+              <a:t>Rules: 상시 자동 적용</a:t>
             </a:r>
           </a:p>
           <a:p>
             <a:pPr>
               <a:spcBef>
-                <a:spcPts val="600"/>
+                <a:spcPts val="400"/>
               </a:spcBef>
               <a:spcAft>
                 <a:spcPts val="0"/>
@@ -7545,63 +7384,25 @@
             <a:r>
               <a:rPr sz="1200" b="0">
                 <a:solidFill>
-                  <a:srgbClr val="1A2332"/>
+                  <a:srgbClr val="5A6678"/>
                 </a:solidFill>
                 <a:latin typeface="Malgun Gothic"/>
               </a:rPr>
-              <a:t>•  읽기 전용 — 데이터 변경·COMMIT·LOCK 금지</a:t>
-            </a:r>
-          </a:p>
-          <a:p>
-            <a:pPr>
-              <a:spcBef>
-                <a:spcPts val="600"/>
-              </a:spcBef>
-              <a:spcAft>
-                <a:spcPts val="0"/>
-              </a:spcAft>
-            </a:pPr>
-            <a:r>
-              <a:rPr sz="1200" b="0">
-                <a:solidFill>
-                  <a:srgbClr val="1A2332"/>
-                </a:solidFill>
-                <a:latin typeface="Malgun Gothic"/>
-              </a:rPr>
-              <a:t>•  SAP 표준 테이블/FM만 사용</a:t>
-            </a:r>
-          </a:p>
-          <a:p>
-            <a:pPr>
-              <a:spcBef>
-                <a:spcPts val="600"/>
-              </a:spcBef>
-              <a:spcAft>
-                <a:spcPts val="0"/>
-              </a:spcAft>
-            </a:pPr>
-            <a:r>
-              <a:rPr sz="1200" b="0">
-                <a:solidFill>
-                  <a:srgbClr val="1A2332"/>
-                </a:solidFill>
-                <a:latin typeface="Malgun Gothic"/>
-              </a:rPr>
-              <a:t>•  영역별 권한 격리 — 일부 권한 없어도 나머지 동작</a:t>
-            </a:r>
-          </a:p>
-        </p:txBody>
-      </p:sp>
-      <p:sp>
-        <p:nvSpPr>
-          <p:cNvPr id="11" name="Rounded Rectangle 10"/>
+              <a:t>Skills: 작업별 절차 재사용</a:t>
+            </a:r>
+          </a:p>
+        </p:txBody>
+      </p:sp>
+      <p:sp>
+        <p:nvSpPr>
+          <p:cNvPr id="21" name="Rounded Rectangle 20"/>
           <p:cNvSpPr/>
           <p:nvPr/>
         </p:nvSpPr>
         <p:spPr>
           <a:xfrm>
-            <a:off x="6400800" y="1371600"/>
-            <a:ext cx="5120640" cy="1051560"/>
+            <a:off x="8183880" y="1828800"/>
+            <a:ext cx="3611880" cy="4114800"/>
           </a:xfrm>
           <a:prstGeom prst="roundRect">
             <a:avLst/>
@@ -7611,7 +7412,7 @@
           </a:solidFill>
           <a:ln w="12700">
             <a:solidFill>
-              <a:srgbClr val="D8DEE9"/>
+              <a:srgbClr val="E2E6ED"/>
             </a:solidFill>
           </a:ln>
           <a:effectLst/>
@@ -7631,10 +7432,80 @@
           </a:fontRef>
         </p:style>
         <p:txBody>
-          <a:bodyPr rtlCol="0" anchor="ctr" lIns="228600" tIns="201168"/>
-          <a:lstStyle/>
-          <a:p>
-            <a:pPr algn="ctr">
+          <a:bodyPr rtlCol="0" anchor="ctr"/>
+          <a:lstStyle/>
+          <a:p>
+            <a:pPr algn="ctr"/>
+          </a:p>
+        </p:txBody>
+      </p:sp>
+      <p:sp>
+        <p:nvSpPr>
+          <p:cNvPr id="22" name="Rectangle 21"/>
+          <p:cNvSpPr/>
+          <p:nvPr/>
+        </p:nvSpPr>
+        <p:spPr>
+          <a:xfrm>
+            <a:off x="8183880" y="1828800"/>
+            <a:ext cx="3611880" cy="91440"/>
+          </a:xfrm>
+          <a:prstGeom prst="rect">
+            <a:avLst/>
+          </a:prstGeom>
+          <a:solidFill>
+            <a:srgbClr val="1A568A"/>
+          </a:solidFill>
+          <a:ln>
+            <a:noFill/>
+          </a:ln>
+          <a:effectLst/>
+        </p:spPr>
+        <p:style>
+          <a:lnRef idx="1">
+            <a:schemeClr val="accent1"/>
+          </a:lnRef>
+          <a:fillRef idx="3">
+            <a:schemeClr val="accent1"/>
+          </a:fillRef>
+          <a:effectRef idx="2">
+            <a:schemeClr val="accent1"/>
+          </a:effectRef>
+          <a:fontRef idx="minor">
+            <a:schemeClr val="lt1"/>
+          </a:fontRef>
+        </p:style>
+        <p:txBody>
+          <a:bodyPr rtlCol="0" anchor="ctr"/>
+          <a:lstStyle/>
+          <a:p>
+            <a:pPr algn="ctr"/>
+          </a:p>
+        </p:txBody>
+      </p:sp>
+      <p:sp>
+        <p:nvSpPr>
+          <p:cNvPr id="23" name="TextBox 22"/>
+          <p:cNvSpPr txBox="1"/>
+          <p:nvPr/>
+        </p:nvSpPr>
+        <p:spPr>
+          <a:xfrm>
+            <a:off x="8503920" y="2057400"/>
+            <a:ext cx="3108960" cy="365760"/>
+          </a:xfrm>
+          <a:prstGeom prst="rect">
+            <a:avLst/>
+          </a:prstGeom>
+          <a:noFill/>
+        </p:spPr>
+        <p:txBody>
+          <a:bodyPr wrap="square">
+            <a:spAutoFit/>
+          </a:bodyPr>
+          <a:lstStyle/>
+          <a:p>
+            <a:pPr>
               <a:spcBef>
                 <a:spcPts val="0"/>
               </a:spcBef>
@@ -7643,13 +7514,55 @@
               </a:spcAft>
             </a:pPr>
             <a:r>
-              <a:rPr sz="1400" b="1">
-                <a:solidFill>
-                  <a:srgbClr val="0F1F3D"/>
+              <a:rPr sz="1600" b="1">
+                <a:solidFill>
+                  <a:srgbClr val="1A568A"/>
                 </a:solidFill>
                 <a:latin typeface="Malgun Gothic"/>
               </a:rPr>
-              <a:t>한눈에 파악</a:t>
+              <a:t>검증 루프</a:t>
+            </a:r>
+          </a:p>
+        </p:txBody>
+      </p:sp>
+      <p:sp>
+        <p:nvSpPr>
+          <p:cNvPr id="24" name="TextBox 23"/>
+          <p:cNvSpPr txBox="1"/>
+          <p:nvPr/>
+        </p:nvSpPr>
+        <p:spPr>
+          <a:xfrm>
+            <a:off x="8503920" y="2606040"/>
+            <a:ext cx="3108960" cy="1188720"/>
+          </a:xfrm>
+          <a:prstGeom prst="rect">
+            <a:avLst/>
+          </a:prstGeom>
+          <a:noFill/>
+        </p:spPr>
+        <p:txBody>
+          <a:bodyPr wrap="square">
+            <a:spAutoFit/>
+          </a:bodyPr>
+          <a:lstStyle/>
+          <a:p>
+            <a:pPr>
+              <a:spcBef>
+                <a:spcPts val="0"/>
+              </a:spcBef>
+              <a:spcAft>
+                <a:spcPts val="0"/>
+              </a:spcAft>
+            </a:pPr>
+            <a:r>
+              <a:rPr sz="1500" b="1">
+                <a:solidFill>
+                  <a:srgbClr val="0B1220"/>
+                </a:solidFill>
+                <a:latin typeface="Malgun Gothic"/>
+              </a:rPr>
+              <a:t>생성으로 끝내지 않고</a:t>
             </a:r>
           </a:p>
           <a:p>
@@ -7662,60 +7575,40 @@
               </a:spcAft>
             </a:pPr>
             <a:r>
-              <a:rPr sz="1200" b="0">
-                <a:solidFill>
-                  <a:srgbClr val="5B677A"/>
+              <a:rPr sz="1500" b="1">
+                <a:solidFill>
+                  <a:srgbClr val="0B1220"/>
                 </a:solidFill>
                 <a:latin typeface="Malgun Gothic"/>
               </a:rPr>
-              <a:t>3개 점검을 한 트랜잭션에서 동시 확인</a:t>
-            </a:r>
-          </a:p>
-        </p:txBody>
-      </p:sp>
-      <p:sp>
-        <p:nvSpPr>
-          <p:cNvPr id="12" name="Rounded Rectangle 11"/>
-          <p:cNvSpPr/>
-          <p:nvPr/>
-        </p:nvSpPr>
-        <p:spPr>
-          <a:xfrm>
-            <a:off x="6400800" y="2514600"/>
-            <a:ext cx="5120640" cy="1051560"/>
-          </a:xfrm>
-          <a:prstGeom prst="roundRect">
-            <a:avLst/>
-          </a:prstGeom>
-          <a:solidFill>
-            <a:srgbClr val="FFFFFF"/>
-          </a:solidFill>
-          <a:ln w="12700">
-            <a:solidFill>
-              <a:srgbClr val="D8DEE9"/>
-            </a:solidFill>
-          </a:ln>
-          <a:effectLst/>
-        </p:spPr>
-        <p:style>
-          <a:lnRef idx="1">
-            <a:schemeClr val="accent1"/>
-          </a:lnRef>
-          <a:fillRef idx="3">
-            <a:schemeClr val="accent1"/>
-          </a:fillRef>
-          <a:effectRef idx="2">
-            <a:schemeClr val="accent1"/>
-          </a:effectRef>
-          <a:fontRef idx="minor">
-            <a:schemeClr val="lt1"/>
-          </a:fontRef>
-        </p:style>
-        <p:txBody>
-          <a:bodyPr rtlCol="0" anchor="ctr" lIns="228600" tIns="201168"/>
-          <a:lstStyle/>
-          <a:p>
-            <a:pPr algn="ctr">
+              <a:t>진단–수정–확인을 짧게 돕니다</a:t>
+            </a:r>
+          </a:p>
+        </p:txBody>
+      </p:sp>
+      <p:sp>
+        <p:nvSpPr>
+          <p:cNvPr id="25" name="TextBox 24"/>
+          <p:cNvSpPr txBox="1"/>
+          <p:nvPr/>
+        </p:nvSpPr>
+        <p:spPr>
+          <a:xfrm>
+            <a:off x="8503920" y="4114800"/>
+            <a:ext cx="3108960" cy="1371600"/>
+          </a:xfrm>
+          <a:prstGeom prst="rect">
+            <a:avLst/>
+          </a:prstGeom>
+          <a:noFill/>
+        </p:spPr>
+        <p:txBody>
+          <a:bodyPr wrap="square">
+            <a:spAutoFit/>
+          </a:bodyPr>
+          <a:lstStyle/>
+          <a:p>
+            <a:pPr>
               <a:spcBef>
                 <a:spcPts val="0"/>
               </a:spcBef>
@@ -7724,13 +7617,13 @@
               </a:spcAft>
             </a:pPr>
             <a:r>
-              <a:rPr sz="1400" b="1">
-                <a:solidFill>
-                  <a:srgbClr val="0F1F3D"/>
+              <a:rPr sz="1200" b="0">
+                <a:solidFill>
+                  <a:srgbClr val="5A6678"/>
                 </a:solidFill>
                 <a:latin typeface="Malgun Gothic"/>
               </a:rPr>
-              <a:t>빠른 드릴다운</a:t>
+              <a:t>오류·권한·성능 이슈를</a:t>
             </a:r>
           </a:p>
           <a:p>
@@ -7745,173 +7638,11 @@
             <a:r>
               <a:rPr sz="1200" b="0">
                 <a:solidFill>
-                  <a:srgbClr val="5B677A"/>
+                  <a:srgbClr val="5A6678"/>
                 </a:solidFill>
                 <a:latin typeface="Malgun Gothic"/>
               </a:rPr>
-              <a:t>목록 → 표준 상세(로그/덤프/메시지) 직행</a:t>
-            </a:r>
-          </a:p>
-        </p:txBody>
-      </p:sp>
-      <p:sp>
-        <p:nvSpPr>
-          <p:cNvPr id="13" name="Rounded Rectangle 12"/>
-          <p:cNvSpPr/>
-          <p:nvPr/>
-        </p:nvSpPr>
-        <p:spPr>
-          <a:xfrm>
-            <a:off x="6400800" y="3657600"/>
-            <a:ext cx="5120640" cy="1051560"/>
-          </a:xfrm>
-          <a:prstGeom prst="roundRect">
-            <a:avLst/>
-          </a:prstGeom>
-          <a:solidFill>
-            <a:srgbClr val="FFFFFF"/>
-          </a:solidFill>
-          <a:ln w="12700">
-            <a:solidFill>
-              <a:srgbClr val="D8DEE9"/>
-            </a:solidFill>
-          </a:ln>
-          <a:effectLst/>
-        </p:spPr>
-        <p:style>
-          <a:lnRef idx="1">
-            <a:schemeClr val="accent1"/>
-          </a:lnRef>
-          <a:fillRef idx="3">
-            <a:schemeClr val="accent1"/>
-          </a:fillRef>
-          <a:effectRef idx="2">
-            <a:schemeClr val="accent1"/>
-          </a:effectRef>
-          <a:fontRef idx="minor">
-            <a:schemeClr val="lt1"/>
-          </a:fontRef>
-        </p:style>
-        <p:txBody>
-          <a:bodyPr rtlCol="0" anchor="ctr" lIns="228600" tIns="201168"/>
-          <a:lstStyle/>
-          <a:p>
-            <a:pPr algn="ctr">
-              <a:spcBef>
-                <a:spcPts val="0"/>
-              </a:spcBef>
-              <a:spcAft>
-                <a:spcPts val="0"/>
-              </a:spcAft>
-            </a:pPr>
-            <a:r>
-              <a:rPr sz="1400" b="1">
-                <a:solidFill>
-                  <a:srgbClr val="0F1F3D"/>
-                </a:solidFill>
-                <a:latin typeface="Malgun Gothic"/>
-              </a:rPr>
-              <a:t>운영 안전성</a:t>
-            </a:r>
-          </a:p>
-          <a:p>
-            <a:pPr>
-              <a:spcBef>
-                <a:spcPts val="400"/>
-              </a:spcBef>
-              <a:spcAft>
-                <a:spcPts val="0"/>
-              </a:spcAft>
-            </a:pPr>
-            <a:r>
-              <a:rPr sz="1200" b="0">
-                <a:solidFill>
-                  <a:srgbClr val="5B677A"/>
-                </a:solidFill>
-                <a:latin typeface="Malgun Gothic"/>
-              </a:rPr>
-              <a:t>조회 전용으로 운영계 영향 최소화</a:t>
-            </a:r>
-          </a:p>
-        </p:txBody>
-      </p:sp>
-      <p:sp>
-        <p:nvSpPr>
-          <p:cNvPr id="14" name="Rounded Rectangle 13"/>
-          <p:cNvSpPr/>
-          <p:nvPr/>
-        </p:nvSpPr>
-        <p:spPr>
-          <a:xfrm>
-            <a:off x="6400800" y="4800600"/>
-            <a:ext cx="5120640" cy="1051560"/>
-          </a:xfrm>
-          <a:prstGeom prst="roundRect">
-            <a:avLst/>
-          </a:prstGeom>
-          <a:solidFill>
-            <a:srgbClr val="FFFFFF"/>
-          </a:solidFill>
-          <a:ln w="12700">
-            <a:solidFill>
-              <a:srgbClr val="D8DEE9"/>
-            </a:solidFill>
-          </a:ln>
-          <a:effectLst/>
-        </p:spPr>
-        <p:style>
-          <a:lnRef idx="1">
-            <a:schemeClr val="accent1"/>
-          </a:lnRef>
-          <a:fillRef idx="3">
-            <a:schemeClr val="accent1"/>
-          </a:fillRef>
-          <a:effectRef idx="2">
-            <a:schemeClr val="accent1"/>
-          </a:effectRef>
-          <a:fontRef idx="minor">
-            <a:schemeClr val="lt1"/>
-          </a:fontRef>
-        </p:style>
-        <p:txBody>
-          <a:bodyPr rtlCol="0" anchor="ctr" lIns="228600" tIns="201168"/>
-          <a:lstStyle/>
-          <a:p>
-            <a:pPr algn="ctr">
-              <a:spcBef>
-                <a:spcPts val="0"/>
-              </a:spcBef>
-              <a:spcAft>
-                <a:spcPts val="0"/>
-              </a:spcAft>
-            </a:pPr>
-            <a:r>
-              <a:rPr sz="1400" b="1">
-                <a:solidFill>
-                  <a:srgbClr val="0F1F3D"/>
-                </a:solidFill>
-                <a:latin typeface="Malgun Gothic"/>
-              </a:rPr>
-              <a:t>확장 가능 구조</a:t>
-            </a:r>
-          </a:p>
-          <a:p>
-            <a:pPr>
-              <a:spcBef>
-                <a:spcPts val="400"/>
-              </a:spcBef>
-              <a:spcAft>
-                <a:spcPts val="0"/>
-              </a:spcAft>
-            </a:pPr>
-            <a:r>
-              <a:rPr sz="1200" b="0">
-                <a:solidFill>
-                  <a:srgbClr val="5B677A"/>
-                </a:solidFill>
-                <a:latin typeface="Malgun Gothic"/>
-              </a:rPr>
-              <a:t>영역 추가 시 Provider만 등록</a:t>
+              <a:t>같은 맥락에서 즉시 처리</a:t>
             </a:r>
           </a:p>
         </p:txBody>
@@ -7949,7 +7680,7 @@
             <a:avLst/>
           </a:prstGeom>
           <a:solidFill>
-            <a:srgbClr val="F3F5F9"/>
+            <a:srgbClr val="F7F8FA"/>
           </a:solidFill>
           <a:ln>
             <a:noFill/>
@@ -7987,13 +7718,13 @@
         <p:spPr>
           <a:xfrm>
             <a:off x="0" y="0"/>
-            <a:ext cx="12191695" cy="73152"/>
+            <a:ext cx="12191695" cy="54864"/>
           </a:xfrm>
           <a:prstGeom prst="rect">
             <a:avLst/>
           </a:prstGeom>
           <a:solidFill>
-            <a:srgbClr val="0F1F3D"/>
+            <a:srgbClr val="0B1220"/>
           </a:solidFill>
           <a:ln>
             <a:noFill/>
@@ -8030,8 +7761,8 @@
         </p:nvSpPr>
         <p:spPr>
           <a:xfrm>
-            <a:off x="640080" y="256032"/>
-            <a:ext cx="9144000" cy="292608"/>
+            <a:off x="594360" y="320040"/>
+            <a:ext cx="10972800" cy="256032"/>
           </a:xfrm>
           <a:prstGeom prst="rect">
             <a:avLst/>
@@ -8053,13 +7784,13 @@
               </a:spcAft>
             </a:pPr>
             <a:r>
-              <a:rPr sz="1100" b="1">
-                <a:solidFill>
-                  <a:srgbClr val="1E4D8C"/>
+              <a:rPr sz="1000" b="1">
+                <a:solidFill>
+                  <a:srgbClr val="1A568A"/>
                 </a:solidFill>
                 <a:latin typeface="Malgun Gothic"/>
               </a:rPr>
-              <a:t>04  APPROACH</a:t>
+              <a:t>CASE</a:t>
             </a:r>
           </a:p>
         </p:txBody>
@@ -8072,8 +7803,8 @@
         </p:nvSpPr>
         <p:spPr>
           <a:xfrm>
-            <a:off x="640080" y="502920"/>
-            <a:ext cx="10515600" cy="502920"/>
+            <a:off x="594360" y="594360"/>
+            <a:ext cx="10972800" cy="502920"/>
           </a:xfrm>
           <a:prstGeom prst="rect">
             <a:avLst/>
@@ -8095,33 +7826,75 @@
               </a:spcAft>
             </a:pPr>
             <a:r>
-              <a:rPr sz="2400" b="1">
-                <a:solidFill>
-                  <a:srgbClr val="0F1F3D"/>
+              <a:rPr sz="2600" b="1">
+                <a:solidFill>
+                  <a:srgbClr val="0B1220"/>
                 </a:solidFill>
                 <a:latin typeface="Malgun Gothic"/>
               </a:rPr>
-              <a:t>개발 전 과정에 AI(Cursor)를 적용</a:t>
-            </a:r>
-          </a:p>
-        </p:txBody>
-      </p:sp>
-      <p:sp>
-        <p:nvSpPr>
-          <p:cNvPr id="6" name="Rectangle 5"/>
+              <a:t>적용 사례로 확인한 것</a:t>
+            </a:r>
+          </a:p>
+        </p:txBody>
+      </p:sp>
+      <p:sp>
+        <p:nvSpPr>
+          <p:cNvPr id="6" name="TextBox 5"/>
+          <p:cNvSpPr txBox="1"/>
+          <p:nvPr/>
+        </p:nvSpPr>
+        <p:spPr>
+          <a:xfrm>
+            <a:off x="594360" y="1097280"/>
+            <a:ext cx="10972800" cy="320040"/>
+          </a:xfrm>
+          <a:prstGeom prst="rect">
+            <a:avLst/>
+          </a:prstGeom>
+          <a:noFill/>
+        </p:spPr>
+        <p:txBody>
+          <a:bodyPr wrap="square">
+            <a:spAutoFit/>
+          </a:bodyPr>
+          <a:lstStyle/>
+          <a:p>
+            <a:pPr>
+              <a:spcBef>
+                <a:spcPts val="0"/>
+              </a:spcBef>
+              <a:spcAft>
+                <a:spcPts val="0"/>
+              </a:spcAft>
+            </a:pPr>
+            <a:r>
+              <a:rPr sz="1300" b="0">
+                <a:solidFill>
+                  <a:srgbClr val="5A6678"/>
+                </a:solidFill>
+                <a:latin typeface="Malgun Gothic"/>
+              </a:rPr>
+              <a:t>SAP 통합 운영 모니터링 — 목적물이 아니라 검증 무대</a:t>
+            </a:r>
+          </a:p>
+        </p:txBody>
+      </p:sp>
+      <p:sp>
+        <p:nvSpPr>
+          <p:cNvPr id="7" name="Rectangle 6"/>
           <p:cNvSpPr/>
           <p:nvPr/>
         </p:nvSpPr>
         <p:spPr>
           <a:xfrm>
-            <a:off x="658368" y="1051560"/>
-            <a:ext cx="1097280" cy="44450"/>
+            <a:off x="594360" y="1417320"/>
+            <a:ext cx="822960" cy="38100"/>
           </a:xfrm>
           <a:prstGeom prst="rect">
             <a:avLst/>
           </a:prstGeom>
           <a:solidFill>
-            <a:srgbClr val="C48A1A"/>
+            <a:srgbClr val="B88A2E"/>
           </a:solidFill>
           <a:ln>
             <a:noFill/>
@@ -8152,20 +7925,20 @@
       </p:sp>
       <p:sp>
         <p:nvSpPr>
-          <p:cNvPr id="7" name="Rectangle 6"/>
+          <p:cNvPr id="8" name="Rectangle 7"/>
           <p:cNvSpPr/>
           <p:nvPr/>
         </p:nvSpPr>
         <p:spPr>
           <a:xfrm>
-            <a:off x="0" y="6537960"/>
-            <a:ext cx="12191695" cy="320040"/>
+            <a:off x="0" y="6583680"/>
+            <a:ext cx="12191695" cy="274320"/>
           </a:xfrm>
           <a:prstGeom prst="rect">
             <a:avLst/>
           </a:prstGeom>
           <a:solidFill>
-            <a:srgbClr val="0F1F3D"/>
+            <a:srgbClr val="0B1220"/>
           </a:solidFill>
           <a:ln>
             <a:noFill/>
@@ -8196,14 +7969,14 @@
       </p:sp>
       <p:sp>
         <p:nvSpPr>
-          <p:cNvPr id="8" name="TextBox 7"/>
+          <p:cNvPr id="9" name="TextBox 8"/>
           <p:cNvSpPr txBox="1"/>
           <p:nvPr/>
         </p:nvSpPr>
         <p:spPr>
           <a:xfrm>
-            <a:off x="640080" y="6565392"/>
-            <a:ext cx="8229600" cy="256032"/>
+            <a:off x="594360" y="6601968"/>
+            <a:ext cx="8229600" cy="237744"/>
           </a:xfrm>
           <a:prstGeom prst="rect">
             <a:avLst/>
@@ -8227,25 +8000,25 @@
             <a:r>
               <a:rPr sz="900" b="0">
                 <a:solidFill>
-                  <a:srgbClr val="FFFFFF"/>
+                  <a:srgbClr val="8B95A5"/>
                 </a:solidFill>
                 <a:latin typeface="Malgun Gothic"/>
               </a:rPr>
-              <a:t>통합 운영 모니터링  ·  AI 활용 개발 성과 보고</a:t>
-            </a:r>
-          </a:p>
-        </p:txBody>
-      </p:sp>
-      <p:sp>
-        <p:nvSpPr>
-          <p:cNvPr id="9" name="TextBox 8"/>
+              <a:t>AI 활용 효율성  ·  향후 방향</a:t>
+            </a:r>
+          </a:p>
+        </p:txBody>
+      </p:sp>
+      <p:sp>
+        <p:nvSpPr>
+          <p:cNvPr id="10" name="TextBox 9"/>
           <p:cNvSpPr txBox="1"/>
           <p:nvPr/>
         </p:nvSpPr>
         <p:spPr>
           <a:xfrm>
-            <a:off x="10241280" y="6565392"/>
-            <a:ext cx="1371600" cy="256032"/>
+            <a:off x="10332720" y="6601968"/>
+            <a:ext cx="1280160" cy="237744"/>
           </a:xfrm>
           <a:prstGeom prst="rect">
             <a:avLst/>
@@ -8269,25 +8042,25 @@
             <a:r>
               <a:rPr sz="900" b="0">
                 <a:solidFill>
-                  <a:srgbClr val="FFFFFF"/>
+                  <a:srgbClr val="8B95A5"/>
                 </a:solidFill>
                 <a:latin typeface="Malgun Gothic"/>
               </a:rPr>
-              <a:t>5 / 8</a:t>
-            </a:r>
-          </a:p>
-        </p:txBody>
-      </p:sp>
-      <p:sp>
-        <p:nvSpPr>
-          <p:cNvPr id="10" name="Rounded Rectangle 9"/>
+              <a:t>5  /  8</a:t>
+            </a:r>
+          </a:p>
+        </p:txBody>
+      </p:sp>
+      <p:sp>
+        <p:nvSpPr>
+          <p:cNvPr id="11" name="Rounded Rectangle 10"/>
           <p:cNvSpPr/>
           <p:nvPr/>
         </p:nvSpPr>
         <p:spPr>
           <a:xfrm>
-            <a:off x="640080" y="1417320"/>
-            <a:ext cx="2103120" cy="2331720"/>
+            <a:off x="594360" y="1828800"/>
+            <a:ext cx="5669280" cy="4114800"/>
           </a:xfrm>
           <a:prstGeom prst="roundRect">
             <a:avLst/>
@@ -8297,7 +8070,7 @@
           </a:solidFill>
           <a:ln w="12700">
             <a:solidFill>
-              <a:srgbClr val="D8DEE9"/>
+              <a:srgbClr val="E2E6ED"/>
             </a:solidFill>
           </a:ln>
           <a:effectLst/>
@@ -8317,10 +8090,36 @@
           </a:fontRef>
         </p:style>
         <p:txBody>
-          <a:bodyPr rtlCol="0" anchor="ctr" lIns="164592" tIns="320040"/>
-          <a:lstStyle/>
-          <a:p>
-            <a:pPr algn="ctr">
+          <a:bodyPr rtlCol="0" anchor="ctr"/>
+          <a:lstStyle/>
+          <a:p>
+            <a:pPr algn="ctr"/>
+          </a:p>
+        </p:txBody>
+      </p:sp>
+      <p:sp>
+        <p:nvSpPr>
+          <p:cNvPr id="12" name="TextBox 11"/>
+          <p:cNvSpPr txBox="1"/>
+          <p:nvPr/>
+        </p:nvSpPr>
+        <p:spPr>
+          <a:xfrm>
+            <a:off x="914400" y="2057400"/>
+            <a:ext cx="5029200" cy="320040"/>
+          </a:xfrm>
+          <a:prstGeom prst="rect">
+            <a:avLst/>
+          </a:prstGeom>
+          <a:noFill/>
+        </p:spPr>
+        <p:txBody>
+          <a:bodyPr wrap="square">
+            <a:spAutoFit/>
+          </a:bodyPr>
+          <a:lstStyle/>
+          <a:p>
+            <a:pPr>
               <a:spcBef>
                 <a:spcPts val="0"/>
               </a:spcBef>
@@ -8329,71 +8128,369 @@
               </a:spcAft>
             </a:pPr>
             <a:r>
-              <a:rPr sz="1600" b="1">
-                <a:solidFill>
-                  <a:srgbClr val="0F1F3D"/>
+              <a:rPr sz="1400" b="1">
+                <a:solidFill>
+                  <a:srgbClr val="1A568A"/>
+                </a:solidFill>
+                <a:latin typeface="Malgun Gothic"/>
+              </a:rPr>
+              <a:t>한 과제로 전 과정을 관통</a:t>
+            </a:r>
+          </a:p>
+        </p:txBody>
+      </p:sp>
+      <p:sp>
+        <p:nvSpPr>
+          <p:cNvPr id="13" name="TextBox 12"/>
+          <p:cNvSpPr txBox="1"/>
+          <p:nvPr/>
+        </p:nvSpPr>
+        <p:spPr>
+          <a:xfrm>
+            <a:off x="914400" y="2560320"/>
+            <a:ext cx="1097280" cy="320040"/>
+          </a:xfrm>
+          <a:prstGeom prst="rect">
+            <a:avLst/>
+          </a:prstGeom>
+          <a:noFill/>
+        </p:spPr>
+        <p:txBody>
+          <a:bodyPr wrap="square">
+            <a:spAutoFit/>
+          </a:bodyPr>
+          <a:lstStyle/>
+          <a:p>
+            <a:pPr>
+              <a:spcBef>
+                <a:spcPts val="0"/>
+              </a:spcBef>
+              <a:spcAft>
+                <a:spcPts val="0"/>
+              </a:spcAft>
+            </a:pPr>
+            <a:r>
+              <a:rPr sz="1300" b="1">
+                <a:solidFill>
+                  <a:srgbClr val="0B1220"/>
                 </a:solidFill>
                 <a:latin typeface="Malgun Gothic"/>
               </a:rPr>
               <a:t>설계</a:t>
             </a:r>
           </a:p>
-          <a:p>
-            <a:pPr algn="ctr">
+        </p:txBody>
+      </p:sp>
+      <p:sp>
+        <p:nvSpPr>
+          <p:cNvPr id="14" name="TextBox 13"/>
+          <p:cNvSpPr txBox="1"/>
+          <p:nvPr/>
+        </p:nvSpPr>
+        <p:spPr>
+          <a:xfrm>
+            <a:off x="2103120" y="2560320"/>
+            <a:ext cx="3840480" cy="320040"/>
+          </a:xfrm>
+          <a:prstGeom prst="rect">
+            <a:avLst/>
+          </a:prstGeom>
+          <a:noFill/>
+        </p:spPr>
+        <p:txBody>
+          <a:bodyPr wrap="square">
+            <a:spAutoFit/>
+          </a:bodyPr>
+          <a:lstStyle/>
+          <a:p>
+            <a:pPr>
               <a:spcBef>
-                <a:spcPts val="600"/>
+                <a:spcPts val="0"/>
               </a:spcBef>
               <a:spcAft>
                 <a:spcPts val="0"/>
               </a:spcAft>
             </a:pPr>
             <a:r>
-              <a:rPr sz="1100" b="0">
-                <a:solidFill>
-                  <a:srgbClr val="5B677A"/>
+              <a:rPr sz="1300" b="0">
+                <a:solidFill>
+                  <a:srgbClr val="5A6678"/>
                 </a:solidFill>
                 <a:latin typeface="Malgun Gothic"/>
               </a:rPr>
-              <a:t>설계서 초안·개정,</a:t>
-            </a:r>
-          </a:p>
-          <a:p>
-            <a:pPr algn="ctr">
+              <a:t>설계서·결정사항 이력을 대화로 유지</a:t>
+            </a:r>
+          </a:p>
+        </p:txBody>
+      </p:sp>
+      <p:sp>
+        <p:nvSpPr>
+          <p:cNvPr id="15" name="TextBox 14"/>
+          <p:cNvSpPr txBox="1"/>
+          <p:nvPr/>
+        </p:nvSpPr>
+        <p:spPr>
+          <a:xfrm>
+            <a:off x="914400" y="3200400"/>
+            <a:ext cx="1097280" cy="320040"/>
+          </a:xfrm>
+          <a:prstGeom prst="rect">
+            <a:avLst/>
+          </a:prstGeom>
+          <a:noFill/>
+        </p:spPr>
+        <p:txBody>
+          <a:bodyPr wrap="square">
+            <a:spAutoFit/>
+          </a:bodyPr>
+          <a:lstStyle/>
+          <a:p>
+            <a:pPr>
               <a:spcBef>
-                <a:spcPts val="200"/>
+                <a:spcPts val="0"/>
               </a:spcBef>
               <a:spcAft>
                 <a:spcPts val="0"/>
               </a:spcAft>
             </a:pPr>
             <a:r>
-              <a:rPr sz="1100" b="0">
-                <a:solidFill>
-                  <a:srgbClr val="5B677A"/>
+              <a:rPr sz="1300" b="1">
+                <a:solidFill>
+                  <a:srgbClr val="0B1220"/>
                 </a:solidFill>
                 <a:latin typeface="Malgun Gothic"/>
               </a:rPr>
-              <a:t>결정/미결 이력 관리</a:t>
-            </a:r>
-          </a:p>
-        </p:txBody>
-      </p:sp>
-      <p:sp>
-        <p:nvSpPr>
-          <p:cNvPr id="11" name="Rectangle 10"/>
+              <a:t>분석</a:t>
+            </a:r>
+          </a:p>
+        </p:txBody>
+      </p:sp>
+      <p:sp>
+        <p:nvSpPr>
+          <p:cNvPr id="16" name="TextBox 15"/>
+          <p:cNvSpPr txBox="1"/>
+          <p:nvPr/>
+        </p:nvSpPr>
+        <p:spPr>
+          <a:xfrm>
+            <a:off x="2103120" y="3200400"/>
+            <a:ext cx="3840480" cy="320040"/>
+          </a:xfrm>
+          <a:prstGeom prst="rect">
+            <a:avLst/>
+          </a:prstGeom>
+          <a:noFill/>
+        </p:spPr>
+        <p:txBody>
+          <a:bodyPr wrap="square">
+            <a:spAutoFit/>
+          </a:bodyPr>
+          <a:lstStyle/>
+          <a:p>
+            <a:pPr>
+              <a:spcBef>
+                <a:spcPts val="0"/>
+              </a:spcBef>
+              <a:spcAft>
+                <a:spcPts val="0"/>
+              </a:spcAft>
+            </a:pPr>
+            <a:r>
+              <a:rPr sz="1300" b="0">
+                <a:solidFill>
+                  <a:srgbClr val="5A6678"/>
+                </a:solidFill>
+                <a:latin typeface="Malgun Gothic"/>
+              </a:rPr>
+              <a:t>권한 추적 자료를 AI가 읽어 필요 권한 도출</a:t>
+            </a:r>
+          </a:p>
+        </p:txBody>
+      </p:sp>
+      <p:sp>
+        <p:nvSpPr>
+          <p:cNvPr id="17" name="TextBox 16"/>
+          <p:cNvSpPr txBox="1"/>
+          <p:nvPr/>
+        </p:nvSpPr>
+        <p:spPr>
+          <a:xfrm>
+            <a:off x="914400" y="3840480"/>
+            <a:ext cx="1097280" cy="320040"/>
+          </a:xfrm>
+          <a:prstGeom prst="rect">
+            <a:avLst/>
+          </a:prstGeom>
+          <a:noFill/>
+        </p:spPr>
+        <p:txBody>
+          <a:bodyPr wrap="square">
+            <a:spAutoFit/>
+          </a:bodyPr>
+          <a:lstStyle/>
+          <a:p>
+            <a:pPr>
+              <a:spcBef>
+                <a:spcPts val="0"/>
+              </a:spcBef>
+              <a:spcAft>
+                <a:spcPts val="0"/>
+              </a:spcAft>
+            </a:pPr>
+            <a:r>
+              <a:rPr sz="1300" b="1">
+                <a:solidFill>
+                  <a:srgbClr val="0B1220"/>
+                </a:solidFill>
+                <a:latin typeface="Malgun Gothic"/>
+              </a:rPr>
+              <a:t>구현</a:t>
+            </a:r>
+          </a:p>
+        </p:txBody>
+      </p:sp>
+      <p:sp>
+        <p:nvSpPr>
+          <p:cNvPr id="18" name="TextBox 17"/>
+          <p:cNvSpPr txBox="1"/>
+          <p:nvPr/>
+        </p:nvSpPr>
+        <p:spPr>
+          <a:xfrm>
+            <a:off x="2103120" y="3840480"/>
+            <a:ext cx="3840480" cy="320040"/>
+          </a:xfrm>
+          <a:prstGeom prst="rect">
+            <a:avLst/>
+          </a:prstGeom>
+          <a:noFill/>
+        </p:spPr>
+        <p:txBody>
+          <a:bodyPr wrap="square">
+            <a:spAutoFit/>
+          </a:bodyPr>
+          <a:lstStyle/>
+          <a:p>
+            <a:pPr>
+              <a:spcBef>
+                <a:spcPts val="0"/>
+              </a:spcBef>
+              <a:spcAft>
+                <a:spcPts val="0"/>
+              </a:spcAft>
+            </a:pPr>
+            <a:r>
+              <a:rPr sz="1300" b="0">
+                <a:solidFill>
+                  <a:srgbClr val="5A6678"/>
+                </a:solidFill>
+                <a:latin typeface="Malgun Gothic"/>
+              </a:rPr>
+              <a:t>생성–오류진단–수정을 짧은 사이클로 반복</a:t>
+            </a:r>
+          </a:p>
+        </p:txBody>
+      </p:sp>
+      <p:sp>
+        <p:nvSpPr>
+          <p:cNvPr id="19" name="TextBox 18"/>
+          <p:cNvSpPr txBox="1"/>
+          <p:nvPr/>
+        </p:nvSpPr>
+        <p:spPr>
+          <a:xfrm>
+            <a:off x="914400" y="4480560"/>
+            <a:ext cx="1097280" cy="320040"/>
+          </a:xfrm>
+          <a:prstGeom prst="rect">
+            <a:avLst/>
+          </a:prstGeom>
+          <a:noFill/>
+        </p:spPr>
+        <p:txBody>
+          <a:bodyPr wrap="square">
+            <a:spAutoFit/>
+          </a:bodyPr>
+          <a:lstStyle/>
+          <a:p>
+            <a:pPr>
+              <a:spcBef>
+                <a:spcPts val="0"/>
+              </a:spcBef>
+              <a:spcAft>
+                <a:spcPts val="0"/>
+              </a:spcAft>
+            </a:pPr>
+            <a:r>
+              <a:rPr sz="1300" b="1">
+                <a:solidFill>
+                  <a:srgbClr val="0B1220"/>
+                </a:solidFill>
+                <a:latin typeface="Malgun Gothic"/>
+              </a:rPr>
+              <a:t>표준</a:t>
+            </a:r>
+          </a:p>
+        </p:txBody>
+      </p:sp>
+      <p:sp>
+        <p:nvSpPr>
+          <p:cNvPr id="20" name="TextBox 19"/>
+          <p:cNvSpPr txBox="1"/>
+          <p:nvPr/>
+        </p:nvSpPr>
+        <p:spPr>
+          <a:xfrm>
+            <a:off x="2103120" y="4480560"/>
+            <a:ext cx="3840480" cy="320040"/>
+          </a:xfrm>
+          <a:prstGeom prst="rect">
+            <a:avLst/>
+          </a:prstGeom>
+          <a:noFill/>
+        </p:spPr>
+        <p:txBody>
+          <a:bodyPr wrap="square">
+            <a:spAutoFit/>
+          </a:bodyPr>
+          <a:lstStyle/>
+          <a:p>
+            <a:pPr>
+              <a:spcBef>
+                <a:spcPts val="0"/>
+              </a:spcBef>
+              <a:spcAft>
+                <a:spcPts val="0"/>
+              </a:spcAft>
+            </a:pPr>
+            <a:r>
+              <a:rPr sz="1300" b="0">
+                <a:solidFill>
+                  <a:srgbClr val="5A6678"/>
+                </a:solidFill>
+                <a:latin typeface="Malgun Gothic"/>
+              </a:rPr>
+              <a:t>읽기전용·명명·구조를 Rules로 상시 강제</a:t>
+            </a:r>
+          </a:p>
+        </p:txBody>
+      </p:sp>
+      <p:sp>
+        <p:nvSpPr>
+          <p:cNvPr id="21" name="Rounded Rectangle 20"/>
           <p:cNvSpPr/>
           <p:nvPr/>
         </p:nvSpPr>
         <p:spPr>
           <a:xfrm>
-            <a:off x="640080" y="1417320"/>
-            <a:ext cx="2103120" cy="109728"/>
-          </a:xfrm>
-          <a:prstGeom prst="rect">
+            <a:off x="6537960" y="1828800"/>
+            <a:ext cx="5029200" cy="4114800"/>
+          </a:xfrm>
+          <a:prstGeom prst="roundRect">
             <a:avLst/>
           </a:prstGeom>
           <a:solidFill>
-            <a:srgbClr val="1E4D8C"/>
+            <a:srgbClr val="0B1220"/>
           </a:solidFill>
           <a:ln>
             <a:noFill/>
@@ -8424,47 +8521,27 @@
       </p:sp>
       <p:sp>
         <p:nvSpPr>
-          <p:cNvPr id="12" name="Rounded Rectangle 11"/>
-          <p:cNvSpPr/>
-          <p:nvPr/>
-        </p:nvSpPr>
-        <p:spPr>
-          <a:xfrm>
-            <a:off x="2880360" y="1417320"/>
-            <a:ext cx="2103120" cy="2331720"/>
-          </a:xfrm>
-          <a:prstGeom prst="roundRect">
-            <a:avLst/>
-          </a:prstGeom>
-          <a:solidFill>
-            <a:srgbClr val="FFFFFF"/>
-          </a:solidFill>
-          <a:ln w="12700">
-            <a:solidFill>
-              <a:srgbClr val="D8DEE9"/>
-            </a:solidFill>
-          </a:ln>
-          <a:effectLst/>
-        </p:spPr>
-        <p:style>
-          <a:lnRef idx="1">
-            <a:schemeClr val="accent1"/>
-          </a:lnRef>
-          <a:fillRef idx="3">
-            <a:schemeClr val="accent1"/>
-          </a:fillRef>
-          <a:effectRef idx="2">
-            <a:schemeClr val="accent1"/>
-          </a:effectRef>
-          <a:fontRef idx="minor">
-            <a:schemeClr val="lt1"/>
-          </a:fontRef>
-        </p:style>
-        <p:txBody>
-          <a:bodyPr rtlCol="0" anchor="ctr" lIns="164592" tIns="320040"/>
-          <a:lstStyle/>
-          <a:p>
-            <a:pPr algn="ctr">
+          <p:cNvPr id="22" name="TextBox 21"/>
+          <p:cNvSpPr txBox="1"/>
+          <p:nvPr/>
+        </p:nvSpPr>
+        <p:spPr>
+          <a:xfrm>
+            <a:off x="6903720" y="2194560"/>
+            <a:ext cx="4297680" cy="365760"/>
+          </a:xfrm>
+          <a:prstGeom prst="rect">
+            <a:avLst/>
+          </a:prstGeom>
+          <a:noFill/>
+        </p:spPr>
+        <p:txBody>
+          <a:bodyPr wrap="square">
+            <a:spAutoFit/>
+          </a:bodyPr>
+          <a:lstStyle/>
+          <a:p>
+            <a:pPr>
               <a:spcBef>
                 <a:spcPts val="0"/>
               </a:spcBef>
@@ -8473,142 +8550,101 @@
               </a:spcAft>
             </a:pPr>
             <a:r>
-              <a:rPr sz="1600" b="1">
-                <a:solidFill>
-                  <a:srgbClr val="0F1F3D"/>
+              <a:rPr sz="1200" b="1">
+                <a:solidFill>
+                  <a:srgbClr val="B88A2E"/>
                 </a:solidFill>
                 <a:latin typeface="Malgun Gothic"/>
               </a:rPr>
-              <a:t>분석</a:t>
-            </a:r>
-          </a:p>
-          <a:p>
-            <a:pPr algn="ctr">
+              <a:t>이 사례에서 얻은 결론</a:t>
+            </a:r>
+          </a:p>
+        </p:txBody>
+      </p:sp>
+      <p:sp>
+        <p:nvSpPr>
+          <p:cNvPr id="23" name="TextBox 22"/>
+          <p:cNvSpPr txBox="1"/>
+          <p:nvPr/>
+        </p:nvSpPr>
+        <p:spPr>
+          <a:xfrm>
+            <a:off x="6903720" y="2834640"/>
+            <a:ext cx="4297680" cy="914400"/>
+          </a:xfrm>
+          <a:prstGeom prst="rect">
+            <a:avLst/>
+          </a:prstGeom>
+          <a:noFill/>
+        </p:spPr>
+        <p:txBody>
+          <a:bodyPr wrap="square">
+            <a:spAutoFit/>
+          </a:bodyPr>
+          <a:lstStyle/>
+          <a:p>
+            <a:pPr>
               <a:spcBef>
-                <a:spcPts val="600"/>
+                <a:spcPts val="0"/>
               </a:spcBef>
               <a:spcAft>
                 <a:spcPts val="0"/>
               </a:spcAft>
             </a:pPr>
             <a:r>
-              <a:rPr sz="1100" b="0">
-                <a:solidFill>
-                  <a:srgbClr val="5B677A"/>
+              <a:rPr sz="1300" b="0">
+                <a:solidFill>
+                  <a:srgbClr val="FFFFFF"/>
                 </a:solidFill>
                 <a:latin typeface="Malgun Gothic"/>
               </a:rPr>
-              <a:t>권한추적(STAUTHTRACE)</a:t>
-            </a:r>
-          </a:p>
-          <a:p>
-            <a:pPr algn="ctr">
+              <a:t>AI는 “대신 코딩하는 도구”가 아니라</a:t>
+            </a:r>
+          </a:p>
+          <a:p>
+            <a:pPr>
               <a:spcBef>
-                <a:spcPts val="200"/>
+                <a:spcPts val="300"/>
               </a:spcBef>
               <a:spcAft>
                 <a:spcPts val="0"/>
               </a:spcAft>
             </a:pPr>
             <a:r>
-              <a:rPr sz="1100" b="0">
-                <a:solidFill>
-                  <a:srgbClr val="5B677A"/>
+              <a:rPr sz="1300" b="0">
+                <a:solidFill>
+                  <a:srgbClr val="FFFFFF"/>
                 </a:solidFill>
                 <a:latin typeface="Malgun Gothic"/>
               </a:rPr>
-              <a:t>엑셀 분석 → 권한 도출</a:t>
-            </a:r>
-          </a:p>
-        </p:txBody>
-      </p:sp>
-      <p:sp>
-        <p:nvSpPr>
-          <p:cNvPr id="13" name="Rectangle 12"/>
-          <p:cNvSpPr/>
-          <p:nvPr/>
-        </p:nvSpPr>
-        <p:spPr>
-          <a:xfrm>
-            <a:off x="2880360" y="1417320"/>
-            <a:ext cx="2103120" cy="109728"/>
-          </a:xfrm>
-          <a:prstGeom prst="rect">
-            <a:avLst/>
-          </a:prstGeom>
-          <a:solidFill>
-            <a:srgbClr val="0E7C6B"/>
-          </a:solidFill>
-          <a:ln>
-            <a:noFill/>
-          </a:ln>
-          <a:effectLst/>
-        </p:spPr>
-        <p:style>
-          <a:lnRef idx="1">
-            <a:schemeClr val="accent1"/>
-          </a:lnRef>
-          <a:fillRef idx="3">
-            <a:schemeClr val="accent1"/>
-          </a:fillRef>
-          <a:effectRef idx="2">
-            <a:schemeClr val="accent1"/>
-          </a:effectRef>
-          <a:fontRef idx="minor">
-            <a:schemeClr val="lt1"/>
-          </a:fontRef>
-        </p:style>
-        <p:txBody>
-          <a:bodyPr rtlCol="0" anchor="ctr"/>
-          <a:lstStyle/>
-          <a:p>
-            <a:pPr algn="ctr"/>
-          </a:p>
-        </p:txBody>
-      </p:sp>
-      <p:sp>
-        <p:nvSpPr>
-          <p:cNvPr id="14" name="Rounded Rectangle 13"/>
-          <p:cNvSpPr/>
-          <p:nvPr/>
-        </p:nvSpPr>
-        <p:spPr>
-          <a:xfrm>
-            <a:off x="5120640" y="1417320"/>
-            <a:ext cx="2103120" cy="2331720"/>
-          </a:xfrm>
-          <a:prstGeom prst="roundRect">
-            <a:avLst/>
-          </a:prstGeom>
-          <a:solidFill>
-            <a:srgbClr val="FFFFFF"/>
-          </a:solidFill>
-          <a:ln w="12700">
-            <a:solidFill>
-              <a:srgbClr val="D8DEE9"/>
-            </a:solidFill>
-          </a:ln>
-          <a:effectLst/>
-        </p:spPr>
-        <p:style>
-          <a:lnRef idx="1">
-            <a:schemeClr val="accent1"/>
-          </a:lnRef>
-          <a:fillRef idx="3">
-            <a:schemeClr val="accent1"/>
-          </a:fillRef>
-          <a:effectRef idx="2">
-            <a:schemeClr val="accent1"/>
-          </a:effectRef>
-          <a:fontRef idx="minor">
-            <a:schemeClr val="lt1"/>
-          </a:fontRef>
-        </p:style>
-        <p:txBody>
-          <a:bodyPr rtlCol="0" anchor="ctr" lIns="164592" tIns="320040"/>
-          <a:lstStyle/>
-          <a:p>
-            <a:pPr algn="ctr">
+              <a:t>“조사–초안–수정의 가속기”로 쓸 때 효과가 큼</a:t>
+            </a:r>
+          </a:p>
+        </p:txBody>
+      </p:sp>
+      <p:sp>
+        <p:nvSpPr>
+          <p:cNvPr id="24" name="TextBox 23"/>
+          <p:cNvSpPr txBox="1"/>
+          <p:nvPr/>
+        </p:nvSpPr>
+        <p:spPr>
+          <a:xfrm>
+            <a:off x="6903720" y="3794760"/>
+            <a:ext cx="4297680" cy="914400"/>
+          </a:xfrm>
+          <a:prstGeom prst="rect">
+            <a:avLst/>
+          </a:prstGeom>
+          <a:noFill/>
+        </p:spPr>
+        <p:txBody>
+          <a:bodyPr wrap="square">
+            <a:spAutoFit/>
+          </a:bodyPr>
+          <a:lstStyle/>
+          <a:p>
+            <a:pPr>
               <a:spcBef>
                 <a:spcPts val="0"/>
               </a:spcBef>
@@ -8617,502 +8653,93 @@
               </a:spcAft>
             </a:pPr>
             <a:r>
-              <a:rPr sz="1600" b="1">
-                <a:solidFill>
-                  <a:srgbClr val="0F1F3D"/>
+              <a:rPr sz="1300" b="0">
+                <a:solidFill>
+                  <a:srgbClr val="FFFFFF"/>
                 </a:solidFill>
                 <a:latin typeface="Malgun Gothic"/>
               </a:rPr>
-              <a:t>조사</a:t>
-            </a:r>
-          </a:p>
-          <a:p>
-            <a:pPr algn="ctr">
+              <a:t>표준을 .md로 고정하지 않으면</a:t>
+            </a:r>
+          </a:p>
+          <a:p>
+            <a:pPr>
               <a:spcBef>
-                <a:spcPts val="600"/>
+                <a:spcPts val="300"/>
               </a:spcBef>
               <a:spcAft>
                 <a:spcPts val="0"/>
               </a:spcAft>
             </a:pPr>
             <a:r>
-              <a:rPr sz="1100" b="0">
-                <a:solidFill>
-                  <a:srgbClr val="5B677A"/>
+              <a:rPr sz="1300" b="0">
+                <a:solidFill>
+                  <a:srgbClr val="FFFFFF"/>
                 </a:solidFill>
                 <a:latin typeface="Malgun Gothic"/>
               </a:rPr>
-              <a:t>SAP 표준 FM·화면</a:t>
-            </a:r>
-          </a:p>
-          <a:p>
-            <a:pPr algn="ctr">
+              <a:t>같은 실수를 세션마다 반복함</a:t>
+            </a:r>
+          </a:p>
+        </p:txBody>
+      </p:sp>
+      <p:sp>
+        <p:nvSpPr>
+          <p:cNvPr id="25" name="TextBox 24"/>
+          <p:cNvSpPr txBox="1"/>
+          <p:nvPr/>
+        </p:nvSpPr>
+        <p:spPr>
+          <a:xfrm>
+            <a:off x="6903720" y="4754880"/>
+            <a:ext cx="4297680" cy="914400"/>
+          </a:xfrm>
+          <a:prstGeom prst="rect">
+            <a:avLst/>
+          </a:prstGeom>
+          <a:noFill/>
+        </p:spPr>
+        <p:txBody>
+          <a:bodyPr wrap="square">
+            <a:spAutoFit/>
+          </a:bodyPr>
+          <a:lstStyle/>
+          <a:p>
+            <a:pPr>
               <a:spcBef>
-                <a:spcPts val="200"/>
+                <a:spcPts val="0"/>
               </a:spcBef>
               <a:spcAft>
                 <a:spcPts val="0"/>
               </a:spcAft>
             </a:pPr>
             <a:r>
-              <a:rPr sz="1100" b="0">
-                <a:solidFill>
-                  <a:srgbClr val="5B677A"/>
+              <a:rPr sz="1300" b="0">
+                <a:solidFill>
+                  <a:srgbClr val="FFFFFF"/>
                 </a:solidFill>
                 <a:latin typeface="Malgun Gothic"/>
               </a:rPr>
-              <a:t>사용법 즉시 확인</a:t>
-            </a:r>
-          </a:p>
-        </p:txBody>
-      </p:sp>
-      <p:sp>
-        <p:nvSpPr>
-          <p:cNvPr id="15" name="Rectangle 14"/>
-          <p:cNvSpPr/>
-          <p:nvPr/>
-        </p:nvSpPr>
-        <p:spPr>
-          <a:xfrm>
-            <a:off x="5120640" y="1417320"/>
-            <a:ext cx="2103120" cy="109728"/>
-          </a:xfrm>
-          <a:prstGeom prst="rect">
-            <a:avLst/>
-          </a:prstGeom>
-          <a:solidFill>
-            <a:srgbClr val="C48A1A"/>
-          </a:solidFill>
-          <a:ln>
-            <a:noFill/>
-          </a:ln>
-          <a:effectLst/>
-        </p:spPr>
-        <p:style>
-          <a:lnRef idx="1">
-            <a:schemeClr val="accent1"/>
-          </a:lnRef>
-          <a:fillRef idx="3">
-            <a:schemeClr val="accent1"/>
-          </a:fillRef>
-          <a:effectRef idx="2">
-            <a:schemeClr val="accent1"/>
-          </a:effectRef>
-          <a:fontRef idx="minor">
-            <a:schemeClr val="lt1"/>
-          </a:fontRef>
-        </p:style>
-        <p:txBody>
-          <a:bodyPr rtlCol="0" anchor="ctr"/>
-          <a:lstStyle/>
-          <a:p>
-            <a:pPr algn="ctr"/>
-          </a:p>
-        </p:txBody>
-      </p:sp>
-      <p:sp>
-        <p:nvSpPr>
-          <p:cNvPr id="16" name="Rounded Rectangle 15"/>
-          <p:cNvSpPr/>
-          <p:nvPr/>
-        </p:nvSpPr>
-        <p:spPr>
-          <a:xfrm>
-            <a:off x="7360920" y="1417320"/>
-            <a:ext cx="2103120" cy="2331720"/>
-          </a:xfrm>
-          <a:prstGeom prst="roundRect">
-            <a:avLst/>
-          </a:prstGeom>
-          <a:solidFill>
-            <a:srgbClr val="FFFFFF"/>
-          </a:solidFill>
-          <a:ln w="12700">
-            <a:solidFill>
-              <a:srgbClr val="D8DEE9"/>
-            </a:solidFill>
-          </a:ln>
-          <a:effectLst/>
-        </p:spPr>
-        <p:style>
-          <a:lnRef idx="1">
-            <a:schemeClr val="accent1"/>
-          </a:lnRef>
-          <a:fillRef idx="3">
-            <a:schemeClr val="accent1"/>
-          </a:fillRef>
-          <a:effectRef idx="2">
-            <a:schemeClr val="accent1"/>
-          </a:effectRef>
-          <a:fontRef idx="minor">
-            <a:schemeClr val="lt1"/>
-          </a:fontRef>
-        </p:style>
-        <p:txBody>
-          <a:bodyPr rtlCol="0" anchor="ctr" lIns="164592" tIns="320040"/>
-          <a:lstStyle/>
-          <a:p>
-            <a:pPr algn="ctr">
+              <a:t>사람은 판단과 검증에 집중할수록</a:t>
+            </a:r>
+          </a:p>
+          <a:p>
+            <a:pPr>
               <a:spcBef>
-                <a:spcPts val="0"/>
+                <a:spcPts val="300"/>
               </a:spcBef>
               <a:spcAft>
                 <a:spcPts val="0"/>
               </a:spcAft>
             </a:pPr>
             <a:r>
-              <a:rPr sz="1600" b="1">
-                <a:solidFill>
-                  <a:srgbClr val="0F1F3D"/>
+              <a:rPr sz="1300" b="0">
+                <a:solidFill>
+                  <a:srgbClr val="FFFFFF"/>
                 </a:solidFill>
                 <a:latin typeface="Malgun Gothic"/>
               </a:rPr>
-              <a:t>구현</a:t>
-            </a:r>
-          </a:p>
-          <a:p>
-            <a:pPr algn="ctr">
-              <a:spcBef>
-                <a:spcPts val="600"/>
-              </a:spcBef>
-              <a:spcAft>
-                <a:spcPts val="0"/>
-              </a:spcAft>
-            </a:pPr>
-            <a:r>
-              <a:rPr sz="1100" b="0">
-                <a:solidFill>
-                  <a:srgbClr val="5B677A"/>
-                </a:solidFill>
-                <a:latin typeface="Malgun Gothic"/>
-              </a:rPr>
-              <a:t>코드 생성 → 오류 진단</a:t>
-            </a:r>
-          </a:p>
-          <a:p>
-            <a:pPr algn="ctr">
-              <a:spcBef>
-                <a:spcPts val="200"/>
-              </a:spcBef>
-              <a:spcAft>
-                <a:spcPts val="0"/>
-              </a:spcAft>
-            </a:pPr>
-            <a:r>
-              <a:rPr sz="1100" b="0">
-                <a:solidFill>
-                  <a:srgbClr val="5B677A"/>
-                </a:solidFill>
-                <a:latin typeface="Malgun Gothic"/>
-              </a:rPr>
-              <a:t>→ 수정 루프 가속</a:t>
-            </a:r>
-          </a:p>
-        </p:txBody>
-      </p:sp>
-      <p:sp>
-        <p:nvSpPr>
-          <p:cNvPr id="17" name="Rectangle 16"/>
-          <p:cNvSpPr/>
-          <p:nvPr/>
-        </p:nvSpPr>
-        <p:spPr>
-          <a:xfrm>
-            <a:off x="7360920" y="1417320"/>
-            <a:ext cx="2103120" cy="109728"/>
-          </a:xfrm>
-          <a:prstGeom prst="rect">
-            <a:avLst/>
-          </a:prstGeom>
-          <a:solidFill>
-            <a:srgbClr val="1E4D8C"/>
-          </a:solidFill>
-          <a:ln>
-            <a:noFill/>
-          </a:ln>
-          <a:effectLst/>
-        </p:spPr>
-        <p:style>
-          <a:lnRef idx="1">
-            <a:schemeClr val="accent1"/>
-          </a:lnRef>
-          <a:fillRef idx="3">
-            <a:schemeClr val="accent1"/>
-          </a:fillRef>
-          <a:effectRef idx="2">
-            <a:schemeClr val="accent1"/>
-          </a:effectRef>
-          <a:fontRef idx="minor">
-            <a:schemeClr val="lt1"/>
-          </a:fontRef>
-        </p:style>
-        <p:txBody>
-          <a:bodyPr rtlCol="0" anchor="ctr"/>
-          <a:lstStyle/>
-          <a:p>
-            <a:pPr algn="ctr"/>
-          </a:p>
-        </p:txBody>
-      </p:sp>
-      <p:sp>
-        <p:nvSpPr>
-          <p:cNvPr id="18" name="Rounded Rectangle 17"/>
-          <p:cNvSpPr/>
-          <p:nvPr/>
-        </p:nvSpPr>
-        <p:spPr>
-          <a:xfrm>
-            <a:off x="9601200" y="1417320"/>
-            <a:ext cx="2103120" cy="2331720"/>
-          </a:xfrm>
-          <a:prstGeom prst="roundRect">
-            <a:avLst/>
-          </a:prstGeom>
-          <a:solidFill>
-            <a:srgbClr val="FFFFFF"/>
-          </a:solidFill>
-          <a:ln w="12700">
-            <a:solidFill>
-              <a:srgbClr val="D8DEE9"/>
-            </a:solidFill>
-          </a:ln>
-          <a:effectLst/>
-        </p:spPr>
-        <p:style>
-          <a:lnRef idx="1">
-            <a:schemeClr val="accent1"/>
-          </a:lnRef>
-          <a:fillRef idx="3">
-            <a:schemeClr val="accent1"/>
-          </a:fillRef>
-          <a:effectRef idx="2">
-            <a:schemeClr val="accent1"/>
-          </a:effectRef>
-          <a:fontRef idx="minor">
-            <a:schemeClr val="lt1"/>
-          </a:fontRef>
-        </p:style>
-        <p:txBody>
-          <a:bodyPr rtlCol="0" anchor="ctr" lIns="164592" tIns="320040"/>
-          <a:lstStyle/>
-          <a:p>
-            <a:pPr algn="ctr">
-              <a:spcBef>
-                <a:spcPts val="0"/>
-              </a:spcBef>
-              <a:spcAft>
-                <a:spcPts val="0"/>
-              </a:spcAft>
-            </a:pPr>
-            <a:r>
-              <a:rPr sz="1600" b="1">
-                <a:solidFill>
-                  <a:srgbClr val="0F1F3D"/>
-                </a:solidFill>
-                <a:latin typeface="Malgun Gothic"/>
-              </a:rPr>
-              <a:t>검증</a:t>
-            </a:r>
-          </a:p>
-          <a:p>
-            <a:pPr algn="ctr">
-              <a:spcBef>
-                <a:spcPts val="600"/>
-              </a:spcBef>
-              <a:spcAft>
-                <a:spcPts val="0"/>
-              </a:spcAft>
-            </a:pPr>
-            <a:r>
-              <a:rPr sz="1100" b="0">
-                <a:solidFill>
-                  <a:srgbClr val="5B677A"/>
-                </a:solidFill>
-                <a:latin typeface="Malgun Gothic"/>
-              </a:rPr>
-              <a:t>리뷰·표준 준수 점검</a:t>
-            </a:r>
-          </a:p>
-          <a:p>
-            <a:pPr algn="ctr">
-              <a:spcBef>
-                <a:spcPts val="200"/>
-              </a:spcBef>
-              <a:spcAft>
-                <a:spcPts val="0"/>
-              </a:spcAft>
-            </a:pPr>
-            <a:r>
-              <a:rPr sz="1100" b="0">
-                <a:solidFill>
-                  <a:srgbClr val="5B677A"/>
-                </a:solidFill>
-                <a:latin typeface="Malgun Gothic"/>
-              </a:rPr>
-              <a:t>문서/PR 품질 균일화</a:t>
-            </a:r>
-          </a:p>
-        </p:txBody>
-      </p:sp>
-      <p:sp>
-        <p:nvSpPr>
-          <p:cNvPr id="19" name="Rectangle 18"/>
-          <p:cNvSpPr/>
-          <p:nvPr/>
-        </p:nvSpPr>
-        <p:spPr>
-          <a:xfrm>
-            <a:off x="9601200" y="1417320"/>
-            <a:ext cx="2103120" cy="109728"/>
-          </a:xfrm>
-          <a:prstGeom prst="rect">
-            <a:avLst/>
-          </a:prstGeom>
-          <a:solidFill>
-            <a:srgbClr val="0E7C6B"/>
-          </a:solidFill>
-          <a:ln>
-            <a:noFill/>
-          </a:ln>
-          <a:effectLst/>
-        </p:spPr>
-        <p:style>
-          <a:lnRef idx="1">
-            <a:schemeClr val="accent1"/>
-          </a:lnRef>
-          <a:fillRef idx="3">
-            <a:schemeClr val="accent1"/>
-          </a:fillRef>
-          <a:effectRef idx="2">
-            <a:schemeClr val="accent1"/>
-          </a:effectRef>
-          <a:fontRef idx="minor">
-            <a:schemeClr val="lt1"/>
-          </a:fontRef>
-        </p:style>
-        <p:txBody>
-          <a:bodyPr rtlCol="0" anchor="ctr"/>
-          <a:lstStyle/>
-          <a:p>
-            <a:pPr algn="ctr"/>
-          </a:p>
-        </p:txBody>
-      </p:sp>
-      <p:sp>
-        <p:nvSpPr>
-          <p:cNvPr id="20" name="Rounded Rectangle 19"/>
-          <p:cNvSpPr/>
-          <p:nvPr/>
-        </p:nvSpPr>
-        <p:spPr>
-          <a:xfrm>
-            <a:off x="640080" y="4023360"/>
-            <a:ext cx="10881360" cy="2011680"/>
-          </a:xfrm>
-          <a:prstGeom prst="roundRect">
-            <a:avLst/>
-          </a:prstGeom>
-          <a:solidFill>
-            <a:srgbClr val="0F1F3D"/>
-          </a:solidFill>
-          <a:ln w="12700">
-            <a:solidFill>
-              <a:srgbClr val="D8DEE9"/>
-            </a:solidFill>
-          </a:ln>
-          <a:effectLst/>
-        </p:spPr>
-        <p:style>
-          <a:lnRef idx="1">
-            <a:schemeClr val="accent1"/>
-          </a:lnRef>
-          <a:fillRef idx="3">
-            <a:schemeClr val="accent1"/>
-          </a:fillRef>
-          <a:effectRef idx="2">
-            <a:schemeClr val="accent1"/>
-          </a:effectRef>
-          <a:fontRef idx="minor">
-            <a:schemeClr val="lt1"/>
-          </a:fontRef>
-        </p:style>
-        <p:txBody>
-          <a:bodyPr rtlCol="0" anchor="ctr" lIns="365760" tIns="274320"/>
-          <a:lstStyle/>
-          <a:p>
-            <a:pPr algn="ctr">
-              <a:spcBef>
-                <a:spcPts val="0"/>
-              </a:spcBef>
-              <a:spcAft>
-                <a:spcPts val="0"/>
-              </a:spcAft>
-            </a:pPr>
-            <a:r>
-              <a:rPr sz="1400" b="1">
-                <a:solidFill>
-                  <a:srgbClr val="C48A1A"/>
-                </a:solidFill>
-                <a:latin typeface="Malgun Gothic"/>
-              </a:rPr>
-              <a:t>역할 분담의 재정의</a:t>
-            </a:r>
-          </a:p>
-          <a:p>
-            <a:pPr>
-              <a:spcBef>
-                <a:spcPts val="1200"/>
-              </a:spcBef>
-              <a:spcAft>
-                <a:spcPts val="0"/>
-              </a:spcAft>
-            </a:pPr>
-            <a:r>
-              <a:rPr sz="1400" b="0">
-                <a:solidFill>
-                  <a:srgbClr val="FFFFFF"/>
-                </a:solidFill>
-                <a:latin typeface="Malgun Gothic"/>
-              </a:rPr>
-              <a:t>AI  :  조사 · 초안 작성 · 반복 수정 · 표준 체크리스트 적용</a:t>
-            </a:r>
-          </a:p>
-          <a:p>
-            <a:pPr>
-              <a:spcBef>
-                <a:spcPts val="800"/>
-              </a:spcBef>
-              <a:spcAft>
-                <a:spcPts val="0"/>
-              </a:spcAft>
-            </a:pPr>
-            <a:r>
-              <a:rPr sz="1400" b="0">
-                <a:solidFill>
-                  <a:srgbClr val="FFFFFF"/>
-                </a:solidFill>
-                <a:latin typeface="Malgun Gothic"/>
-              </a:rPr>
-              <a:t>개발자  :  요구 확정 · 설계 의사결정 · 결과 검증 · 운영 책임</a:t>
-            </a:r>
-          </a:p>
-          <a:p>
-            <a:pPr>
-              <a:spcBef>
-                <a:spcPts val="1200"/>
-              </a:spcBef>
-              <a:spcAft>
-                <a:spcPts val="0"/>
-              </a:spcAft>
-            </a:pPr>
-            <a:r>
-              <a:rPr sz="1300" b="1">
-                <a:solidFill>
-                  <a:srgbClr val="FFD97A"/>
-                </a:solidFill>
-                <a:latin typeface="Malgun Gothic"/>
-              </a:rPr>
-              <a:t>→  “사람이 모든 것을 타이핑”하는 방식에서 “사람이 판단하고 AI가 실행”하는 방식으로 전환</a:t>
+              <a:t>전체 리드타임이 줄어듦</a:t>
             </a:r>
           </a:p>
         </p:txBody>
@@ -9150,7 +8777,7 @@
             <a:avLst/>
           </a:prstGeom>
           <a:solidFill>
-            <a:srgbClr val="F3F5F9"/>
+            <a:srgbClr val="F7F8FA"/>
           </a:solidFill>
           <a:ln>
             <a:noFill/>
@@ -9188,13 +8815,13 @@
         <p:spPr>
           <a:xfrm>
             <a:off x="0" y="0"/>
-            <a:ext cx="12191695" cy="73152"/>
+            <a:ext cx="12191695" cy="54864"/>
           </a:xfrm>
           <a:prstGeom prst="rect">
             <a:avLst/>
           </a:prstGeom>
           <a:solidFill>
-            <a:srgbClr val="0F1F3D"/>
+            <a:srgbClr val="0B1220"/>
           </a:solidFill>
           <a:ln>
             <a:noFill/>
@@ -9231,8 +8858,8 @@
         </p:nvSpPr>
         <p:spPr>
           <a:xfrm>
-            <a:off x="640080" y="256032"/>
-            <a:ext cx="9144000" cy="292608"/>
+            <a:off x="594360" y="320040"/>
+            <a:ext cx="10972800" cy="256032"/>
           </a:xfrm>
           <a:prstGeom prst="rect">
             <a:avLst/>
@@ -9254,13 +8881,13 @@
               </a:spcAft>
             </a:pPr>
             <a:r>
-              <a:rPr sz="1100" b="1">
-                <a:solidFill>
-                  <a:srgbClr val="1E4D8C"/>
+              <a:rPr sz="1000" b="1">
+                <a:solidFill>
+                  <a:srgbClr val="1A568A"/>
                 </a:solidFill>
                 <a:latin typeface="Malgun Gothic"/>
               </a:rPr>
-              <a:t>05  STANDARDS AS CODE</a:t>
+              <a:t>MECHANISM</a:t>
             </a:r>
           </a:p>
         </p:txBody>
@@ -9273,8 +8900,8 @@
         </p:nvSpPr>
         <p:spPr>
           <a:xfrm>
-            <a:off x="640080" y="502920"/>
-            <a:ext cx="10515600" cy="502920"/>
+            <a:off x="594360" y="594360"/>
+            <a:ext cx="10972800" cy="502920"/>
           </a:xfrm>
           <a:prstGeom prst="rect">
             <a:avLst/>
@@ -9296,33 +8923,75 @@
               </a:spcAft>
             </a:pPr>
             <a:r>
-              <a:rPr sz="2400" b="1">
-                <a:solidFill>
-                  <a:srgbClr val="0F1F3D"/>
+              <a:rPr sz="2600" b="1">
+                <a:solidFill>
+                  <a:srgbClr val="0B1220"/>
                 </a:solidFill>
                 <a:latin typeface="Malgun Gothic"/>
               </a:rPr>
-              <a:t>규칙·스킬(.md)로 개발 표준을 내재화</a:t>
-            </a:r>
-          </a:p>
-        </p:txBody>
-      </p:sp>
-      <p:sp>
-        <p:nvSpPr>
-          <p:cNvPr id="6" name="Rectangle 5"/>
+              <a:t>효율을 재현 가능하게 만드는 장치</a:t>
+            </a:r>
+          </a:p>
+        </p:txBody>
+      </p:sp>
+      <p:sp>
+        <p:nvSpPr>
+          <p:cNvPr id="6" name="TextBox 5"/>
+          <p:cNvSpPr txBox="1"/>
+          <p:nvPr/>
+        </p:nvSpPr>
+        <p:spPr>
+          <a:xfrm>
+            <a:off x="594360" y="1097280"/>
+            <a:ext cx="10972800" cy="320040"/>
+          </a:xfrm>
+          <a:prstGeom prst="rect">
+            <a:avLst/>
+          </a:prstGeom>
+          <a:noFill/>
+        </p:spPr>
+        <p:txBody>
+          <a:bodyPr wrap="square">
+            <a:spAutoFit/>
+          </a:bodyPr>
+          <a:lstStyle/>
+          <a:p>
+            <a:pPr>
+              <a:spcBef>
+                <a:spcPts val="0"/>
+              </a:spcBef>
+              <a:spcAft>
+                <a:spcPts val="0"/>
+              </a:spcAft>
+            </a:pPr>
+            <a:r>
+              <a:rPr sz="1300" b="0">
+                <a:solidFill>
+                  <a:srgbClr val="5A6678"/>
+                </a:solidFill>
+                <a:latin typeface="Malgun Gothic"/>
+              </a:rPr>
+              <a:t>개인 프롬프트 → 조직 자산으로</a:t>
+            </a:r>
+          </a:p>
+        </p:txBody>
+      </p:sp>
+      <p:sp>
+        <p:nvSpPr>
+          <p:cNvPr id="7" name="Rectangle 6"/>
           <p:cNvSpPr/>
           <p:nvPr/>
         </p:nvSpPr>
         <p:spPr>
           <a:xfrm>
-            <a:off x="658368" y="1051560"/>
-            <a:ext cx="1097280" cy="44450"/>
+            <a:off x="594360" y="1417320"/>
+            <a:ext cx="822960" cy="38100"/>
           </a:xfrm>
           <a:prstGeom prst="rect">
             <a:avLst/>
           </a:prstGeom>
           <a:solidFill>
-            <a:srgbClr val="C48A1A"/>
+            <a:srgbClr val="B88A2E"/>
           </a:solidFill>
           <a:ln>
             <a:noFill/>
@@ -9353,20 +9022,20 @@
       </p:sp>
       <p:sp>
         <p:nvSpPr>
-          <p:cNvPr id="7" name="Rectangle 6"/>
+          <p:cNvPr id="8" name="Rectangle 7"/>
           <p:cNvSpPr/>
           <p:nvPr/>
         </p:nvSpPr>
         <p:spPr>
           <a:xfrm>
-            <a:off x="0" y="6537960"/>
-            <a:ext cx="12191695" cy="320040"/>
+            <a:off x="0" y="6583680"/>
+            <a:ext cx="12191695" cy="274320"/>
           </a:xfrm>
           <a:prstGeom prst="rect">
             <a:avLst/>
           </a:prstGeom>
           <a:solidFill>
-            <a:srgbClr val="0F1F3D"/>
+            <a:srgbClr val="0B1220"/>
           </a:solidFill>
           <a:ln>
             <a:noFill/>
@@ -9397,14 +9066,14 @@
       </p:sp>
       <p:sp>
         <p:nvSpPr>
-          <p:cNvPr id="8" name="TextBox 7"/>
+          <p:cNvPr id="9" name="TextBox 8"/>
           <p:cNvSpPr txBox="1"/>
           <p:nvPr/>
         </p:nvSpPr>
         <p:spPr>
           <a:xfrm>
-            <a:off x="640080" y="6565392"/>
-            <a:ext cx="8229600" cy="256032"/>
+            <a:off x="594360" y="6601968"/>
+            <a:ext cx="8229600" cy="237744"/>
           </a:xfrm>
           <a:prstGeom prst="rect">
             <a:avLst/>
@@ -9428,25 +9097,25 @@
             <a:r>
               <a:rPr sz="900" b="0">
                 <a:solidFill>
-                  <a:srgbClr val="FFFFFF"/>
+                  <a:srgbClr val="8B95A5"/>
                 </a:solidFill>
                 <a:latin typeface="Malgun Gothic"/>
               </a:rPr>
-              <a:t>통합 운영 모니터링  ·  AI 활용 개발 성과 보고</a:t>
-            </a:r>
-          </a:p>
-        </p:txBody>
-      </p:sp>
-      <p:sp>
-        <p:nvSpPr>
-          <p:cNvPr id="9" name="TextBox 8"/>
+              <a:t>AI 활용 효율성  ·  향후 방향</a:t>
+            </a:r>
+          </a:p>
+        </p:txBody>
+      </p:sp>
+      <p:sp>
+        <p:nvSpPr>
+          <p:cNvPr id="10" name="TextBox 9"/>
           <p:cNvSpPr txBox="1"/>
           <p:nvPr/>
         </p:nvSpPr>
         <p:spPr>
           <a:xfrm>
-            <a:off x="10241280" y="6565392"/>
-            <a:ext cx="1371600" cy="256032"/>
+            <a:off x="10332720" y="6601968"/>
+            <a:ext cx="1280160" cy="237744"/>
           </a:xfrm>
           <a:prstGeom prst="rect">
             <a:avLst/>
@@ -9470,25 +9139,25 @@
             <a:r>
               <a:rPr sz="900" b="0">
                 <a:solidFill>
-                  <a:srgbClr val="FFFFFF"/>
+                  <a:srgbClr val="8B95A5"/>
                 </a:solidFill>
                 <a:latin typeface="Malgun Gothic"/>
               </a:rPr>
-              <a:t>6 / 8</a:t>
-            </a:r>
-          </a:p>
-        </p:txBody>
-      </p:sp>
-      <p:sp>
-        <p:nvSpPr>
-          <p:cNvPr id="10" name="Rounded Rectangle 9"/>
+              <a:t>6  /  8</a:t>
+            </a:r>
+          </a:p>
+        </p:txBody>
+      </p:sp>
+      <p:sp>
+        <p:nvSpPr>
+          <p:cNvPr id="11" name="Rounded Rectangle 10"/>
           <p:cNvSpPr/>
           <p:nvPr/>
         </p:nvSpPr>
         <p:spPr>
           <a:xfrm>
-            <a:off x="640080" y="1371600"/>
-            <a:ext cx="5349240" cy="3291840"/>
+            <a:off x="594360" y="1828800"/>
+            <a:ext cx="5394960" cy="3063240"/>
           </a:xfrm>
           <a:prstGeom prst="roundRect">
             <a:avLst/>
@@ -9498,7 +9167,7 @@
           </a:solidFill>
           <a:ln w="12700">
             <a:solidFill>
-              <a:srgbClr val="D8DEE9"/>
+              <a:srgbClr val="E2E6ED"/>
             </a:solidFill>
           </a:ln>
           <a:effectLst/>
@@ -9518,10 +9187,36 @@
           </a:fontRef>
         </p:style>
         <p:txBody>
-          <a:bodyPr rtlCol="0" anchor="ctr" lIns="274320" tIns="685800"/>
-          <a:lstStyle/>
-          <a:p>
-            <a:pPr algn="ctr">
+          <a:bodyPr rtlCol="0" anchor="ctr"/>
+          <a:lstStyle/>
+          <a:p>
+            <a:pPr algn="ctr"/>
+          </a:p>
+        </p:txBody>
+      </p:sp>
+      <p:sp>
+        <p:nvSpPr>
+          <p:cNvPr id="12" name="TextBox 11"/>
+          <p:cNvSpPr txBox="1"/>
+          <p:nvPr/>
+        </p:nvSpPr>
+        <p:spPr>
+          <a:xfrm>
+            <a:off x="914400" y="2057400"/>
+            <a:ext cx="4754880" cy="320040"/>
+          </a:xfrm>
+          <a:prstGeom prst="rect">
+            <a:avLst/>
+          </a:prstGeom>
+          <a:noFill/>
+        </p:spPr>
+        <p:txBody>
+          <a:bodyPr wrap="square">
+            <a:spAutoFit/>
+          </a:bodyPr>
+          <a:lstStyle/>
+          <a:p>
+            <a:pPr>
               <a:spcBef>
                 <a:spcPts val="0"/>
               </a:spcBef>
@@ -9530,13 +9225,55 @@
               </a:spcAft>
             </a:pPr>
             <a:r>
-              <a:rPr sz="1100" b="1">
-                <a:solidFill>
-                  <a:srgbClr val="1E4D8C"/>
+              <a:rPr sz="1500" b="1">
+                <a:solidFill>
+                  <a:srgbClr val="0B1220"/>
                 </a:solidFill>
                 <a:latin typeface="Malgun Gothic"/>
               </a:rPr>
-              <a:t>.cursor/rules/abap-project-conventions</a:t>
+              <a:t>Rules  —  항상 켜져 있는 기준</a:t>
+            </a:r>
+          </a:p>
+        </p:txBody>
+      </p:sp>
+      <p:sp>
+        <p:nvSpPr>
+          <p:cNvPr id="13" name="TextBox 12"/>
+          <p:cNvSpPr txBox="1"/>
+          <p:nvPr/>
+        </p:nvSpPr>
+        <p:spPr>
+          <a:xfrm>
+            <a:off x="914400" y="2606040"/>
+            <a:ext cx="4754880" cy="2011680"/>
+          </a:xfrm>
+          <a:prstGeom prst="rect">
+            <a:avLst/>
+          </a:prstGeom>
+          <a:noFill/>
+        </p:spPr>
+        <p:txBody>
+          <a:bodyPr wrap="square">
+            <a:spAutoFit/>
+          </a:bodyPr>
+          <a:lstStyle/>
+          <a:p>
+            <a:pPr>
+              <a:spcBef>
+                <a:spcPts val="0"/>
+              </a:spcBef>
+              <a:spcAft>
+                <a:spcPts val="0"/>
+              </a:spcAft>
+            </a:pPr>
+            <a:r>
+              <a:rPr sz="1300" b="0">
+                <a:solidFill>
+                  <a:srgbClr val="5A6678"/>
+                </a:solidFill>
+                <a:latin typeface="Malgun Gothic"/>
+              </a:rPr>
+              <a:t>–  읽기 전용, 표준 객체만 사용 등 불변식</a:t>
             </a:r>
           </a:p>
           <a:p>
@@ -9549,13 +9286,13 @@
               </a:spcAft>
             </a:pPr>
             <a:r>
-              <a:rPr sz="1200" b="0">
-                <a:solidFill>
-                  <a:srgbClr val="1A2332"/>
+              <a:rPr sz="1300" b="0">
+                <a:solidFill>
+                  <a:srgbClr val="5A6678"/>
                 </a:solidFill>
                 <a:latin typeface="Malgun Gothic"/>
               </a:rPr>
-              <a:t>•  읽기 전용 불변식 (변경·COMMIT·LOCK 금지)</a:t>
+              <a:t>–  매 대화마다 다시 설명하지 않음</a:t>
             </a:r>
           </a:p>
           <a:p>
@@ -9568,13 +9305,143 @@
               </a:spcAft>
             </a:pPr>
             <a:r>
-              <a:rPr sz="1200" b="0">
-                <a:solidFill>
-                  <a:srgbClr val="1A2332"/>
+              <a:rPr sz="1300" b="0">
+                <a:solidFill>
+                  <a:srgbClr val="5A6678"/>
                 </a:solidFill>
                 <a:latin typeface="Malgun Gothic"/>
               </a:rPr>
-              <a:t>•  표준 테이블 / 표준 FM만 데이터 소스로 사용</a:t>
+              <a:t>–  위반을 사전에 차단 → 재작업 감소</a:t>
+            </a:r>
+          </a:p>
+        </p:txBody>
+      </p:sp>
+      <p:sp>
+        <p:nvSpPr>
+          <p:cNvPr id="14" name="Rounded Rectangle 13"/>
+          <p:cNvSpPr/>
+          <p:nvPr/>
+        </p:nvSpPr>
+        <p:spPr>
+          <a:xfrm>
+            <a:off x="6217920" y="1828800"/>
+            <a:ext cx="5394960" cy="3063240"/>
+          </a:xfrm>
+          <a:prstGeom prst="roundRect">
+            <a:avLst/>
+          </a:prstGeom>
+          <a:solidFill>
+            <a:srgbClr val="FFFFFF"/>
+          </a:solidFill>
+          <a:ln w="12700">
+            <a:solidFill>
+              <a:srgbClr val="E2E6ED"/>
+            </a:solidFill>
+          </a:ln>
+          <a:effectLst/>
+        </p:spPr>
+        <p:style>
+          <a:lnRef idx="1">
+            <a:schemeClr val="accent1"/>
+          </a:lnRef>
+          <a:fillRef idx="3">
+            <a:schemeClr val="accent1"/>
+          </a:fillRef>
+          <a:effectRef idx="2">
+            <a:schemeClr val="accent1"/>
+          </a:effectRef>
+          <a:fontRef idx="minor">
+            <a:schemeClr val="lt1"/>
+          </a:fontRef>
+        </p:style>
+        <p:txBody>
+          <a:bodyPr rtlCol="0" anchor="ctr"/>
+          <a:lstStyle/>
+          <a:p>
+            <a:pPr algn="ctr"/>
+          </a:p>
+        </p:txBody>
+      </p:sp>
+      <p:sp>
+        <p:nvSpPr>
+          <p:cNvPr id="15" name="TextBox 14"/>
+          <p:cNvSpPr txBox="1"/>
+          <p:nvPr/>
+        </p:nvSpPr>
+        <p:spPr>
+          <a:xfrm>
+            <a:off x="6537960" y="2057400"/>
+            <a:ext cx="4754880" cy="320040"/>
+          </a:xfrm>
+          <a:prstGeom prst="rect">
+            <a:avLst/>
+          </a:prstGeom>
+          <a:noFill/>
+        </p:spPr>
+        <p:txBody>
+          <a:bodyPr wrap="square">
+            <a:spAutoFit/>
+          </a:bodyPr>
+          <a:lstStyle/>
+          <a:p>
+            <a:pPr>
+              <a:spcBef>
+                <a:spcPts val="0"/>
+              </a:spcBef>
+              <a:spcAft>
+                <a:spcPts val="0"/>
+              </a:spcAft>
+            </a:pPr>
+            <a:r>
+              <a:rPr sz="1500" b="1">
+                <a:solidFill>
+                  <a:srgbClr val="0B1220"/>
+                </a:solidFill>
+                <a:latin typeface="Malgun Gothic"/>
+              </a:rPr>
+              <a:t>Skills  —  필요할 때 꺼내는 절차</a:t>
+            </a:r>
+          </a:p>
+        </p:txBody>
+      </p:sp>
+      <p:sp>
+        <p:nvSpPr>
+          <p:cNvPr id="16" name="TextBox 15"/>
+          <p:cNvSpPr txBox="1"/>
+          <p:nvPr/>
+        </p:nvSpPr>
+        <p:spPr>
+          <a:xfrm>
+            <a:off x="6537960" y="2606040"/>
+            <a:ext cx="4754880" cy="2011680"/>
+          </a:xfrm>
+          <a:prstGeom prst="rect">
+            <a:avLst/>
+          </a:prstGeom>
+          <a:noFill/>
+        </p:spPr>
+        <p:txBody>
+          <a:bodyPr wrap="square">
+            <a:spAutoFit/>
+          </a:bodyPr>
+          <a:lstStyle/>
+          <a:p>
+            <a:pPr>
+              <a:spcBef>
+                <a:spcPts val="0"/>
+              </a:spcBef>
+              <a:spcAft>
+                <a:spcPts val="0"/>
+              </a:spcAft>
+            </a:pPr>
+            <a:r>
+              <a:rPr sz="1300" b="0">
+                <a:solidFill>
+                  <a:srgbClr val="5A6678"/>
+                </a:solidFill>
+                <a:latin typeface="Malgun Gothic"/>
+              </a:rPr>
+              <a:t>–  구현 · 리뷰 · 성능 · 디버깅 · 문서/PR</a:t>
             </a:r>
           </a:p>
           <a:p>
@@ -9587,13 +9454,13 @@
               </a:spcAft>
             </a:pPr>
             <a:r>
-              <a:rPr sz="1200" b="0">
-                <a:solidFill>
-                  <a:srgbClr val="1A2332"/>
+              <a:rPr sz="1300" b="0">
+                <a:solidFill>
+                  <a:srgbClr val="5A6678"/>
                 </a:solidFill>
                 <a:latin typeface="Malgun Gothic"/>
               </a:rPr>
-              <a:t>•  기간 제한 SELECT · SELECT * 금지</a:t>
+              <a:t>–  검증된 순서를 그대로 재실행</a:t>
             </a:r>
           </a:p>
           <a:p>
@@ -9606,52 +9473,33 @@
               </a:spcAft>
             </a:pPr>
             <a:r>
-              <a:rPr sz="1200" b="0">
-                <a:solidFill>
-                  <a:srgbClr val="1A2332"/>
+              <a:rPr sz="1300" b="0">
+                <a:solidFill>
+                  <a:srgbClr val="5A6678"/>
                 </a:solidFill>
                 <a:latin typeface="Malgun Gothic"/>
               </a:rPr>
-              <a:t>•  인터페이스 기반 OO · 영역별 권한 격리</a:t>
-            </a:r>
-          </a:p>
-          <a:p>
-            <a:pPr>
-              <a:spcBef>
-                <a:spcPts val="1400"/>
-              </a:spcBef>
-              <a:spcAft>
-                <a:spcPts val="0"/>
-              </a:spcAft>
-            </a:pPr>
-            <a:r>
-              <a:rPr sz="1200" b="1">
-                <a:solidFill>
-                  <a:srgbClr val="0E7C6B"/>
-                </a:solidFill>
-                <a:latin typeface="Malgun Gothic"/>
-              </a:rPr>
-              <a:t>→ 매 작업마다 재지시 없이 자동 준수</a:t>
-            </a:r>
-          </a:p>
-        </p:txBody>
-      </p:sp>
-      <p:sp>
-        <p:nvSpPr>
-          <p:cNvPr id="11" name="Rectangle 10"/>
+              <a:t>–  담당자·세션이 바뀌어도 품질 편차 축소</a:t>
+            </a:r>
+          </a:p>
+        </p:txBody>
+      </p:sp>
+      <p:sp>
+        <p:nvSpPr>
+          <p:cNvPr id="17" name="Rounded Rectangle 16"/>
           <p:cNvSpPr/>
           <p:nvPr/>
         </p:nvSpPr>
         <p:spPr>
           <a:xfrm>
-            <a:off x="640080" y="1371600"/>
-            <a:ext cx="5349240" cy="502920"/>
-          </a:xfrm>
-          <a:prstGeom prst="rect">
+            <a:off x="594360" y="5074920"/>
+            <a:ext cx="11018520" cy="1097280"/>
+          </a:xfrm>
+          <a:prstGeom prst="roundRect">
             <a:avLst/>
           </a:prstGeom>
           <a:solidFill>
-            <a:srgbClr val="0F1F3D"/>
+            <a:srgbClr val="0B1220"/>
           </a:solidFill>
           <a:ln>
             <a:noFill/>
@@ -9682,14 +9530,14 @@
       </p:sp>
       <p:sp>
         <p:nvSpPr>
-          <p:cNvPr id="12" name="TextBox 11"/>
+          <p:cNvPr id="18" name="TextBox 17"/>
           <p:cNvSpPr txBox="1"/>
           <p:nvPr/>
         </p:nvSpPr>
         <p:spPr>
           <a:xfrm>
-            <a:off x="640080" y="1371600"/>
-            <a:ext cx="5349240" cy="502920"/>
+            <a:off x="914400" y="5257800"/>
+            <a:ext cx="10332720" cy="777240"/>
           </a:xfrm>
           <a:prstGeom prst="rect">
             <a:avLst/>
@@ -9702,7 +9550,7 @@
           </a:bodyPr>
           <a:lstStyle/>
           <a:p>
-            <a:pPr algn="ctr">
+            <a:pPr>
               <a:spcBef>
                 <a:spcPts val="0"/>
               </a:spcBef>
@@ -9711,337 +9559,32 @@
               </a:spcAft>
             </a:pPr>
             <a:r>
-              <a:rPr sz="1400" b="1">
-                <a:solidFill>
-                  <a:srgbClr val="FFFFFF"/>
+              <a:rPr sz="1100" b="1">
+                <a:solidFill>
+                  <a:srgbClr val="B88A2E"/>
                 </a:solidFill>
                 <a:latin typeface="Malgun Gothic"/>
               </a:rPr>
-              <a:t>Rules  ·  상시 자동 적용</a:t>
-            </a:r>
-          </a:p>
-        </p:txBody>
-      </p:sp>
-      <p:sp>
-        <p:nvSpPr>
-          <p:cNvPr id="13" name="Rounded Rectangle 12"/>
-          <p:cNvSpPr/>
-          <p:nvPr/>
-        </p:nvSpPr>
-        <p:spPr>
-          <a:xfrm>
-            <a:off x="6217920" y="1371600"/>
-            <a:ext cx="5349240" cy="3291840"/>
-          </a:xfrm>
-          <a:prstGeom prst="roundRect">
-            <a:avLst/>
-          </a:prstGeom>
-          <a:solidFill>
-            <a:srgbClr val="FFFFFF"/>
-          </a:solidFill>
-          <a:ln w="12700">
-            <a:solidFill>
-              <a:srgbClr val="D8DEE9"/>
-            </a:solidFill>
-          </a:ln>
-          <a:effectLst/>
-        </p:spPr>
-        <p:style>
-          <a:lnRef idx="1">
-            <a:schemeClr val="accent1"/>
-          </a:lnRef>
-          <a:fillRef idx="3">
-            <a:schemeClr val="accent1"/>
-          </a:fillRef>
-          <a:effectRef idx="2">
-            <a:schemeClr val="accent1"/>
-          </a:effectRef>
-          <a:fontRef idx="minor">
-            <a:schemeClr val="lt1"/>
-          </a:fontRef>
-        </p:style>
-        <p:txBody>
-          <a:bodyPr rtlCol="0" anchor="ctr" lIns="274320" tIns="685800"/>
-          <a:lstStyle/>
-          <a:p>
-            <a:pPr algn="ctr">
+              <a:t>핵심</a:t>
+            </a:r>
+          </a:p>
+          <a:p>
+            <a:pPr>
               <a:spcBef>
-                <a:spcPts val="0"/>
+                <a:spcPts val="600"/>
               </a:spcBef>
               <a:spcAft>
                 <a:spcPts val="0"/>
               </a:spcAft>
             </a:pPr>
             <a:r>
-              <a:rPr sz="1100" b="1">
-                <a:solidFill>
-                  <a:srgbClr val="C48A1A"/>
+              <a:rPr sz="1500" b="1">
+                <a:solidFill>
+                  <a:srgbClr val="FFFFFF"/>
                 </a:solidFill>
                 <a:latin typeface="Malgun Gothic"/>
               </a:rPr>
-              <a:t>.cursor/skills/*/SKILL.md</a:t>
-            </a:r>
-          </a:p>
-          <a:p>
-            <a:pPr>
-              <a:spcBef>
-                <a:spcPts val="1000"/>
-              </a:spcBef>
-              <a:spcAft>
-                <a:spcPts val="0"/>
-              </a:spcAft>
-            </a:pPr>
-            <a:r>
-              <a:rPr sz="1200" b="0">
-                <a:solidFill>
-                  <a:srgbClr val="1A2332"/>
-                </a:solidFill>
-                <a:latin typeface="Malgun Gothic"/>
-              </a:rPr>
-              <a:t>•  구현: 읽기전용 모니터링 · 클린 OO · 성능</a:t>
-            </a:r>
-          </a:p>
-          <a:p>
-            <a:pPr>
-              <a:spcBef>
-                <a:spcPts val="1000"/>
-              </a:spcBef>
-              <a:spcAft>
-                <a:spcPts val="0"/>
-              </a:spcAft>
-            </a:pPr>
-            <a:r>
-              <a:rPr sz="1200" b="0">
-                <a:solidFill>
-                  <a:srgbClr val="1A2332"/>
-                </a:solidFill>
-                <a:latin typeface="Malgun Gothic"/>
-              </a:rPr>
-              <a:t>•  검증: 코드리뷰 · 체계적 디버깅</a:t>
-            </a:r>
-          </a:p>
-          <a:p>
-            <a:pPr>
-              <a:spcBef>
-                <a:spcPts val="1000"/>
-              </a:spcBef>
-              <a:spcAft>
-                <a:spcPts val="0"/>
-              </a:spcAft>
-            </a:pPr>
-            <a:r>
-              <a:rPr sz="1200" b="0">
-                <a:solidFill>
-                  <a:srgbClr val="1A2332"/>
-                </a:solidFill>
-                <a:latin typeface="Malgun Gothic"/>
-              </a:rPr>
-              <a:t>•  문서: 설계서 · 커밋 메시지 · PR 작성</a:t>
-            </a:r>
-          </a:p>
-          <a:p>
-            <a:pPr>
-              <a:spcBef>
-                <a:spcPts val="1000"/>
-              </a:spcBef>
-              <a:spcAft>
-                <a:spcPts val="0"/>
-              </a:spcAft>
-            </a:pPr>
-            <a:r>
-              <a:rPr sz="1200" b="0">
-                <a:solidFill>
-                  <a:srgbClr val="1A2332"/>
-                </a:solidFill>
-                <a:latin typeface="Malgun Gothic"/>
-              </a:rPr>
-              <a:t>•  검증된 절차를 재사용 → 품질 편차 축소</a:t>
-            </a:r>
-          </a:p>
-          <a:p>
-            <a:pPr>
-              <a:spcBef>
-                <a:spcPts val="1400"/>
-              </a:spcBef>
-              <a:spcAft>
-                <a:spcPts val="0"/>
-              </a:spcAft>
-            </a:pPr>
-            <a:r>
-              <a:rPr sz="1200" b="1">
-                <a:solidFill>
-                  <a:srgbClr val="0E7C6B"/>
-                </a:solidFill>
-                <a:latin typeface="Malgun Gothic"/>
-              </a:rPr>
-              <a:t>→ 사람·세션이 바뀌어도 동일 기준 유지</a:t>
-            </a:r>
-          </a:p>
-        </p:txBody>
-      </p:sp>
-      <p:sp>
-        <p:nvSpPr>
-          <p:cNvPr id="14" name="Rectangle 13"/>
-          <p:cNvSpPr/>
-          <p:nvPr/>
-        </p:nvSpPr>
-        <p:spPr>
-          <a:xfrm>
-            <a:off x="6217920" y="1371600"/>
-            <a:ext cx="5349240" cy="502920"/>
-          </a:xfrm>
-          <a:prstGeom prst="rect">
-            <a:avLst/>
-          </a:prstGeom>
-          <a:solidFill>
-            <a:srgbClr val="C48A1A"/>
-          </a:solidFill>
-          <a:ln>
-            <a:noFill/>
-          </a:ln>
-          <a:effectLst/>
-        </p:spPr>
-        <p:style>
-          <a:lnRef idx="1">
-            <a:schemeClr val="accent1"/>
-          </a:lnRef>
-          <a:fillRef idx="3">
-            <a:schemeClr val="accent1"/>
-          </a:fillRef>
-          <a:effectRef idx="2">
-            <a:schemeClr val="accent1"/>
-          </a:effectRef>
-          <a:fontRef idx="minor">
-            <a:schemeClr val="lt1"/>
-          </a:fontRef>
-        </p:style>
-        <p:txBody>
-          <a:bodyPr rtlCol="0" anchor="ctr"/>
-          <a:lstStyle/>
-          <a:p>
-            <a:pPr algn="ctr"/>
-          </a:p>
-        </p:txBody>
-      </p:sp>
-      <p:sp>
-        <p:nvSpPr>
-          <p:cNvPr id="15" name="TextBox 14"/>
-          <p:cNvSpPr txBox="1"/>
-          <p:nvPr/>
-        </p:nvSpPr>
-        <p:spPr>
-          <a:xfrm>
-            <a:off x="6217920" y="1371600"/>
-            <a:ext cx="5349240" cy="502920"/>
-          </a:xfrm>
-          <a:prstGeom prst="rect">
-            <a:avLst/>
-          </a:prstGeom>
-          <a:noFill/>
-        </p:spPr>
-        <p:txBody>
-          <a:bodyPr wrap="square" anchor="ctr">
-            <a:spAutoFit/>
-          </a:bodyPr>
-          <a:lstStyle/>
-          <a:p>
-            <a:pPr algn="ctr">
-              <a:spcBef>
-                <a:spcPts val="0"/>
-              </a:spcBef>
-              <a:spcAft>
-                <a:spcPts val="0"/>
-              </a:spcAft>
-            </a:pPr>
-            <a:r>
-              <a:rPr sz="1400" b="1">
-                <a:solidFill>
-                  <a:srgbClr val="FFFFFF"/>
-                </a:solidFill>
-                <a:latin typeface="Malgun Gothic"/>
-              </a:rPr>
-              <a:t>Skills  ·  작업 유형별 플레이북</a:t>
-            </a:r>
-          </a:p>
-        </p:txBody>
-      </p:sp>
-      <p:sp>
-        <p:nvSpPr>
-          <p:cNvPr id="16" name="Rounded Rectangle 15"/>
-          <p:cNvSpPr/>
-          <p:nvPr/>
-        </p:nvSpPr>
-        <p:spPr>
-          <a:xfrm>
-            <a:off x="640080" y="4892040"/>
-            <a:ext cx="10927080" cy="1188720"/>
-          </a:xfrm>
-          <a:prstGeom prst="roundRect">
-            <a:avLst/>
-          </a:prstGeom>
-          <a:solidFill>
-            <a:srgbClr val="F3F5F9"/>
-          </a:solidFill>
-          <a:ln w="12700">
-            <a:solidFill>
-              <a:srgbClr val="D8DEE9"/>
-            </a:solidFill>
-          </a:ln>
-          <a:effectLst/>
-        </p:spPr>
-        <p:style>
-          <a:lnRef idx="1">
-            <a:schemeClr val="accent1"/>
-          </a:lnRef>
-          <a:fillRef idx="3">
-            <a:schemeClr val="accent1"/>
-          </a:fillRef>
-          <a:effectRef idx="2">
-            <a:schemeClr val="accent1"/>
-          </a:effectRef>
-          <a:fontRef idx="minor">
-            <a:schemeClr val="lt1"/>
-          </a:fontRef>
-        </p:style>
-        <p:txBody>
-          <a:bodyPr rtlCol="0" anchor="ctr" lIns="320040" tIns="201168"/>
-          <a:lstStyle/>
-          <a:p>
-            <a:pPr algn="ctr">
-              <a:spcBef>
-                <a:spcPts val="0"/>
-              </a:spcBef>
-              <a:spcAft>
-                <a:spcPts val="0"/>
-              </a:spcAft>
-            </a:pPr>
-            <a:r>
-              <a:rPr sz="1300" b="1">
-                <a:solidFill>
-                  <a:srgbClr val="1E4D8C"/>
-                </a:solidFill>
-                <a:latin typeface="Malgun Gothic"/>
-              </a:rPr>
-              <a:t>md 표준화의 실무 효과</a:t>
-            </a:r>
-          </a:p>
-          <a:p>
-            <a:pPr>
-              <a:spcBef>
-                <a:spcPts val="800"/>
-              </a:spcBef>
-              <a:spcAft>
-                <a:spcPts val="0"/>
-              </a:spcAft>
-            </a:pPr>
-            <a:r>
-              <a:rPr sz="1200" b="0">
-                <a:solidFill>
-                  <a:srgbClr val="1A2332"/>
-                </a:solidFill>
-                <a:latin typeface="Malgun Gothic"/>
-              </a:rPr>
-              <a:t>표준 설명 반복 제거  ·  재작업·휴먼에러 감소  ·  리뷰/문서 품질 균일화  ·  신규 인력 온보딩 가속  ·  규칙 자체를 버전관리하여 팀 단위 개선</a:t>
+              <a:t>AI 효율은 “누가 더 잘 물어보느냐”가 아니라, “조직이 무엇을 규칙으로 고정해 두었느냐”에서 갈립니다.</a:t>
             </a:r>
           </a:p>
         </p:txBody>
@@ -10079,7 +9622,7 @@
             <a:avLst/>
           </a:prstGeom>
           <a:solidFill>
-            <a:srgbClr val="F3F5F9"/>
+            <a:srgbClr val="F7F8FA"/>
           </a:solidFill>
           <a:ln>
             <a:noFill/>
@@ -10117,13 +9660,13 @@
         <p:spPr>
           <a:xfrm>
             <a:off x="0" y="0"/>
-            <a:ext cx="12191695" cy="73152"/>
+            <a:ext cx="12191695" cy="54864"/>
           </a:xfrm>
           <a:prstGeom prst="rect">
             <a:avLst/>
           </a:prstGeom>
           <a:solidFill>
-            <a:srgbClr val="0F1F3D"/>
+            <a:srgbClr val="0B1220"/>
           </a:solidFill>
           <a:ln>
             <a:noFill/>
@@ -10160,8 +9703,8 @@
         </p:nvSpPr>
         <p:spPr>
           <a:xfrm>
-            <a:off x="640080" y="256032"/>
-            <a:ext cx="9144000" cy="292608"/>
+            <a:off x="594360" y="320040"/>
+            <a:ext cx="10972800" cy="256032"/>
           </a:xfrm>
           <a:prstGeom prst="rect">
             <a:avLst/>
@@ -10183,13 +9726,13 @@
               </a:spcAft>
             </a:pPr>
             <a:r>
-              <a:rPr sz="1100" b="1">
-                <a:solidFill>
-                  <a:srgbClr val="1E4D8C"/>
+              <a:rPr sz="1000" b="1">
+                <a:solidFill>
+                  <a:srgbClr val="1A568A"/>
                 </a:solidFill>
                 <a:latin typeface="Malgun Gothic"/>
               </a:rPr>
-              <a:t>06  OUTCOMES</a:t>
+              <a:t>DIRECTION</a:t>
             </a:r>
           </a:p>
         </p:txBody>
@@ -10202,8 +9745,8 @@
         </p:nvSpPr>
         <p:spPr>
           <a:xfrm>
-            <a:off x="640080" y="502920"/>
-            <a:ext cx="10515600" cy="502920"/>
+            <a:off x="594360" y="594360"/>
+            <a:ext cx="10972800" cy="502920"/>
           </a:xfrm>
           <a:prstGeom prst="rect">
             <a:avLst/>
@@ -10225,33 +9768,75 @@
               </a:spcAft>
             </a:pPr>
             <a:r>
-              <a:rPr sz="2400" b="1">
-                <a:solidFill>
-                  <a:srgbClr val="0F1F3D"/>
+              <a:rPr sz="2600" b="1">
+                <a:solidFill>
+                  <a:srgbClr val="0B1220"/>
                 </a:solidFill>
                 <a:latin typeface="Malgun Gothic"/>
               </a:rPr>
-              <a:t>효율성 · 성과 (정성 중심 · 추정)</a:t>
-            </a:r>
-          </a:p>
-        </p:txBody>
-      </p:sp>
-      <p:sp>
-        <p:nvSpPr>
-          <p:cNvPr id="6" name="Rectangle 5"/>
+              <a:t>앞으로 가져가야 할 방향</a:t>
+            </a:r>
+          </a:p>
+        </p:txBody>
+      </p:sp>
+      <p:sp>
+        <p:nvSpPr>
+          <p:cNvPr id="6" name="TextBox 5"/>
+          <p:cNvSpPr txBox="1"/>
+          <p:nvPr/>
+        </p:nvSpPr>
+        <p:spPr>
+          <a:xfrm>
+            <a:off x="594360" y="1097280"/>
+            <a:ext cx="10972800" cy="320040"/>
+          </a:xfrm>
+          <a:prstGeom prst="rect">
+            <a:avLst/>
+          </a:prstGeom>
+          <a:noFill/>
+        </p:spPr>
+        <p:txBody>
+          <a:bodyPr wrap="square">
+            <a:spAutoFit/>
+          </a:bodyPr>
+          <a:lstStyle/>
+          <a:p>
+            <a:pPr>
+              <a:spcBef>
+                <a:spcPts val="0"/>
+              </a:spcBef>
+              <a:spcAft>
+                <a:spcPts val="0"/>
+              </a:spcAft>
+            </a:pPr>
+            <a:r>
+              <a:rPr sz="1300" b="0">
+                <a:solidFill>
+                  <a:srgbClr val="5A6678"/>
+                </a:solidFill>
+                <a:latin typeface="Malgun Gothic"/>
+              </a:rPr>
+              <a:t>도입 여부를 넘어, 운영 방식으로</a:t>
+            </a:r>
+          </a:p>
+        </p:txBody>
+      </p:sp>
+      <p:sp>
+        <p:nvSpPr>
+          <p:cNvPr id="7" name="Rectangle 6"/>
           <p:cNvSpPr/>
           <p:nvPr/>
         </p:nvSpPr>
         <p:spPr>
           <a:xfrm>
-            <a:off x="658368" y="1051560"/>
-            <a:ext cx="1097280" cy="44450"/>
+            <a:off x="594360" y="1417320"/>
+            <a:ext cx="822960" cy="38100"/>
           </a:xfrm>
           <a:prstGeom prst="rect">
             <a:avLst/>
           </a:prstGeom>
           <a:solidFill>
-            <a:srgbClr val="C48A1A"/>
+            <a:srgbClr val="B88A2E"/>
           </a:solidFill>
           <a:ln>
             <a:noFill/>
@@ -10282,20 +9867,20 @@
       </p:sp>
       <p:sp>
         <p:nvSpPr>
-          <p:cNvPr id="7" name="Rectangle 6"/>
+          <p:cNvPr id="8" name="Rectangle 7"/>
           <p:cNvSpPr/>
           <p:nvPr/>
         </p:nvSpPr>
         <p:spPr>
           <a:xfrm>
-            <a:off x="0" y="6537960"/>
-            <a:ext cx="12191695" cy="320040"/>
+            <a:off x="0" y="6583680"/>
+            <a:ext cx="12191695" cy="274320"/>
           </a:xfrm>
           <a:prstGeom prst="rect">
             <a:avLst/>
           </a:prstGeom>
           <a:solidFill>
-            <a:srgbClr val="0F1F3D"/>
+            <a:srgbClr val="0B1220"/>
           </a:solidFill>
           <a:ln>
             <a:noFill/>
@@ -10326,14 +9911,14 @@
       </p:sp>
       <p:sp>
         <p:nvSpPr>
-          <p:cNvPr id="8" name="TextBox 7"/>
+          <p:cNvPr id="9" name="TextBox 8"/>
           <p:cNvSpPr txBox="1"/>
           <p:nvPr/>
         </p:nvSpPr>
         <p:spPr>
           <a:xfrm>
-            <a:off x="640080" y="6565392"/>
-            <a:ext cx="8229600" cy="256032"/>
+            <a:off x="594360" y="6601968"/>
+            <a:ext cx="8229600" cy="237744"/>
           </a:xfrm>
           <a:prstGeom prst="rect">
             <a:avLst/>
@@ -10357,25 +9942,25 @@
             <a:r>
               <a:rPr sz="900" b="0">
                 <a:solidFill>
-                  <a:srgbClr val="FFFFFF"/>
+                  <a:srgbClr val="8B95A5"/>
                 </a:solidFill>
                 <a:latin typeface="Malgun Gothic"/>
               </a:rPr>
-              <a:t>통합 운영 모니터링  ·  AI 활용 개발 성과 보고</a:t>
-            </a:r>
-          </a:p>
-        </p:txBody>
-      </p:sp>
-      <p:sp>
-        <p:nvSpPr>
-          <p:cNvPr id="9" name="TextBox 8"/>
+              <a:t>AI 활용 효율성  ·  향후 방향</a:t>
+            </a:r>
+          </a:p>
+        </p:txBody>
+      </p:sp>
+      <p:sp>
+        <p:nvSpPr>
+          <p:cNvPr id="10" name="TextBox 9"/>
           <p:cNvSpPr txBox="1"/>
           <p:nvPr/>
         </p:nvSpPr>
         <p:spPr>
           <a:xfrm>
-            <a:off x="10241280" y="6565392"/>
-            <a:ext cx="1371600" cy="256032"/>
+            <a:off x="10332720" y="6601968"/>
+            <a:ext cx="1280160" cy="237744"/>
           </a:xfrm>
           <a:prstGeom prst="rect">
             <a:avLst/>
@@ -10399,25 +9984,25 @@
             <a:r>
               <a:rPr sz="900" b="0">
                 <a:solidFill>
-                  <a:srgbClr val="FFFFFF"/>
+                  <a:srgbClr val="8B95A5"/>
                 </a:solidFill>
                 <a:latin typeface="Malgun Gothic"/>
               </a:rPr>
-              <a:t>7 / 8</a:t>
-            </a:r>
-          </a:p>
-        </p:txBody>
-      </p:sp>
-      <p:sp>
-        <p:nvSpPr>
-          <p:cNvPr id="10" name="Rounded Rectangle 9"/>
+              <a:t>7  /  8</a:t>
+            </a:r>
+          </a:p>
+        </p:txBody>
+      </p:sp>
+      <p:sp>
+        <p:nvSpPr>
+          <p:cNvPr id="11" name="Rounded Rectangle 10"/>
           <p:cNvSpPr/>
           <p:nvPr/>
         </p:nvSpPr>
         <p:spPr>
           <a:xfrm>
-            <a:off x="640080" y="1371600"/>
-            <a:ext cx="3520440" cy="3246120"/>
+            <a:off x="594360" y="1828800"/>
+            <a:ext cx="10972800" cy="1005840"/>
           </a:xfrm>
           <a:prstGeom prst="roundRect">
             <a:avLst/>
@@ -10427,7 +10012,7 @@
           </a:solidFill>
           <a:ln w="12700">
             <a:solidFill>
-              <a:srgbClr val="D8DEE9"/>
+              <a:srgbClr val="E2E6ED"/>
             </a:solidFill>
           </a:ln>
           <a:effectLst/>
@@ -10447,83 +10032,29 @@
           </a:fontRef>
         </p:style>
         <p:txBody>
-          <a:bodyPr rtlCol="0" anchor="ctr" lIns="228600" tIns="685800"/>
-          <a:lstStyle/>
-          <a:p>
-            <a:pPr algn="ctr">
-              <a:spcBef>
-                <a:spcPts val="1000"/>
-              </a:spcBef>
-              <a:spcAft>
-                <a:spcPts val="0"/>
-              </a:spcAft>
-            </a:pPr>
-            <a:r>
-              <a:rPr sz="1200" b="0">
-                <a:solidFill>
-                  <a:srgbClr val="1A2332"/>
-                </a:solidFill>
-                <a:latin typeface="Malgun Gothic"/>
-              </a:rPr>
-              <a:t>•  설계–구현–검토를 단일 맥락으로 유지</a:t>
-            </a:r>
-          </a:p>
-          <a:p>
-            <a:pPr>
-              <a:spcBef>
-                <a:spcPts val="1000"/>
-              </a:spcBef>
-              <a:spcAft>
-                <a:spcPts val="0"/>
-              </a:spcAft>
-            </a:pPr>
-            <a:r>
-              <a:rPr sz="1200" b="0">
-                <a:solidFill>
-                  <a:srgbClr val="1A2332"/>
-                </a:solidFill>
-                <a:latin typeface="Malgun Gothic"/>
-              </a:rPr>
-              <a:t>•  요구 변경의 즉시 반영으로 완성도 조기 확보</a:t>
-            </a:r>
-          </a:p>
-          <a:p>
-            <a:pPr>
-              <a:spcBef>
-                <a:spcPts val="1000"/>
-              </a:spcBef>
-              <a:spcAft>
-                <a:spcPts val="0"/>
-              </a:spcAft>
-            </a:pPr>
-            <a:r>
-              <a:rPr sz="1200" b="0">
-                <a:solidFill>
-                  <a:srgbClr val="1A2332"/>
-                </a:solidFill>
-                <a:latin typeface="Malgun Gothic"/>
-              </a:rPr>
-              <a:t>•  조사·초안·수정의 대기시간 축소</a:t>
-            </a:r>
-          </a:p>
-        </p:txBody>
-      </p:sp>
-      <p:sp>
-        <p:nvSpPr>
-          <p:cNvPr id="11" name="Rectangle 10"/>
+          <a:bodyPr rtlCol="0" anchor="ctr"/>
+          <a:lstStyle/>
+          <a:p>
+            <a:pPr algn="ctr"/>
+          </a:p>
+        </p:txBody>
+      </p:sp>
+      <p:sp>
+        <p:nvSpPr>
+          <p:cNvPr id="12" name="Rectangle 11"/>
           <p:cNvSpPr/>
           <p:nvPr/>
         </p:nvSpPr>
         <p:spPr>
           <a:xfrm>
-            <a:off x="640080" y="1371600"/>
-            <a:ext cx="3520440" cy="502920"/>
+            <a:off x="594360" y="1828800"/>
+            <a:ext cx="1234440" cy="1005840"/>
           </a:xfrm>
           <a:prstGeom prst="rect">
             <a:avLst/>
           </a:prstGeom>
           <a:solidFill>
-            <a:srgbClr val="1E4D8C"/>
+            <a:srgbClr val="0B1220"/>
           </a:solidFill>
           <a:ln>
             <a:noFill/>
@@ -10554,14 +10085,14 @@
       </p:sp>
       <p:sp>
         <p:nvSpPr>
-          <p:cNvPr id="12" name="TextBox 11"/>
+          <p:cNvPr id="13" name="TextBox 12"/>
           <p:cNvSpPr txBox="1"/>
           <p:nvPr/>
         </p:nvSpPr>
         <p:spPr>
           <a:xfrm>
-            <a:off x="640080" y="1371600"/>
-            <a:ext cx="3520440" cy="502920"/>
+            <a:off x="594360" y="1828800"/>
+            <a:ext cx="1234440" cy="1005840"/>
           </a:xfrm>
           <a:prstGeom prst="rect">
             <a:avLst/>
@@ -10583,27 +10114,111 @@
               </a:spcAft>
             </a:pPr>
             <a:r>
-              <a:rPr sz="1400" b="1">
+              <a:rPr sz="1300" b="1">
                 <a:solidFill>
                   <a:srgbClr val="FFFFFF"/>
                 </a:solidFill>
                 <a:latin typeface="Malgun Gothic"/>
               </a:rPr>
-              <a:t>개발 생산성</a:t>
-            </a:r>
-          </a:p>
-        </p:txBody>
-      </p:sp>
-      <p:sp>
-        <p:nvSpPr>
-          <p:cNvPr id="13" name="Rounded Rectangle 12"/>
+              <a:t>단기</a:t>
+            </a:r>
+          </a:p>
+        </p:txBody>
+      </p:sp>
+      <p:sp>
+        <p:nvSpPr>
+          <p:cNvPr id="14" name="TextBox 13"/>
+          <p:cNvSpPr txBox="1"/>
+          <p:nvPr/>
+        </p:nvSpPr>
+        <p:spPr>
+          <a:xfrm>
+            <a:off x="2057400" y="2011680"/>
+            <a:ext cx="9144000" cy="320040"/>
+          </a:xfrm>
+          <a:prstGeom prst="rect">
+            <a:avLst/>
+          </a:prstGeom>
+          <a:noFill/>
+        </p:spPr>
+        <p:txBody>
+          <a:bodyPr wrap="square">
+            <a:spAutoFit/>
+          </a:bodyPr>
+          <a:lstStyle/>
+          <a:p>
+            <a:pPr>
+              <a:spcBef>
+                <a:spcPts val="0"/>
+              </a:spcBef>
+              <a:spcAft>
+                <a:spcPts val="0"/>
+              </a:spcAft>
+            </a:pPr>
+            <a:r>
+              <a:rPr sz="1500" b="1">
+                <a:solidFill>
+                  <a:srgbClr val="0B1220"/>
+                </a:solidFill>
+                <a:latin typeface="Malgun Gothic"/>
+              </a:rPr>
+              <a:t>검증된 과제에 AI+Rules를 기본 세트로 적용</a:t>
+            </a:r>
+          </a:p>
+        </p:txBody>
+      </p:sp>
+      <p:sp>
+        <p:nvSpPr>
+          <p:cNvPr id="15" name="TextBox 14"/>
+          <p:cNvSpPr txBox="1"/>
+          <p:nvPr/>
+        </p:nvSpPr>
+        <p:spPr>
+          <a:xfrm>
+            <a:off x="2057400" y="2331720"/>
+            <a:ext cx="9144000" cy="320040"/>
+          </a:xfrm>
+          <a:prstGeom prst="rect">
+            <a:avLst/>
+          </a:prstGeom>
+          <a:noFill/>
+        </p:spPr>
+        <p:txBody>
+          <a:bodyPr wrap="square">
+            <a:spAutoFit/>
+          </a:bodyPr>
+          <a:lstStyle/>
+          <a:p>
+            <a:pPr>
+              <a:spcBef>
+                <a:spcPts val="0"/>
+              </a:spcBef>
+              <a:spcAft>
+                <a:spcPts val="0"/>
+              </a:spcAft>
+            </a:pPr>
+            <a:r>
+              <a:rPr sz="1200" b="0">
+                <a:solidFill>
+                  <a:srgbClr val="5A6678"/>
+                </a:solidFill>
+                <a:latin typeface="Malgun Gothic"/>
+              </a:rPr>
+              <a:t>새 과제 착수 시 규칙/스킬을 함께 준비</a:t>
+            </a:r>
+          </a:p>
+        </p:txBody>
+      </p:sp>
+      <p:sp>
+        <p:nvSpPr>
+          <p:cNvPr id="16" name="Rounded Rectangle 15"/>
           <p:cNvSpPr/>
           <p:nvPr/>
         </p:nvSpPr>
         <p:spPr>
           <a:xfrm>
-            <a:off x="4343400" y="1371600"/>
-            <a:ext cx="3520440" cy="3246120"/>
+            <a:off x="594360" y="2926080"/>
+            <a:ext cx="10972800" cy="1005840"/>
           </a:xfrm>
           <a:prstGeom prst="roundRect">
             <a:avLst/>
@@ -10613,7 +10228,7 @@
           </a:solidFill>
           <a:ln w="12700">
             <a:solidFill>
-              <a:srgbClr val="D8DEE9"/>
+              <a:srgbClr val="E2E6ED"/>
             </a:solidFill>
           </a:ln>
           <a:effectLst/>
@@ -10633,83 +10248,29 @@
           </a:fontRef>
         </p:style>
         <p:txBody>
-          <a:bodyPr rtlCol="0" anchor="ctr" lIns="228600" tIns="685800"/>
-          <a:lstStyle/>
-          <a:p>
-            <a:pPr algn="ctr">
-              <a:spcBef>
-                <a:spcPts val="1000"/>
-              </a:spcBef>
-              <a:spcAft>
-                <a:spcPts val="0"/>
-              </a:spcAft>
-            </a:pPr>
-            <a:r>
-              <a:rPr sz="1200" b="0">
-                <a:solidFill>
-                  <a:srgbClr val="1A2332"/>
-                </a:solidFill>
-                <a:latin typeface="Malgun Gothic"/>
-              </a:rPr>
-              <a:t>•  표준 FM/권한/화면 조사를 대화로 해결</a:t>
-            </a:r>
-          </a:p>
-          <a:p>
-            <a:pPr>
-              <a:spcBef>
-                <a:spcPts val="1000"/>
-              </a:spcBef>
-              <a:spcAft>
-                <a:spcPts val="0"/>
-              </a:spcAft>
-            </a:pPr>
-            <a:r>
-              <a:rPr sz="1200" b="0">
-                <a:solidFill>
-                  <a:srgbClr val="1A2332"/>
-                </a:solidFill>
-                <a:latin typeface="Malgun Gothic"/>
-              </a:rPr>
-              <a:t>•  문서·트랜잭션 탐색 시간 절감</a:t>
-            </a:r>
-          </a:p>
-          <a:p>
-            <a:pPr>
-              <a:spcBef>
-                <a:spcPts val="1000"/>
-              </a:spcBef>
-              <a:spcAft>
-                <a:spcPts val="0"/>
-              </a:spcAft>
-            </a:pPr>
-            <a:r>
-              <a:rPr sz="1200" b="0">
-                <a:solidFill>
-                  <a:srgbClr val="1A2332"/>
-                </a:solidFill>
-                <a:latin typeface="Malgun Gothic"/>
-              </a:rPr>
-              <a:t>•  의사결정에 필요한 근거를 빠르게 확보</a:t>
-            </a:r>
-          </a:p>
-        </p:txBody>
-      </p:sp>
-      <p:sp>
-        <p:nvSpPr>
-          <p:cNvPr id="14" name="Rectangle 13"/>
+          <a:bodyPr rtlCol="0" anchor="ctr"/>
+          <a:lstStyle/>
+          <a:p>
+            <a:pPr algn="ctr"/>
+          </a:p>
+        </p:txBody>
+      </p:sp>
+      <p:sp>
+        <p:nvSpPr>
+          <p:cNvPr id="17" name="Rectangle 16"/>
           <p:cNvSpPr/>
           <p:nvPr/>
         </p:nvSpPr>
         <p:spPr>
           <a:xfrm>
-            <a:off x="4343400" y="1371600"/>
-            <a:ext cx="3520440" cy="502920"/>
+            <a:off x="594360" y="2926080"/>
+            <a:ext cx="1234440" cy="1005840"/>
           </a:xfrm>
           <a:prstGeom prst="rect">
             <a:avLst/>
           </a:prstGeom>
           <a:solidFill>
-            <a:srgbClr val="0E7C6B"/>
+            <a:srgbClr val="0B1220"/>
           </a:solidFill>
           <a:ln>
             <a:noFill/>
@@ -10740,14 +10301,14 @@
       </p:sp>
       <p:sp>
         <p:nvSpPr>
-          <p:cNvPr id="15" name="TextBox 14"/>
+          <p:cNvPr id="18" name="TextBox 17"/>
           <p:cNvSpPr txBox="1"/>
           <p:nvPr/>
         </p:nvSpPr>
         <p:spPr>
           <a:xfrm>
-            <a:off x="4343400" y="1371600"/>
-            <a:ext cx="3520440" cy="502920"/>
+            <a:off x="594360" y="2926080"/>
+            <a:ext cx="1234440" cy="1005840"/>
           </a:xfrm>
           <a:prstGeom prst="rect">
             <a:avLst/>
@@ -10769,27 +10330,111 @@
               </a:spcAft>
             </a:pPr>
             <a:r>
-              <a:rPr sz="1400" b="1">
+              <a:rPr sz="1300" b="1">
                 <a:solidFill>
                   <a:srgbClr val="FFFFFF"/>
                 </a:solidFill>
                 <a:latin typeface="Malgun Gothic"/>
               </a:rPr>
-              <a:t>리서치 부담</a:t>
-            </a:r>
-          </a:p>
-        </p:txBody>
-      </p:sp>
-      <p:sp>
-        <p:nvSpPr>
-          <p:cNvPr id="16" name="Rounded Rectangle 15"/>
+              <a:t>중기</a:t>
+            </a:r>
+          </a:p>
+        </p:txBody>
+      </p:sp>
+      <p:sp>
+        <p:nvSpPr>
+          <p:cNvPr id="19" name="TextBox 18"/>
+          <p:cNvSpPr txBox="1"/>
+          <p:nvPr/>
+        </p:nvSpPr>
+        <p:spPr>
+          <a:xfrm>
+            <a:off x="2057400" y="3108960"/>
+            <a:ext cx="9144000" cy="320040"/>
+          </a:xfrm>
+          <a:prstGeom prst="rect">
+            <a:avLst/>
+          </a:prstGeom>
+          <a:noFill/>
+        </p:spPr>
+        <p:txBody>
+          <a:bodyPr wrap="square">
+            <a:spAutoFit/>
+          </a:bodyPr>
+          <a:lstStyle/>
+          <a:p>
+            <a:pPr>
+              <a:spcBef>
+                <a:spcPts val="0"/>
+              </a:spcBef>
+              <a:spcAft>
+                <a:spcPts val="0"/>
+              </a:spcAft>
+            </a:pPr>
+            <a:r>
+              <a:rPr sz="1500" b="1">
+                <a:solidFill>
+                  <a:srgbClr val="0B1220"/>
+                </a:solidFill>
+                <a:latin typeface="Malgun Gothic"/>
+              </a:rPr>
+              <a:t>팀 공통 Rules를 자산으로 관리</a:t>
+            </a:r>
+          </a:p>
+        </p:txBody>
+      </p:sp>
+      <p:sp>
+        <p:nvSpPr>
+          <p:cNvPr id="20" name="TextBox 19"/>
+          <p:cNvSpPr txBox="1"/>
+          <p:nvPr/>
+        </p:nvSpPr>
+        <p:spPr>
+          <a:xfrm>
+            <a:off x="2057400" y="3429000"/>
+            <a:ext cx="9144000" cy="320040"/>
+          </a:xfrm>
+          <a:prstGeom prst="rect">
+            <a:avLst/>
+          </a:prstGeom>
+          <a:noFill/>
+        </p:spPr>
+        <p:txBody>
+          <a:bodyPr wrap="square">
+            <a:spAutoFit/>
+          </a:bodyPr>
+          <a:lstStyle/>
+          <a:p>
+            <a:pPr>
+              <a:spcBef>
+                <a:spcPts val="0"/>
+              </a:spcBef>
+              <a:spcAft>
+                <a:spcPts val="0"/>
+              </a:spcAft>
+            </a:pPr>
+            <a:r>
+              <a:rPr sz="1200" b="0">
+                <a:solidFill>
+                  <a:srgbClr val="5A6678"/>
+                </a:solidFill>
+                <a:latin typeface="Malgun Gothic"/>
+              </a:rPr>
+              <a:t>영역별 Skills를 축적하고 리뷰 기준으로 사용</a:t>
+            </a:r>
+          </a:p>
+        </p:txBody>
+      </p:sp>
+      <p:sp>
+        <p:nvSpPr>
+          <p:cNvPr id="21" name="Rounded Rectangle 20"/>
           <p:cNvSpPr/>
           <p:nvPr/>
         </p:nvSpPr>
         <p:spPr>
           <a:xfrm>
-            <a:off x="8046720" y="1371600"/>
-            <a:ext cx="3520440" cy="3246120"/>
+            <a:off x="594360" y="4023360"/>
+            <a:ext cx="10972800" cy="1005840"/>
           </a:xfrm>
           <a:prstGeom prst="roundRect">
             <a:avLst/>
@@ -10799,7 +10444,7 @@
           </a:solidFill>
           <a:ln w="12700">
             <a:solidFill>
-              <a:srgbClr val="D8DEE9"/>
+              <a:srgbClr val="E2E6ED"/>
             </a:solidFill>
           </a:ln>
           <a:effectLst/>
@@ -10819,83 +10464,29 @@
           </a:fontRef>
         </p:style>
         <p:txBody>
-          <a:bodyPr rtlCol="0" anchor="ctr" lIns="228600" tIns="685800"/>
-          <a:lstStyle/>
-          <a:p>
-            <a:pPr algn="ctr">
-              <a:spcBef>
-                <a:spcPts val="1000"/>
-              </a:spcBef>
-              <a:spcAft>
-                <a:spcPts val="0"/>
-              </a:spcAft>
-            </a:pPr>
-            <a:r>
-              <a:rPr sz="1200" b="0">
-                <a:solidFill>
-                  <a:srgbClr val="1A2332"/>
-                </a:solidFill>
-                <a:latin typeface="Malgun Gothic"/>
-              </a:rPr>
-              <a:t>•  Rules/Skills로 사내 표준 일관 적용</a:t>
-            </a:r>
-          </a:p>
-          <a:p>
-            <a:pPr>
-              <a:spcBef>
-                <a:spcPts val="1000"/>
-              </a:spcBef>
-              <a:spcAft>
-                <a:spcPts val="0"/>
-              </a:spcAft>
-            </a:pPr>
-            <a:r>
-              <a:rPr sz="1200" b="0">
-                <a:solidFill>
-                  <a:srgbClr val="1A2332"/>
-                </a:solidFill>
-                <a:latin typeface="Malgun Gothic"/>
-              </a:rPr>
-              <a:t>•  읽기 전용 위반·명명 오류 등 재작업 감소</a:t>
-            </a:r>
-          </a:p>
-          <a:p>
-            <a:pPr>
-              <a:spcBef>
-                <a:spcPts val="1000"/>
-              </a:spcBef>
-              <a:spcAft>
-                <a:spcPts val="0"/>
-              </a:spcAft>
-            </a:pPr>
-            <a:r>
-              <a:rPr sz="1200" b="0">
-                <a:solidFill>
-                  <a:srgbClr val="1A2332"/>
-                </a:solidFill>
-                <a:latin typeface="Malgun Gothic"/>
-              </a:rPr>
-              <a:t>•  리뷰·문서 산출물의 편차 축소</a:t>
-            </a:r>
-          </a:p>
-        </p:txBody>
-      </p:sp>
-      <p:sp>
-        <p:nvSpPr>
-          <p:cNvPr id="17" name="Rectangle 16"/>
+          <a:bodyPr rtlCol="0" anchor="ctr"/>
+          <a:lstStyle/>
+          <a:p>
+            <a:pPr algn="ctr"/>
+          </a:p>
+        </p:txBody>
+      </p:sp>
+      <p:sp>
+        <p:nvSpPr>
+          <p:cNvPr id="22" name="Rectangle 21"/>
           <p:cNvSpPr/>
           <p:nvPr/>
         </p:nvSpPr>
         <p:spPr>
           <a:xfrm>
-            <a:off x="8046720" y="1371600"/>
-            <a:ext cx="3520440" cy="502920"/>
+            <a:off x="594360" y="4023360"/>
+            <a:ext cx="1234440" cy="1005840"/>
           </a:xfrm>
           <a:prstGeom prst="rect">
             <a:avLst/>
           </a:prstGeom>
           <a:solidFill>
-            <a:srgbClr val="C48A1A"/>
+            <a:srgbClr val="0B1220"/>
           </a:solidFill>
           <a:ln>
             <a:noFill/>
@@ -10926,14 +10517,14 @@
       </p:sp>
       <p:sp>
         <p:nvSpPr>
-          <p:cNvPr id="18" name="TextBox 17"/>
+          <p:cNvPr id="23" name="TextBox 22"/>
           <p:cNvSpPr txBox="1"/>
           <p:nvPr/>
         </p:nvSpPr>
         <p:spPr>
           <a:xfrm>
-            <a:off x="8046720" y="1371600"/>
-            <a:ext cx="3520440" cy="502920"/>
+            <a:off x="594360" y="4023360"/>
+            <a:ext cx="1234440" cy="1005840"/>
           </a:xfrm>
           <a:prstGeom prst="rect">
             <a:avLst/>
@@ -10955,37 +10546,121 @@
               </a:spcAft>
             </a:pPr>
             <a:r>
-              <a:rPr sz="1400" b="1">
+              <a:rPr sz="1300" b="1">
                 <a:solidFill>
                   <a:srgbClr val="FFFFFF"/>
                 </a:solidFill>
                 <a:latin typeface="Malgun Gothic"/>
               </a:rPr>
-              <a:t>품질 · 표준</a:t>
-            </a:r>
-          </a:p>
-        </p:txBody>
-      </p:sp>
-      <p:sp>
-        <p:nvSpPr>
-          <p:cNvPr id="19" name="Rounded Rectangle 18"/>
+              <a:t>측정</a:t>
+            </a:r>
+          </a:p>
+        </p:txBody>
+      </p:sp>
+      <p:sp>
+        <p:nvSpPr>
+          <p:cNvPr id="24" name="TextBox 23"/>
+          <p:cNvSpPr txBox="1"/>
+          <p:nvPr/>
+        </p:nvSpPr>
+        <p:spPr>
+          <a:xfrm>
+            <a:off x="2057400" y="4206240"/>
+            <a:ext cx="9144000" cy="320040"/>
+          </a:xfrm>
+          <a:prstGeom prst="rect">
+            <a:avLst/>
+          </a:prstGeom>
+          <a:noFill/>
+        </p:spPr>
+        <p:txBody>
+          <a:bodyPr wrap="square">
+            <a:spAutoFit/>
+          </a:bodyPr>
+          <a:lstStyle/>
+          <a:p>
+            <a:pPr>
+              <a:spcBef>
+                <a:spcPts val="0"/>
+              </a:spcBef>
+              <a:spcAft>
+                <a:spcPts val="0"/>
+              </a:spcAft>
+            </a:pPr>
+            <a:r>
+              <a:rPr sz="1500" b="1">
+                <a:solidFill>
+                  <a:srgbClr val="0B1220"/>
+                </a:solidFill>
+                <a:latin typeface="Malgun Gothic"/>
+              </a:rPr>
+              <a:t>체감이 아닌 전/후 소요시간으로 확인</a:t>
+            </a:r>
+          </a:p>
+        </p:txBody>
+      </p:sp>
+      <p:sp>
+        <p:nvSpPr>
+          <p:cNvPr id="25" name="TextBox 24"/>
+          <p:cNvSpPr txBox="1"/>
+          <p:nvPr/>
+        </p:nvSpPr>
+        <p:spPr>
+          <a:xfrm>
+            <a:off x="2057400" y="4526280"/>
+            <a:ext cx="9144000" cy="320040"/>
+          </a:xfrm>
+          <a:prstGeom prst="rect">
+            <a:avLst/>
+          </a:prstGeom>
+          <a:noFill/>
+        </p:spPr>
+        <p:txBody>
+          <a:bodyPr wrap="square">
+            <a:spAutoFit/>
+          </a:bodyPr>
+          <a:lstStyle/>
+          <a:p>
+            <a:pPr>
+              <a:spcBef>
+                <a:spcPts val="0"/>
+              </a:spcBef>
+              <a:spcAft>
+                <a:spcPts val="0"/>
+              </a:spcAft>
+            </a:pPr>
+            <a:r>
+              <a:rPr sz="1200" b="0">
+                <a:solidFill>
+                  <a:srgbClr val="5A6678"/>
+                </a:solidFill>
+                <a:latin typeface="Malgun Gothic"/>
+              </a:rPr>
+              <a:t>동일 난이도 과제 기준의 리드타임 비교</a:t>
+            </a:r>
+          </a:p>
+        </p:txBody>
+      </p:sp>
+      <p:sp>
+        <p:nvSpPr>
+          <p:cNvPr id="26" name="Rounded Rectangle 25"/>
           <p:cNvSpPr/>
           <p:nvPr/>
         </p:nvSpPr>
         <p:spPr>
           <a:xfrm>
-            <a:off x="640080" y="4846320"/>
-            <a:ext cx="10927080" cy="1234440"/>
+            <a:off x="594360" y="5120640"/>
+            <a:ext cx="10972800" cy="1005840"/>
           </a:xfrm>
           <a:prstGeom prst="roundRect">
             <a:avLst/>
           </a:prstGeom>
           <a:solidFill>
-            <a:srgbClr val="0F1F3D"/>
+            <a:srgbClr val="FFFFFF"/>
           </a:solidFill>
           <a:ln w="12700">
             <a:solidFill>
-              <a:srgbClr val="D8DEE9"/>
+              <a:srgbClr val="E2E6ED"/>
             </a:solidFill>
           </a:ln>
           <a:effectLst/>
@@ -11005,7 +10680,77 @@
           </a:fontRef>
         </p:style>
         <p:txBody>
-          <a:bodyPr rtlCol="0" anchor="ctr" lIns="320040" tIns="201168"/>
+          <a:bodyPr rtlCol="0" anchor="ctr"/>
+          <a:lstStyle/>
+          <a:p>
+            <a:pPr algn="ctr"/>
+          </a:p>
+        </p:txBody>
+      </p:sp>
+      <p:sp>
+        <p:nvSpPr>
+          <p:cNvPr id="27" name="Rectangle 26"/>
+          <p:cNvSpPr/>
+          <p:nvPr/>
+        </p:nvSpPr>
+        <p:spPr>
+          <a:xfrm>
+            <a:off x="594360" y="5120640"/>
+            <a:ext cx="1234440" cy="1005840"/>
+          </a:xfrm>
+          <a:prstGeom prst="rect">
+            <a:avLst/>
+          </a:prstGeom>
+          <a:solidFill>
+            <a:srgbClr val="0B1220"/>
+          </a:solidFill>
+          <a:ln>
+            <a:noFill/>
+          </a:ln>
+          <a:effectLst/>
+        </p:spPr>
+        <p:style>
+          <a:lnRef idx="1">
+            <a:schemeClr val="accent1"/>
+          </a:lnRef>
+          <a:fillRef idx="3">
+            <a:schemeClr val="accent1"/>
+          </a:fillRef>
+          <a:effectRef idx="2">
+            <a:schemeClr val="accent1"/>
+          </a:effectRef>
+          <a:fontRef idx="minor">
+            <a:schemeClr val="lt1"/>
+          </a:fontRef>
+        </p:style>
+        <p:txBody>
+          <a:bodyPr rtlCol="0" anchor="ctr"/>
+          <a:lstStyle/>
+          <a:p>
+            <a:pPr algn="ctr"/>
+          </a:p>
+        </p:txBody>
+      </p:sp>
+      <p:sp>
+        <p:nvSpPr>
+          <p:cNvPr id="28" name="TextBox 27"/>
+          <p:cNvSpPr txBox="1"/>
+          <p:nvPr/>
+        </p:nvSpPr>
+        <p:spPr>
+          <a:xfrm>
+            <a:off x="594360" y="5120640"/>
+            <a:ext cx="1234440" cy="1005840"/>
+          </a:xfrm>
+          <a:prstGeom prst="rect">
+            <a:avLst/>
+          </a:prstGeom>
+          <a:noFill/>
+        </p:spPr>
+        <p:txBody>
+          <a:bodyPr wrap="square" anchor="ctr">
+            <a:spAutoFit/>
+          </a:bodyPr>
           <a:lstStyle/>
           <a:p>
             <a:pPr algn="ctr">
@@ -11019,30 +10764,95 @@
             <a:r>
               <a:rPr sz="1300" b="1">
                 <a:solidFill>
-                  <a:srgbClr val="C48A1A"/>
+                  <a:srgbClr val="FFFFFF"/>
                 </a:solidFill>
                 <a:latin typeface="Malgun Gothic"/>
               </a:rPr>
-              <a:t>효과 규모 (추정)  ·  정량 실측은 후속 과제</a:t>
-            </a:r>
-          </a:p>
+              <a:t>확산</a:t>
+            </a:r>
+          </a:p>
+        </p:txBody>
+      </p:sp>
+      <p:sp>
+        <p:nvSpPr>
+          <p:cNvPr id="29" name="TextBox 28"/>
+          <p:cNvSpPr txBox="1"/>
+          <p:nvPr/>
+        </p:nvSpPr>
+        <p:spPr>
+          <a:xfrm>
+            <a:off x="2057400" y="5303520"/>
+            <a:ext cx="9144000" cy="320040"/>
+          </a:xfrm>
+          <a:prstGeom prst="rect">
+            <a:avLst/>
+          </a:prstGeom>
+          <a:noFill/>
+        </p:spPr>
+        <p:txBody>
+          <a:bodyPr wrap="square">
+            <a:spAutoFit/>
+          </a:bodyPr>
+          <a:lstStyle/>
           <a:p>
             <a:pPr>
               <a:spcBef>
-                <a:spcPts val="800"/>
+                <a:spcPts val="0"/>
               </a:spcBef>
               <a:spcAft>
                 <a:spcPts val="0"/>
               </a:spcAft>
             </a:pPr>
             <a:r>
-              <a:rPr sz="1200" b="0">
-                <a:solidFill>
-                  <a:srgbClr val="FFFFFF"/>
+              <a:rPr sz="1500" b="1">
+                <a:solidFill>
+                  <a:srgbClr val="0B1220"/>
                 </a:solidFill>
                 <a:latin typeface="Malgun Gothic"/>
               </a:rPr>
-              <a:t>설계 문서화 · 표준 API 조사 · 오류 수정 사이클이 수작업 대비 유의미하게 단축된 것으로 판단합니다. 향후 동일 난이도 과제에 대해 개발 소요시간 전/후를 비교해 수치화할 예정입니다.</a:t>
+              <a:t>개인 성공 사례를 조직 가이드로 전환</a:t>
+            </a:r>
+          </a:p>
+        </p:txBody>
+      </p:sp>
+      <p:sp>
+        <p:nvSpPr>
+          <p:cNvPr id="30" name="TextBox 29"/>
+          <p:cNvSpPr txBox="1"/>
+          <p:nvPr/>
+        </p:nvSpPr>
+        <p:spPr>
+          <a:xfrm>
+            <a:off x="2057400" y="5623560"/>
+            <a:ext cx="9144000" cy="320040"/>
+          </a:xfrm>
+          <a:prstGeom prst="rect">
+            <a:avLst/>
+          </a:prstGeom>
+          <a:noFill/>
+        </p:spPr>
+        <p:txBody>
+          <a:bodyPr wrap="square">
+            <a:spAutoFit/>
+          </a:bodyPr>
+          <a:lstStyle/>
+          <a:p>
+            <a:pPr>
+              <a:spcBef>
+                <a:spcPts val="0"/>
+              </a:spcBef>
+              <a:spcAft>
+                <a:spcPts val="0"/>
+              </a:spcAft>
+            </a:pPr>
+            <a:r>
+              <a:rPr sz="1200" b="0">
+                <a:solidFill>
+                  <a:srgbClr val="5A6678"/>
+                </a:solidFill>
+                <a:latin typeface="Malgun Gothic"/>
+              </a:rPr>
+              <a:t>잘한 프롬프트가 아니라, 재사용 가능한 절차를 공유</a:t>
             </a:r>
           </a:p>
         </p:txBody>
@@ -11080,7 +10890,7 @@
             <a:avLst/>
           </a:prstGeom>
           <a:solidFill>
-            <a:srgbClr val="F3F5F9"/>
+            <a:srgbClr val="0B1220"/>
           </a:solidFill>
           <a:ln>
             <a:noFill/>
@@ -11118,13 +10928,13 @@
         <p:spPr>
           <a:xfrm>
             <a:off x="0" y="0"/>
-            <a:ext cx="12191695" cy="73152"/>
+            <a:ext cx="164592" cy="6858000"/>
           </a:xfrm>
           <a:prstGeom prst="rect">
             <a:avLst/>
           </a:prstGeom>
           <a:solidFill>
-            <a:srgbClr val="0F1F3D"/>
+            <a:srgbClr val="B88A2E"/>
           </a:solidFill>
           <a:ln>
             <a:noFill/>
@@ -11161,8 +10971,8 @@
         </p:nvSpPr>
         <p:spPr>
           <a:xfrm>
-            <a:off x="640080" y="256032"/>
-            <a:ext cx="9144000" cy="292608"/>
+            <a:off x="822960" y="1463040"/>
+            <a:ext cx="10515600" cy="320040"/>
           </a:xfrm>
           <a:prstGeom prst="rect">
             <a:avLst/>
@@ -11186,11 +10996,11 @@
             <a:r>
               <a:rPr sz="1100" b="1">
                 <a:solidFill>
-                  <a:srgbClr val="1E4D8C"/>
+                  <a:srgbClr val="B88A2E"/>
                 </a:solidFill>
                 <a:latin typeface="Malgun Gothic"/>
               </a:rPr>
-              <a:t>07  NEXT</a:t>
+              <a:t>TAKEAWAY</a:t>
             </a:r>
           </a:p>
         </p:txBody>
@@ -11203,8 +11013,8 @@
         </p:nvSpPr>
         <p:spPr>
           <a:xfrm>
-            <a:off x="640080" y="502920"/>
-            <a:ext cx="10515600" cy="502920"/>
+            <a:off x="822960" y="1965960"/>
+            <a:ext cx="10789920" cy="1645920"/>
           </a:xfrm>
           <a:prstGeom prst="rect">
             <a:avLst/>
@@ -11226,33 +11036,113 @@
               </a:spcAft>
             </a:pPr>
             <a:r>
-              <a:rPr sz="2400" b="1">
-                <a:solidFill>
-                  <a:srgbClr val="0F1F3D"/>
+              <a:rPr sz="2800" b="1">
+                <a:solidFill>
+                  <a:srgbClr val="FFFFFF"/>
                 </a:solidFill>
                 <a:latin typeface="Malgun Gothic"/>
               </a:rPr>
-              <a:t>기대 효과와 향후 계획</a:t>
-            </a:r>
-          </a:p>
-        </p:txBody>
-      </p:sp>
-      <p:sp>
-        <p:nvSpPr>
-          <p:cNvPr id="6" name="Rectangle 5"/>
+              <a:t>AI는 도입하는 순간이 아니라</a:t>
+            </a:r>
+          </a:p>
+          <a:p>
+            <a:pPr>
+              <a:spcBef>
+                <a:spcPts val="800"/>
+              </a:spcBef>
+              <a:spcAft>
+                <a:spcPts val="0"/>
+              </a:spcAft>
+            </a:pPr>
+            <a:r>
+              <a:rPr sz="2800" b="1">
+                <a:solidFill>
+                  <a:srgbClr val="FFFFFF"/>
+                </a:solidFill>
+                <a:latin typeface="Malgun Gothic"/>
+              </a:rPr>
+              <a:t>쓰는 구조를 만들 때 효율이 납니다</a:t>
+            </a:r>
+          </a:p>
+        </p:txBody>
+      </p:sp>
+      <p:sp>
+        <p:nvSpPr>
+          <p:cNvPr id="6" name="TextBox 5"/>
+          <p:cNvSpPr txBox="1"/>
+          <p:nvPr/>
+        </p:nvSpPr>
+        <p:spPr>
+          <a:xfrm>
+            <a:off x="822960" y="3931920"/>
+            <a:ext cx="10515600" cy="1097280"/>
+          </a:xfrm>
+          <a:prstGeom prst="rect">
+            <a:avLst/>
+          </a:prstGeom>
+          <a:noFill/>
+        </p:spPr>
+        <p:txBody>
+          <a:bodyPr wrap="square">
+            <a:spAutoFit/>
+          </a:bodyPr>
+          <a:lstStyle/>
+          <a:p>
+            <a:pPr>
+              <a:spcBef>
+                <a:spcPts val="0"/>
+              </a:spcBef>
+              <a:spcAft>
+                <a:spcPts val="0"/>
+              </a:spcAft>
+            </a:pPr>
+            <a:r>
+              <a:rPr sz="1500" b="0">
+                <a:solidFill>
+                  <a:srgbClr val="8B95A5"/>
+                </a:solidFill>
+                <a:latin typeface="Malgun Gothic"/>
+              </a:rPr>
+              <a:t>우리가 할 일:  범위 고정  ·  표준(.md) 자산화  ·  검증 루프  ·  전/후 측정</a:t>
+            </a:r>
+          </a:p>
+          <a:p>
+            <a:pPr>
+              <a:spcBef>
+                <a:spcPts val="1000"/>
+              </a:spcBef>
+              <a:spcAft>
+                <a:spcPts val="0"/>
+              </a:spcAft>
+            </a:pPr>
+            <a:r>
+              <a:rPr sz="1400" b="0">
+                <a:solidFill>
+                  <a:srgbClr val="5A6678"/>
+                </a:solidFill>
+                <a:latin typeface="Malgun Gothic"/>
+              </a:rPr>
+              <a:t>사례는 이미 한 번 확인했습니다. 다음은 조직 습관으로 옮기는 단계입니다.</a:t>
+            </a:r>
+          </a:p>
+        </p:txBody>
+      </p:sp>
+      <p:sp>
+        <p:nvSpPr>
+          <p:cNvPr id="7" name="Rectangle 6"/>
           <p:cNvSpPr/>
           <p:nvPr/>
         </p:nvSpPr>
         <p:spPr>
           <a:xfrm>
-            <a:off x="658368" y="1051560"/>
-            <a:ext cx="1097280" cy="44450"/>
+            <a:off x="822960" y="5394960"/>
+            <a:ext cx="1828800" cy="38100"/>
           </a:xfrm>
           <a:prstGeom prst="rect">
             <a:avLst/>
           </a:prstGeom>
           <a:solidFill>
-            <a:srgbClr val="C48A1A"/>
+            <a:srgbClr val="B88A2E"/>
           </a:solidFill>
           <a:ln>
             <a:noFill/>
@@ -11283,58 +11173,14 @@
       </p:sp>
       <p:sp>
         <p:nvSpPr>
-          <p:cNvPr id="7" name="Rectangle 6"/>
-          <p:cNvSpPr/>
-          <p:nvPr/>
-        </p:nvSpPr>
-        <p:spPr>
-          <a:xfrm>
-            <a:off x="0" y="6537960"/>
-            <a:ext cx="12191695" cy="320040"/>
-          </a:xfrm>
-          <a:prstGeom prst="rect">
-            <a:avLst/>
-          </a:prstGeom>
-          <a:solidFill>
-            <a:srgbClr val="0F1F3D"/>
-          </a:solidFill>
-          <a:ln>
-            <a:noFill/>
-          </a:ln>
-          <a:effectLst/>
-        </p:spPr>
-        <p:style>
-          <a:lnRef idx="1">
-            <a:schemeClr val="accent1"/>
-          </a:lnRef>
-          <a:fillRef idx="3">
-            <a:schemeClr val="accent1"/>
-          </a:fillRef>
-          <a:effectRef idx="2">
-            <a:schemeClr val="accent1"/>
-          </a:effectRef>
-          <a:fontRef idx="minor">
-            <a:schemeClr val="lt1"/>
-          </a:fontRef>
-        </p:style>
-        <p:txBody>
-          <a:bodyPr rtlCol="0" anchor="ctr"/>
-          <a:lstStyle/>
-          <a:p>
-            <a:pPr algn="ctr"/>
-          </a:p>
-        </p:txBody>
-      </p:sp>
-      <p:sp>
-        <p:nvSpPr>
           <p:cNvPr id="8" name="TextBox 7"/>
           <p:cNvSpPr txBox="1"/>
           <p:nvPr/>
         </p:nvSpPr>
         <p:spPr>
           <a:xfrm>
-            <a:off x="640080" y="6565392"/>
-            <a:ext cx="8229600" cy="256032"/>
+            <a:off x="822960" y="5669280"/>
+            <a:ext cx="10515600" cy="365760"/>
           </a:xfrm>
           <a:prstGeom prst="rect">
             <a:avLst/>
@@ -11342,7 +11188,7 @@
           <a:noFill/>
         </p:spPr>
         <p:txBody>
-          <a:bodyPr wrap="square" anchor="ctr">
+          <a:bodyPr wrap="square">
             <a:spAutoFit/>
           </a:bodyPr>
           <a:lstStyle/>
@@ -11356,565 +11202,13 @@
               </a:spcAft>
             </a:pPr>
             <a:r>
-              <a:rPr sz="900" b="0">
+              <a:rPr sz="1400" b="1">
                 <a:solidFill>
                   <a:srgbClr val="FFFFFF"/>
                 </a:solidFill>
                 <a:latin typeface="Malgun Gothic"/>
               </a:rPr>
-              <a:t>통합 운영 모니터링  ·  AI 활용 개발 성과 보고</a:t>
-            </a:r>
-          </a:p>
-        </p:txBody>
-      </p:sp>
-      <p:sp>
-        <p:nvSpPr>
-          <p:cNvPr id="9" name="TextBox 8"/>
-          <p:cNvSpPr txBox="1"/>
-          <p:nvPr/>
-        </p:nvSpPr>
-        <p:spPr>
-          <a:xfrm>
-            <a:off x="10241280" y="6565392"/>
-            <a:ext cx="1371600" cy="256032"/>
-          </a:xfrm>
-          <a:prstGeom prst="rect">
-            <a:avLst/>
-          </a:prstGeom>
-          <a:noFill/>
-        </p:spPr>
-        <p:txBody>
-          <a:bodyPr wrap="square" anchor="ctr">
-            <a:spAutoFit/>
-          </a:bodyPr>
-          <a:lstStyle/>
-          <a:p>
-            <a:pPr algn="r">
-              <a:spcBef>
-                <a:spcPts val="0"/>
-              </a:spcBef>
-              <a:spcAft>
-                <a:spcPts val="0"/>
-              </a:spcAft>
-            </a:pPr>
-            <a:r>
-              <a:rPr sz="900" b="0">
-                <a:solidFill>
-                  <a:srgbClr val="FFFFFF"/>
-                </a:solidFill>
-                <a:latin typeface="Malgun Gothic"/>
-              </a:rPr>
-              <a:t>8 / 8</a:t>
-            </a:r>
-          </a:p>
-        </p:txBody>
-      </p:sp>
-      <p:sp>
-        <p:nvSpPr>
-          <p:cNvPr id="10" name="Rounded Rectangle 9"/>
-          <p:cNvSpPr/>
-          <p:nvPr/>
-        </p:nvSpPr>
-        <p:spPr>
-          <a:xfrm>
-            <a:off x="640080" y="1371600"/>
-            <a:ext cx="5349240" cy="3017520"/>
-          </a:xfrm>
-          <a:prstGeom prst="roundRect">
-            <a:avLst/>
-          </a:prstGeom>
-          <a:solidFill>
-            <a:srgbClr val="FFFFFF"/>
-          </a:solidFill>
-          <a:ln w="12700">
-            <a:solidFill>
-              <a:srgbClr val="D8DEE9"/>
-            </a:solidFill>
-          </a:ln>
-          <a:effectLst/>
-        </p:spPr>
-        <p:style>
-          <a:lnRef idx="1">
-            <a:schemeClr val="accent1"/>
-          </a:lnRef>
-          <a:fillRef idx="3">
-            <a:schemeClr val="accent1"/>
-          </a:fillRef>
-          <a:effectRef idx="2">
-            <a:schemeClr val="accent1"/>
-          </a:effectRef>
-          <a:fontRef idx="minor">
-            <a:schemeClr val="lt1"/>
-          </a:fontRef>
-        </p:style>
-        <p:txBody>
-          <a:bodyPr rtlCol="0" anchor="ctr" lIns="274320" tIns="685800"/>
-          <a:lstStyle/>
-          <a:p>
-            <a:pPr algn="ctr">
-              <a:spcBef>
-                <a:spcPts val="1000"/>
-              </a:spcBef>
-              <a:spcAft>
-                <a:spcPts val="0"/>
-              </a:spcAft>
-            </a:pPr>
-            <a:r>
-              <a:rPr sz="1300" b="0">
-                <a:solidFill>
-                  <a:srgbClr val="1A2332"/>
-                </a:solidFill>
-                <a:latin typeface="Malgun Gothic"/>
-              </a:rPr>
-              <a:t>•  운영 점검 시간 단축 및 누락 방지</a:t>
-            </a:r>
-          </a:p>
-          <a:p>
-            <a:pPr>
-              <a:spcBef>
-                <a:spcPts val="1000"/>
-              </a:spcBef>
-              <a:spcAft>
-                <a:spcPts val="0"/>
-              </a:spcAft>
-            </a:pPr>
-            <a:r>
-              <a:rPr sz="1300" b="0">
-                <a:solidFill>
-                  <a:srgbClr val="1A2332"/>
-                </a:solidFill>
-                <a:latin typeface="Malgun Gothic"/>
-              </a:rPr>
-              <a:t>•  읽기 전용 설계로 운영 안전성 확보</a:t>
-            </a:r>
-          </a:p>
-          <a:p>
-            <a:pPr>
-              <a:spcBef>
-                <a:spcPts val="1000"/>
-              </a:spcBef>
-              <a:spcAft>
-                <a:spcPts val="0"/>
-              </a:spcAft>
-            </a:pPr>
-            <a:r>
-              <a:rPr sz="1300" b="0">
-                <a:solidFill>
-                  <a:srgbClr val="1A2332"/>
-                </a:solidFill>
-                <a:latin typeface="Malgun Gothic"/>
-              </a:rPr>
-              <a:t>•  AI 페어프로그래밍의 사내 적용 가능성 확인</a:t>
-            </a:r>
-          </a:p>
-          <a:p>
-            <a:pPr>
-              <a:spcBef>
-                <a:spcPts val="1000"/>
-              </a:spcBef>
-              <a:spcAft>
-                <a:spcPts val="0"/>
-              </a:spcAft>
-            </a:pPr>
-            <a:r>
-              <a:rPr sz="1300" b="0">
-                <a:solidFill>
-                  <a:srgbClr val="1A2332"/>
-                </a:solidFill>
-                <a:latin typeface="Malgun Gothic"/>
-              </a:rPr>
-              <a:t>•  Rules/Skills를 통한 개발 표준 자산화</a:t>
-            </a:r>
-          </a:p>
-        </p:txBody>
-      </p:sp>
-      <p:sp>
-        <p:nvSpPr>
-          <p:cNvPr id="11" name="Rectangle 10"/>
-          <p:cNvSpPr/>
-          <p:nvPr/>
-        </p:nvSpPr>
-        <p:spPr>
-          <a:xfrm>
-            <a:off x="640080" y="1371600"/>
-            <a:ext cx="5349240" cy="502920"/>
-          </a:xfrm>
-          <a:prstGeom prst="rect">
-            <a:avLst/>
-          </a:prstGeom>
-          <a:solidFill>
-            <a:srgbClr val="0F1F3D"/>
-          </a:solidFill>
-          <a:ln>
-            <a:noFill/>
-          </a:ln>
-          <a:effectLst/>
-        </p:spPr>
-        <p:style>
-          <a:lnRef idx="1">
-            <a:schemeClr val="accent1"/>
-          </a:lnRef>
-          <a:fillRef idx="3">
-            <a:schemeClr val="accent1"/>
-          </a:fillRef>
-          <a:effectRef idx="2">
-            <a:schemeClr val="accent1"/>
-          </a:effectRef>
-          <a:fontRef idx="minor">
-            <a:schemeClr val="lt1"/>
-          </a:fontRef>
-        </p:style>
-        <p:txBody>
-          <a:bodyPr rtlCol="0" anchor="ctr"/>
-          <a:lstStyle/>
-          <a:p>
-            <a:pPr algn="ctr"/>
-          </a:p>
-        </p:txBody>
-      </p:sp>
-      <p:sp>
-        <p:nvSpPr>
-          <p:cNvPr id="12" name="TextBox 11"/>
-          <p:cNvSpPr txBox="1"/>
-          <p:nvPr/>
-        </p:nvSpPr>
-        <p:spPr>
-          <a:xfrm>
-            <a:off x="640080" y="1371600"/>
-            <a:ext cx="5349240" cy="502920"/>
-          </a:xfrm>
-          <a:prstGeom prst="rect">
-            <a:avLst/>
-          </a:prstGeom>
-          <a:noFill/>
-        </p:spPr>
-        <p:txBody>
-          <a:bodyPr wrap="square" anchor="ctr">
-            <a:spAutoFit/>
-          </a:bodyPr>
-          <a:lstStyle/>
-          <a:p>
-            <a:pPr algn="ctr">
-              <a:spcBef>
-                <a:spcPts val="0"/>
-              </a:spcBef>
-              <a:spcAft>
-                <a:spcPts val="0"/>
-              </a:spcAft>
-            </a:pPr>
-            <a:r>
-              <a:rPr sz="1400" b="1">
-                <a:solidFill>
-                  <a:srgbClr val="FFFFFF"/>
-                </a:solidFill>
-                <a:latin typeface="Malgun Gothic"/>
-              </a:rPr>
-              <a:t>기대 효과</a:t>
-            </a:r>
-          </a:p>
-        </p:txBody>
-      </p:sp>
-      <p:sp>
-        <p:nvSpPr>
-          <p:cNvPr id="13" name="Rounded Rectangle 12"/>
-          <p:cNvSpPr/>
-          <p:nvPr/>
-        </p:nvSpPr>
-        <p:spPr>
-          <a:xfrm>
-            <a:off x="6217920" y="1371600"/>
-            <a:ext cx="5349240" cy="3017520"/>
-          </a:xfrm>
-          <a:prstGeom prst="roundRect">
-            <a:avLst/>
-          </a:prstGeom>
-          <a:solidFill>
-            <a:srgbClr val="FFFFFF"/>
-          </a:solidFill>
-          <a:ln w="12700">
-            <a:solidFill>
-              <a:srgbClr val="D8DEE9"/>
-            </a:solidFill>
-          </a:ln>
-          <a:effectLst/>
-        </p:spPr>
-        <p:style>
-          <a:lnRef idx="1">
-            <a:schemeClr val="accent1"/>
-          </a:lnRef>
-          <a:fillRef idx="3">
-            <a:schemeClr val="accent1"/>
-          </a:fillRef>
-          <a:effectRef idx="2">
-            <a:schemeClr val="accent1"/>
-          </a:effectRef>
-          <a:fontRef idx="minor">
-            <a:schemeClr val="lt1"/>
-          </a:fontRef>
-        </p:style>
-        <p:txBody>
-          <a:bodyPr rtlCol="0" anchor="ctr" lIns="274320" tIns="685800"/>
-          <a:lstStyle/>
-          <a:p>
-            <a:pPr algn="ctr">
-              <a:spcBef>
-                <a:spcPts val="1000"/>
-              </a:spcBef>
-              <a:spcAft>
-                <a:spcPts val="0"/>
-              </a:spcAft>
-            </a:pPr>
-            <a:r>
-              <a:rPr sz="1300" b="0">
-                <a:solidFill>
-                  <a:srgbClr val="1A2332"/>
-                </a:solidFill>
-                <a:latin typeface="Malgun Gothic"/>
-              </a:rPr>
-              <a:t>•  검증본의 정식 오브젝트화 및 기능 고도화</a:t>
-            </a:r>
-          </a:p>
-          <a:p>
-            <a:pPr>
-              <a:spcBef>
-                <a:spcPts val="1000"/>
-              </a:spcBef>
-              <a:spcAft>
-                <a:spcPts val="0"/>
-              </a:spcAft>
-            </a:pPr>
-            <a:r>
-              <a:rPr sz="1300" b="0">
-                <a:solidFill>
-                  <a:srgbClr val="1A2332"/>
-                </a:solidFill>
-                <a:latin typeface="Malgun Gothic"/>
-              </a:rPr>
-              <a:t>•  개발 소요시간 전/후 비교로 정량 효과 실측</a:t>
-            </a:r>
-          </a:p>
-          <a:p>
-            <a:pPr>
-              <a:spcBef>
-                <a:spcPts val="1000"/>
-              </a:spcBef>
-              <a:spcAft>
-                <a:spcPts val="0"/>
-              </a:spcAft>
-            </a:pPr>
-            <a:r>
-              <a:rPr sz="1300" b="0">
-                <a:solidFill>
-                  <a:srgbClr val="1A2332"/>
-                </a:solidFill>
-                <a:latin typeface="Malgun Gothic"/>
-              </a:rPr>
-              <a:t>•  유사 ABAP 과제에 Rules/Skills 확대 적용</a:t>
-            </a:r>
-          </a:p>
-          <a:p>
-            <a:pPr>
-              <a:spcBef>
-                <a:spcPts val="1000"/>
-              </a:spcBef>
-              <a:spcAft>
-                <a:spcPts val="0"/>
-              </a:spcAft>
-            </a:pPr>
-            <a:r>
-              <a:rPr sz="1300" b="0">
-                <a:solidFill>
-                  <a:srgbClr val="1A2332"/>
-                </a:solidFill>
-                <a:latin typeface="Malgun Gothic"/>
-              </a:rPr>
-              <a:t>•  팀 단위 AI 활용 가이드라인 정리</a:t>
-            </a:r>
-          </a:p>
-        </p:txBody>
-      </p:sp>
-      <p:sp>
-        <p:nvSpPr>
-          <p:cNvPr id="14" name="Rectangle 13"/>
-          <p:cNvSpPr/>
-          <p:nvPr/>
-        </p:nvSpPr>
-        <p:spPr>
-          <a:xfrm>
-            <a:off x="6217920" y="1371600"/>
-            <a:ext cx="5349240" cy="502920"/>
-          </a:xfrm>
-          <a:prstGeom prst="rect">
-            <a:avLst/>
-          </a:prstGeom>
-          <a:solidFill>
-            <a:srgbClr val="C48A1A"/>
-          </a:solidFill>
-          <a:ln>
-            <a:noFill/>
-          </a:ln>
-          <a:effectLst/>
-        </p:spPr>
-        <p:style>
-          <a:lnRef idx="1">
-            <a:schemeClr val="accent1"/>
-          </a:lnRef>
-          <a:fillRef idx="3">
-            <a:schemeClr val="accent1"/>
-          </a:fillRef>
-          <a:effectRef idx="2">
-            <a:schemeClr val="accent1"/>
-          </a:effectRef>
-          <a:fontRef idx="minor">
-            <a:schemeClr val="lt1"/>
-          </a:fontRef>
-        </p:style>
-        <p:txBody>
-          <a:bodyPr rtlCol="0" anchor="ctr"/>
-          <a:lstStyle/>
-          <a:p>
-            <a:pPr algn="ctr"/>
-          </a:p>
-        </p:txBody>
-      </p:sp>
-      <p:sp>
-        <p:nvSpPr>
-          <p:cNvPr id="15" name="TextBox 14"/>
-          <p:cNvSpPr txBox="1"/>
-          <p:nvPr/>
-        </p:nvSpPr>
-        <p:spPr>
-          <a:xfrm>
-            <a:off x="6217920" y="1371600"/>
-            <a:ext cx="5349240" cy="502920"/>
-          </a:xfrm>
-          <a:prstGeom prst="rect">
-            <a:avLst/>
-          </a:prstGeom>
-          <a:noFill/>
-        </p:spPr>
-        <p:txBody>
-          <a:bodyPr wrap="square" anchor="ctr">
-            <a:spAutoFit/>
-          </a:bodyPr>
-          <a:lstStyle/>
-          <a:p>
-            <a:pPr algn="ctr">
-              <a:spcBef>
-                <a:spcPts val="0"/>
-              </a:spcBef>
-              <a:spcAft>
-                <a:spcPts val="0"/>
-              </a:spcAft>
-            </a:pPr>
-            <a:r>
-              <a:rPr sz="1400" b="1">
-                <a:solidFill>
-                  <a:srgbClr val="FFFFFF"/>
-                </a:solidFill>
-                <a:latin typeface="Malgun Gothic"/>
-              </a:rPr>
-              <a:t>향후 계획</a:t>
-            </a:r>
-          </a:p>
-        </p:txBody>
-      </p:sp>
-      <p:sp>
-        <p:nvSpPr>
-          <p:cNvPr id="16" name="Rounded Rectangle 15"/>
-          <p:cNvSpPr/>
-          <p:nvPr/>
-        </p:nvSpPr>
-        <p:spPr>
-          <a:xfrm>
-            <a:off x="640080" y="4663440"/>
-            <a:ext cx="10927080" cy="1417320"/>
-          </a:xfrm>
-          <a:prstGeom prst="roundRect">
-            <a:avLst/>
-          </a:prstGeom>
-          <a:solidFill>
-            <a:srgbClr val="0F1F3D"/>
-          </a:solidFill>
-          <a:ln w="12700">
-            <a:solidFill>
-              <a:srgbClr val="D8DEE9"/>
-            </a:solidFill>
-          </a:ln>
-          <a:effectLst/>
-        </p:spPr>
-        <p:style>
-          <a:lnRef idx="1">
-            <a:schemeClr val="accent1"/>
-          </a:lnRef>
-          <a:fillRef idx="3">
-            <a:schemeClr val="accent1"/>
-          </a:fillRef>
-          <a:effectRef idx="2">
-            <a:schemeClr val="accent1"/>
-          </a:effectRef>
-          <a:fontRef idx="minor">
-            <a:schemeClr val="lt1"/>
-          </a:fontRef>
-        </p:style>
-        <p:txBody>
-          <a:bodyPr rtlCol="0" anchor="ctr" lIns="365760" tIns="256032"/>
-          <a:lstStyle/>
-          <a:p>
-            <a:pPr algn="ctr">
-              <a:spcBef>
-                <a:spcPts val="0"/>
-              </a:spcBef>
-              <a:spcAft>
-                <a:spcPts val="0"/>
-              </a:spcAft>
-            </a:pPr>
-            <a:r>
-              <a:rPr sz="1200" b="1">
-                <a:solidFill>
-                  <a:srgbClr val="C48A1A"/>
-                </a:solidFill>
-                <a:latin typeface="Malgun Gothic"/>
-              </a:rPr>
-              <a:t>핵심 메시지</a:t>
-            </a:r>
-          </a:p>
-          <a:p>
-            <a:pPr>
-              <a:spcBef>
-                <a:spcPts val="800"/>
-              </a:spcBef>
-              <a:spcAft>
-                <a:spcPts val="0"/>
-              </a:spcAft>
-            </a:pPr>
-            <a:r>
-              <a:rPr sz="1600" b="1">
-                <a:solidFill>
-                  <a:srgbClr val="FFFFFF"/>
-                </a:solidFill>
-                <a:latin typeface="Malgun Gothic"/>
-              </a:rPr>
-              <a:t>운영 점검을 통합하는 동시에, AI와 표준(.md)을 결합해</a:t>
-            </a:r>
-          </a:p>
-          <a:p>
-            <a:pPr>
-              <a:spcBef>
-                <a:spcPts val="400"/>
-              </a:spcBef>
-              <a:spcAft>
-                <a:spcPts val="0"/>
-              </a:spcAft>
-            </a:pPr>
-            <a:r>
-              <a:rPr sz="1600" b="1">
-                <a:solidFill>
-                  <a:srgbClr val="FFFFFF"/>
-                </a:solidFill>
-                <a:latin typeface="Malgun Gothic"/>
-              </a:rPr>
-              <a:t>개발 생산성과 품질을 함께 끌어올린 실행 사례입니다.</a:t>
+              <a:t>질의응답</a:t>
             </a:r>
           </a:p>
         </p:txBody>
